--- a/docs/presentacion/FuelTrack-Presentacion.pptx
+++ b/docs/presentacion/FuelTrack-Presentacion.pptx
@@ -2,31 +2,31 @@
 <file path=ppt/presentation.xml><?xml version="1.0" encoding="utf-8"?>
 <p:presentation xmlns:p="http://schemas.openxmlformats.org/presentationml/2006/main">
   <p:sldMasterIdLst>
-    <p:sldMasterId xmlns:r="http://schemas.openxmlformats.org/officeDocument/2006/relationships" id="2147483648" r:id="R0259d329e63844a8"/>
+    <p:sldMasterId xmlns:r="http://schemas.openxmlformats.org/officeDocument/2006/relationships" id="2147483648" r:id="R28fa4a467bbb4bc2"/>
   </p:sldMasterIdLst>
   <p:notesMasterIdLst>
-    <p:notesMasterId xmlns:r="http://schemas.openxmlformats.org/officeDocument/2006/relationships" r:id="Raf15f29a477d4d0d"/>
+    <p:notesMasterId xmlns:r="http://schemas.openxmlformats.org/officeDocument/2006/relationships" r:id="Rbf6cb99420d74c05"/>
   </p:notesMasterIdLst>
   <p:sldIdLst>
-    <p:sldId xmlns:r="http://schemas.openxmlformats.org/officeDocument/2006/relationships" id="256" r:id="R6dadc270fcfc4788"/>
-    <p:sldId xmlns:r="http://schemas.openxmlformats.org/officeDocument/2006/relationships" id="257" r:id="Rf39154e8e4684f75"/>
-    <p:sldId xmlns:r="http://schemas.openxmlformats.org/officeDocument/2006/relationships" id="258" r:id="R260cb64ce69940bb"/>
-    <p:sldId xmlns:r="http://schemas.openxmlformats.org/officeDocument/2006/relationships" id="259" r:id="Rd1009e4035a44c7e"/>
-    <p:sldId xmlns:r="http://schemas.openxmlformats.org/officeDocument/2006/relationships" id="260" r:id="R0b32fa7d315f4570"/>
-    <p:sldId xmlns:r="http://schemas.openxmlformats.org/officeDocument/2006/relationships" id="261" r:id="R61569e53b2784174"/>
-    <p:sldId xmlns:r="http://schemas.openxmlformats.org/officeDocument/2006/relationships" id="262" r:id="R437fff2e848a407d"/>
-    <p:sldId xmlns:r="http://schemas.openxmlformats.org/officeDocument/2006/relationships" id="263" r:id="R5b042eb2271647e1"/>
-    <p:sldId xmlns:r="http://schemas.openxmlformats.org/officeDocument/2006/relationships" id="264" r:id="Rb47f9ce45e5648f7"/>
-    <p:sldId xmlns:r="http://schemas.openxmlformats.org/officeDocument/2006/relationships" id="265" r:id="R3e1af5379f69479d"/>
-    <p:sldId xmlns:r="http://schemas.openxmlformats.org/officeDocument/2006/relationships" id="266" r:id="R51bd1bfc92ee4088"/>
-    <p:sldId xmlns:r="http://schemas.openxmlformats.org/officeDocument/2006/relationships" id="267" r:id="R18b5a70889bf44a0"/>
-    <p:sldId xmlns:r="http://schemas.openxmlformats.org/officeDocument/2006/relationships" id="268" r:id="Rf5a8d3a668594443"/>
-    <p:sldId xmlns:r="http://schemas.openxmlformats.org/officeDocument/2006/relationships" id="269" r:id="R7b90c073b1094ea5"/>
-    <p:sldId xmlns:r="http://schemas.openxmlformats.org/officeDocument/2006/relationships" id="270" r:id="R760182356eaa4090"/>
-    <p:sldId xmlns:r="http://schemas.openxmlformats.org/officeDocument/2006/relationships" id="271" r:id="Rcbb8284fa05f45e1"/>
-    <p:sldId xmlns:r="http://schemas.openxmlformats.org/officeDocument/2006/relationships" id="272" r:id="R5bf9dd2a20814326"/>
-    <p:sldId xmlns:r="http://schemas.openxmlformats.org/officeDocument/2006/relationships" id="273" r:id="R9ae9c1ce555e4807"/>
-    <p:sldId xmlns:r="http://schemas.openxmlformats.org/officeDocument/2006/relationships" id="274" r:id="R11ba1e5f5b6e44f8"/>
+    <p:sldId xmlns:r="http://schemas.openxmlformats.org/officeDocument/2006/relationships" id="256" r:id="R68146a545585423f"/>
+    <p:sldId xmlns:r="http://schemas.openxmlformats.org/officeDocument/2006/relationships" id="257" r:id="R342358756da34142"/>
+    <p:sldId xmlns:r="http://schemas.openxmlformats.org/officeDocument/2006/relationships" id="258" r:id="R57761686bfdd42b1"/>
+    <p:sldId xmlns:r="http://schemas.openxmlformats.org/officeDocument/2006/relationships" id="259" r:id="R924808d6a3ac4a80"/>
+    <p:sldId xmlns:r="http://schemas.openxmlformats.org/officeDocument/2006/relationships" id="260" r:id="R204a7534cc6f4ea1"/>
+    <p:sldId xmlns:r="http://schemas.openxmlformats.org/officeDocument/2006/relationships" id="261" r:id="R5a3bff9509a34607"/>
+    <p:sldId xmlns:r="http://schemas.openxmlformats.org/officeDocument/2006/relationships" id="262" r:id="Reeb268ea526e49fd"/>
+    <p:sldId xmlns:r="http://schemas.openxmlformats.org/officeDocument/2006/relationships" id="263" r:id="R91c18fdc248049b3"/>
+    <p:sldId xmlns:r="http://schemas.openxmlformats.org/officeDocument/2006/relationships" id="264" r:id="Rc5efe66152f24eec"/>
+    <p:sldId xmlns:r="http://schemas.openxmlformats.org/officeDocument/2006/relationships" id="265" r:id="R918290fdbadb49d5"/>
+    <p:sldId xmlns:r="http://schemas.openxmlformats.org/officeDocument/2006/relationships" id="266" r:id="Rb257bfc5520244d0"/>
+    <p:sldId xmlns:r="http://schemas.openxmlformats.org/officeDocument/2006/relationships" id="267" r:id="R208db10379864945"/>
+    <p:sldId xmlns:r="http://schemas.openxmlformats.org/officeDocument/2006/relationships" id="268" r:id="Rb73375207a8a443f"/>
+    <p:sldId xmlns:r="http://schemas.openxmlformats.org/officeDocument/2006/relationships" id="269" r:id="R6fdd365000084bee"/>
+    <p:sldId xmlns:r="http://schemas.openxmlformats.org/officeDocument/2006/relationships" id="270" r:id="Rc4741ad284cc49c8"/>
+    <p:sldId xmlns:r="http://schemas.openxmlformats.org/officeDocument/2006/relationships" id="271" r:id="R9b2c98082238402c"/>
+    <p:sldId xmlns:r="http://schemas.openxmlformats.org/officeDocument/2006/relationships" id="272" r:id="R52086432959644a7"/>
+    <p:sldId xmlns:r="http://schemas.openxmlformats.org/officeDocument/2006/relationships" id="273" r:id="R8bbc6d9f49d04d1b"/>
+    <p:sldId xmlns:r="http://schemas.openxmlformats.org/officeDocument/2006/relationships" id="274" r:id="R86246d43eaa74b31"/>
   </p:sldIdLst>
   <p:sldSz cx="12192000" cy="6858000"/>
   <p:notesSz cx="6858000" cy="9144000"/>
@@ -460,7 +460,7 @@
           <a:lstStyle xmlns:a="http://schemas.openxmlformats.org/drawingml/2006/main"/>
           <a:p xmlns:a="http://schemas.openxmlformats.org/drawingml/2006/main">
             <a:r>
-              <a:t>Apertura: presentamos FuelTrack como una solución para la operación de combustible. Nuestro cliente necesita saber quién autorizó cada salida, quién recibió el combustible y cuánto queda. El alcance procede del SRS v1.0, agosto 2026. Grupo 6. No atribuir ahorros ni certificaciones que no se midieron.</a:t>
+              <a:t>Presentación académica del Grupo 6 ante el profesor Santos Ramos. Logo oficial: https://identidad.intec.edu.do/manual-de-uso/logo. Se conserva el archivo original y su proporción.</a:t>
             </a:r>
           </a:p>
         </p:txBody>
@@ -810,7 +810,7 @@
           <a:lstStyle xmlns:a="http://schemas.openxmlformats.org/drawingml/2006/main"/>
           <a:p xmlns:a="http://schemas.openxmlformats.org/drawingml/2006/main">
             <a:r>
-              <a:t>La división documentada tiene seis integrantes: tres builders y tres testers. Builder 1 se enfoca en backend y datos; Builder 2 en seguridad, tickets, móvil e integraciones; Builder 3 en web y UX. Los testers revisan por fases. Las herramientas de IA apoyaron construcción y revisión. No atribuir autoría individual ni nombres que no se verificaron. Fuente: docs/13-DIVISION-EQUIPO.md y docs/qa.</a:t>
+              <a:t>Integrantes y matrículas transcritos de la imagen suministrada por el usuario. Profesor Santos Ramos. No se atribuyen responsabilidades individuales que no hayan sido confirmadas. La división documentada del trabajo incluye desarrollo y pruebas por fases.</a:t>
             </a:r>
           </a:p>
         </p:txBody>
@@ -880,7 +880,7 @@
           <a:lstStyle xmlns:a="http://schemas.openxmlformats.org/drawingml/2006/main"/>
           <a:p xmlns:a="http://schemas.openxmlformats.org/drawingml/2006/main">
             <a:r>
-              <a:t>Explicar las correcciones sin afirmar que el software carece de errores. Se corrigieron capacidad y compatibilidad, validaciones de entidades inactivas, coherencia empleado/vehículo, privacidad, permisos, sesión, reportes y QR. La suite del servidor de esta revisión tiene 458 pruebas aprobadas y cero omitidas, incluidas Keycloak. Añadimos Textbee, modo histórico, PWA y corrección visual del escáner. Las pruebas anteriores de 166 checks son históricas; no sumarlas como pruebas nuevas.</a:t>
+              <a:t>Explicar las correcciones sin afirmar que el software carece de errores. Se corrigieron capacidad y compatibilidad, validaciones de entidades inactivas, coherencia empleado/vehículo, privacidad, permisos, sesión, reportes y QR. La suite del servidor de esta revisión tiene 463 pruebas aprobadas y cero omitidas, incluidas Keycloak. Añadimos Textbee, modo histórico, PWA y corrección visual del escáner. Las pruebas anteriores de 166 checks son históricas; no sumarlas como pruebas nuevas.</a:t>
             </a:r>
           </a:p>
         </p:txBody>
@@ -1788,7 +1788,7 @@
   </p:cSld>
   <p:clrMap bg1="lt1" tx1="dk1" bg2="lt2" tx2="dk2" accent1="accent1" accent2="accent2" accent3="accent3" accent4="accent4" accent5="accent5" accent6="accent6" hlink="hlink" folHlink="folHlink"/>
   <p:sldLayoutIdLst>
-    <p:sldLayoutId xmlns:r="http://schemas.openxmlformats.org/officeDocument/2006/relationships" id="2147483649" r:id="Rb71c3a5e8eb1476d"/>
+    <p:sldLayoutId xmlns:r="http://schemas.openxmlformats.org/officeDocument/2006/relationships" id="2147483649" r:id="Rfcf84dcae59c44f6"/>
   </p:sldLayoutIdLst>
   <p:txStyles>
     <p:titleStyle>
@@ -2336,10 +2336,10 @@
       </p:grpSpPr>
       <p:sp>
         <p:nvSpPr>
-          <p:cNvPr id="5" name="">
-            <a:extLst xmlns:a="http://schemas.openxmlformats.org/drawingml/2006/main">
-              <a:ext uri="{FF2B5EF4-FFF2-40B4-BE49-F238E27FC236}">
-                <a16:creationId xmlns:a16="http://schemas.microsoft.com/office/drawing/2014/main" id="{D2DE36FC-FCBA-41FB-A014-B2294A4AE852}"/>
+          <p:cNvPr id="7" name="">
+            <a:extLst xmlns:a="http://schemas.openxmlformats.org/drawingml/2006/main">
+              <a:ext uri="{FF2B5EF4-FFF2-40B4-BE49-F238E27FC236}">
+                <a16:creationId xmlns:a16="http://schemas.microsoft.com/office/drawing/2014/main" id="{7FD3641A-2A17-4A51-89DB-93EB28F9D2F9}"/>
               </a:ext>
             </a:extLst>
           </p:cNvPr>
@@ -2396,7 +2396,7 @@
           <p:cNvPr id="2" name="">
             <a:extLst xmlns:a="http://schemas.openxmlformats.org/drawingml/2006/main">
               <a:ext uri="{FF2B5EF4-FFF2-40B4-BE49-F238E27FC236}">
-                <a16:creationId xmlns:a16="http://schemas.microsoft.com/office/drawing/2014/main" id="{CFAC38A8-AD25-48D2-811E-22B1ED70DA7B}"/>
+                <a16:creationId xmlns:a16="http://schemas.microsoft.com/office/drawing/2014/main" id="{309649EC-787C-4A50-A36A-E400FD906E4B}"/>
               </a:ext>
             </a:extLst>
           </p:cNvPr>
@@ -2453,7 +2453,7 @@
           <p:cNvPr id="3" name="">
             <a:extLst xmlns:a="http://schemas.openxmlformats.org/drawingml/2006/main">
               <a:ext uri="{FF2B5EF4-FFF2-40B4-BE49-F238E27FC236}">
-                <a16:creationId xmlns:a16="http://schemas.microsoft.com/office/drawing/2014/main" id="{BC1E2B27-5B5F-4E85-889A-05B87E37E488}"/>
+                <a16:creationId xmlns:a16="http://schemas.microsoft.com/office/drawing/2014/main" id="{39FFE847-A093-4D22-B21E-8FD1C8403CC2}"/>
               </a:ext>
             </a:extLst>
           </p:cNvPr>
@@ -2533,19 +2533,19 @@
           <p:cNvPr id="4" name="">
             <a:extLst xmlns:a="http://schemas.openxmlformats.org/drawingml/2006/main">
               <a:ext uri="{FF2B5EF4-FFF2-40B4-BE49-F238E27FC236}">
-                <a16:creationId xmlns:a16="http://schemas.microsoft.com/office/drawing/2014/main" id="{46C7F89B-B62B-4477-87ED-F5B55C7508CD}"/>
-              </a:ext>
-            </a:extLst>
-          </p:cNvPr>
-          <p:cNvSpPr>
-            <a:spLocks xmlns:a="http://schemas.openxmlformats.org/drawingml/2006/main" noGrp="1"/>
-          </p:cNvSpPr>
-          <p:nvPr/>
-        </p:nvSpPr>
-        <p:spPr>
-          <a:xfrm xmlns:a="http://schemas.openxmlformats.org/drawingml/2006/main">
-            <a:off x="714375" y="5572125"/>
-            <a:ext cx="9525000" cy="476250"/>
+                <a16:creationId xmlns:a16="http://schemas.microsoft.com/office/drawing/2014/main" id="{0B736B9B-64B6-43C1-B06B-35F5B5F571AA}"/>
+              </a:ext>
+            </a:extLst>
+          </p:cNvPr>
+          <p:cNvSpPr>
+            <a:spLocks xmlns:a="http://schemas.openxmlformats.org/drawingml/2006/main" noGrp="1"/>
+          </p:cNvSpPr>
+          <p:nvPr/>
+        </p:nvSpPr>
+        <p:spPr>
+          <a:xfrm xmlns:a="http://schemas.openxmlformats.org/drawingml/2006/main">
+            <a:off x="714375" y="5286375"/>
+            <a:ext cx="9525000" cy="428625"/>
           </a:xfrm>
           <a:prstGeom xmlns:a="http://schemas.openxmlformats.org/drawingml/2006/main" prst="rect">
             <a:avLst/>
@@ -2585,10 +2585,89 @@
           </a:p>
         </p:txBody>
       </p:sp>
+      <p:sp>
+        <p:nvSpPr>
+          <p:cNvPr id="5" name="">
+            <a:extLst xmlns:a="http://schemas.openxmlformats.org/drawingml/2006/main">
+              <a:ext uri="{FF2B5EF4-FFF2-40B4-BE49-F238E27FC236}">
+                <a16:creationId xmlns:a16="http://schemas.microsoft.com/office/drawing/2014/main" id="{A794453D-C4B6-40CB-A35C-F94E5DC948F5}"/>
+              </a:ext>
+            </a:extLst>
+          </p:cNvPr>
+          <p:cNvSpPr>
+            <a:spLocks xmlns:a="http://schemas.openxmlformats.org/drawingml/2006/main" noGrp="1"/>
+          </p:cNvSpPr>
+          <p:nvPr/>
+        </p:nvSpPr>
+        <p:spPr>
+          <a:xfrm xmlns:a="http://schemas.openxmlformats.org/drawingml/2006/main">
+            <a:off x="714375" y="5762625"/>
+            <a:ext cx="9525000" cy="400050"/>
+          </a:xfrm>
+          <a:prstGeom xmlns:a="http://schemas.openxmlformats.org/drawingml/2006/main" prst="rect">
+            <a:avLst/>
+          </a:prstGeom>
+          <a:noFill xmlns:a="http://schemas.openxmlformats.org/drawingml/2006/main"/>
+          <a:ln xmlns:a="http://schemas.openxmlformats.org/drawingml/2006/main" w="0">
+            <a:noFill/>
+          </a:ln>
+        </p:spPr>
+        <p:txBody>
+          <a:bodyPr xmlns:a="http://schemas.openxmlformats.org/drawingml/2006/main">
+            <a:noAutofit/>
+          </a:bodyPr>
+          <a:lstStyle xmlns:a="http://schemas.openxmlformats.org/drawingml/2006/main"/>
+          <a:p xmlns:a="http://schemas.openxmlformats.org/drawingml/2006/main">
+            <a:pPr>
+              <a:defRPr sz="1875" b="0">
+                <a:solidFill>
+                  <a:srgbClr val="CBDDD5"/>
+                </a:solidFill>
+                <a:latin typeface="DejaVu Sans"/>
+                <a:ea typeface="DejaVu Sans"/>
+                <a:cs typeface="DejaVu Sans"/>
+              </a:defRPr>
+            </a:pPr>
+            <a:r>
+              <a:rPr sz="1875" b="0">
+                <a:solidFill>
+                  <a:srgbClr val="CBDDD5"/>
+                </a:solidFill>
+                <a:latin typeface="DejaVu Sans"/>
+                <a:ea typeface="DejaVu Sans"/>
+                <a:cs typeface="DejaVu Sans"/>
+              </a:rPr>
+              <a:t>Profesor: Santos Ramos</a:t>
+            </a:r>
+          </a:p>
+        </p:txBody>
+      </p:sp>
+      <p:pic>
+        <p:nvPicPr>
+          <p:cNvPr id="12" name=""/>
+          <p:cNvPicPr>
+            <a:picLocks xmlns:a="http://schemas.openxmlformats.org/drawingml/2006/main" noChangeAspect="1"/>
+          </p:cNvPicPr>
+          <p:nvPr/>
+        </p:nvPicPr>
+        <p:blipFill>
+          <a:blip xmlns:r="http://schemas.openxmlformats.org/officeDocument/2006/relationships" xmlns:a="http://schemas.openxmlformats.org/drawingml/2006/main" r:embed="R2100c966730c4810"/>
+          <a:stretch xmlns:a="http://schemas.openxmlformats.org/drawingml/2006/main"/>
+        </p:blipFill>
+        <p:spPr>
+          <a:xfrm xmlns:a="http://schemas.openxmlformats.org/drawingml/2006/main">
+            <a:off x="9865281" y="476250"/>
+            <a:ext cx="1653064" cy="1857375"/>
+          </a:xfrm>
+          <a:prstGeom xmlns:a="http://schemas.openxmlformats.org/drawingml/2006/main" prst="rect">
+            <a:avLst/>
+          </a:prstGeom>
+        </p:spPr>
+      </p:pic>
     </p:spTree>
     <p:extLst>
       <p:ext uri="{BB962C8B-B14F-4D97-AF65-F5344CB8AC3E}">
-        <p14:creationId xmlns:p14="http://schemas.microsoft.com/office/powerpoint/2010/main" val="550581143"/>
+        <p14:creationId xmlns:p14="http://schemas.microsoft.com/office/powerpoint/2010/main" val="2019234822"/>
       </p:ext>
     </p:extLst>
   </p:cSld>
@@ -2619,7 +2698,7 @@
           <p:cNvPr id="4" name="">
             <a:extLst xmlns:a="http://schemas.openxmlformats.org/drawingml/2006/main">
               <a:ext uri="{FF2B5EF4-FFF2-40B4-BE49-F238E27FC236}">
-                <a16:creationId xmlns:a16="http://schemas.microsoft.com/office/drawing/2014/main" id="{B28676E5-266E-4B9E-84F8-E43258496A9D}"/>
+                <a16:creationId xmlns:a16="http://schemas.microsoft.com/office/drawing/2014/main" id="{0F845689-BE1D-4C91-BCFC-3A9D03317023}"/>
               </a:ext>
             </a:extLst>
           </p:cNvPr>
@@ -2676,7 +2755,7 @@
           <p:cNvPr id="2" name="">
             <a:extLst xmlns:a="http://schemas.openxmlformats.org/drawingml/2006/main">
               <a:ext uri="{FF2B5EF4-FFF2-40B4-BE49-F238E27FC236}">
-                <a16:creationId xmlns:a16="http://schemas.microsoft.com/office/drawing/2014/main" id="{C322F129-DEE4-429C-8859-1796D89CAD64}"/>
+                <a16:creationId xmlns:a16="http://schemas.microsoft.com/office/drawing/2014/main" id="{6A05924E-75D2-48A0-8445-C950425F0239}"/>
               </a:ext>
             </a:extLst>
           </p:cNvPr>
@@ -2737,7 +2816,7 @@
           <p:nvPr/>
         </p:nvPicPr>
         <p:blipFill>
-          <a:blip xmlns:r="http://schemas.openxmlformats.org/officeDocument/2006/relationships" xmlns:a="http://schemas.openxmlformats.org/drawingml/2006/main" r:embed="Rd191330f12704dc9"/>
+          <a:blip xmlns:r="http://schemas.openxmlformats.org/officeDocument/2006/relationships" xmlns:a="http://schemas.openxmlformats.org/drawingml/2006/main" r:embed="R41bdad8472644189"/>
           <a:stretch xmlns:a="http://schemas.openxmlformats.org/drawingml/2006/main"/>
         </p:blipFill>
         <p:spPr>
@@ -2753,7 +2832,7 @@
     </p:spTree>
     <p:extLst>
       <p:ext uri="{BB962C8B-B14F-4D97-AF65-F5344CB8AC3E}">
-        <p14:creationId xmlns:p14="http://schemas.microsoft.com/office/powerpoint/2010/main" val="1330470533"/>
+        <p14:creationId xmlns:p14="http://schemas.microsoft.com/office/powerpoint/2010/main" val="1388340021"/>
       </p:ext>
     </p:extLst>
   </p:cSld>
@@ -2784,7 +2863,7 @@
           <p:cNvPr id="5" name="">
             <a:extLst xmlns:a="http://schemas.openxmlformats.org/drawingml/2006/main">
               <a:ext uri="{FF2B5EF4-FFF2-40B4-BE49-F238E27FC236}">
-                <a16:creationId xmlns:a16="http://schemas.microsoft.com/office/drawing/2014/main" id="{3508493D-AD2C-4876-9FB0-980761A12CC5}"/>
+                <a16:creationId xmlns:a16="http://schemas.microsoft.com/office/drawing/2014/main" id="{A3AACBDF-8227-4D22-8FC4-80EC2E697809}"/>
               </a:ext>
             </a:extLst>
           </p:cNvPr>
@@ -2841,7 +2920,7 @@
           <p:cNvPr id="2" name="">
             <a:extLst xmlns:a="http://schemas.openxmlformats.org/drawingml/2006/main">
               <a:ext uri="{FF2B5EF4-FFF2-40B4-BE49-F238E27FC236}">
-                <a16:creationId xmlns:a16="http://schemas.microsoft.com/office/drawing/2014/main" id="{A1135887-F7AB-4CC9-B1C4-EF0AD2E34E2D}"/>
+                <a16:creationId xmlns:a16="http://schemas.microsoft.com/office/drawing/2014/main" id="{68DB18CD-049F-4DB0-B02F-B8FC7DBB91F7}"/>
               </a:ext>
             </a:extLst>
           </p:cNvPr>
@@ -2902,7 +2981,7 @@
           <p:nvPr/>
         </p:nvPicPr>
         <p:blipFill>
-          <a:blip xmlns:r="http://schemas.openxmlformats.org/officeDocument/2006/relationships" xmlns:a="http://schemas.openxmlformats.org/drawingml/2006/main" r:embed="R6f141be8df53402d"/>
+          <a:blip xmlns:r="http://schemas.openxmlformats.org/officeDocument/2006/relationships" xmlns:a="http://schemas.openxmlformats.org/drawingml/2006/main" r:embed="Rfe6162f77fb9442e"/>
           <a:stretch xmlns:a="http://schemas.openxmlformats.org/drawingml/2006/main"/>
         </p:blipFill>
         <p:spPr>
@@ -2920,7 +2999,7 @@
           <p:cNvPr id="4" name="">
             <a:extLst xmlns:a="http://schemas.openxmlformats.org/drawingml/2006/main">
               <a:ext uri="{FF2B5EF4-FFF2-40B4-BE49-F238E27FC236}">
-                <a16:creationId xmlns:a16="http://schemas.microsoft.com/office/drawing/2014/main" id="{30E0E106-64AD-4778-8655-8395CAD28494}"/>
+                <a16:creationId xmlns:a16="http://schemas.microsoft.com/office/drawing/2014/main" id="{E16B4783-C0FB-4418-A16F-FB92A2C433E4}"/>
               </a:ext>
             </a:extLst>
           </p:cNvPr>
@@ -3059,7 +3138,7 @@
     </p:spTree>
     <p:extLst>
       <p:ext uri="{BB962C8B-B14F-4D97-AF65-F5344CB8AC3E}">
-        <p14:creationId xmlns:p14="http://schemas.microsoft.com/office/powerpoint/2010/main" val="243063219"/>
+        <p14:creationId xmlns:p14="http://schemas.microsoft.com/office/powerpoint/2010/main" val="416750965"/>
       </p:ext>
     </p:extLst>
   </p:cSld>
@@ -3090,7 +3169,7 @@
           <p:cNvPr id="5" name="">
             <a:extLst xmlns:a="http://schemas.openxmlformats.org/drawingml/2006/main">
               <a:ext uri="{FF2B5EF4-FFF2-40B4-BE49-F238E27FC236}">
-                <a16:creationId xmlns:a16="http://schemas.microsoft.com/office/drawing/2014/main" id="{0399CDF7-76F0-4823-AAA6-BDC88E1A5261}"/>
+                <a16:creationId xmlns:a16="http://schemas.microsoft.com/office/drawing/2014/main" id="{4D3DC9CB-D452-4057-8BD0-76805D9D6DDB}"/>
               </a:ext>
             </a:extLst>
           </p:cNvPr>
@@ -3147,7 +3226,7 @@
           <p:cNvPr id="2" name="">
             <a:extLst xmlns:a="http://schemas.openxmlformats.org/drawingml/2006/main">
               <a:ext uri="{FF2B5EF4-FFF2-40B4-BE49-F238E27FC236}">
-                <a16:creationId xmlns:a16="http://schemas.microsoft.com/office/drawing/2014/main" id="{D4B209B1-9E47-46B8-AA14-714CA2397892}"/>
+                <a16:creationId xmlns:a16="http://schemas.microsoft.com/office/drawing/2014/main" id="{18E86C37-163E-4CBB-B289-4876FC39979B}"/>
               </a:ext>
             </a:extLst>
           </p:cNvPr>
@@ -3671,7 +3750,7 @@
           <p:cNvPr id="4" name="">
             <a:extLst xmlns:a="http://schemas.openxmlformats.org/drawingml/2006/main">
               <a:ext uri="{FF2B5EF4-FFF2-40B4-BE49-F238E27FC236}">
-                <a16:creationId xmlns:a16="http://schemas.microsoft.com/office/drawing/2014/main" id="{2D79A506-6F16-4A30-AB5A-80E1B734581D}"/>
+                <a16:creationId xmlns:a16="http://schemas.microsoft.com/office/drawing/2014/main" id="{08D6D268-BEE9-47C7-9AA4-38496737FDB6}"/>
               </a:ext>
             </a:extLst>
           </p:cNvPr>
@@ -3726,7 +3805,7 @@
     </p:spTree>
     <p:extLst>
       <p:ext uri="{BB962C8B-B14F-4D97-AF65-F5344CB8AC3E}">
-        <p14:creationId xmlns:p14="http://schemas.microsoft.com/office/powerpoint/2010/main" val="1998300779"/>
+        <p14:creationId xmlns:p14="http://schemas.microsoft.com/office/powerpoint/2010/main" val="1787031104"/>
       </p:ext>
     </p:extLst>
   </p:cSld>
@@ -3757,7 +3836,7 @@
           <p:cNvPr id="11" name="">
             <a:extLst xmlns:a="http://schemas.openxmlformats.org/drawingml/2006/main">
               <a:ext uri="{FF2B5EF4-FFF2-40B4-BE49-F238E27FC236}">
-                <a16:creationId xmlns:a16="http://schemas.microsoft.com/office/drawing/2014/main" id="{87C30DF3-6B44-4855-8AA0-6431EEF0FBAC}"/>
+                <a16:creationId xmlns:a16="http://schemas.microsoft.com/office/drawing/2014/main" id="{B3223A05-3981-480E-B2E8-BB1535D3789D}"/>
               </a:ext>
             </a:extLst>
           </p:cNvPr>
@@ -3814,7 +3893,7 @@
           <p:cNvPr id="2" name="">
             <a:extLst xmlns:a="http://schemas.openxmlformats.org/drawingml/2006/main">
               <a:ext uri="{FF2B5EF4-FFF2-40B4-BE49-F238E27FC236}">
-                <a16:creationId xmlns:a16="http://schemas.microsoft.com/office/drawing/2014/main" id="{335FB848-FB5E-491B-A645-6699BA27AA8F}"/>
+                <a16:creationId xmlns:a16="http://schemas.microsoft.com/office/drawing/2014/main" id="{B28538BB-23A6-4C9D-B4B1-C6616EB22F76}"/>
               </a:ext>
             </a:extLst>
           </p:cNvPr>
@@ -3871,7 +3950,7 @@
           <p:cNvPr id="3" name="">
             <a:extLst xmlns:a="http://schemas.openxmlformats.org/drawingml/2006/main">
               <a:ext uri="{FF2B5EF4-FFF2-40B4-BE49-F238E27FC236}">
-                <a16:creationId xmlns:a16="http://schemas.microsoft.com/office/drawing/2014/main" id="{BF85630D-A297-4A58-8C3A-D8EF282FBF62}"/>
+                <a16:creationId xmlns:a16="http://schemas.microsoft.com/office/drawing/2014/main" id="{1D0B5385-B0D5-4FFB-B2F5-521FFFB31B07}"/>
               </a:ext>
             </a:extLst>
           </p:cNvPr>
@@ -3928,7 +4007,7 @@
           <p:cNvPr id="4" name="">
             <a:extLst xmlns:a="http://schemas.openxmlformats.org/drawingml/2006/main">
               <a:ext uri="{FF2B5EF4-FFF2-40B4-BE49-F238E27FC236}">
-                <a16:creationId xmlns:a16="http://schemas.microsoft.com/office/drawing/2014/main" id="{B04E7760-2B6D-4EC0-B3E4-BA6E8403AF89}"/>
+                <a16:creationId xmlns:a16="http://schemas.microsoft.com/office/drawing/2014/main" id="{5577A250-8444-402E-B1F7-0FDE5C8CCA1E}"/>
               </a:ext>
             </a:extLst>
           </p:cNvPr>
@@ -3985,7 +4064,7 @@
           <p:cNvPr id="5" name="">
             <a:extLst xmlns:a="http://schemas.openxmlformats.org/drawingml/2006/main">
               <a:ext uri="{FF2B5EF4-FFF2-40B4-BE49-F238E27FC236}">
-                <a16:creationId xmlns:a16="http://schemas.microsoft.com/office/drawing/2014/main" id="{7A56BE4F-66B9-4E13-8F2C-BB8A8F3C6A39}"/>
+                <a16:creationId xmlns:a16="http://schemas.microsoft.com/office/drawing/2014/main" id="{51C9A630-DFC5-47BA-8A4D-1862BE575F5B}"/>
               </a:ext>
             </a:extLst>
           </p:cNvPr>
@@ -4042,7 +4121,7 @@
           <p:cNvPr id="6" name="">
             <a:extLst xmlns:a="http://schemas.openxmlformats.org/drawingml/2006/main">
               <a:ext uri="{FF2B5EF4-FFF2-40B4-BE49-F238E27FC236}">
-                <a16:creationId xmlns:a16="http://schemas.microsoft.com/office/drawing/2014/main" id="{18F2E082-B8D8-432C-BE67-E4B55C0500B2}"/>
+                <a16:creationId xmlns:a16="http://schemas.microsoft.com/office/drawing/2014/main" id="{257843E0-712D-4D45-8760-4BE9CA128894}"/>
               </a:ext>
             </a:extLst>
           </p:cNvPr>
@@ -4099,7 +4178,7 @@
           <p:cNvPr id="7" name="">
             <a:extLst xmlns:a="http://schemas.openxmlformats.org/drawingml/2006/main">
               <a:ext uri="{FF2B5EF4-FFF2-40B4-BE49-F238E27FC236}">
-                <a16:creationId xmlns:a16="http://schemas.microsoft.com/office/drawing/2014/main" id="{E3248DF5-F904-488D-9E8F-1BB694C42900}"/>
+                <a16:creationId xmlns:a16="http://schemas.microsoft.com/office/drawing/2014/main" id="{A69187DC-DEE8-4649-AE4B-AE51FEB3CDFC}"/>
               </a:ext>
             </a:extLst>
           </p:cNvPr>
@@ -4156,7 +4235,7 @@
           <p:cNvPr id="8" name="">
             <a:extLst xmlns:a="http://schemas.openxmlformats.org/drawingml/2006/main">
               <a:ext uri="{FF2B5EF4-FFF2-40B4-BE49-F238E27FC236}">
-                <a16:creationId xmlns:a16="http://schemas.microsoft.com/office/drawing/2014/main" id="{D0DAECC6-A297-4A74-A265-B833BB9AF286}"/>
+                <a16:creationId xmlns:a16="http://schemas.microsoft.com/office/drawing/2014/main" id="{62606321-EDA9-4FFB-B9E9-B35299051380}"/>
               </a:ext>
             </a:extLst>
           </p:cNvPr>
@@ -4213,7 +4292,7 @@
           <p:cNvPr id="9" name="">
             <a:extLst xmlns:a="http://schemas.openxmlformats.org/drawingml/2006/main">
               <a:ext uri="{FF2B5EF4-FFF2-40B4-BE49-F238E27FC236}">
-                <a16:creationId xmlns:a16="http://schemas.microsoft.com/office/drawing/2014/main" id="{ACF47A30-14EE-42C5-BF4D-BC275778A15D}"/>
+                <a16:creationId xmlns:a16="http://schemas.microsoft.com/office/drawing/2014/main" id="{133056E0-5B17-43A4-81B6-2E387B66197B}"/>
               </a:ext>
             </a:extLst>
           </p:cNvPr>
@@ -4270,7 +4349,7 @@
           <p:cNvPr id="10" name="">
             <a:extLst xmlns:a="http://schemas.openxmlformats.org/drawingml/2006/main">
               <a:ext uri="{FF2B5EF4-FFF2-40B4-BE49-F238E27FC236}">
-                <a16:creationId xmlns:a16="http://schemas.microsoft.com/office/drawing/2014/main" id="{51F45C0A-36EC-43B4-9864-C45FD435FE7D}"/>
+                <a16:creationId xmlns:a16="http://schemas.microsoft.com/office/drawing/2014/main" id="{09715120-97AB-4AC1-AFB6-DC662146B233}"/>
               </a:ext>
             </a:extLst>
           </p:cNvPr>
@@ -4325,7 +4404,7 @@
     </p:spTree>
     <p:extLst>
       <p:ext uri="{BB962C8B-B14F-4D97-AF65-F5344CB8AC3E}">
-        <p14:creationId xmlns:p14="http://schemas.microsoft.com/office/powerpoint/2010/main" val="2146074124"/>
+        <p14:creationId xmlns:p14="http://schemas.microsoft.com/office/powerpoint/2010/main" val="1700190253"/>
       </p:ext>
     </p:extLst>
   </p:cSld>
@@ -4353,10 +4432,10 @@
       </p:grpSpPr>
       <p:sp>
         <p:nvSpPr>
-          <p:cNvPr id="7" name="">
-            <a:extLst xmlns:a="http://schemas.openxmlformats.org/drawingml/2006/main">
-              <a:ext uri="{FF2B5EF4-FFF2-40B4-BE49-F238E27FC236}">
-                <a16:creationId xmlns:a16="http://schemas.microsoft.com/office/drawing/2014/main" id="{D0BBA449-D6D7-418D-8893-9C4AEF6FB09D}"/>
+          <p:cNvPr id="16" name="">
+            <a:extLst xmlns:a="http://schemas.openxmlformats.org/drawingml/2006/main">
+              <a:ext uri="{FF2B5EF4-FFF2-40B4-BE49-F238E27FC236}">
+                <a16:creationId xmlns:a16="http://schemas.microsoft.com/office/drawing/2014/main" id="{B868DC29-3DFE-4B25-8D36-AD7FD5327158}"/>
               </a:ext>
             </a:extLst>
           </p:cNvPr>
@@ -4403,7 +4482,7 @@
                 <a:ea typeface="DejaVu Sans"/>
                 <a:cs typeface="DejaVu Sans"/>
               </a:rPr>
-              <a:t>Trabajo del equipo</a:t>
+              <a:t>Integrantes del Grupo 6</a:t>
             </a:r>
           </a:p>
         </p:txBody>
@@ -4413,7 +4492,7 @@
           <p:cNvPr id="2" name="">
             <a:extLst xmlns:a="http://schemas.openxmlformats.org/drawingml/2006/main">
               <a:ext uri="{FF2B5EF4-FFF2-40B4-BE49-F238E27FC236}">
-                <a16:creationId xmlns:a16="http://schemas.microsoft.com/office/drawing/2014/main" id="{47728454-A7B8-4645-AAA7-4A9110687D85}"/>
+                <a16:creationId xmlns:a16="http://schemas.microsoft.com/office/drawing/2014/main" id="{A80064B9-FE10-4AF2-865A-9BEF481F3D68}"/>
               </a:ext>
             </a:extLst>
           </p:cNvPr>
@@ -4470,36 +4549,36 @@
           <p:cNvPr id="3" name="">
             <a:extLst xmlns:a="http://schemas.openxmlformats.org/drawingml/2006/main">
               <a:ext uri="{FF2B5EF4-FFF2-40B4-BE49-F238E27FC236}">
-                <a16:creationId xmlns:a16="http://schemas.microsoft.com/office/drawing/2014/main" id="{372740F2-27BD-408A-9804-D3C6FA5D83AE}"/>
-              </a:ext>
-            </a:extLst>
-          </p:cNvPr>
-          <p:cNvSpPr>
-            <a:spLocks xmlns:a="http://schemas.openxmlformats.org/drawingml/2006/main" noGrp="1"/>
-          </p:cNvSpPr>
-          <p:nvPr/>
-        </p:nvSpPr>
-        <p:spPr>
-          <a:xfrm xmlns:a="http://schemas.openxmlformats.org/drawingml/2006/main">
-            <a:off x="666750" y="1685925"/>
-            <a:ext cx="5429250" cy="857250"/>
-          </a:xfrm>
-          <a:prstGeom xmlns:a="http://schemas.openxmlformats.org/drawingml/2006/main" prst="rect">
-            <a:avLst/>
-          </a:prstGeom>
-          <a:noFill xmlns:a="http://schemas.openxmlformats.org/drawingml/2006/main"/>
-          <a:ln xmlns:a="http://schemas.openxmlformats.org/drawingml/2006/main" w="0">
-            <a:noFill/>
-          </a:ln>
-        </p:spPr>
-        <p:txBody>
-          <a:bodyPr xmlns:a="http://schemas.openxmlformats.org/drawingml/2006/main">
-            <a:noAutofit/>
-          </a:bodyPr>
-          <a:lstStyle xmlns:a="http://schemas.openxmlformats.org/drawingml/2006/main"/>
-          <a:p xmlns:a="http://schemas.openxmlformats.org/drawingml/2006/main">
-            <a:pPr>
-              <a:defRPr sz="4650" b="1">
+                <a16:creationId xmlns:a16="http://schemas.microsoft.com/office/drawing/2014/main" id="{599D4736-9599-448D-B6A3-9EC4262D24F9}"/>
+              </a:ext>
+            </a:extLst>
+          </p:cNvPr>
+          <p:cNvSpPr>
+            <a:spLocks xmlns:a="http://schemas.openxmlformats.org/drawingml/2006/main" noGrp="1"/>
+          </p:cNvSpPr>
+          <p:nvPr/>
+        </p:nvSpPr>
+        <p:spPr>
+          <a:xfrm xmlns:a="http://schemas.openxmlformats.org/drawingml/2006/main">
+            <a:off x="714375" y="1762125"/>
+            <a:ext cx="6334125" cy="457200"/>
+          </a:xfrm>
+          <a:prstGeom xmlns:a="http://schemas.openxmlformats.org/drawingml/2006/main" prst="rect">
+            <a:avLst/>
+          </a:prstGeom>
+          <a:noFill xmlns:a="http://schemas.openxmlformats.org/drawingml/2006/main"/>
+          <a:ln xmlns:a="http://schemas.openxmlformats.org/drawingml/2006/main" w="0">
+            <a:noFill/>
+          </a:ln>
+        </p:spPr>
+        <p:txBody>
+          <a:bodyPr xmlns:a="http://schemas.openxmlformats.org/drawingml/2006/main">
+            <a:noAutofit/>
+          </a:bodyPr>
+          <a:lstStyle xmlns:a="http://schemas.openxmlformats.org/drawingml/2006/main"/>
+          <a:p xmlns:a="http://schemas.openxmlformats.org/drawingml/2006/main">
+            <a:pPr>
+              <a:defRPr sz="2325" b="1">
                 <a:solidFill>
                   <a:srgbClr val="173D35"/>
                 </a:solidFill>
@@ -4509,7 +4588,7 @@
               </a:defRPr>
             </a:pPr>
             <a:r>
-              <a:rPr sz="4650" b="1">
+              <a:rPr sz="2325" b="1">
                 <a:solidFill>
                   <a:srgbClr val="173D35"/>
                 </a:solidFill>
@@ -4517,7 +4596,7 @@
                 <a:ea typeface="DejaVu Sans"/>
                 <a:cs typeface="DejaVu Sans"/>
               </a:rPr>
-              <a:t>6 integrantes</a:t>
+              <a:t>Jorge Melo</a:t>
             </a:r>
           </a:p>
         </p:txBody>
@@ -4527,54 +4606,54 @@
           <p:cNvPr id="4" name="">
             <a:extLst xmlns:a="http://schemas.openxmlformats.org/drawingml/2006/main">
               <a:ext uri="{FF2B5EF4-FFF2-40B4-BE49-F238E27FC236}">
-                <a16:creationId xmlns:a16="http://schemas.microsoft.com/office/drawing/2014/main" id="{80135D55-7034-45B2-9FCE-832A6F656CE4}"/>
-              </a:ext>
-            </a:extLst>
-          </p:cNvPr>
-          <p:cNvSpPr>
-            <a:spLocks xmlns:a="http://schemas.openxmlformats.org/drawingml/2006/main" noGrp="1"/>
-          </p:cNvSpPr>
-          <p:nvPr/>
-        </p:nvSpPr>
-        <p:spPr>
-          <a:xfrm xmlns:a="http://schemas.openxmlformats.org/drawingml/2006/main">
-            <a:off x="666750" y="2695575"/>
-            <a:ext cx="8096250" cy="619125"/>
-          </a:xfrm>
-          <a:prstGeom xmlns:a="http://schemas.openxmlformats.org/drawingml/2006/main" prst="rect">
-            <a:avLst/>
-          </a:prstGeom>
-          <a:noFill xmlns:a="http://schemas.openxmlformats.org/drawingml/2006/main"/>
-          <a:ln xmlns:a="http://schemas.openxmlformats.org/drawingml/2006/main" w="0">
-            <a:noFill/>
-          </a:ln>
-        </p:spPr>
-        <p:txBody>
-          <a:bodyPr xmlns:a="http://schemas.openxmlformats.org/drawingml/2006/main">
-            <a:noAutofit/>
-          </a:bodyPr>
-          <a:lstStyle xmlns:a="http://schemas.openxmlformats.org/drawingml/2006/main"/>
-          <a:p xmlns:a="http://schemas.openxmlformats.org/drawingml/2006/main">
-            <a:pPr>
-              <a:defRPr sz="2700" b="0">
-                <a:solidFill>
-                  <a:srgbClr val="142C32"/>
-                </a:solidFill>
-                <a:latin typeface="DejaVu Sans"/>
-                <a:ea typeface="DejaVu Sans"/>
-                <a:cs typeface="DejaVu Sans"/>
-              </a:defRPr>
-            </a:pPr>
-            <a:r>
-              <a:rPr sz="2700" b="0">
-                <a:solidFill>
-                  <a:srgbClr val="142C32"/>
-                </a:solidFill>
-                <a:latin typeface="DejaVu Sans"/>
-                <a:ea typeface="DejaVu Sans"/>
-                <a:cs typeface="DejaVu Sans"/>
-              </a:rPr>
-              <a:t>3 builders y 3 testers</a:t>
+                <a16:creationId xmlns:a16="http://schemas.microsoft.com/office/drawing/2014/main" id="{DFBD4E38-5E8A-479A-9620-73244F8BAF00}"/>
+              </a:ext>
+            </a:extLst>
+          </p:cNvPr>
+          <p:cNvSpPr>
+            <a:spLocks xmlns:a="http://schemas.openxmlformats.org/drawingml/2006/main" noGrp="1"/>
+          </p:cNvSpPr>
+          <p:nvPr/>
+        </p:nvSpPr>
+        <p:spPr>
+          <a:xfrm xmlns:a="http://schemas.openxmlformats.org/drawingml/2006/main">
+            <a:off x="7429500" y="1762125"/>
+            <a:ext cx="3333750" cy="457200"/>
+          </a:xfrm>
+          <a:prstGeom xmlns:a="http://schemas.openxmlformats.org/drawingml/2006/main" prst="rect">
+            <a:avLst/>
+          </a:prstGeom>
+          <a:noFill xmlns:a="http://schemas.openxmlformats.org/drawingml/2006/main"/>
+          <a:ln xmlns:a="http://schemas.openxmlformats.org/drawingml/2006/main" w="0">
+            <a:noFill/>
+          </a:ln>
+        </p:spPr>
+        <p:txBody>
+          <a:bodyPr xmlns:a="http://schemas.openxmlformats.org/drawingml/2006/main">
+            <a:noAutofit/>
+          </a:bodyPr>
+          <a:lstStyle xmlns:a="http://schemas.openxmlformats.org/drawingml/2006/main"/>
+          <a:p xmlns:a="http://schemas.openxmlformats.org/drawingml/2006/main">
+            <a:pPr>
+              <a:defRPr sz="2175" b="0">
+                <a:solidFill>
+                  <a:srgbClr val="142C32"/>
+                </a:solidFill>
+                <a:latin typeface="DejaVu Sans"/>
+                <a:ea typeface="DejaVu Sans"/>
+                <a:cs typeface="DejaVu Sans"/>
+              </a:defRPr>
+            </a:pPr>
+            <a:r>
+              <a:rPr sz="2175" b="0">
+                <a:solidFill>
+                  <a:srgbClr val="142C32"/>
+                </a:solidFill>
+                <a:latin typeface="DejaVu Sans"/>
+                <a:ea typeface="DejaVu Sans"/>
+                <a:cs typeface="DejaVu Sans"/>
+              </a:rPr>
+              <a:t>1127398</a:t>
             </a:r>
           </a:p>
         </p:txBody>
@@ -4584,77 +4663,54 @@
           <p:cNvPr id="5" name="">
             <a:extLst xmlns:a="http://schemas.openxmlformats.org/drawingml/2006/main">
               <a:ext uri="{FF2B5EF4-FFF2-40B4-BE49-F238E27FC236}">
-                <a16:creationId xmlns:a16="http://schemas.microsoft.com/office/drawing/2014/main" id="{1165E2F0-9E5F-49C7-ADDA-8EA36563432B}"/>
-              </a:ext>
-            </a:extLst>
-          </p:cNvPr>
-          <p:cNvSpPr>
-            <a:spLocks xmlns:a="http://schemas.openxmlformats.org/drawingml/2006/main" noGrp="1"/>
-          </p:cNvSpPr>
-          <p:nvPr/>
-        </p:nvSpPr>
-        <p:spPr>
-          <a:xfrm xmlns:a="http://schemas.openxmlformats.org/drawingml/2006/main">
-            <a:off x="666750" y="3838575"/>
-            <a:ext cx="10668000" cy="1143000"/>
-          </a:xfrm>
-          <a:prstGeom xmlns:a="http://schemas.openxmlformats.org/drawingml/2006/main" prst="rect">
-            <a:avLst/>
-          </a:prstGeom>
-          <a:noFill xmlns:a="http://schemas.openxmlformats.org/drawingml/2006/main"/>
-          <a:ln xmlns:a="http://schemas.openxmlformats.org/drawingml/2006/main" w="0">
-            <a:noFill/>
-          </a:ln>
-        </p:spPr>
-        <p:txBody>
-          <a:bodyPr xmlns:a="http://schemas.openxmlformats.org/drawingml/2006/main">
-            <a:noAutofit/>
-          </a:bodyPr>
-          <a:lstStyle xmlns:a="http://schemas.openxmlformats.org/drawingml/2006/main"/>
-          <a:p xmlns:a="http://schemas.openxmlformats.org/drawingml/2006/main">
-            <a:pPr>
-              <a:defRPr sz="2775" b="0">
-                <a:solidFill>
-                  <a:srgbClr val="142C32"/>
-                </a:solidFill>
-                <a:latin typeface="DejaVu Sans"/>
-                <a:ea typeface="DejaVu Sans"/>
-                <a:cs typeface="DejaVu Sans"/>
-              </a:defRPr>
-            </a:pPr>
-            <a:r>
-              <a:rPr sz="2775" b="0">
-                <a:solidFill>
-                  <a:srgbClr val="142C32"/>
-                </a:solidFill>
-                <a:latin typeface="DejaVu Sans"/>
-                <a:ea typeface="DejaVu Sans"/>
-                <a:cs typeface="DejaVu Sans"/>
-              </a:rPr>
-              <a:t>Desarrollo por capas, entregas por fases</a:t>
-            </a:r>
-          </a:p>
-          <a:p xmlns:a="http://schemas.openxmlformats.org/drawingml/2006/main">
-            <a:pPr>
-              <a:defRPr sz="2775" b="0">
-                <a:solidFill>
-                  <a:srgbClr val="142C32"/>
-                </a:solidFill>
-                <a:latin typeface="DejaVu Sans"/>
-                <a:ea typeface="DejaVu Sans"/>
-                <a:cs typeface="DejaVu Sans"/>
-              </a:defRPr>
-            </a:pPr>
-            <a:r>
-              <a:rPr sz="2775" b="0">
-                <a:solidFill>
-                  <a:srgbClr val="142C32"/>
-                </a:solidFill>
-                <a:latin typeface="DejaVu Sans"/>
-                <a:ea typeface="DejaVu Sans"/>
-                <a:cs typeface="DejaVu Sans"/>
-              </a:rPr>
-              <a:t>y revisión de los flujos completos</a:t>
+                <a16:creationId xmlns:a16="http://schemas.microsoft.com/office/drawing/2014/main" id="{CF2A6059-D59A-4912-8ED6-BAEAD87EC4B5}"/>
+              </a:ext>
+            </a:extLst>
+          </p:cNvPr>
+          <p:cNvSpPr>
+            <a:spLocks xmlns:a="http://schemas.openxmlformats.org/drawingml/2006/main" noGrp="1"/>
+          </p:cNvSpPr>
+          <p:nvPr/>
+        </p:nvSpPr>
+        <p:spPr>
+          <a:xfrm xmlns:a="http://schemas.openxmlformats.org/drawingml/2006/main">
+            <a:off x="714375" y="2381250"/>
+            <a:ext cx="6334125" cy="457200"/>
+          </a:xfrm>
+          <a:prstGeom xmlns:a="http://schemas.openxmlformats.org/drawingml/2006/main" prst="rect">
+            <a:avLst/>
+          </a:prstGeom>
+          <a:noFill xmlns:a="http://schemas.openxmlformats.org/drawingml/2006/main"/>
+          <a:ln xmlns:a="http://schemas.openxmlformats.org/drawingml/2006/main" w="0">
+            <a:noFill/>
+          </a:ln>
+        </p:spPr>
+        <p:txBody>
+          <a:bodyPr xmlns:a="http://schemas.openxmlformats.org/drawingml/2006/main">
+            <a:noAutofit/>
+          </a:bodyPr>
+          <a:lstStyle xmlns:a="http://schemas.openxmlformats.org/drawingml/2006/main"/>
+          <a:p xmlns:a="http://schemas.openxmlformats.org/drawingml/2006/main">
+            <a:pPr>
+              <a:defRPr sz="2325" b="1">
+                <a:solidFill>
+                  <a:srgbClr val="173D35"/>
+                </a:solidFill>
+                <a:latin typeface="DejaVu Sans"/>
+                <a:ea typeface="DejaVu Sans"/>
+                <a:cs typeface="DejaVu Sans"/>
+              </a:defRPr>
+            </a:pPr>
+            <a:r>
+              <a:rPr sz="2325" b="1">
+                <a:solidFill>
+                  <a:srgbClr val="173D35"/>
+                </a:solidFill>
+                <a:latin typeface="DejaVu Sans"/>
+                <a:ea typeface="DejaVu Sans"/>
+                <a:cs typeface="DejaVu Sans"/>
+              </a:rPr>
+              <a:t>Ashley Franco</a:t>
             </a:r>
           </a:p>
         </p:txBody>
@@ -4664,36 +4720,549 @@
           <p:cNvPr id="6" name="">
             <a:extLst xmlns:a="http://schemas.openxmlformats.org/drawingml/2006/main">
               <a:ext uri="{FF2B5EF4-FFF2-40B4-BE49-F238E27FC236}">
-                <a16:creationId xmlns:a16="http://schemas.microsoft.com/office/drawing/2014/main" id="{B2F4766F-7E6E-4BF9-AD60-69A51379BC9A}"/>
-              </a:ext>
-            </a:extLst>
-          </p:cNvPr>
-          <p:cNvSpPr>
-            <a:spLocks xmlns:a="http://schemas.openxmlformats.org/drawingml/2006/main" noGrp="1"/>
-          </p:cNvSpPr>
-          <p:nvPr/>
-        </p:nvSpPr>
-        <p:spPr>
-          <a:xfrm xmlns:a="http://schemas.openxmlformats.org/drawingml/2006/main">
-            <a:off x="666750" y="5581650"/>
-            <a:ext cx="10763250" cy="523875"/>
-          </a:xfrm>
-          <a:prstGeom xmlns:a="http://schemas.openxmlformats.org/drawingml/2006/main" prst="rect">
-            <a:avLst/>
-          </a:prstGeom>
-          <a:noFill xmlns:a="http://schemas.openxmlformats.org/drawingml/2006/main"/>
-          <a:ln xmlns:a="http://schemas.openxmlformats.org/drawingml/2006/main" w="0">
-            <a:noFill/>
-          </a:ln>
-        </p:spPr>
-        <p:txBody>
-          <a:bodyPr xmlns:a="http://schemas.openxmlformats.org/drawingml/2006/main">
-            <a:noAutofit/>
-          </a:bodyPr>
-          <a:lstStyle xmlns:a="http://schemas.openxmlformats.org/drawingml/2006/main"/>
-          <a:p xmlns:a="http://schemas.openxmlformats.org/drawingml/2006/main">
-            <a:pPr>
-              <a:defRPr sz="1950" b="0">
+                <a16:creationId xmlns:a16="http://schemas.microsoft.com/office/drawing/2014/main" id="{28427790-6E6B-49E2-B93B-DC40E2045DAA}"/>
+              </a:ext>
+            </a:extLst>
+          </p:cNvPr>
+          <p:cNvSpPr>
+            <a:spLocks xmlns:a="http://schemas.openxmlformats.org/drawingml/2006/main" noGrp="1"/>
+          </p:cNvSpPr>
+          <p:nvPr/>
+        </p:nvSpPr>
+        <p:spPr>
+          <a:xfrm xmlns:a="http://schemas.openxmlformats.org/drawingml/2006/main">
+            <a:off x="7429500" y="2381250"/>
+            <a:ext cx="3333750" cy="457200"/>
+          </a:xfrm>
+          <a:prstGeom xmlns:a="http://schemas.openxmlformats.org/drawingml/2006/main" prst="rect">
+            <a:avLst/>
+          </a:prstGeom>
+          <a:noFill xmlns:a="http://schemas.openxmlformats.org/drawingml/2006/main"/>
+          <a:ln xmlns:a="http://schemas.openxmlformats.org/drawingml/2006/main" w="0">
+            <a:noFill/>
+          </a:ln>
+        </p:spPr>
+        <p:txBody>
+          <a:bodyPr xmlns:a="http://schemas.openxmlformats.org/drawingml/2006/main">
+            <a:noAutofit/>
+          </a:bodyPr>
+          <a:lstStyle xmlns:a="http://schemas.openxmlformats.org/drawingml/2006/main"/>
+          <a:p xmlns:a="http://schemas.openxmlformats.org/drawingml/2006/main">
+            <a:pPr>
+              <a:defRPr sz="2175" b="0">
+                <a:solidFill>
+                  <a:srgbClr val="142C32"/>
+                </a:solidFill>
+                <a:latin typeface="DejaVu Sans"/>
+                <a:ea typeface="DejaVu Sans"/>
+                <a:cs typeface="DejaVu Sans"/>
+              </a:defRPr>
+            </a:pPr>
+            <a:r>
+              <a:rPr sz="2175" b="0">
+                <a:solidFill>
+                  <a:srgbClr val="142C32"/>
+                </a:solidFill>
+                <a:latin typeface="DejaVu Sans"/>
+                <a:ea typeface="DejaVu Sans"/>
+                <a:cs typeface="DejaVu Sans"/>
+              </a:rPr>
+              <a:t>1127646</a:t>
+            </a:r>
+          </a:p>
+        </p:txBody>
+      </p:sp>
+      <p:sp>
+        <p:nvSpPr>
+          <p:cNvPr id="7" name="">
+            <a:extLst xmlns:a="http://schemas.openxmlformats.org/drawingml/2006/main">
+              <a:ext uri="{FF2B5EF4-FFF2-40B4-BE49-F238E27FC236}">
+                <a16:creationId xmlns:a16="http://schemas.microsoft.com/office/drawing/2014/main" id="{24E68FD6-628A-41BF-ABE5-02B43DEB165C}"/>
+              </a:ext>
+            </a:extLst>
+          </p:cNvPr>
+          <p:cNvSpPr>
+            <a:spLocks xmlns:a="http://schemas.openxmlformats.org/drawingml/2006/main" noGrp="1"/>
+          </p:cNvSpPr>
+          <p:nvPr/>
+        </p:nvSpPr>
+        <p:spPr>
+          <a:xfrm xmlns:a="http://schemas.openxmlformats.org/drawingml/2006/main">
+            <a:off x="714375" y="3000375"/>
+            <a:ext cx="6334125" cy="457200"/>
+          </a:xfrm>
+          <a:prstGeom xmlns:a="http://schemas.openxmlformats.org/drawingml/2006/main" prst="rect">
+            <a:avLst/>
+          </a:prstGeom>
+          <a:noFill xmlns:a="http://schemas.openxmlformats.org/drawingml/2006/main"/>
+          <a:ln xmlns:a="http://schemas.openxmlformats.org/drawingml/2006/main" w="0">
+            <a:noFill/>
+          </a:ln>
+        </p:spPr>
+        <p:txBody>
+          <a:bodyPr xmlns:a="http://schemas.openxmlformats.org/drawingml/2006/main">
+            <a:noAutofit/>
+          </a:bodyPr>
+          <a:lstStyle xmlns:a="http://schemas.openxmlformats.org/drawingml/2006/main"/>
+          <a:p xmlns:a="http://schemas.openxmlformats.org/drawingml/2006/main">
+            <a:pPr>
+              <a:defRPr sz="2325" b="1">
+                <a:solidFill>
+                  <a:srgbClr val="173D35"/>
+                </a:solidFill>
+                <a:latin typeface="DejaVu Sans"/>
+                <a:ea typeface="DejaVu Sans"/>
+                <a:cs typeface="DejaVu Sans"/>
+              </a:defRPr>
+            </a:pPr>
+            <a:r>
+              <a:rPr sz="2325" b="1">
+                <a:solidFill>
+                  <a:srgbClr val="173D35"/>
+                </a:solidFill>
+                <a:latin typeface="DejaVu Sans"/>
+                <a:ea typeface="DejaVu Sans"/>
+                <a:cs typeface="DejaVu Sans"/>
+              </a:rPr>
+              <a:t>Rowlis Trinidad</a:t>
+            </a:r>
+          </a:p>
+        </p:txBody>
+      </p:sp>
+      <p:sp>
+        <p:nvSpPr>
+          <p:cNvPr id="8" name="">
+            <a:extLst xmlns:a="http://schemas.openxmlformats.org/drawingml/2006/main">
+              <a:ext uri="{FF2B5EF4-FFF2-40B4-BE49-F238E27FC236}">
+                <a16:creationId xmlns:a16="http://schemas.microsoft.com/office/drawing/2014/main" id="{66F1FDDA-7EAB-402A-BC81-4A927AEFB704}"/>
+              </a:ext>
+            </a:extLst>
+          </p:cNvPr>
+          <p:cNvSpPr>
+            <a:spLocks xmlns:a="http://schemas.openxmlformats.org/drawingml/2006/main" noGrp="1"/>
+          </p:cNvSpPr>
+          <p:nvPr/>
+        </p:nvSpPr>
+        <p:spPr>
+          <a:xfrm xmlns:a="http://schemas.openxmlformats.org/drawingml/2006/main">
+            <a:off x="7429500" y="3000375"/>
+            <a:ext cx="3333750" cy="457200"/>
+          </a:xfrm>
+          <a:prstGeom xmlns:a="http://schemas.openxmlformats.org/drawingml/2006/main" prst="rect">
+            <a:avLst/>
+          </a:prstGeom>
+          <a:noFill xmlns:a="http://schemas.openxmlformats.org/drawingml/2006/main"/>
+          <a:ln xmlns:a="http://schemas.openxmlformats.org/drawingml/2006/main" w="0">
+            <a:noFill/>
+          </a:ln>
+        </p:spPr>
+        <p:txBody>
+          <a:bodyPr xmlns:a="http://schemas.openxmlformats.org/drawingml/2006/main">
+            <a:noAutofit/>
+          </a:bodyPr>
+          <a:lstStyle xmlns:a="http://schemas.openxmlformats.org/drawingml/2006/main"/>
+          <a:p xmlns:a="http://schemas.openxmlformats.org/drawingml/2006/main">
+            <a:pPr>
+              <a:defRPr sz="2175" b="0">
+                <a:solidFill>
+                  <a:srgbClr val="142C32"/>
+                </a:solidFill>
+                <a:latin typeface="DejaVu Sans"/>
+                <a:ea typeface="DejaVu Sans"/>
+                <a:cs typeface="DejaVu Sans"/>
+              </a:defRPr>
+            </a:pPr>
+            <a:r>
+              <a:rPr sz="2175" b="0">
+                <a:solidFill>
+                  <a:srgbClr val="142C32"/>
+                </a:solidFill>
+                <a:latin typeface="DejaVu Sans"/>
+                <a:ea typeface="DejaVu Sans"/>
+                <a:cs typeface="DejaVu Sans"/>
+              </a:rPr>
+              <a:t>1128666</a:t>
+            </a:r>
+          </a:p>
+        </p:txBody>
+      </p:sp>
+      <p:sp>
+        <p:nvSpPr>
+          <p:cNvPr id="9" name="">
+            <a:extLst xmlns:a="http://schemas.openxmlformats.org/drawingml/2006/main">
+              <a:ext uri="{FF2B5EF4-FFF2-40B4-BE49-F238E27FC236}">
+                <a16:creationId xmlns:a16="http://schemas.microsoft.com/office/drawing/2014/main" id="{6E0403AF-1EC2-440F-B48E-68D85E22C174}"/>
+              </a:ext>
+            </a:extLst>
+          </p:cNvPr>
+          <p:cNvSpPr>
+            <a:spLocks xmlns:a="http://schemas.openxmlformats.org/drawingml/2006/main" noGrp="1"/>
+          </p:cNvSpPr>
+          <p:nvPr/>
+        </p:nvSpPr>
+        <p:spPr>
+          <a:xfrm xmlns:a="http://schemas.openxmlformats.org/drawingml/2006/main">
+            <a:off x="714375" y="3619500"/>
+            <a:ext cx="6334125" cy="457200"/>
+          </a:xfrm>
+          <a:prstGeom xmlns:a="http://schemas.openxmlformats.org/drawingml/2006/main" prst="rect">
+            <a:avLst/>
+          </a:prstGeom>
+          <a:noFill xmlns:a="http://schemas.openxmlformats.org/drawingml/2006/main"/>
+          <a:ln xmlns:a="http://schemas.openxmlformats.org/drawingml/2006/main" w="0">
+            <a:noFill/>
+          </a:ln>
+        </p:spPr>
+        <p:txBody>
+          <a:bodyPr xmlns:a="http://schemas.openxmlformats.org/drawingml/2006/main">
+            <a:noAutofit/>
+          </a:bodyPr>
+          <a:lstStyle xmlns:a="http://schemas.openxmlformats.org/drawingml/2006/main"/>
+          <a:p xmlns:a="http://schemas.openxmlformats.org/drawingml/2006/main">
+            <a:pPr>
+              <a:defRPr sz="2325" b="1">
+                <a:solidFill>
+                  <a:srgbClr val="173D35"/>
+                </a:solidFill>
+                <a:latin typeface="DejaVu Sans"/>
+                <a:ea typeface="DejaVu Sans"/>
+                <a:cs typeface="DejaVu Sans"/>
+              </a:defRPr>
+            </a:pPr>
+            <a:r>
+              <a:rPr sz="2325" b="1">
+                <a:solidFill>
+                  <a:srgbClr val="173D35"/>
+                </a:solidFill>
+                <a:latin typeface="DejaVu Sans"/>
+                <a:ea typeface="DejaVu Sans"/>
+                <a:cs typeface="DejaVu Sans"/>
+              </a:rPr>
+              <a:t>Rangelis Trinidad</a:t>
+            </a:r>
+          </a:p>
+        </p:txBody>
+      </p:sp>
+      <p:sp>
+        <p:nvSpPr>
+          <p:cNvPr id="10" name="">
+            <a:extLst xmlns:a="http://schemas.openxmlformats.org/drawingml/2006/main">
+              <a:ext uri="{FF2B5EF4-FFF2-40B4-BE49-F238E27FC236}">
+                <a16:creationId xmlns:a16="http://schemas.microsoft.com/office/drawing/2014/main" id="{265FC871-1F1D-438E-A4A5-8D0FC3012268}"/>
+              </a:ext>
+            </a:extLst>
+          </p:cNvPr>
+          <p:cNvSpPr>
+            <a:spLocks xmlns:a="http://schemas.openxmlformats.org/drawingml/2006/main" noGrp="1"/>
+          </p:cNvSpPr>
+          <p:nvPr/>
+        </p:nvSpPr>
+        <p:spPr>
+          <a:xfrm xmlns:a="http://schemas.openxmlformats.org/drawingml/2006/main">
+            <a:off x="7429500" y="3619500"/>
+            <a:ext cx="3333750" cy="457200"/>
+          </a:xfrm>
+          <a:prstGeom xmlns:a="http://schemas.openxmlformats.org/drawingml/2006/main" prst="rect">
+            <a:avLst/>
+          </a:prstGeom>
+          <a:noFill xmlns:a="http://schemas.openxmlformats.org/drawingml/2006/main"/>
+          <a:ln xmlns:a="http://schemas.openxmlformats.org/drawingml/2006/main" w="0">
+            <a:noFill/>
+          </a:ln>
+        </p:spPr>
+        <p:txBody>
+          <a:bodyPr xmlns:a="http://schemas.openxmlformats.org/drawingml/2006/main">
+            <a:noAutofit/>
+          </a:bodyPr>
+          <a:lstStyle xmlns:a="http://schemas.openxmlformats.org/drawingml/2006/main"/>
+          <a:p xmlns:a="http://schemas.openxmlformats.org/drawingml/2006/main">
+            <a:pPr>
+              <a:defRPr sz="2175" b="0">
+                <a:solidFill>
+                  <a:srgbClr val="142C32"/>
+                </a:solidFill>
+                <a:latin typeface="DejaVu Sans"/>
+                <a:ea typeface="DejaVu Sans"/>
+                <a:cs typeface="DejaVu Sans"/>
+              </a:defRPr>
+            </a:pPr>
+            <a:r>
+              <a:rPr sz="2175" b="0">
+                <a:solidFill>
+                  <a:srgbClr val="142C32"/>
+                </a:solidFill>
+                <a:latin typeface="DejaVu Sans"/>
+                <a:ea typeface="DejaVu Sans"/>
+                <a:cs typeface="DejaVu Sans"/>
+              </a:rPr>
+              <a:t>1128680</a:t>
+            </a:r>
+          </a:p>
+        </p:txBody>
+      </p:sp>
+      <p:sp>
+        <p:nvSpPr>
+          <p:cNvPr id="11" name="">
+            <a:extLst xmlns:a="http://schemas.openxmlformats.org/drawingml/2006/main">
+              <a:ext uri="{FF2B5EF4-FFF2-40B4-BE49-F238E27FC236}">
+                <a16:creationId xmlns:a16="http://schemas.microsoft.com/office/drawing/2014/main" id="{183E135E-2839-4CF8-B151-B88F901785ED}"/>
+              </a:ext>
+            </a:extLst>
+          </p:cNvPr>
+          <p:cNvSpPr>
+            <a:spLocks xmlns:a="http://schemas.openxmlformats.org/drawingml/2006/main" noGrp="1"/>
+          </p:cNvSpPr>
+          <p:nvPr/>
+        </p:nvSpPr>
+        <p:spPr>
+          <a:xfrm xmlns:a="http://schemas.openxmlformats.org/drawingml/2006/main">
+            <a:off x="714375" y="4238625"/>
+            <a:ext cx="6334125" cy="457200"/>
+          </a:xfrm>
+          <a:prstGeom xmlns:a="http://schemas.openxmlformats.org/drawingml/2006/main" prst="rect">
+            <a:avLst/>
+          </a:prstGeom>
+          <a:noFill xmlns:a="http://schemas.openxmlformats.org/drawingml/2006/main"/>
+          <a:ln xmlns:a="http://schemas.openxmlformats.org/drawingml/2006/main" w="0">
+            <a:noFill/>
+          </a:ln>
+        </p:spPr>
+        <p:txBody>
+          <a:bodyPr xmlns:a="http://schemas.openxmlformats.org/drawingml/2006/main">
+            <a:noAutofit/>
+          </a:bodyPr>
+          <a:lstStyle xmlns:a="http://schemas.openxmlformats.org/drawingml/2006/main"/>
+          <a:p xmlns:a="http://schemas.openxmlformats.org/drawingml/2006/main">
+            <a:pPr>
+              <a:defRPr sz="2325" b="1">
+                <a:solidFill>
+                  <a:srgbClr val="173D35"/>
+                </a:solidFill>
+                <a:latin typeface="DejaVu Sans"/>
+                <a:ea typeface="DejaVu Sans"/>
+                <a:cs typeface="DejaVu Sans"/>
+              </a:defRPr>
+            </a:pPr>
+            <a:r>
+              <a:rPr sz="2325" b="1">
+                <a:solidFill>
+                  <a:srgbClr val="173D35"/>
+                </a:solidFill>
+                <a:latin typeface="DejaVu Sans"/>
+                <a:ea typeface="DejaVu Sans"/>
+                <a:cs typeface="DejaVu Sans"/>
+              </a:rPr>
+              <a:t>Jarry Gonzalez</a:t>
+            </a:r>
+          </a:p>
+        </p:txBody>
+      </p:sp>
+      <p:sp>
+        <p:nvSpPr>
+          <p:cNvPr id="12" name="">
+            <a:extLst xmlns:a="http://schemas.openxmlformats.org/drawingml/2006/main">
+              <a:ext uri="{FF2B5EF4-FFF2-40B4-BE49-F238E27FC236}">
+                <a16:creationId xmlns:a16="http://schemas.microsoft.com/office/drawing/2014/main" id="{E7F0AA9F-D5D7-4364-94E5-8D980F813A9A}"/>
+              </a:ext>
+            </a:extLst>
+          </p:cNvPr>
+          <p:cNvSpPr>
+            <a:spLocks xmlns:a="http://schemas.openxmlformats.org/drawingml/2006/main" noGrp="1"/>
+          </p:cNvSpPr>
+          <p:nvPr/>
+        </p:nvSpPr>
+        <p:spPr>
+          <a:xfrm xmlns:a="http://schemas.openxmlformats.org/drawingml/2006/main">
+            <a:off x="7429500" y="4238625"/>
+            <a:ext cx="3333750" cy="457200"/>
+          </a:xfrm>
+          <a:prstGeom xmlns:a="http://schemas.openxmlformats.org/drawingml/2006/main" prst="rect">
+            <a:avLst/>
+          </a:prstGeom>
+          <a:noFill xmlns:a="http://schemas.openxmlformats.org/drawingml/2006/main"/>
+          <a:ln xmlns:a="http://schemas.openxmlformats.org/drawingml/2006/main" w="0">
+            <a:noFill/>
+          </a:ln>
+        </p:spPr>
+        <p:txBody>
+          <a:bodyPr xmlns:a="http://schemas.openxmlformats.org/drawingml/2006/main">
+            <a:noAutofit/>
+          </a:bodyPr>
+          <a:lstStyle xmlns:a="http://schemas.openxmlformats.org/drawingml/2006/main"/>
+          <a:p xmlns:a="http://schemas.openxmlformats.org/drawingml/2006/main">
+            <a:pPr>
+              <a:defRPr sz="2175" b="0">
+                <a:solidFill>
+                  <a:srgbClr val="142C32"/>
+                </a:solidFill>
+                <a:latin typeface="DejaVu Sans"/>
+                <a:ea typeface="DejaVu Sans"/>
+                <a:cs typeface="DejaVu Sans"/>
+              </a:defRPr>
+            </a:pPr>
+            <a:r>
+              <a:rPr sz="2175" b="0">
+                <a:solidFill>
+                  <a:srgbClr val="142C32"/>
+                </a:solidFill>
+                <a:latin typeface="DejaVu Sans"/>
+                <a:ea typeface="DejaVu Sans"/>
+                <a:cs typeface="DejaVu Sans"/>
+              </a:rPr>
+              <a:t>1127998</a:t>
+            </a:r>
+          </a:p>
+        </p:txBody>
+      </p:sp>
+      <p:sp>
+        <p:nvSpPr>
+          <p:cNvPr id="13" name="">
+            <a:extLst xmlns:a="http://schemas.openxmlformats.org/drawingml/2006/main">
+              <a:ext uri="{FF2B5EF4-FFF2-40B4-BE49-F238E27FC236}">
+                <a16:creationId xmlns:a16="http://schemas.microsoft.com/office/drawing/2014/main" id="{2CF93428-7988-439C-88FD-C86194CB335D}"/>
+              </a:ext>
+            </a:extLst>
+          </p:cNvPr>
+          <p:cNvSpPr>
+            <a:spLocks xmlns:a="http://schemas.openxmlformats.org/drawingml/2006/main" noGrp="1"/>
+          </p:cNvSpPr>
+          <p:nvPr/>
+        </p:nvSpPr>
+        <p:spPr>
+          <a:xfrm xmlns:a="http://schemas.openxmlformats.org/drawingml/2006/main">
+            <a:off x="714375" y="4857750"/>
+            <a:ext cx="6334125" cy="457200"/>
+          </a:xfrm>
+          <a:prstGeom xmlns:a="http://schemas.openxmlformats.org/drawingml/2006/main" prst="rect">
+            <a:avLst/>
+          </a:prstGeom>
+          <a:noFill xmlns:a="http://schemas.openxmlformats.org/drawingml/2006/main"/>
+          <a:ln xmlns:a="http://schemas.openxmlformats.org/drawingml/2006/main" w="0">
+            <a:noFill/>
+          </a:ln>
+        </p:spPr>
+        <p:txBody>
+          <a:bodyPr xmlns:a="http://schemas.openxmlformats.org/drawingml/2006/main">
+            <a:noAutofit/>
+          </a:bodyPr>
+          <a:lstStyle xmlns:a="http://schemas.openxmlformats.org/drawingml/2006/main"/>
+          <a:p xmlns:a="http://schemas.openxmlformats.org/drawingml/2006/main">
+            <a:pPr>
+              <a:defRPr sz="2325" b="1">
+                <a:solidFill>
+                  <a:srgbClr val="173D35"/>
+                </a:solidFill>
+                <a:latin typeface="DejaVu Sans"/>
+                <a:ea typeface="DejaVu Sans"/>
+                <a:cs typeface="DejaVu Sans"/>
+              </a:defRPr>
+            </a:pPr>
+            <a:r>
+              <a:rPr sz="2325" b="1">
+                <a:solidFill>
+                  <a:srgbClr val="173D35"/>
+                </a:solidFill>
+                <a:latin typeface="DejaVu Sans"/>
+                <a:ea typeface="DejaVu Sans"/>
+                <a:cs typeface="DejaVu Sans"/>
+              </a:rPr>
+              <a:t>Daniel Cruz</a:t>
+            </a:r>
+          </a:p>
+        </p:txBody>
+      </p:sp>
+      <p:sp>
+        <p:nvSpPr>
+          <p:cNvPr id="14" name="">
+            <a:extLst xmlns:a="http://schemas.openxmlformats.org/drawingml/2006/main">
+              <a:ext uri="{FF2B5EF4-FFF2-40B4-BE49-F238E27FC236}">
+                <a16:creationId xmlns:a16="http://schemas.microsoft.com/office/drawing/2014/main" id="{8F205B76-5E0C-4B7C-9518-6C4CD11D0CD5}"/>
+              </a:ext>
+            </a:extLst>
+          </p:cNvPr>
+          <p:cNvSpPr>
+            <a:spLocks xmlns:a="http://schemas.openxmlformats.org/drawingml/2006/main" noGrp="1"/>
+          </p:cNvSpPr>
+          <p:nvPr/>
+        </p:nvSpPr>
+        <p:spPr>
+          <a:xfrm xmlns:a="http://schemas.openxmlformats.org/drawingml/2006/main">
+            <a:off x="7429500" y="4857750"/>
+            <a:ext cx="3333750" cy="457200"/>
+          </a:xfrm>
+          <a:prstGeom xmlns:a="http://schemas.openxmlformats.org/drawingml/2006/main" prst="rect">
+            <a:avLst/>
+          </a:prstGeom>
+          <a:noFill xmlns:a="http://schemas.openxmlformats.org/drawingml/2006/main"/>
+          <a:ln xmlns:a="http://schemas.openxmlformats.org/drawingml/2006/main" w="0">
+            <a:noFill/>
+          </a:ln>
+        </p:spPr>
+        <p:txBody>
+          <a:bodyPr xmlns:a="http://schemas.openxmlformats.org/drawingml/2006/main">
+            <a:noAutofit/>
+          </a:bodyPr>
+          <a:lstStyle xmlns:a="http://schemas.openxmlformats.org/drawingml/2006/main"/>
+          <a:p xmlns:a="http://schemas.openxmlformats.org/drawingml/2006/main">
+            <a:pPr>
+              <a:defRPr sz="2175" b="0">
+                <a:solidFill>
+                  <a:srgbClr val="142C32"/>
+                </a:solidFill>
+                <a:latin typeface="DejaVu Sans"/>
+                <a:ea typeface="DejaVu Sans"/>
+                <a:cs typeface="DejaVu Sans"/>
+              </a:defRPr>
+            </a:pPr>
+            <a:r>
+              <a:rPr sz="2175" b="0">
+                <a:solidFill>
+                  <a:srgbClr val="142C32"/>
+                </a:solidFill>
+                <a:latin typeface="DejaVu Sans"/>
+                <a:ea typeface="DejaVu Sans"/>
+                <a:cs typeface="DejaVu Sans"/>
+              </a:rPr>
+              <a:t>1128565</a:t>
+            </a:r>
+          </a:p>
+        </p:txBody>
+      </p:sp>
+      <p:sp>
+        <p:nvSpPr>
+          <p:cNvPr id="15" name="">
+            <a:extLst xmlns:a="http://schemas.openxmlformats.org/drawingml/2006/main">
+              <a:ext uri="{FF2B5EF4-FFF2-40B4-BE49-F238E27FC236}">
+                <a16:creationId xmlns:a16="http://schemas.microsoft.com/office/drawing/2014/main" id="{8EBA6303-243A-4CFA-B68F-D137ED42D723}"/>
+              </a:ext>
+            </a:extLst>
+          </p:cNvPr>
+          <p:cNvSpPr>
+            <a:spLocks xmlns:a="http://schemas.openxmlformats.org/drawingml/2006/main" noGrp="1"/>
+          </p:cNvSpPr>
+          <p:nvPr/>
+        </p:nvSpPr>
+        <p:spPr>
+          <a:xfrm xmlns:a="http://schemas.openxmlformats.org/drawingml/2006/main">
+            <a:off x="714375" y="5734050"/>
+            <a:ext cx="10001250" cy="428625"/>
+          </a:xfrm>
+          <a:prstGeom xmlns:a="http://schemas.openxmlformats.org/drawingml/2006/main" prst="rect">
+            <a:avLst/>
+          </a:prstGeom>
+          <a:noFill xmlns:a="http://schemas.openxmlformats.org/drawingml/2006/main"/>
+          <a:ln xmlns:a="http://schemas.openxmlformats.org/drawingml/2006/main" w="0">
+            <a:noFill/>
+          </a:ln>
+        </p:spPr>
+        <p:txBody>
+          <a:bodyPr xmlns:a="http://schemas.openxmlformats.org/drawingml/2006/main">
+            <a:noAutofit/>
+          </a:bodyPr>
+          <a:lstStyle xmlns:a="http://schemas.openxmlformats.org/drawingml/2006/main"/>
+          <a:p xmlns:a="http://schemas.openxmlformats.org/drawingml/2006/main">
+            <a:pPr>
+              <a:defRPr sz="2025" b="0">
                 <a:solidFill>
                   <a:srgbClr val="53666B"/>
                 </a:solidFill>
@@ -4703,7 +5272,7 @@
               </a:defRPr>
             </a:pPr>
             <a:r>
-              <a:rPr sz="1950" b="0">
+              <a:rPr sz="2025" b="0">
                 <a:solidFill>
                   <a:srgbClr val="53666B"/>
                 </a:solidFill>
@@ -4711,7 +5280,7 @@
                 <a:ea typeface="DejaVu Sans"/>
                 <a:cs typeface="DejaVu Sans"/>
               </a:rPr>
-              <a:t>Código, pruebas y documentación forman parte de la entrega</a:t>
+              <a:t>Profesor: Santos Ramos</a:t>
             </a:r>
           </a:p>
         </p:txBody>
@@ -4719,7 +5288,7 @@
     </p:spTree>
     <p:extLst>
       <p:ext uri="{BB962C8B-B14F-4D97-AF65-F5344CB8AC3E}">
-        <p14:creationId xmlns:p14="http://schemas.microsoft.com/office/powerpoint/2010/main" val="2138926830"/>
+        <p14:creationId xmlns:p14="http://schemas.microsoft.com/office/powerpoint/2010/main" val="1302399620"/>
       </p:ext>
     </p:extLst>
   </p:cSld>
@@ -4750,7 +5319,7 @@
           <p:cNvPr id="7" name="">
             <a:extLst xmlns:a="http://schemas.openxmlformats.org/drawingml/2006/main">
               <a:ext uri="{FF2B5EF4-FFF2-40B4-BE49-F238E27FC236}">
-                <a16:creationId xmlns:a16="http://schemas.microsoft.com/office/drawing/2014/main" id="{90BB036F-4C1C-4682-8741-2DADE91F2EDE}"/>
+                <a16:creationId xmlns:a16="http://schemas.microsoft.com/office/drawing/2014/main" id="{F126A879-C256-4CCC-BB75-7777E233B506}"/>
               </a:ext>
             </a:extLst>
           </p:cNvPr>
@@ -4807,7 +5376,7 @@
           <p:cNvPr id="2" name="">
             <a:extLst xmlns:a="http://schemas.openxmlformats.org/drawingml/2006/main">
               <a:ext uri="{FF2B5EF4-FFF2-40B4-BE49-F238E27FC236}">
-                <a16:creationId xmlns:a16="http://schemas.microsoft.com/office/drawing/2014/main" id="{83AFEF81-3FB4-431B-9FDB-695BA17F8163}"/>
+                <a16:creationId xmlns:a16="http://schemas.microsoft.com/office/drawing/2014/main" id="{39F94C3B-DC2A-48C1-B1E1-66DF121B14E1}"/>
               </a:ext>
             </a:extLst>
           </p:cNvPr>
@@ -4864,7 +5433,7 @@
           <p:cNvPr id="3" name="">
             <a:extLst xmlns:a="http://schemas.openxmlformats.org/drawingml/2006/main">
               <a:ext uri="{FF2B5EF4-FFF2-40B4-BE49-F238E27FC236}">
-                <a16:creationId xmlns:a16="http://schemas.microsoft.com/office/drawing/2014/main" id="{178960E7-1413-4322-8A2B-5B08AC0175AA}"/>
+                <a16:creationId xmlns:a16="http://schemas.microsoft.com/office/drawing/2014/main" id="{DEB8D60C-9635-4520-9165-7291D5ED8BA1}"/>
               </a:ext>
             </a:extLst>
           </p:cNvPr>
@@ -4911,7 +5480,7 @@
                 <a:ea typeface="DejaVu Sans"/>
                 <a:cs typeface="DejaVu Sans"/>
               </a:rPr>
-              <a:t>458</a:t>
+              <a:t>463</a:t>
             </a:r>
           </a:p>
         </p:txBody>
@@ -4921,7 +5490,7 @@
           <p:cNvPr id="4" name="">
             <a:extLst xmlns:a="http://schemas.openxmlformats.org/drawingml/2006/main">
               <a:ext uri="{FF2B5EF4-FFF2-40B4-BE49-F238E27FC236}">
-                <a16:creationId xmlns:a16="http://schemas.microsoft.com/office/drawing/2014/main" id="{9D95CEE9-412E-4FCA-8856-3D43D0647BA7}"/>
+                <a16:creationId xmlns:a16="http://schemas.microsoft.com/office/drawing/2014/main" id="{655FC5FE-9A61-41CC-8E0F-E254812E50D0}"/>
               </a:ext>
             </a:extLst>
           </p:cNvPr>
@@ -5001,7 +5570,7 @@
           <p:cNvPr id="5" name="">
             <a:extLst xmlns:a="http://schemas.openxmlformats.org/drawingml/2006/main">
               <a:ext uri="{FF2B5EF4-FFF2-40B4-BE49-F238E27FC236}">
-                <a16:creationId xmlns:a16="http://schemas.microsoft.com/office/drawing/2014/main" id="{FF6DD4AE-2D49-4A92-BDD6-E6862CC6EA08}"/>
+                <a16:creationId xmlns:a16="http://schemas.microsoft.com/office/drawing/2014/main" id="{16E79BAF-A861-4318-A15D-A2AEE6D5E509}"/>
               </a:ext>
             </a:extLst>
           </p:cNvPr>
@@ -5142,7 +5711,7 @@
           <p:cNvPr id="6" name="">
             <a:extLst xmlns:a="http://schemas.openxmlformats.org/drawingml/2006/main">
               <a:ext uri="{FF2B5EF4-FFF2-40B4-BE49-F238E27FC236}">
-                <a16:creationId xmlns:a16="http://schemas.microsoft.com/office/drawing/2014/main" id="{92FB6472-0848-4D1B-9397-5D50D649D026}"/>
+                <a16:creationId xmlns:a16="http://schemas.microsoft.com/office/drawing/2014/main" id="{8E89D3AC-C391-4812-B29F-5CFB72B3272E}"/>
               </a:ext>
             </a:extLst>
           </p:cNvPr>
@@ -5197,7 +5766,7 @@
     </p:spTree>
     <p:extLst>
       <p:ext uri="{BB962C8B-B14F-4D97-AF65-F5344CB8AC3E}">
-        <p14:creationId xmlns:p14="http://schemas.microsoft.com/office/powerpoint/2010/main" val="892477290"/>
+        <p14:creationId xmlns:p14="http://schemas.microsoft.com/office/powerpoint/2010/main" val="875281977"/>
       </p:ext>
     </p:extLst>
   </p:cSld>
@@ -5225,10 +5794,10 @@
       </p:grpSpPr>
       <p:sp>
         <p:nvSpPr>
-          <p:cNvPr id="11" name="">
-            <a:extLst xmlns:a="http://schemas.openxmlformats.org/drawingml/2006/main">
-              <a:ext uri="{FF2B5EF4-FFF2-40B4-BE49-F238E27FC236}">
-                <a16:creationId xmlns:a16="http://schemas.microsoft.com/office/drawing/2014/main" id="{1F7AB997-AE04-4517-B99A-0D917A6EAB6E}"/>
+          <p:cNvPr id="20" name="">
+            <a:extLst xmlns:a="http://schemas.openxmlformats.org/drawingml/2006/main">
+              <a:ext uri="{FF2B5EF4-FFF2-40B4-BE49-F238E27FC236}">
+                <a16:creationId xmlns:a16="http://schemas.microsoft.com/office/drawing/2014/main" id="{12E560DF-B875-4D53-A2E0-AEEF0028E94D}"/>
               </a:ext>
             </a:extLst>
           </p:cNvPr>
@@ -5285,7 +5854,7 @@
           <p:cNvPr id="2" name="">
             <a:extLst xmlns:a="http://schemas.openxmlformats.org/drawingml/2006/main">
               <a:ext uri="{FF2B5EF4-FFF2-40B4-BE49-F238E27FC236}">
-                <a16:creationId xmlns:a16="http://schemas.microsoft.com/office/drawing/2014/main" id="{9F436FDE-55A3-4B79-BFCA-08C893941A36}"/>
+                <a16:creationId xmlns:a16="http://schemas.microsoft.com/office/drawing/2014/main" id="{5A50C7A5-7D4C-4AAC-872B-A7E209F68AAC}"/>
               </a:ext>
             </a:extLst>
           </p:cNvPr>
@@ -5342,36 +5911,68 @@
           <p:cNvPr id="3" name="">
             <a:extLst xmlns:a="http://schemas.openxmlformats.org/drawingml/2006/main">
               <a:ext uri="{FF2B5EF4-FFF2-40B4-BE49-F238E27FC236}">
-                <a16:creationId xmlns:a16="http://schemas.microsoft.com/office/drawing/2014/main" id="{13197624-84A9-4957-AB85-EF75C2973E39}"/>
-              </a:ext>
-            </a:extLst>
-          </p:cNvPr>
-          <p:cNvSpPr>
-            <a:spLocks xmlns:a="http://schemas.openxmlformats.org/drawingml/2006/main" noGrp="1"/>
-          </p:cNvSpPr>
-          <p:nvPr/>
-        </p:nvSpPr>
-        <p:spPr>
-          <a:xfrm xmlns:a="http://schemas.openxmlformats.org/drawingml/2006/main">
-            <a:off x="666750" y="1809750"/>
-            <a:ext cx="3333750" cy="438150"/>
-          </a:xfrm>
-          <a:prstGeom xmlns:a="http://schemas.openxmlformats.org/drawingml/2006/main" prst="rect">
-            <a:avLst/>
-          </a:prstGeom>
-          <a:noFill xmlns:a="http://schemas.openxmlformats.org/drawingml/2006/main"/>
-          <a:ln xmlns:a="http://schemas.openxmlformats.org/drawingml/2006/main" w="0">
-            <a:noFill/>
-          </a:ln>
-        </p:spPr>
-        <p:txBody>
-          <a:bodyPr xmlns:a="http://schemas.openxmlformats.org/drawingml/2006/main">
-            <a:noAutofit/>
-          </a:bodyPr>
-          <a:lstStyle xmlns:a="http://schemas.openxmlformats.org/drawingml/2006/main"/>
-          <a:p xmlns:a="http://schemas.openxmlformats.org/drawingml/2006/main">
-            <a:pPr>
-              <a:defRPr sz="2175" b="1">
+                <a16:creationId xmlns:a16="http://schemas.microsoft.com/office/drawing/2014/main" id="{B517E0B0-FDA4-42D9-9533-87DA0B98B362}"/>
+              </a:ext>
+            </a:extLst>
+          </p:cNvPr>
+          <p:cNvSpPr>
+            <a:spLocks xmlns:a="http://schemas.openxmlformats.org/drawingml/2006/main" noGrp="1"/>
+          </p:cNvSpPr>
+          <p:nvPr/>
+        </p:nvSpPr>
+        <p:spPr>
+          <a:xfrm xmlns:a="http://schemas.openxmlformats.org/drawingml/2006/main">
+            <a:off x="619125" y="2524125"/>
+            <a:ext cx="2333625" cy="1381125"/>
+          </a:xfrm>
+          <a:prstGeom xmlns:a="http://schemas.openxmlformats.org/drawingml/2006/main" prst="rect">
+            <a:avLst/>
+          </a:prstGeom>
+          <a:solidFill xmlns:a="http://schemas.openxmlformats.org/drawingml/2006/main">
+            <a:srgbClr val="E7EDE7"/>
+          </a:solidFill>
+          <a:ln xmlns:a="http://schemas.openxmlformats.org/drawingml/2006/main" w="19050">
+            <a:solidFill>
+              <a:srgbClr val="173D35"/>
+            </a:solidFill>
+          </a:ln>
+        </p:spPr>
+      </p:sp>
+      <p:sp>
+        <p:nvSpPr>
+          <p:cNvPr id="4" name="">
+            <a:extLst xmlns:a="http://schemas.openxmlformats.org/drawingml/2006/main">
+              <a:ext uri="{FF2B5EF4-FFF2-40B4-BE49-F238E27FC236}">
+                <a16:creationId xmlns:a16="http://schemas.microsoft.com/office/drawing/2014/main" id="{50D8D858-DD74-49E8-9453-A1E62A5086EC}"/>
+              </a:ext>
+            </a:extLst>
+          </p:cNvPr>
+          <p:cNvSpPr>
+            <a:spLocks xmlns:a="http://schemas.openxmlformats.org/drawingml/2006/main" noGrp="1"/>
+          </p:cNvSpPr>
+          <p:nvPr/>
+        </p:nvSpPr>
+        <p:spPr>
+          <a:xfrm xmlns:a="http://schemas.openxmlformats.org/drawingml/2006/main">
+            <a:off x="695325" y="2695575"/>
+            <a:ext cx="2181225" cy="438150"/>
+          </a:xfrm>
+          <a:prstGeom xmlns:a="http://schemas.openxmlformats.org/drawingml/2006/main" prst="rect">
+            <a:avLst/>
+          </a:prstGeom>
+          <a:noFill xmlns:a="http://schemas.openxmlformats.org/drawingml/2006/main"/>
+          <a:ln xmlns:a="http://schemas.openxmlformats.org/drawingml/2006/main" w="0">
+            <a:noFill/>
+          </a:ln>
+        </p:spPr>
+        <p:txBody>
+          <a:bodyPr xmlns:a="http://schemas.openxmlformats.org/drawingml/2006/main">
+            <a:noAutofit/>
+          </a:bodyPr>
+          <a:lstStyle xmlns:a="http://schemas.openxmlformats.org/drawingml/2006/main"/>
+          <a:p xmlns:a="http://schemas.openxmlformats.org/drawingml/2006/main">
+            <a:pPr>
+              <a:defRPr sz="1875" b="1">
                 <a:solidFill>
                   <a:srgbClr val="173D35"/>
                 </a:solidFill>
@@ -5381,7 +5982,7 @@
               </a:defRPr>
             </a:pPr>
             <a:r>
-              <a:rPr sz="2175" b="1">
+              <a:rPr sz="1875" b="1">
                 <a:solidFill>
                   <a:srgbClr val="173D35"/>
                 </a:solidFill>
@@ -5396,22 +5997,649 @@
       </p:sp>
       <p:sp>
         <p:nvSpPr>
-          <p:cNvPr id="4" name="">
-            <a:extLst xmlns:a="http://schemas.openxmlformats.org/drawingml/2006/main">
-              <a:ext uri="{FF2B5EF4-FFF2-40B4-BE49-F238E27FC236}">
-                <a16:creationId xmlns:a16="http://schemas.microsoft.com/office/drawing/2014/main" id="{132454EC-0615-4A96-9742-C8BD9187BD09}"/>
-              </a:ext>
-            </a:extLst>
-          </p:cNvPr>
-          <p:cNvSpPr>
-            <a:spLocks xmlns:a="http://schemas.openxmlformats.org/drawingml/2006/main" noGrp="1"/>
-          </p:cNvSpPr>
-          <p:nvPr/>
-        </p:nvSpPr>
-        <p:spPr>
-          <a:xfrm xmlns:a="http://schemas.openxmlformats.org/drawingml/2006/main">
-            <a:off x="4333875" y="1809750"/>
-            <a:ext cx="7048500" cy="838200"/>
+          <p:cNvPr id="5" name="">
+            <a:extLst xmlns:a="http://schemas.openxmlformats.org/drawingml/2006/main">
+              <a:ext uri="{FF2B5EF4-FFF2-40B4-BE49-F238E27FC236}">
+                <a16:creationId xmlns:a16="http://schemas.microsoft.com/office/drawing/2014/main" id="{37725826-BD96-4C46-B11C-1BAF3F5C8FBF}"/>
+              </a:ext>
+            </a:extLst>
+          </p:cNvPr>
+          <p:cNvSpPr>
+            <a:spLocks xmlns:a="http://schemas.openxmlformats.org/drawingml/2006/main" noGrp="1"/>
+          </p:cNvSpPr>
+          <p:nvPr/>
+        </p:nvSpPr>
+        <p:spPr>
+          <a:xfrm xmlns:a="http://schemas.openxmlformats.org/drawingml/2006/main">
+            <a:off x="695325" y="3209925"/>
+            <a:ext cx="2181225" cy="657225"/>
+          </a:xfrm>
+          <a:prstGeom xmlns:a="http://schemas.openxmlformats.org/drawingml/2006/main" prst="rect">
+            <a:avLst/>
+          </a:prstGeom>
+          <a:noFill xmlns:a="http://schemas.openxmlformats.org/drawingml/2006/main"/>
+          <a:ln xmlns:a="http://schemas.openxmlformats.org/drawingml/2006/main" w="0">
+            <a:noFill/>
+          </a:ln>
+        </p:spPr>
+        <p:txBody>
+          <a:bodyPr xmlns:a="http://schemas.openxmlformats.org/drawingml/2006/main">
+            <a:noAutofit/>
+          </a:bodyPr>
+          <a:lstStyle xmlns:a="http://schemas.openxmlformats.org/drawingml/2006/main"/>
+          <a:p xmlns:a="http://schemas.openxmlformats.org/drawingml/2006/main">
+            <a:pPr>
+              <a:defRPr sz="1725" b="0">
+                <a:solidFill>
+                  <a:srgbClr val="142C32"/>
+                </a:solidFill>
+                <a:latin typeface="DejaVu Sans"/>
+                <a:ea typeface="DejaVu Sans"/>
+                <a:cs typeface="DejaVu Sans"/>
+              </a:defRPr>
+            </a:pPr>
+            <a:r>
+              <a:rPr sz="1725" b="0">
+                <a:solidFill>
+                  <a:srgbClr val="142C32"/>
+                </a:solidFill>
+                <a:latin typeface="DejaVu Sans"/>
+                <a:ea typeface="DejaVu Sans"/>
+                <a:cs typeface="DejaVu Sans"/>
+              </a:rPr>
+              <a:t>API y cola</a:t>
+            </a:r>
+          </a:p>
+        </p:txBody>
+      </p:sp>
+      <p:sp>
+        <p:nvSpPr>
+          <p:cNvPr id="6" name="">
+            <a:extLst xmlns:a="http://schemas.openxmlformats.org/drawingml/2006/main">
+              <a:ext uri="{FF2B5EF4-FFF2-40B4-BE49-F238E27FC236}">
+                <a16:creationId xmlns:a16="http://schemas.microsoft.com/office/drawing/2014/main" id="{9674DC50-AE55-4670-AE94-79A80EB8BEB3}"/>
+              </a:ext>
+            </a:extLst>
+          </p:cNvPr>
+          <p:cNvSpPr>
+            <a:spLocks xmlns:a="http://schemas.openxmlformats.org/drawingml/2006/main" noGrp="1"/>
+          </p:cNvSpPr>
+          <p:nvPr/>
+        </p:nvSpPr>
+        <p:spPr>
+          <a:xfrm xmlns:a="http://schemas.openxmlformats.org/drawingml/2006/main">
+            <a:off x="3476625" y="2524125"/>
+            <a:ext cx="2333625" cy="1381125"/>
+          </a:xfrm>
+          <a:prstGeom xmlns:a="http://schemas.openxmlformats.org/drawingml/2006/main" prst="rect">
+            <a:avLst/>
+          </a:prstGeom>
+          <a:solidFill xmlns:a="http://schemas.openxmlformats.org/drawingml/2006/main">
+            <a:srgbClr val="E7EDE7"/>
+          </a:solidFill>
+          <a:ln xmlns:a="http://schemas.openxmlformats.org/drawingml/2006/main" w="19050">
+            <a:solidFill>
+              <a:srgbClr val="173D35"/>
+            </a:solidFill>
+          </a:ln>
+        </p:spPr>
+      </p:sp>
+      <p:sp>
+        <p:nvSpPr>
+          <p:cNvPr id="7" name="">
+            <a:extLst xmlns:a="http://schemas.openxmlformats.org/drawingml/2006/main">
+              <a:ext uri="{FF2B5EF4-FFF2-40B4-BE49-F238E27FC236}">
+                <a16:creationId xmlns:a16="http://schemas.microsoft.com/office/drawing/2014/main" id="{FA19D179-CE1A-425A-B7CA-599B688F3F7E}"/>
+              </a:ext>
+            </a:extLst>
+          </p:cNvPr>
+          <p:cNvSpPr>
+            <a:spLocks xmlns:a="http://schemas.openxmlformats.org/drawingml/2006/main" noGrp="1"/>
+          </p:cNvSpPr>
+          <p:nvPr/>
+        </p:nvSpPr>
+        <p:spPr>
+          <a:xfrm xmlns:a="http://schemas.openxmlformats.org/drawingml/2006/main">
+            <a:off x="3552825" y="2695575"/>
+            <a:ext cx="2181225" cy="438150"/>
+          </a:xfrm>
+          <a:prstGeom xmlns:a="http://schemas.openxmlformats.org/drawingml/2006/main" prst="rect">
+            <a:avLst/>
+          </a:prstGeom>
+          <a:noFill xmlns:a="http://schemas.openxmlformats.org/drawingml/2006/main"/>
+          <a:ln xmlns:a="http://schemas.openxmlformats.org/drawingml/2006/main" w="0">
+            <a:noFill/>
+          </a:ln>
+        </p:spPr>
+        <p:txBody>
+          <a:bodyPr xmlns:a="http://schemas.openxmlformats.org/drawingml/2006/main">
+            <a:noAutofit/>
+          </a:bodyPr>
+          <a:lstStyle xmlns:a="http://schemas.openxmlformats.org/drawingml/2006/main"/>
+          <a:p xmlns:a="http://schemas.openxmlformats.org/drawingml/2006/main">
+            <a:pPr>
+              <a:defRPr sz="1875" b="1">
+                <a:solidFill>
+                  <a:srgbClr val="173D35"/>
+                </a:solidFill>
+                <a:latin typeface="DejaVu Sans"/>
+                <a:ea typeface="DejaVu Sans"/>
+                <a:cs typeface="DejaVu Sans"/>
+              </a:defRPr>
+            </a:pPr>
+            <a:r>
+              <a:rPr sz="1875" b="1">
+                <a:solidFill>
+                  <a:srgbClr val="173D35"/>
+                </a:solidFill>
+                <a:latin typeface="DejaVu Sans"/>
+                <a:ea typeface="DejaVu Sans"/>
+                <a:cs typeface="DejaVu Sans"/>
+              </a:rPr>
+              <a:t>Textbee</a:t>
+            </a:r>
+          </a:p>
+        </p:txBody>
+      </p:sp>
+      <p:sp>
+        <p:nvSpPr>
+          <p:cNvPr id="8" name="">
+            <a:extLst xmlns:a="http://schemas.openxmlformats.org/drawingml/2006/main">
+              <a:ext uri="{FF2B5EF4-FFF2-40B4-BE49-F238E27FC236}">
+                <a16:creationId xmlns:a16="http://schemas.microsoft.com/office/drawing/2014/main" id="{8702A4E8-7761-421A-B707-B5EFAF943097}"/>
+              </a:ext>
+            </a:extLst>
+          </p:cNvPr>
+          <p:cNvSpPr>
+            <a:spLocks xmlns:a="http://schemas.openxmlformats.org/drawingml/2006/main" noGrp="1"/>
+          </p:cNvSpPr>
+          <p:nvPr/>
+        </p:nvSpPr>
+        <p:spPr>
+          <a:xfrm xmlns:a="http://schemas.openxmlformats.org/drawingml/2006/main">
+            <a:off x="3552825" y="3209925"/>
+            <a:ext cx="2181225" cy="657225"/>
+          </a:xfrm>
+          <a:prstGeom xmlns:a="http://schemas.openxmlformats.org/drawingml/2006/main" prst="rect">
+            <a:avLst/>
+          </a:prstGeom>
+          <a:noFill xmlns:a="http://schemas.openxmlformats.org/drawingml/2006/main"/>
+          <a:ln xmlns:a="http://schemas.openxmlformats.org/drawingml/2006/main" w="0">
+            <a:noFill/>
+          </a:ln>
+        </p:spPr>
+        <p:txBody>
+          <a:bodyPr xmlns:a="http://schemas.openxmlformats.org/drawingml/2006/main">
+            <a:noAutofit/>
+          </a:bodyPr>
+          <a:lstStyle xmlns:a="http://schemas.openxmlformats.org/drawingml/2006/main"/>
+          <a:p xmlns:a="http://schemas.openxmlformats.org/drawingml/2006/main">
+            <a:pPr>
+              <a:defRPr sz="1725" b="0">
+                <a:solidFill>
+                  <a:srgbClr val="142C32"/>
+                </a:solidFill>
+                <a:latin typeface="DejaVu Sans"/>
+                <a:ea typeface="DejaVu Sans"/>
+                <a:cs typeface="DejaVu Sans"/>
+              </a:defRPr>
+            </a:pPr>
+            <a:r>
+              <a:rPr sz="1725" b="0">
+                <a:solidFill>
+                  <a:srgbClr val="142C32"/>
+                </a:solidFill>
+                <a:latin typeface="DejaVu Sans"/>
+                <a:ea typeface="DejaVu Sans"/>
+                <a:cs typeface="DejaVu Sans"/>
+              </a:rPr>
+              <a:t>Servicio HTTPS</a:t>
+            </a:r>
+          </a:p>
+        </p:txBody>
+      </p:sp>
+      <p:sp>
+        <p:nvSpPr>
+          <p:cNvPr id="9" name="">
+            <a:extLst xmlns:a="http://schemas.openxmlformats.org/drawingml/2006/main">
+              <a:ext uri="{FF2B5EF4-FFF2-40B4-BE49-F238E27FC236}">
+                <a16:creationId xmlns:a16="http://schemas.microsoft.com/office/drawing/2014/main" id="{3898845D-1D4F-43F5-A1F7-1C90FF1DB35F}"/>
+              </a:ext>
+            </a:extLst>
+          </p:cNvPr>
+          <p:cNvSpPr>
+            <a:spLocks xmlns:a="http://schemas.openxmlformats.org/drawingml/2006/main" noGrp="1"/>
+          </p:cNvSpPr>
+          <p:nvPr/>
+        </p:nvSpPr>
+        <p:spPr>
+          <a:xfrm xmlns:a="http://schemas.openxmlformats.org/drawingml/2006/main">
+            <a:off x="6334125" y="2524125"/>
+            <a:ext cx="2333625" cy="1381125"/>
+          </a:xfrm>
+          <a:prstGeom xmlns:a="http://schemas.openxmlformats.org/drawingml/2006/main" prst="rect">
+            <a:avLst/>
+          </a:prstGeom>
+          <a:solidFill xmlns:a="http://schemas.openxmlformats.org/drawingml/2006/main">
+            <a:srgbClr val="E7EDE7"/>
+          </a:solidFill>
+          <a:ln xmlns:a="http://schemas.openxmlformats.org/drawingml/2006/main" w="19050">
+            <a:solidFill>
+              <a:srgbClr val="173D35"/>
+            </a:solidFill>
+          </a:ln>
+        </p:spPr>
+      </p:sp>
+      <p:sp>
+        <p:nvSpPr>
+          <p:cNvPr id="10" name="">
+            <a:extLst xmlns:a="http://schemas.openxmlformats.org/drawingml/2006/main">
+              <a:ext uri="{FF2B5EF4-FFF2-40B4-BE49-F238E27FC236}">
+                <a16:creationId xmlns:a16="http://schemas.microsoft.com/office/drawing/2014/main" id="{315428DA-232A-49EA-BC75-DD1F38CA06F8}"/>
+              </a:ext>
+            </a:extLst>
+          </p:cNvPr>
+          <p:cNvSpPr>
+            <a:spLocks xmlns:a="http://schemas.openxmlformats.org/drawingml/2006/main" noGrp="1"/>
+          </p:cNvSpPr>
+          <p:nvPr/>
+        </p:nvSpPr>
+        <p:spPr>
+          <a:xfrm xmlns:a="http://schemas.openxmlformats.org/drawingml/2006/main">
+            <a:off x="6410325" y="2695575"/>
+            <a:ext cx="2181225" cy="438150"/>
+          </a:xfrm>
+          <a:prstGeom xmlns:a="http://schemas.openxmlformats.org/drawingml/2006/main" prst="rect">
+            <a:avLst/>
+          </a:prstGeom>
+          <a:noFill xmlns:a="http://schemas.openxmlformats.org/drawingml/2006/main"/>
+          <a:ln xmlns:a="http://schemas.openxmlformats.org/drawingml/2006/main" w="0">
+            <a:noFill/>
+          </a:ln>
+        </p:spPr>
+        <p:txBody>
+          <a:bodyPr xmlns:a="http://schemas.openxmlformats.org/drawingml/2006/main">
+            <a:noAutofit/>
+          </a:bodyPr>
+          <a:lstStyle xmlns:a="http://schemas.openxmlformats.org/drawingml/2006/main"/>
+          <a:p xmlns:a="http://schemas.openxmlformats.org/drawingml/2006/main">
+            <a:pPr>
+              <a:defRPr sz="1875" b="1">
+                <a:solidFill>
+                  <a:srgbClr val="173D35"/>
+                </a:solidFill>
+                <a:latin typeface="DejaVu Sans"/>
+                <a:ea typeface="DejaVu Sans"/>
+                <a:cs typeface="DejaVu Sans"/>
+              </a:defRPr>
+            </a:pPr>
+            <a:r>
+              <a:rPr sz="1875" b="1">
+                <a:solidFill>
+                  <a:srgbClr val="173D35"/>
+                </a:solidFill>
+                <a:latin typeface="DejaVu Sans"/>
+                <a:ea typeface="DejaVu Sans"/>
+                <a:cs typeface="DejaVu Sans"/>
+              </a:rPr>
+              <a:t>Android</a:t>
+            </a:r>
+          </a:p>
+        </p:txBody>
+      </p:sp>
+      <p:sp>
+        <p:nvSpPr>
+          <p:cNvPr id="11" name="">
+            <a:extLst xmlns:a="http://schemas.openxmlformats.org/drawingml/2006/main">
+              <a:ext uri="{FF2B5EF4-FFF2-40B4-BE49-F238E27FC236}">
+                <a16:creationId xmlns:a16="http://schemas.microsoft.com/office/drawing/2014/main" id="{04D98F59-8A30-4A06-B844-831DA5264157}"/>
+              </a:ext>
+            </a:extLst>
+          </p:cNvPr>
+          <p:cNvSpPr>
+            <a:spLocks xmlns:a="http://schemas.openxmlformats.org/drawingml/2006/main" noGrp="1"/>
+          </p:cNvSpPr>
+          <p:nvPr/>
+        </p:nvSpPr>
+        <p:spPr>
+          <a:xfrm xmlns:a="http://schemas.openxmlformats.org/drawingml/2006/main">
+            <a:off x="6410325" y="3209925"/>
+            <a:ext cx="2181225" cy="657225"/>
+          </a:xfrm>
+          <a:prstGeom xmlns:a="http://schemas.openxmlformats.org/drawingml/2006/main" prst="rect">
+            <a:avLst/>
+          </a:prstGeom>
+          <a:noFill xmlns:a="http://schemas.openxmlformats.org/drawingml/2006/main"/>
+          <a:ln xmlns:a="http://schemas.openxmlformats.org/drawingml/2006/main" w="0">
+            <a:noFill/>
+          </a:ln>
+        </p:spPr>
+        <p:txBody>
+          <a:bodyPr xmlns:a="http://schemas.openxmlformats.org/drawingml/2006/main">
+            <a:noAutofit/>
+          </a:bodyPr>
+          <a:lstStyle xmlns:a="http://schemas.openxmlformats.org/drawingml/2006/main"/>
+          <a:p xmlns:a="http://schemas.openxmlformats.org/drawingml/2006/main">
+            <a:pPr>
+              <a:defRPr sz="1725" b="0">
+                <a:solidFill>
+                  <a:srgbClr val="142C32"/>
+                </a:solidFill>
+                <a:latin typeface="DejaVu Sans"/>
+                <a:ea typeface="DejaVu Sans"/>
+                <a:cs typeface="DejaVu Sans"/>
+              </a:defRPr>
+            </a:pPr>
+            <a:r>
+              <a:rPr sz="1725" b="0">
+                <a:solidFill>
+                  <a:srgbClr val="142C32"/>
+                </a:solidFill>
+                <a:latin typeface="DejaVu Sans"/>
+                <a:ea typeface="DejaVu Sans"/>
+                <a:cs typeface="DejaVu Sans"/>
+              </a:rPr>
+              <a:t>SIM del operador</a:t>
+            </a:r>
+          </a:p>
+        </p:txBody>
+      </p:sp>
+      <p:sp>
+        <p:nvSpPr>
+          <p:cNvPr id="12" name="">
+            <a:extLst xmlns:a="http://schemas.openxmlformats.org/drawingml/2006/main">
+              <a:ext uri="{FF2B5EF4-FFF2-40B4-BE49-F238E27FC236}">
+                <a16:creationId xmlns:a16="http://schemas.microsoft.com/office/drawing/2014/main" id="{784CB378-C8A2-4197-BB18-0BB082E71F4E}"/>
+              </a:ext>
+            </a:extLst>
+          </p:cNvPr>
+          <p:cNvSpPr>
+            <a:spLocks xmlns:a="http://schemas.openxmlformats.org/drawingml/2006/main" noGrp="1"/>
+          </p:cNvSpPr>
+          <p:nvPr/>
+        </p:nvSpPr>
+        <p:spPr>
+          <a:xfrm xmlns:a="http://schemas.openxmlformats.org/drawingml/2006/main">
+            <a:off x="9191625" y="2524125"/>
+            <a:ext cx="2333625" cy="1381125"/>
+          </a:xfrm>
+          <a:prstGeom xmlns:a="http://schemas.openxmlformats.org/drawingml/2006/main" prst="rect">
+            <a:avLst/>
+          </a:prstGeom>
+          <a:solidFill xmlns:a="http://schemas.openxmlformats.org/drawingml/2006/main">
+            <a:srgbClr val="E7EDE7"/>
+          </a:solidFill>
+          <a:ln xmlns:a="http://schemas.openxmlformats.org/drawingml/2006/main" w="19050">
+            <a:solidFill>
+              <a:srgbClr val="173D35"/>
+            </a:solidFill>
+          </a:ln>
+        </p:spPr>
+      </p:sp>
+      <p:sp>
+        <p:nvSpPr>
+          <p:cNvPr id="13" name="">
+            <a:extLst xmlns:a="http://schemas.openxmlformats.org/drawingml/2006/main">
+              <a:ext uri="{FF2B5EF4-FFF2-40B4-BE49-F238E27FC236}">
+                <a16:creationId xmlns:a16="http://schemas.microsoft.com/office/drawing/2014/main" id="{46825BED-38B9-46A4-AA9A-DC6D577FD499}"/>
+              </a:ext>
+            </a:extLst>
+          </p:cNvPr>
+          <p:cNvSpPr>
+            <a:spLocks xmlns:a="http://schemas.openxmlformats.org/drawingml/2006/main" noGrp="1"/>
+          </p:cNvSpPr>
+          <p:nvPr/>
+        </p:nvSpPr>
+        <p:spPr>
+          <a:xfrm xmlns:a="http://schemas.openxmlformats.org/drawingml/2006/main">
+            <a:off x="9267825" y="2695575"/>
+            <a:ext cx="2181225" cy="438150"/>
+          </a:xfrm>
+          <a:prstGeom xmlns:a="http://schemas.openxmlformats.org/drawingml/2006/main" prst="rect">
+            <a:avLst/>
+          </a:prstGeom>
+          <a:noFill xmlns:a="http://schemas.openxmlformats.org/drawingml/2006/main"/>
+          <a:ln xmlns:a="http://schemas.openxmlformats.org/drawingml/2006/main" w="0">
+            <a:noFill/>
+          </a:ln>
+        </p:spPr>
+        <p:txBody>
+          <a:bodyPr xmlns:a="http://schemas.openxmlformats.org/drawingml/2006/main">
+            <a:noAutofit/>
+          </a:bodyPr>
+          <a:lstStyle xmlns:a="http://schemas.openxmlformats.org/drawingml/2006/main"/>
+          <a:p xmlns:a="http://schemas.openxmlformats.org/drawingml/2006/main">
+            <a:pPr>
+              <a:defRPr sz="1875" b="1">
+                <a:solidFill>
+                  <a:srgbClr val="173D35"/>
+                </a:solidFill>
+                <a:latin typeface="DejaVu Sans"/>
+                <a:ea typeface="DejaVu Sans"/>
+                <a:cs typeface="DejaVu Sans"/>
+              </a:defRPr>
+            </a:pPr>
+            <a:r>
+              <a:rPr sz="1875" b="1">
+                <a:solidFill>
+                  <a:srgbClr val="173D35"/>
+                </a:solidFill>
+                <a:latin typeface="DejaVu Sans"/>
+                <a:ea typeface="DejaVu Sans"/>
+                <a:cs typeface="DejaVu Sans"/>
+              </a:rPr>
+              <a:t>Destinatario</a:t>
+            </a:r>
+          </a:p>
+        </p:txBody>
+      </p:sp>
+      <p:sp>
+        <p:nvSpPr>
+          <p:cNvPr id="14" name="">
+            <a:extLst xmlns:a="http://schemas.openxmlformats.org/drawingml/2006/main">
+              <a:ext uri="{FF2B5EF4-FFF2-40B4-BE49-F238E27FC236}">
+                <a16:creationId xmlns:a16="http://schemas.microsoft.com/office/drawing/2014/main" id="{7D32573A-BC58-4113-9AE5-2F13B139E3D7}"/>
+              </a:ext>
+            </a:extLst>
+          </p:cNvPr>
+          <p:cNvSpPr>
+            <a:spLocks xmlns:a="http://schemas.openxmlformats.org/drawingml/2006/main" noGrp="1"/>
+          </p:cNvSpPr>
+          <p:nvPr/>
+        </p:nvSpPr>
+        <p:spPr>
+          <a:xfrm xmlns:a="http://schemas.openxmlformats.org/drawingml/2006/main">
+            <a:off x="9267825" y="3209925"/>
+            <a:ext cx="2181225" cy="657225"/>
+          </a:xfrm>
+          <a:prstGeom xmlns:a="http://schemas.openxmlformats.org/drawingml/2006/main" prst="rect">
+            <a:avLst/>
+          </a:prstGeom>
+          <a:noFill xmlns:a="http://schemas.openxmlformats.org/drawingml/2006/main"/>
+          <a:ln xmlns:a="http://schemas.openxmlformats.org/drawingml/2006/main" w="0">
+            <a:noFill/>
+          </a:ln>
+        </p:spPr>
+        <p:txBody>
+          <a:bodyPr xmlns:a="http://schemas.openxmlformats.org/drawingml/2006/main">
+            <a:noAutofit/>
+          </a:bodyPr>
+          <a:lstStyle xmlns:a="http://schemas.openxmlformats.org/drawingml/2006/main"/>
+          <a:p xmlns:a="http://schemas.openxmlformats.org/drawingml/2006/main">
+            <a:pPr>
+              <a:defRPr sz="1725" b="0">
+                <a:solidFill>
+                  <a:srgbClr val="142C32"/>
+                </a:solidFill>
+                <a:latin typeface="DejaVu Sans"/>
+                <a:ea typeface="DejaVu Sans"/>
+                <a:cs typeface="DejaVu Sans"/>
+              </a:defRPr>
+            </a:pPr>
+            <a:r>
+              <a:rPr sz="1725" b="0">
+                <a:solidFill>
+                  <a:srgbClr val="142C32"/>
+                </a:solidFill>
+                <a:latin typeface="DejaVu Sans"/>
+                <a:ea typeface="DejaVu Sans"/>
+                <a:cs typeface="DejaVu Sans"/>
+              </a:rPr>
+              <a:t>iPhone u otro móvil</a:t>
+            </a:r>
+          </a:p>
+        </p:txBody>
+      </p:sp>
+      <p:cxnSp>
+        <p:nvCxnSpPr>
+          <p:cNvPr id="34" name=""/>
+          <p:cNvCxnSpPr>
+            <a:stCxn xmlns:a="http://schemas.openxmlformats.org/drawingml/2006/main" id="3" idx="3"/>
+            <a:endCxn xmlns:a="http://schemas.openxmlformats.org/drawingml/2006/main" id="6" idx="1"/>
+          </p:cNvCxnSpPr>
+          <p:nvPr/>
+        </p:nvCxnSpPr>
+        <p:spPr>
+          <a:xfrm xmlns:a="http://schemas.openxmlformats.org/drawingml/2006/main">
+            <a:off x="2952750" y="3214688"/>
+            <a:ext cx="523875" cy="0"/>
+          </a:xfrm>
+          <a:prstGeom xmlns:a="http://schemas.openxmlformats.org/drawingml/2006/main" prst="straightConnector1">
+            <a:avLst/>
+          </a:prstGeom>
+          <a:ln xmlns:a="http://schemas.openxmlformats.org/drawingml/2006/main" w="28575">
+            <a:solidFill>
+              <a:srgbClr val="D99A32"/>
+            </a:solidFill>
+            <a:tailEnd type="arrow" w="med" len="med"/>
+          </a:ln>
+        </p:spPr>
+      </p:cxnSp>
+      <p:cxnSp>
+        <p:nvCxnSpPr>
+          <p:cNvPr id="35" name=""/>
+          <p:cNvCxnSpPr>
+            <a:stCxn xmlns:a="http://schemas.openxmlformats.org/drawingml/2006/main" id="6" idx="3"/>
+            <a:endCxn xmlns:a="http://schemas.openxmlformats.org/drawingml/2006/main" id="9" idx="1"/>
+          </p:cNvCxnSpPr>
+          <p:nvPr/>
+        </p:nvCxnSpPr>
+        <p:spPr>
+          <a:xfrm xmlns:a="http://schemas.openxmlformats.org/drawingml/2006/main">
+            <a:off x="5810250" y="3214688"/>
+            <a:ext cx="523875" cy="0"/>
+          </a:xfrm>
+          <a:prstGeom xmlns:a="http://schemas.openxmlformats.org/drawingml/2006/main" prst="straightConnector1">
+            <a:avLst/>
+          </a:prstGeom>
+          <a:ln xmlns:a="http://schemas.openxmlformats.org/drawingml/2006/main" w="28575">
+            <a:solidFill>
+              <a:srgbClr val="D99A32"/>
+            </a:solidFill>
+            <a:tailEnd type="arrow" w="med" len="med"/>
+          </a:ln>
+        </p:spPr>
+      </p:cxnSp>
+      <p:cxnSp>
+        <p:nvCxnSpPr>
+          <p:cNvPr id="36" name=""/>
+          <p:cNvCxnSpPr>
+            <a:stCxn xmlns:a="http://schemas.openxmlformats.org/drawingml/2006/main" id="9" idx="3"/>
+            <a:endCxn xmlns:a="http://schemas.openxmlformats.org/drawingml/2006/main" id="12" idx="1"/>
+          </p:cNvCxnSpPr>
+          <p:nvPr/>
+        </p:nvCxnSpPr>
+        <p:spPr>
+          <a:xfrm xmlns:a="http://schemas.openxmlformats.org/drawingml/2006/main">
+            <a:off x="8667750" y="3214688"/>
+            <a:ext cx="523875" cy="0"/>
+          </a:xfrm>
+          <a:prstGeom xmlns:a="http://schemas.openxmlformats.org/drawingml/2006/main" prst="straightConnector1">
+            <a:avLst/>
+          </a:prstGeom>
+          <a:ln xmlns:a="http://schemas.openxmlformats.org/drawingml/2006/main" w="28575">
+            <a:solidFill>
+              <a:srgbClr val="D99A32"/>
+            </a:solidFill>
+            <a:tailEnd type="arrow" w="med" len="med"/>
+          </a:ln>
+        </p:spPr>
+      </p:cxnSp>
+      <p:sp>
+        <p:nvSpPr>
+          <p:cNvPr id="18" name="">
+            <a:extLst xmlns:a="http://schemas.openxmlformats.org/drawingml/2006/main">
+              <a:ext uri="{FF2B5EF4-FFF2-40B4-BE49-F238E27FC236}">
+                <a16:creationId xmlns:a16="http://schemas.microsoft.com/office/drawing/2014/main" id="{D808ABD1-883E-401C-9C92-EFFF18F19F33}"/>
+              </a:ext>
+            </a:extLst>
+          </p:cNvPr>
+          <p:cNvSpPr>
+            <a:spLocks xmlns:a="http://schemas.openxmlformats.org/drawingml/2006/main" noGrp="1"/>
+          </p:cNvSpPr>
+          <p:nvPr/>
+        </p:nvSpPr>
+        <p:spPr>
+          <a:xfrm xmlns:a="http://schemas.openxmlformats.org/drawingml/2006/main">
+            <a:off x="666750" y="4686300"/>
+            <a:ext cx="10668000" cy="619125"/>
+          </a:xfrm>
+          <a:prstGeom xmlns:a="http://schemas.openxmlformats.org/drawingml/2006/main" prst="rect">
+            <a:avLst/>
+          </a:prstGeom>
+          <a:noFill xmlns:a="http://schemas.openxmlformats.org/drawingml/2006/main"/>
+          <a:ln xmlns:a="http://schemas.openxmlformats.org/drawingml/2006/main" w="0">
+            <a:noFill/>
+          </a:ln>
+        </p:spPr>
+        <p:txBody>
+          <a:bodyPr xmlns:a="http://schemas.openxmlformats.org/drawingml/2006/main">
+            <a:noAutofit/>
+          </a:bodyPr>
+          <a:lstStyle xmlns:a="http://schemas.openxmlformats.org/drawingml/2006/main"/>
+          <a:p xmlns:a="http://schemas.openxmlformats.org/drawingml/2006/main">
+            <a:pPr>
+              <a:defRPr sz="2475" b="1">
+                <a:solidFill>
+                  <a:srgbClr val="173D35"/>
+                </a:solidFill>
+                <a:latin typeface="DejaVu Sans"/>
+                <a:ea typeface="DejaVu Sans"/>
+                <a:cs typeface="DejaVu Sans"/>
+              </a:defRPr>
+            </a:pPr>
+            <a:r>
+              <a:rPr sz="2475" b="1">
+                <a:solidFill>
+                  <a:srgbClr val="173D35"/>
+                </a:solidFill>
+                <a:latin typeface="DejaVu Sans"/>
+                <a:ea typeface="DejaVu Sans"/>
+                <a:cs typeface="DejaVu Sans"/>
+              </a:rPr>
+              <a:t>El iPhone puede recibir el mensaje y abrir el ticket</a:t>
+            </a:r>
+          </a:p>
+        </p:txBody>
+      </p:sp>
+      <p:sp>
+        <p:nvSpPr>
+          <p:cNvPr id="19" name="">
+            <a:extLst xmlns:a="http://schemas.openxmlformats.org/drawingml/2006/main">
+              <a:ext uri="{FF2B5EF4-FFF2-40B4-BE49-F238E27FC236}">
+                <a16:creationId xmlns:a16="http://schemas.microsoft.com/office/drawing/2014/main" id="{41D6B575-0591-4637-80AF-158E4C020B85}"/>
+              </a:ext>
+            </a:extLst>
+          </p:cNvPr>
+          <p:cNvSpPr>
+            <a:spLocks xmlns:a="http://schemas.openxmlformats.org/drawingml/2006/main" noGrp="1"/>
+          </p:cNvSpPr>
+          <p:nvPr/>
+        </p:nvSpPr>
+        <p:spPr>
+          <a:xfrm xmlns:a="http://schemas.openxmlformats.org/drawingml/2006/main">
+            <a:off x="666750" y="5638800"/>
+            <a:ext cx="10668000" cy="495300"/>
           </a:xfrm>
           <a:prstGeom xmlns:a="http://schemas.openxmlformats.org/drawingml/2006/main" prst="rect">
             <a:avLst/>
@@ -5430,7 +6658,7 @@
             <a:pPr>
               <a:defRPr sz="1950" b="0">
                 <a:solidFill>
-                  <a:srgbClr val="142C32"/>
+                  <a:srgbClr val="53666B"/>
                 </a:solidFill>
                 <a:latin typeface="DejaVu Sans"/>
                 <a:ea typeface="DejaVu Sans"/>
@@ -5440,355 +6668,13 @@
             <a:r>
               <a:rPr sz="1950" b="0">
                 <a:solidFill>
-                  <a:srgbClr val="142C32"/>
-                </a:solidFill>
-                <a:latin typeface="DejaVu Sans"/>
-                <a:ea typeface="DejaVu Sans"/>
-                <a:cs typeface="DejaVu Sans"/>
-              </a:rPr>
-              <a:t>Envía el texto y el destinatario a la API de Textbee.</a:t>
-            </a:r>
-          </a:p>
-        </p:txBody>
-      </p:sp>
-      <p:sp>
-        <p:nvSpPr>
-          <p:cNvPr id="5" name="">
-            <a:extLst xmlns:a="http://schemas.openxmlformats.org/drawingml/2006/main">
-              <a:ext uri="{FF2B5EF4-FFF2-40B4-BE49-F238E27FC236}">
-                <a16:creationId xmlns:a16="http://schemas.microsoft.com/office/drawing/2014/main" id="{1E149EC7-4153-444A-9384-084C369F9760}"/>
-              </a:ext>
-            </a:extLst>
-          </p:cNvPr>
-          <p:cNvSpPr>
-            <a:spLocks xmlns:a="http://schemas.openxmlformats.org/drawingml/2006/main" noGrp="1"/>
-          </p:cNvSpPr>
-          <p:nvPr/>
-        </p:nvSpPr>
-        <p:spPr>
-          <a:xfrm xmlns:a="http://schemas.openxmlformats.org/drawingml/2006/main">
-            <a:off x="666750" y="2895600"/>
-            <a:ext cx="3333750" cy="438150"/>
-          </a:xfrm>
-          <a:prstGeom xmlns:a="http://schemas.openxmlformats.org/drawingml/2006/main" prst="rect">
-            <a:avLst/>
-          </a:prstGeom>
-          <a:noFill xmlns:a="http://schemas.openxmlformats.org/drawingml/2006/main"/>
-          <a:ln xmlns:a="http://schemas.openxmlformats.org/drawingml/2006/main" w="0">
-            <a:noFill/>
-          </a:ln>
-        </p:spPr>
-        <p:txBody>
-          <a:bodyPr xmlns:a="http://schemas.openxmlformats.org/drawingml/2006/main">
-            <a:noAutofit/>
-          </a:bodyPr>
-          <a:lstStyle xmlns:a="http://schemas.openxmlformats.org/drawingml/2006/main"/>
-          <a:p xmlns:a="http://schemas.openxmlformats.org/drawingml/2006/main">
-            <a:pPr>
-              <a:defRPr sz="2175" b="1">
-                <a:solidFill>
-                  <a:srgbClr val="173D35"/>
-                </a:solidFill>
-                <a:latin typeface="DejaVu Sans"/>
-                <a:ea typeface="DejaVu Sans"/>
-                <a:cs typeface="DejaVu Sans"/>
-              </a:defRPr>
-            </a:pPr>
-            <a:r>
-              <a:rPr sz="2175" b="1">
-                <a:solidFill>
-                  <a:srgbClr val="173D35"/>
-                </a:solidFill>
-                <a:latin typeface="DejaVu Sans"/>
-                <a:ea typeface="DejaVu Sans"/>
-                <a:cs typeface="DejaVu Sans"/>
-              </a:rPr>
-              <a:t>Android vinculado</a:t>
-            </a:r>
-          </a:p>
-        </p:txBody>
-      </p:sp>
-      <p:sp>
-        <p:nvSpPr>
-          <p:cNvPr id="6" name="">
-            <a:extLst xmlns:a="http://schemas.openxmlformats.org/drawingml/2006/main">
-              <a:ext uri="{FF2B5EF4-FFF2-40B4-BE49-F238E27FC236}">
-                <a16:creationId xmlns:a16="http://schemas.microsoft.com/office/drawing/2014/main" id="{18C30442-541D-4947-8F6B-FB96AB3D0776}"/>
-              </a:ext>
-            </a:extLst>
-          </p:cNvPr>
-          <p:cNvSpPr>
-            <a:spLocks xmlns:a="http://schemas.openxmlformats.org/drawingml/2006/main" noGrp="1"/>
-          </p:cNvSpPr>
-          <p:nvPr/>
-        </p:nvSpPr>
-        <p:spPr>
-          <a:xfrm xmlns:a="http://schemas.openxmlformats.org/drawingml/2006/main">
-            <a:off x="4333875" y="2895600"/>
-            <a:ext cx="7048500" cy="838200"/>
-          </a:xfrm>
-          <a:prstGeom xmlns:a="http://schemas.openxmlformats.org/drawingml/2006/main" prst="rect">
-            <a:avLst/>
-          </a:prstGeom>
-          <a:noFill xmlns:a="http://schemas.openxmlformats.org/drawingml/2006/main"/>
-          <a:ln xmlns:a="http://schemas.openxmlformats.org/drawingml/2006/main" w="0">
-            <a:noFill/>
-          </a:ln>
-        </p:spPr>
-        <p:txBody>
-          <a:bodyPr xmlns:a="http://schemas.openxmlformats.org/drawingml/2006/main">
-            <a:noAutofit/>
-          </a:bodyPr>
-          <a:lstStyle xmlns:a="http://schemas.openxmlformats.org/drawingml/2006/main"/>
-          <a:p xmlns:a="http://schemas.openxmlformats.org/drawingml/2006/main">
-            <a:pPr>
-              <a:defRPr sz="1950" b="0">
-                <a:solidFill>
-                  <a:srgbClr val="142C32"/>
-                </a:solidFill>
-                <a:latin typeface="DejaVu Sans"/>
-                <a:ea typeface="DejaVu Sans"/>
-                <a:cs typeface="DejaVu Sans"/>
-              </a:defRPr>
-            </a:pPr>
-            <a:r>
-              <a:rPr sz="1950" b="0">
-                <a:solidFill>
-                  <a:srgbClr val="142C32"/>
-                </a:solidFill>
-                <a:latin typeface="DejaVu Sans"/>
-                <a:ea typeface="DejaVu Sans"/>
-                <a:cs typeface="DejaVu Sans"/>
-              </a:rPr>
-              <a:t>Usa su SIM y el plan del operador para enviar el SMS.</a:t>
-            </a:r>
-          </a:p>
-        </p:txBody>
-      </p:sp>
-      <p:sp>
-        <p:nvSpPr>
-          <p:cNvPr id="7" name="">
-            <a:extLst xmlns:a="http://schemas.openxmlformats.org/drawingml/2006/main">
-              <a:ext uri="{FF2B5EF4-FFF2-40B4-BE49-F238E27FC236}">
-                <a16:creationId xmlns:a16="http://schemas.microsoft.com/office/drawing/2014/main" id="{E9C19CC7-DDCC-4CAF-90A1-DFA68CEB900A}"/>
-              </a:ext>
-            </a:extLst>
-          </p:cNvPr>
-          <p:cNvSpPr>
-            <a:spLocks xmlns:a="http://schemas.openxmlformats.org/drawingml/2006/main" noGrp="1"/>
-          </p:cNvSpPr>
-          <p:nvPr/>
-        </p:nvSpPr>
-        <p:spPr>
-          <a:xfrm xmlns:a="http://schemas.openxmlformats.org/drawingml/2006/main">
-            <a:off x="666750" y="3981450"/>
-            <a:ext cx="3333750" cy="438150"/>
-          </a:xfrm>
-          <a:prstGeom xmlns:a="http://schemas.openxmlformats.org/drawingml/2006/main" prst="rect">
-            <a:avLst/>
-          </a:prstGeom>
-          <a:noFill xmlns:a="http://schemas.openxmlformats.org/drawingml/2006/main"/>
-          <a:ln xmlns:a="http://schemas.openxmlformats.org/drawingml/2006/main" w="0">
-            <a:noFill/>
-          </a:ln>
-        </p:spPr>
-        <p:txBody>
-          <a:bodyPr xmlns:a="http://schemas.openxmlformats.org/drawingml/2006/main">
-            <a:noAutofit/>
-          </a:bodyPr>
-          <a:lstStyle xmlns:a="http://schemas.openxmlformats.org/drawingml/2006/main"/>
-          <a:p xmlns:a="http://schemas.openxmlformats.org/drawingml/2006/main">
-            <a:pPr>
-              <a:defRPr sz="2175" b="1">
-                <a:solidFill>
-                  <a:srgbClr val="173D35"/>
-                </a:solidFill>
-                <a:latin typeface="DejaVu Sans"/>
-                <a:ea typeface="DejaVu Sans"/>
-                <a:cs typeface="DejaVu Sans"/>
-              </a:defRPr>
-            </a:pPr>
-            <a:r>
-              <a:rPr sz="2175" b="1">
-                <a:solidFill>
-                  <a:srgbClr val="173D35"/>
-                </a:solidFill>
-                <a:latin typeface="DejaVu Sans"/>
-                <a:ea typeface="DejaVu Sans"/>
-                <a:cs typeface="DejaVu Sans"/>
-              </a:rPr>
-              <a:t>Ticket</a:t>
-            </a:r>
-          </a:p>
-        </p:txBody>
-      </p:sp>
-      <p:sp>
-        <p:nvSpPr>
-          <p:cNvPr id="8" name="">
-            <a:extLst xmlns:a="http://schemas.openxmlformats.org/drawingml/2006/main">
-              <a:ext uri="{FF2B5EF4-FFF2-40B4-BE49-F238E27FC236}">
-                <a16:creationId xmlns:a16="http://schemas.microsoft.com/office/drawing/2014/main" id="{F59E8C4B-D532-4AFF-94E6-D972E3A4CF2B}"/>
-              </a:ext>
-            </a:extLst>
-          </p:cNvPr>
-          <p:cNvSpPr>
-            <a:spLocks xmlns:a="http://schemas.openxmlformats.org/drawingml/2006/main" noGrp="1"/>
-          </p:cNvSpPr>
-          <p:nvPr/>
-        </p:nvSpPr>
-        <p:spPr>
-          <a:xfrm xmlns:a="http://schemas.openxmlformats.org/drawingml/2006/main">
-            <a:off x="4333875" y="3981450"/>
-            <a:ext cx="7048500" cy="838200"/>
-          </a:xfrm>
-          <a:prstGeom xmlns:a="http://schemas.openxmlformats.org/drawingml/2006/main" prst="rect">
-            <a:avLst/>
-          </a:prstGeom>
-          <a:noFill xmlns:a="http://schemas.openxmlformats.org/drawingml/2006/main"/>
-          <a:ln xmlns:a="http://schemas.openxmlformats.org/drawingml/2006/main" w="0">
-            <a:noFill/>
-          </a:ln>
-        </p:spPr>
-        <p:txBody>
-          <a:bodyPr xmlns:a="http://schemas.openxmlformats.org/drawingml/2006/main">
-            <a:noAutofit/>
-          </a:bodyPr>
-          <a:lstStyle xmlns:a="http://schemas.openxmlformats.org/drawingml/2006/main"/>
-          <a:p xmlns:a="http://schemas.openxmlformats.org/drawingml/2006/main">
-            <a:pPr>
-              <a:defRPr sz="1950" b="0">
-                <a:solidFill>
-                  <a:srgbClr val="142C32"/>
-                </a:solidFill>
-                <a:latin typeface="DejaVu Sans"/>
-                <a:ea typeface="DejaVu Sans"/>
-                <a:cs typeface="DejaVu Sans"/>
-              </a:defRPr>
-            </a:pPr>
-            <a:r>
-              <a:rPr sz="1950" b="0">
-                <a:solidFill>
-                  <a:srgbClr val="142C32"/>
-                </a:solidFill>
-                <a:latin typeface="DejaVu Sans"/>
-                <a:ea typeface="DejaVu Sans"/>
-                <a:cs typeface="DejaVu Sans"/>
-              </a:rPr>
-              <a:t>El destinatario recibe un enlace HTTPS al PDF con QR.</a:t>
-            </a:r>
-          </a:p>
-        </p:txBody>
-      </p:sp>
-      <p:sp>
-        <p:nvSpPr>
-          <p:cNvPr id="9" name="">
-            <a:extLst xmlns:a="http://schemas.openxmlformats.org/drawingml/2006/main">
-              <a:ext uri="{FF2B5EF4-FFF2-40B4-BE49-F238E27FC236}">
-                <a16:creationId xmlns:a16="http://schemas.microsoft.com/office/drawing/2014/main" id="{FB2ABE70-E0C7-467C-B2EC-55135AF8456C}"/>
-              </a:ext>
-            </a:extLst>
-          </p:cNvPr>
-          <p:cNvSpPr>
-            <a:spLocks xmlns:a="http://schemas.openxmlformats.org/drawingml/2006/main" noGrp="1"/>
-          </p:cNvSpPr>
-          <p:nvPr/>
-        </p:nvSpPr>
-        <p:spPr>
-          <a:xfrm xmlns:a="http://schemas.openxmlformats.org/drawingml/2006/main">
-            <a:off x="666750" y="5067300"/>
-            <a:ext cx="3333750" cy="438150"/>
-          </a:xfrm>
-          <a:prstGeom xmlns:a="http://schemas.openxmlformats.org/drawingml/2006/main" prst="rect">
-            <a:avLst/>
-          </a:prstGeom>
-          <a:noFill xmlns:a="http://schemas.openxmlformats.org/drawingml/2006/main"/>
-          <a:ln xmlns:a="http://schemas.openxmlformats.org/drawingml/2006/main" w="0">
-            <a:noFill/>
-          </a:ln>
-        </p:spPr>
-        <p:txBody>
-          <a:bodyPr xmlns:a="http://schemas.openxmlformats.org/drawingml/2006/main">
-            <a:noAutofit/>
-          </a:bodyPr>
-          <a:lstStyle xmlns:a="http://schemas.openxmlformats.org/drawingml/2006/main"/>
-          <a:p xmlns:a="http://schemas.openxmlformats.org/drawingml/2006/main">
-            <a:pPr>
-              <a:defRPr sz="2175" b="1">
-                <a:solidFill>
-                  <a:srgbClr val="173D35"/>
-                </a:solidFill>
-                <a:latin typeface="DejaVu Sans"/>
-                <a:ea typeface="DejaVu Sans"/>
-                <a:cs typeface="DejaVu Sans"/>
-              </a:defRPr>
-            </a:pPr>
-            <a:r>
-              <a:rPr sz="2175" b="1">
-                <a:solidFill>
-                  <a:srgbClr val="173D35"/>
-                </a:solidFill>
-                <a:latin typeface="DejaVu Sans"/>
-                <a:ea typeface="DejaVu Sans"/>
-                <a:cs typeface="DejaVu Sans"/>
-              </a:rPr>
-              <a:t>Pendiente externo</a:t>
-            </a:r>
-          </a:p>
-        </p:txBody>
-      </p:sp>
-      <p:sp>
-        <p:nvSpPr>
-          <p:cNvPr id="10" name="">
-            <a:extLst xmlns:a="http://schemas.openxmlformats.org/drawingml/2006/main">
-              <a:ext uri="{FF2B5EF4-FFF2-40B4-BE49-F238E27FC236}">
-                <a16:creationId xmlns:a16="http://schemas.microsoft.com/office/drawing/2014/main" id="{1D57221E-2977-4182-92D3-C1558A8E6AA0}"/>
-              </a:ext>
-            </a:extLst>
-          </p:cNvPr>
-          <p:cNvSpPr>
-            <a:spLocks xmlns:a="http://schemas.openxmlformats.org/drawingml/2006/main" noGrp="1"/>
-          </p:cNvSpPr>
-          <p:nvPr/>
-        </p:nvSpPr>
-        <p:spPr>
-          <a:xfrm xmlns:a="http://schemas.openxmlformats.org/drawingml/2006/main">
-            <a:off x="4333875" y="5067300"/>
-            <a:ext cx="7048500" cy="838200"/>
-          </a:xfrm>
-          <a:prstGeom xmlns:a="http://schemas.openxmlformats.org/drawingml/2006/main" prst="rect">
-            <a:avLst/>
-          </a:prstGeom>
-          <a:noFill xmlns:a="http://schemas.openxmlformats.org/drawingml/2006/main"/>
-          <a:ln xmlns:a="http://schemas.openxmlformats.org/drawingml/2006/main" w="0">
-            <a:noFill/>
-          </a:ln>
-        </p:spPr>
-        <p:txBody>
-          <a:bodyPr xmlns:a="http://schemas.openxmlformats.org/drawingml/2006/main">
-            <a:noAutofit/>
-          </a:bodyPr>
-          <a:lstStyle xmlns:a="http://schemas.openxmlformats.org/drawingml/2006/main"/>
-          <a:p xmlns:a="http://schemas.openxmlformats.org/drawingml/2006/main">
-            <a:pPr>
-              <a:defRPr sz="1950" b="0">
-                <a:solidFill>
-                  <a:srgbClr val="142C32"/>
-                </a:solidFill>
-                <a:latin typeface="DejaVu Sans"/>
-                <a:ea typeface="DejaVu Sans"/>
-                <a:cs typeface="DejaVu Sans"/>
-              </a:defRPr>
-            </a:pPr>
-            <a:r>
-              <a:rPr sz="1950" b="0">
-                <a:solidFill>
-                  <a:srgbClr val="142C32"/>
-                </a:solidFill>
-                <a:latin typeface="DejaVu Sans"/>
-                <a:ea typeface="DejaVu Sans"/>
-                <a:cs typeface="DejaVu Sans"/>
-              </a:rPr>
-              <a:t>Vincular teléfono con SIM y confirmar una entrega real.</a:t>
+                  <a:srgbClr val="53666B"/>
+                </a:solidFill>
+                <a:latin typeface="DejaVu Sans"/>
+                <a:ea typeface="DejaVu Sans"/>
+                <a:cs typeface="DejaVu Sans"/>
+              </a:rPr>
+              <a:t>Pendiente: Android físico con SIM, cuenta y entrega real</a:t>
             </a:r>
           </a:p>
         </p:txBody>
@@ -5796,7 +6682,7 @@
     </p:spTree>
     <p:extLst>
       <p:ext uri="{BB962C8B-B14F-4D97-AF65-F5344CB8AC3E}">
-        <p14:creationId xmlns:p14="http://schemas.microsoft.com/office/powerpoint/2010/main" val="601492498"/>
+        <p14:creationId xmlns:p14="http://schemas.microsoft.com/office/powerpoint/2010/main" val="481132202"/>
       </p:ext>
     </p:extLst>
   </p:cSld>
@@ -5827,7 +6713,7 @@
           <p:cNvPr id="11" name="">
             <a:extLst xmlns:a="http://schemas.openxmlformats.org/drawingml/2006/main">
               <a:ext uri="{FF2B5EF4-FFF2-40B4-BE49-F238E27FC236}">
-                <a16:creationId xmlns:a16="http://schemas.microsoft.com/office/drawing/2014/main" id="{8B3FD365-C32D-4AC6-A0C6-E41A86963A0F}"/>
+                <a16:creationId xmlns:a16="http://schemas.microsoft.com/office/drawing/2014/main" id="{5EE98587-8577-478C-B21C-19D2CC5AB934}"/>
               </a:ext>
             </a:extLst>
           </p:cNvPr>
@@ -5884,7 +6770,7 @@
           <p:cNvPr id="2" name="">
             <a:extLst xmlns:a="http://schemas.openxmlformats.org/drawingml/2006/main">
               <a:ext uri="{FF2B5EF4-FFF2-40B4-BE49-F238E27FC236}">
-                <a16:creationId xmlns:a16="http://schemas.microsoft.com/office/drawing/2014/main" id="{08B918EC-5DD5-45FA-A2EB-C125513AB790}"/>
+                <a16:creationId xmlns:a16="http://schemas.microsoft.com/office/drawing/2014/main" id="{719C5161-B9F2-4BC2-B6EB-209515D6B25C}"/>
               </a:ext>
             </a:extLst>
           </p:cNvPr>
@@ -5941,7 +6827,7 @@
           <p:cNvPr id="3" name="">
             <a:extLst xmlns:a="http://schemas.openxmlformats.org/drawingml/2006/main">
               <a:ext uri="{FF2B5EF4-FFF2-40B4-BE49-F238E27FC236}">
-                <a16:creationId xmlns:a16="http://schemas.microsoft.com/office/drawing/2014/main" id="{A7753AE5-A289-4B9E-8549-67245408F944}"/>
+                <a16:creationId xmlns:a16="http://schemas.microsoft.com/office/drawing/2014/main" id="{0972378B-5F18-4F4A-B5EB-EE3010A5D45B}"/>
               </a:ext>
             </a:extLst>
           </p:cNvPr>
@@ -5998,7 +6884,7 @@
           <p:cNvPr id="4" name="">
             <a:extLst xmlns:a="http://schemas.openxmlformats.org/drawingml/2006/main">
               <a:ext uri="{FF2B5EF4-FFF2-40B4-BE49-F238E27FC236}">
-                <a16:creationId xmlns:a16="http://schemas.microsoft.com/office/drawing/2014/main" id="{56FD889E-2F46-4164-BB2A-A9369B92BB6D}"/>
+                <a16:creationId xmlns:a16="http://schemas.microsoft.com/office/drawing/2014/main" id="{B49C35F8-F725-4521-A5E2-E48C89D48E20}"/>
               </a:ext>
             </a:extLst>
           </p:cNvPr>
@@ -6055,7 +6941,7 @@
           <p:cNvPr id="5" name="">
             <a:extLst xmlns:a="http://schemas.openxmlformats.org/drawingml/2006/main">
               <a:ext uri="{FF2B5EF4-FFF2-40B4-BE49-F238E27FC236}">
-                <a16:creationId xmlns:a16="http://schemas.microsoft.com/office/drawing/2014/main" id="{8C1DFEEE-231B-41D6-B491-356EEF28390D}"/>
+                <a16:creationId xmlns:a16="http://schemas.microsoft.com/office/drawing/2014/main" id="{93A806A6-7B98-42BB-B529-416C7AAFBBA9}"/>
               </a:ext>
             </a:extLst>
           </p:cNvPr>
@@ -6112,7 +6998,7 @@
           <p:cNvPr id="6" name="">
             <a:extLst xmlns:a="http://schemas.openxmlformats.org/drawingml/2006/main">
               <a:ext uri="{FF2B5EF4-FFF2-40B4-BE49-F238E27FC236}">
-                <a16:creationId xmlns:a16="http://schemas.microsoft.com/office/drawing/2014/main" id="{FAC4ED0C-B2E0-47A3-B9F9-54112DC914AE}"/>
+                <a16:creationId xmlns:a16="http://schemas.microsoft.com/office/drawing/2014/main" id="{F37CF5F4-C8DB-4CEF-975C-957EA07CED40}"/>
               </a:ext>
             </a:extLst>
           </p:cNvPr>
@@ -6169,7 +7055,7 @@
           <p:cNvPr id="7" name="">
             <a:extLst xmlns:a="http://schemas.openxmlformats.org/drawingml/2006/main">
               <a:ext uri="{FF2B5EF4-FFF2-40B4-BE49-F238E27FC236}">
-                <a16:creationId xmlns:a16="http://schemas.microsoft.com/office/drawing/2014/main" id="{64A20057-A7BA-4600-92A4-156E56C720E7}"/>
+                <a16:creationId xmlns:a16="http://schemas.microsoft.com/office/drawing/2014/main" id="{EFE3406F-FFC5-4CD2-B89D-8776E2987061}"/>
               </a:ext>
             </a:extLst>
           </p:cNvPr>
@@ -6226,7 +7112,7 @@
           <p:cNvPr id="8" name="">
             <a:extLst xmlns:a="http://schemas.openxmlformats.org/drawingml/2006/main">
               <a:ext uri="{FF2B5EF4-FFF2-40B4-BE49-F238E27FC236}">
-                <a16:creationId xmlns:a16="http://schemas.microsoft.com/office/drawing/2014/main" id="{246B3BC2-F8CF-4850-B972-85294583F536}"/>
+                <a16:creationId xmlns:a16="http://schemas.microsoft.com/office/drawing/2014/main" id="{A9E87D75-263C-4170-8489-DD3AE0EE900C}"/>
               </a:ext>
             </a:extLst>
           </p:cNvPr>
@@ -6283,7 +7169,7 @@
           <p:cNvPr id="9" name="">
             <a:extLst xmlns:a="http://schemas.openxmlformats.org/drawingml/2006/main">
               <a:ext uri="{FF2B5EF4-FFF2-40B4-BE49-F238E27FC236}">
-                <a16:creationId xmlns:a16="http://schemas.microsoft.com/office/drawing/2014/main" id="{180A3568-48A5-4BEA-B55D-7B913C458560}"/>
+                <a16:creationId xmlns:a16="http://schemas.microsoft.com/office/drawing/2014/main" id="{15490553-F3A2-4D74-B8B7-E70C3A7E45DB}"/>
               </a:ext>
             </a:extLst>
           </p:cNvPr>
@@ -6340,7 +7226,7 @@
           <p:cNvPr id="10" name="">
             <a:extLst xmlns:a="http://schemas.openxmlformats.org/drawingml/2006/main">
               <a:ext uri="{FF2B5EF4-FFF2-40B4-BE49-F238E27FC236}">
-                <a16:creationId xmlns:a16="http://schemas.microsoft.com/office/drawing/2014/main" id="{AB7DC9CC-FAE8-4FE4-98DA-8819752D301B}"/>
+                <a16:creationId xmlns:a16="http://schemas.microsoft.com/office/drawing/2014/main" id="{1870A752-EE11-49AC-B84A-0CA759A4C64B}"/>
               </a:ext>
             </a:extLst>
           </p:cNvPr>
@@ -6395,7 +7281,7 @@
     </p:spTree>
     <p:extLst>
       <p:ext uri="{BB962C8B-B14F-4D97-AF65-F5344CB8AC3E}">
-        <p14:creationId xmlns:p14="http://schemas.microsoft.com/office/powerpoint/2010/main" val="1224943287"/>
+        <p14:creationId xmlns:p14="http://schemas.microsoft.com/office/powerpoint/2010/main" val="600672372"/>
       </p:ext>
     </p:extLst>
   </p:cSld>
@@ -6426,7 +7312,7 @@
           <p:cNvPr id="11" name="">
             <a:extLst xmlns:a="http://schemas.openxmlformats.org/drawingml/2006/main">
               <a:ext uri="{FF2B5EF4-FFF2-40B4-BE49-F238E27FC236}">
-                <a16:creationId xmlns:a16="http://schemas.microsoft.com/office/drawing/2014/main" id="{FF737CC5-2F73-4F49-B5BA-FA13FBCAE10C}"/>
+                <a16:creationId xmlns:a16="http://schemas.microsoft.com/office/drawing/2014/main" id="{41876C15-0580-4BE8-B95A-C275E7B3B60B}"/>
               </a:ext>
             </a:extLst>
           </p:cNvPr>
@@ -6483,7 +7369,7 @@
           <p:cNvPr id="2" name="">
             <a:extLst xmlns:a="http://schemas.openxmlformats.org/drawingml/2006/main">
               <a:ext uri="{FF2B5EF4-FFF2-40B4-BE49-F238E27FC236}">
-                <a16:creationId xmlns:a16="http://schemas.microsoft.com/office/drawing/2014/main" id="{D515A9A2-9F1A-48EE-BBBD-A602B9567FAD}"/>
+                <a16:creationId xmlns:a16="http://schemas.microsoft.com/office/drawing/2014/main" id="{EA73398E-10F4-4DC8-8AE3-363D6D6A6C12}"/>
               </a:ext>
             </a:extLst>
           </p:cNvPr>
@@ -6540,7 +7426,7 @@
           <p:cNvPr id="3" name="">
             <a:extLst xmlns:a="http://schemas.openxmlformats.org/drawingml/2006/main">
               <a:ext uri="{FF2B5EF4-FFF2-40B4-BE49-F238E27FC236}">
-                <a16:creationId xmlns:a16="http://schemas.microsoft.com/office/drawing/2014/main" id="{F816A61F-7DE6-43B3-98EA-58ECFDEEF71A}"/>
+                <a16:creationId xmlns:a16="http://schemas.microsoft.com/office/drawing/2014/main" id="{6E07585F-FC7D-43E0-87AC-96D43D98E657}"/>
               </a:ext>
             </a:extLst>
           </p:cNvPr>
@@ -6597,7 +7483,7 @@
           <p:cNvPr id="4" name="">
             <a:extLst xmlns:a="http://schemas.openxmlformats.org/drawingml/2006/main">
               <a:ext uri="{FF2B5EF4-FFF2-40B4-BE49-F238E27FC236}">
-                <a16:creationId xmlns:a16="http://schemas.microsoft.com/office/drawing/2014/main" id="{7BC933E8-BC12-4B36-883A-6C9A2FD880C1}"/>
+                <a16:creationId xmlns:a16="http://schemas.microsoft.com/office/drawing/2014/main" id="{D4B7E3FE-7BE5-47BB-BD19-65E38731E66D}"/>
               </a:ext>
             </a:extLst>
           </p:cNvPr>
@@ -6654,7 +7540,7 @@
           <p:cNvPr id="5" name="">
             <a:extLst xmlns:a="http://schemas.openxmlformats.org/drawingml/2006/main">
               <a:ext uri="{FF2B5EF4-FFF2-40B4-BE49-F238E27FC236}">
-                <a16:creationId xmlns:a16="http://schemas.microsoft.com/office/drawing/2014/main" id="{FA041943-4719-4E4B-A0CA-64EEFD849B51}"/>
+                <a16:creationId xmlns:a16="http://schemas.microsoft.com/office/drawing/2014/main" id="{77905AF2-C866-4A60-990F-668C894122A8}"/>
               </a:ext>
             </a:extLst>
           </p:cNvPr>
@@ -6711,7 +7597,7 @@
           <p:cNvPr id="6" name="">
             <a:extLst xmlns:a="http://schemas.openxmlformats.org/drawingml/2006/main">
               <a:ext uri="{FF2B5EF4-FFF2-40B4-BE49-F238E27FC236}">
-                <a16:creationId xmlns:a16="http://schemas.microsoft.com/office/drawing/2014/main" id="{2BC128F1-9535-471A-B49A-A8A5FD25E8C9}"/>
+                <a16:creationId xmlns:a16="http://schemas.microsoft.com/office/drawing/2014/main" id="{2EDF3474-1981-42B3-A4B9-88D6172E42E9}"/>
               </a:ext>
             </a:extLst>
           </p:cNvPr>
@@ -6768,7 +7654,7 @@
           <p:cNvPr id="7" name="">
             <a:extLst xmlns:a="http://schemas.openxmlformats.org/drawingml/2006/main">
               <a:ext uri="{FF2B5EF4-FFF2-40B4-BE49-F238E27FC236}">
-                <a16:creationId xmlns:a16="http://schemas.microsoft.com/office/drawing/2014/main" id="{806147C5-66AC-4A07-B3E3-AF3E0665AF3E}"/>
+                <a16:creationId xmlns:a16="http://schemas.microsoft.com/office/drawing/2014/main" id="{AED8D7C5-B0F9-4AD8-989B-8184237DC292}"/>
               </a:ext>
             </a:extLst>
           </p:cNvPr>
@@ -6825,7 +7711,7 @@
           <p:cNvPr id="8" name="">
             <a:extLst xmlns:a="http://schemas.openxmlformats.org/drawingml/2006/main">
               <a:ext uri="{FF2B5EF4-FFF2-40B4-BE49-F238E27FC236}">
-                <a16:creationId xmlns:a16="http://schemas.microsoft.com/office/drawing/2014/main" id="{BE84BA34-A56D-457F-8C1C-7806BD989F4F}"/>
+                <a16:creationId xmlns:a16="http://schemas.microsoft.com/office/drawing/2014/main" id="{6C59EDE0-D48D-42D9-BDCB-2B6BE2AE2857}"/>
               </a:ext>
             </a:extLst>
           </p:cNvPr>
@@ -6882,7 +7768,7 @@
           <p:cNvPr id="9" name="">
             <a:extLst xmlns:a="http://schemas.openxmlformats.org/drawingml/2006/main">
               <a:ext uri="{FF2B5EF4-FFF2-40B4-BE49-F238E27FC236}">
-                <a16:creationId xmlns:a16="http://schemas.microsoft.com/office/drawing/2014/main" id="{CDCE0BA1-2088-42F3-BA52-7F13B0A54722}"/>
+                <a16:creationId xmlns:a16="http://schemas.microsoft.com/office/drawing/2014/main" id="{FCF08B66-7706-4248-904A-3B9DE7BC1B38}"/>
               </a:ext>
             </a:extLst>
           </p:cNvPr>
@@ -6939,7 +7825,7 @@
           <p:cNvPr id="10" name="">
             <a:extLst xmlns:a="http://schemas.openxmlformats.org/drawingml/2006/main">
               <a:ext uri="{FF2B5EF4-FFF2-40B4-BE49-F238E27FC236}">
-                <a16:creationId xmlns:a16="http://schemas.microsoft.com/office/drawing/2014/main" id="{09E82472-D3FD-4208-8E6C-DF667005F83C}"/>
+                <a16:creationId xmlns:a16="http://schemas.microsoft.com/office/drawing/2014/main" id="{CBA7AC71-1192-49A7-9A77-FBFA1636B876}"/>
               </a:ext>
             </a:extLst>
           </p:cNvPr>
@@ -6994,7 +7880,7 @@
     </p:spTree>
     <p:extLst>
       <p:ext uri="{BB962C8B-B14F-4D97-AF65-F5344CB8AC3E}">
-        <p14:creationId xmlns:p14="http://schemas.microsoft.com/office/powerpoint/2010/main" val="1436859262"/>
+        <p14:creationId xmlns:p14="http://schemas.microsoft.com/office/powerpoint/2010/main" val="628294963"/>
       </p:ext>
     </p:extLst>
   </p:cSld>
@@ -7025,7 +7911,7 @@
           <p:cNvPr id="5" name="">
             <a:extLst xmlns:a="http://schemas.openxmlformats.org/drawingml/2006/main">
               <a:ext uri="{FF2B5EF4-FFF2-40B4-BE49-F238E27FC236}">
-                <a16:creationId xmlns:a16="http://schemas.microsoft.com/office/drawing/2014/main" id="{669D8B6A-1A14-4B18-8758-5D421943B7A0}"/>
+                <a16:creationId xmlns:a16="http://schemas.microsoft.com/office/drawing/2014/main" id="{0D122C25-32D8-44C9-B721-D32B7BA78832}"/>
               </a:ext>
             </a:extLst>
           </p:cNvPr>
@@ -7082,7 +7968,7 @@
           <p:cNvPr id="2" name="">
             <a:extLst xmlns:a="http://schemas.openxmlformats.org/drawingml/2006/main">
               <a:ext uri="{FF2B5EF4-FFF2-40B4-BE49-F238E27FC236}">
-                <a16:creationId xmlns:a16="http://schemas.microsoft.com/office/drawing/2014/main" id="{6D1DAD6A-CD56-411D-94D1-D83069CAE2AA}"/>
+                <a16:creationId xmlns:a16="http://schemas.microsoft.com/office/drawing/2014/main" id="{29D0C742-5A8C-46D7-9064-3000174B14A0}"/>
               </a:ext>
             </a:extLst>
           </p:cNvPr>
@@ -7139,7 +8025,7 @@
           <p:cNvPr id="3" name="">
             <a:extLst xmlns:a="http://schemas.openxmlformats.org/drawingml/2006/main">
               <a:ext uri="{FF2B5EF4-FFF2-40B4-BE49-F238E27FC236}">
-                <a16:creationId xmlns:a16="http://schemas.microsoft.com/office/drawing/2014/main" id="{0EBBF33C-3A38-45C6-822A-1EB5A8A4A2A6}"/>
+                <a16:creationId xmlns:a16="http://schemas.microsoft.com/office/drawing/2014/main" id="{2A20390D-0CC9-4F37-BE69-A7B54E880504}"/>
               </a:ext>
             </a:extLst>
           </p:cNvPr>
@@ -7219,7 +8105,7 @@
           <p:cNvPr id="4" name="">
             <a:extLst xmlns:a="http://schemas.openxmlformats.org/drawingml/2006/main">
               <a:ext uri="{FF2B5EF4-FFF2-40B4-BE49-F238E27FC236}">
-                <a16:creationId xmlns:a16="http://schemas.microsoft.com/office/drawing/2014/main" id="{DAD81AA9-410C-49AF-B7C1-704ADDC8E8CB}"/>
+                <a16:creationId xmlns:a16="http://schemas.microsoft.com/office/drawing/2014/main" id="{2BA5FAEE-D265-4156-A0B6-FF926280D3C3}"/>
               </a:ext>
             </a:extLst>
           </p:cNvPr>
@@ -7274,7 +8160,7 @@
     </p:spTree>
     <p:extLst>
       <p:ext uri="{BB962C8B-B14F-4D97-AF65-F5344CB8AC3E}">
-        <p14:creationId xmlns:p14="http://schemas.microsoft.com/office/powerpoint/2010/main" val="1598049159"/>
+        <p14:creationId xmlns:p14="http://schemas.microsoft.com/office/powerpoint/2010/main" val="7873805"/>
       </p:ext>
     </p:extLst>
   </p:cSld>
@@ -7305,7 +8191,7 @@
           <p:cNvPr id="11" name="">
             <a:extLst xmlns:a="http://schemas.openxmlformats.org/drawingml/2006/main">
               <a:ext uri="{FF2B5EF4-FFF2-40B4-BE49-F238E27FC236}">
-                <a16:creationId xmlns:a16="http://schemas.microsoft.com/office/drawing/2014/main" id="{02767D24-A3BF-4EA9-A676-2175ECC8002A}"/>
+                <a16:creationId xmlns:a16="http://schemas.microsoft.com/office/drawing/2014/main" id="{88BC30F8-EFC5-4740-A0D5-F58EF14FD266}"/>
               </a:ext>
             </a:extLst>
           </p:cNvPr>
@@ -7362,7 +8248,7 @@
           <p:cNvPr id="2" name="">
             <a:extLst xmlns:a="http://schemas.openxmlformats.org/drawingml/2006/main">
               <a:ext uri="{FF2B5EF4-FFF2-40B4-BE49-F238E27FC236}">
-                <a16:creationId xmlns:a16="http://schemas.microsoft.com/office/drawing/2014/main" id="{346FEEE9-3369-4972-9C06-0553F3F300D5}"/>
+                <a16:creationId xmlns:a16="http://schemas.microsoft.com/office/drawing/2014/main" id="{53B5B214-F7B9-4DD3-8426-561A9FCD3E13}"/>
               </a:ext>
             </a:extLst>
           </p:cNvPr>
@@ -7419,7 +8305,7 @@
           <p:cNvPr id="3" name="">
             <a:extLst xmlns:a="http://schemas.openxmlformats.org/drawingml/2006/main">
               <a:ext uri="{FF2B5EF4-FFF2-40B4-BE49-F238E27FC236}">
-                <a16:creationId xmlns:a16="http://schemas.microsoft.com/office/drawing/2014/main" id="{A6F254F4-5F5E-48EA-9CDD-52E29FDA205E}"/>
+                <a16:creationId xmlns:a16="http://schemas.microsoft.com/office/drawing/2014/main" id="{782FE156-4D6E-4AD2-BE1A-FDBA18F3885E}"/>
               </a:ext>
             </a:extLst>
           </p:cNvPr>
@@ -7476,7 +8362,7 @@
           <p:cNvPr id="4" name="">
             <a:extLst xmlns:a="http://schemas.openxmlformats.org/drawingml/2006/main">
               <a:ext uri="{FF2B5EF4-FFF2-40B4-BE49-F238E27FC236}">
-                <a16:creationId xmlns:a16="http://schemas.microsoft.com/office/drawing/2014/main" id="{F08D645F-C94E-4A87-8947-DA4D954FAC30}"/>
+                <a16:creationId xmlns:a16="http://schemas.microsoft.com/office/drawing/2014/main" id="{61DB19C8-9A9D-4331-AD36-D3670714451A}"/>
               </a:ext>
             </a:extLst>
           </p:cNvPr>
@@ -7533,7 +8419,7 @@
           <p:cNvPr id="5" name="">
             <a:extLst xmlns:a="http://schemas.openxmlformats.org/drawingml/2006/main">
               <a:ext uri="{FF2B5EF4-FFF2-40B4-BE49-F238E27FC236}">
-                <a16:creationId xmlns:a16="http://schemas.microsoft.com/office/drawing/2014/main" id="{BF3B924A-2211-4202-AA07-BF816A15F68A}"/>
+                <a16:creationId xmlns:a16="http://schemas.microsoft.com/office/drawing/2014/main" id="{E7675735-AD5B-4F07-9C35-873FC821C811}"/>
               </a:ext>
             </a:extLst>
           </p:cNvPr>
@@ -7590,7 +8476,7 @@
           <p:cNvPr id="6" name="">
             <a:extLst xmlns:a="http://schemas.openxmlformats.org/drawingml/2006/main">
               <a:ext uri="{FF2B5EF4-FFF2-40B4-BE49-F238E27FC236}">
-                <a16:creationId xmlns:a16="http://schemas.microsoft.com/office/drawing/2014/main" id="{BA5B71EE-0DC6-4A28-962B-4ED8B6A00A61}"/>
+                <a16:creationId xmlns:a16="http://schemas.microsoft.com/office/drawing/2014/main" id="{67642F6B-1873-40FB-B934-055DE2A4E13F}"/>
               </a:ext>
             </a:extLst>
           </p:cNvPr>
@@ -7647,7 +8533,7 @@
           <p:cNvPr id="7" name="">
             <a:extLst xmlns:a="http://schemas.openxmlformats.org/drawingml/2006/main">
               <a:ext uri="{FF2B5EF4-FFF2-40B4-BE49-F238E27FC236}">
-                <a16:creationId xmlns:a16="http://schemas.microsoft.com/office/drawing/2014/main" id="{CB1590B6-241F-4594-9B27-483D93D0E187}"/>
+                <a16:creationId xmlns:a16="http://schemas.microsoft.com/office/drawing/2014/main" id="{1946CC20-6AD6-4330-967E-E4340468B94F}"/>
               </a:ext>
             </a:extLst>
           </p:cNvPr>
@@ -7704,7 +8590,7 @@
           <p:cNvPr id="8" name="">
             <a:extLst xmlns:a="http://schemas.openxmlformats.org/drawingml/2006/main">
               <a:ext uri="{FF2B5EF4-FFF2-40B4-BE49-F238E27FC236}">
-                <a16:creationId xmlns:a16="http://schemas.microsoft.com/office/drawing/2014/main" id="{B679F0FE-0C69-4AC8-9C5D-7B2F55F0171E}"/>
+                <a16:creationId xmlns:a16="http://schemas.microsoft.com/office/drawing/2014/main" id="{6835F0D9-5D62-4E4E-92E6-EF8173D50669}"/>
               </a:ext>
             </a:extLst>
           </p:cNvPr>
@@ -7761,7 +8647,7 @@
           <p:cNvPr id="9" name="">
             <a:extLst xmlns:a="http://schemas.openxmlformats.org/drawingml/2006/main">
               <a:ext uri="{FF2B5EF4-FFF2-40B4-BE49-F238E27FC236}">
-                <a16:creationId xmlns:a16="http://schemas.microsoft.com/office/drawing/2014/main" id="{ED2703EE-7DA5-4003-8BDA-18CEEFD1107F}"/>
+                <a16:creationId xmlns:a16="http://schemas.microsoft.com/office/drawing/2014/main" id="{AD0638DD-9127-43AA-8C67-936CEB211EB6}"/>
               </a:ext>
             </a:extLst>
           </p:cNvPr>
@@ -7818,7 +8704,7 @@
           <p:cNvPr id="10" name="">
             <a:extLst xmlns:a="http://schemas.openxmlformats.org/drawingml/2006/main">
               <a:ext uri="{FF2B5EF4-FFF2-40B4-BE49-F238E27FC236}">
-                <a16:creationId xmlns:a16="http://schemas.microsoft.com/office/drawing/2014/main" id="{65369420-5EFC-4B04-81A7-00C97B3B0B86}"/>
+                <a16:creationId xmlns:a16="http://schemas.microsoft.com/office/drawing/2014/main" id="{CD6601C6-2D2E-4ACA-B231-85FDDA268917}"/>
               </a:ext>
             </a:extLst>
           </p:cNvPr>
@@ -7873,7 +8759,7 @@
     </p:spTree>
     <p:extLst>
       <p:ext uri="{BB962C8B-B14F-4D97-AF65-F5344CB8AC3E}">
-        <p14:creationId xmlns:p14="http://schemas.microsoft.com/office/powerpoint/2010/main" val="1199899523"/>
+        <p14:creationId xmlns:p14="http://schemas.microsoft.com/office/powerpoint/2010/main" val="2073064217"/>
       </p:ext>
     </p:extLst>
   </p:cSld>
@@ -7901,10 +8787,10 @@
       </p:grpSpPr>
       <p:sp>
         <p:nvSpPr>
-          <p:cNvPr id="11" name="">
-            <a:extLst xmlns:a="http://schemas.openxmlformats.org/drawingml/2006/main">
-              <a:ext uri="{FF2B5EF4-FFF2-40B4-BE49-F238E27FC236}">
-                <a16:creationId xmlns:a16="http://schemas.microsoft.com/office/drawing/2014/main" id="{232AC872-F7F8-4E4E-9473-FB54BAEAFC3E}"/>
+          <p:cNvPr id="23" name="">
+            <a:extLst xmlns:a="http://schemas.openxmlformats.org/drawingml/2006/main">
+              <a:ext uri="{FF2B5EF4-FFF2-40B4-BE49-F238E27FC236}">
+                <a16:creationId xmlns:a16="http://schemas.microsoft.com/office/drawing/2014/main" id="{6C02D3CF-1937-43E7-A3D2-6AD2D8D103C6}"/>
               </a:ext>
             </a:extLst>
           </p:cNvPr>
@@ -7961,7 +8847,7 @@
           <p:cNvPr id="2" name="">
             <a:extLst xmlns:a="http://schemas.openxmlformats.org/drawingml/2006/main">
               <a:ext uri="{FF2B5EF4-FFF2-40B4-BE49-F238E27FC236}">
-                <a16:creationId xmlns:a16="http://schemas.microsoft.com/office/drawing/2014/main" id="{DDFCD942-D487-4BDF-AA99-FD788428820D}"/>
+                <a16:creationId xmlns:a16="http://schemas.microsoft.com/office/drawing/2014/main" id="{998916EC-4DF0-4A27-B3D1-9FE8937A774F}"/>
               </a:ext>
             </a:extLst>
           </p:cNvPr>
@@ -8018,36 +8904,68 @@
           <p:cNvPr id="3" name="">
             <a:extLst xmlns:a="http://schemas.openxmlformats.org/drawingml/2006/main">
               <a:ext uri="{FF2B5EF4-FFF2-40B4-BE49-F238E27FC236}">
-                <a16:creationId xmlns:a16="http://schemas.microsoft.com/office/drawing/2014/main" id="{0EC6828C-E96B-4508-97F2-67BF48979A97}"/>
-              </a:ext>
-            </a:extLst>
-          </p:cNvPr>
-          <p:cNvSpPr>
-            <a:spLocks xmlns:a="http://schemas.openxmlformats.org/drawingml/2006/main" noGrp="1"/>
-          </p:cNvSpPr>
-          <p:nvPr/>
-        </p:nvSpPr>
-        <p:spPr>
-          <a:xfrm xmlns:a="http://schemas.openxmlformats.org/drawingml/2006/main">
-            <a:off x="666750" y="1809750"/>
-            <a:ext cx="3333750" cy="438150"/>
-          </a:xfrm>
-          <a:prstGeom xmlns:a="http://schemas.openxmlformats.org/drawingml/2006/main" prst="rect">
-            <a:avLst/>
-          </a:prstGeom>
-          <a:noFill xmlns:a="http://schemas.openxmlformats.org/drawingml/2006/main"/>
-          <a:ln xmlns:a="http://schemas.openxmlformats.org/drawingml/2006/main" w="0">
-            <a:noFill/>
-          </a:ln>
-        </p:spPr>
-        <p:txBody>
-          <a:bodyPr xmlns:a="http://schemas.openxmlformats.org/drawingml/2006/main">
-            <a:noAutofit/>
-          </a:bodyPr>
-          <a:lstStyle xmlns:a="http://schemas.openxmlformats.org/drawingml/2006/main"/>
-          <a:p xmlns:a="http://schemas.openxmlformats.org/drawingml/2006/main">
-            <a:pPr>
-              <a:defRPr sz="2175" b="1">
+                <a16:creationId xmlns:a16="http://schemas.microsoft.com/office/drawing/2014/main" id="{FD1C24B5-6673-4007-8DA8-BC17C0935FED}"/>
+              </a:ext>
+            </a:extLst>
+          </p:cNvPr>
+          <p:cNvSpPr>
+            <a:spLocks xmlns:a="http://schemas.openxmlformats.org/drawingml/2006/main" noGrp="1"/>
+          </p:cNvSpPr>
+          <p:nvPr/>
+        </p:nvSpPr>
+        <p:spPr>
+          <a:xfrm xmlns:a="http://schemas.openxmlformats.org/drawingml/2006/main">
+            <a:off x="619125" y="1762125"/>
+            <a:ext cx="2857500" cy="1476375"/>
+          </a:xfrm>
+          <a:prstGeom xmlns:a="http://schemas.openxmlformats.org/drawingml/2006/main" prst="rect">
+            <a:avLst/>
+          </a:prstGeom>
+          <a:solidFill xmlns:a="http://schemas.openxmlformats.org/drawingml/2006/main">
+            <a:srgbClr val="E7EDE7"/>
+          </a:solidFill>
+          <a:ln xmlns:a="http://schemas.openxmlformats.org/drawingml/2006/main" w="19050">
+            <a:solidFill>
+              <a:srgbClr val="173D35"/>
+            </a:solidFill>
+          </a:ln>
+        </p:spPr>
+      </p:sp>
+      <p:sp>
+        <p:nvSpPr>
+          <p:cNvPr id="4" name="">
+            <a:extLst xmlns:a="http://schemas.openxmlformats.org/drawingml/2006/main">
+              <a:ext uri="{FF2B5EF4-FFF2-40B4-BE49-F238E27FC236}">
+                <a16:creationId xmlns:a16="http://schemas.microsoft.com/office/drawing/2014/main" id="{5DDE04FB-0EDE-4CF3-9814-8DB467134250}"/>
+              </a:ext>
+            </a:extLst>
+          </p:cNvPr>
+          <p:cNvSpPr>
+            <a:spLocks xmlns:a="http://schemas.openxmlformats.org/drawingml/2006/main" noGrp="1"/>
+          </p:cNvSpPr>
+          <p:nvPr/>
+        </p:nvSpPr>
+        <p:spPr>
+          <a:xfrm xmlns:a="http://schemas.openxmlformats.org/drawingml/2006/main">
+            <a:off x="695325" y="1933575"/>
+            <a:ext cx="2705100" cy="438150"/>
+          </a:xfrm>
+          <a:prstGeom xmlns:a="http://schemas.openxmlformats.org/drawingml/2006/main" prst="rect">
+            <a:avLst/>
+          </a:prstGeom>
+          <a:noFill xmlns:a="http://schemas.openxmlformats.org/drawingml/2006/main"/>
+          <a:ln xmlns:a="http://schemas.openxmlformats.org/drawingml/2006/main" w="0">
+            <a:noFill/>
+          </a:ln>
+        </p:spPr>
+        <p:txBody>
+          <a:bodyPr xmlns:a="http://schemas.openxmlformats.org/drawingml/2006/main">
+            <a:noAutofit/>
+          </a:bodyPr>
+          <a:lstStyle xmlns:a="http://schemas.openxmlformats.org/drawingml/2006/main"/>
+          <a:p xmlns:a="http://schemas.openxmlformats.org/drawingml/2006/main">
+            <a:pPr>
+              <a:defRPr sz="2100" b="1">
                 <a:solidFill>
                   <a:srgbClr val="173D35"/>
                 </a:solidFill>
@@ -8057,7 +8975,7 @@
               </a:defRPr>
             </a:pPr>
             <a:r>
-              <a:rPr sz="2175" b="1">
+              <a:rPr sz="2100" b="1">
                 <a:solidFill>
                   <a:srgbClr val="173D35"/>
                 </a:solidFill>
@@ -8065,29 +8983,778 @@
                 <a:ea typeface="DejaVu Sans"/>
                 <a:cs typeface="DejaVu Sans"/>
               </a:rPr>
-              <a:t>Plataforma web</a:t>
-            </a:r>
-          </a:p>
-        </p:txBody>
-      </p:sp>
-      <p:sp>
-        <p:nvSpPr>
-          <p:cNvPr id="4" name="">
-            <a:extLst xmlns:a="http://schemas.openxmlformats.org/drawingml/2006/main">
-              <a:ext uri="{FF2B5EF4-FFF2-40B4-BE49-F238E27FC236}">
-                <a16:creationId xmlns:a16="http://schemas.microsoft.com/office/drawing/2014/main" id="{1C3FB2D0-3245-4D2E-81FB-6705505A7D0A}"/>
-              </a:ext>
-            </a:extLst>
-          </p:cNvPr>
-          <p:cNvSpPr>
-            <a:spLocks xmlns:a="http://schemas.openxmlformats.org/drawingml/2006/main" noGrp="1"/>
-          </p:cNvSpPr>
-          <p:nvPr/>
-        </p:nvSpPr>
-        <p:spPr>
-          <a:xfrm xmlns:a="http://schemas.openxmlformats.org/drawingml/2006/main">
-            <a:off x="4333875" y="1809750"/>
-            <a:ext cx="7048500" cy="838200"/>
+              <a:t>Web / PWA</a:t>
+            </a:r>
+          </a:p>
+        </p:txBody>
+      </p:sp>
+      <p:sp>
+        <p:nvSpPr>
+          <p:cNvPr id="5" name="">
+            <a:extLst xmlns:a="http://schemas.openxmlformats.org/drawingml/2006/main">
+              <a:ext uri="{FF2B5EF4-FFF2-40B4-BE49-F238E27FC236}">
+                <a16:creationId xmlns:a16="http://schemas.microsoft.com/office/drawing/2014/main" id="{D3536402-BE83-46AC-8DA1-26D9BE7390E6}"/>
+              </a:ext>
+            </a:extLst>
+          </p:cNvPr>
+          <p:cNvSpPr>
+            <a:spLocks xmlns:a="http://schemas.openxmlformats.org/drawingml/2006/main" noGrp="1"/>
+          </p:cNvSpPr>
+          <p:nvPr/>
+        </p:nvSpPr>
+        <p:spPr>
+          <a:xfrm xmlns:a="http://schemas.openxmlformats.org/drawingml/2006/main">
+            <a:off x="695325" y="2447925"/>
+            <a:ext cx="2705100" cy="752475"/>
+          </a:xfrm>
+          <a:prstGeom xmlns:a="http://schemas.openxmlformats.org/drawingml/2006/main" prst="rect">
+            <a:avLst/>
+          </a:prstGeom>
+          <a:noFill xmlns:a="http://schemas.openxmlformats.org/drawingml/2006/main"/>
+          <a:ln xmlns:a="http://schemas.openxmlformats.org/drawingml/2006/main" w="0">
+            <a:noFill/>
+          </a:ln>
+        </p:spPr>
+        <p:txBody>
+          <a:bodyPr xmlns:a="http://schemas.openxmlformats.org/drawingml/2006/main">
+            <a:noAutofit/>
+          </a:bodyPr>
+          <a:lstStyle xmlns:a="http://schemas.openxmlformats.org/drawingml/2006/main"/>
+          <a:p xmlns:a="http://schemas.openxmlformats.org/drawingml/2006/main">
+            <a:pPr>
+              <a:defRPr sz="1725" b="0">
+                <a:solidFill>
+                  <a:srgbClr val="142C32"/>
+                </a:solidFill>
+                <a:latin typeface="DejaVu Sans"/>
+                <a:ea typeface="DejaVu Sans"/>
+                <a:cs typeface="DejaVu Sans"/>
+              </a:defRPr>
+            </a:pPr>
+            <a:r>
+              <a:rPr sz="1725" b="0">
+                <a:solidFill>
+                  <a:srgbClr val="142C32"/>
+                </a:solidFill>
+                <a:latin typeface="DejaVu Sans"/>
+                <a:ea typeface="DejaVu Sans"/>
+                <a:cs typeface="DejaVu Sans"/>
+              </a:rPr>
+              <a:t>Administración y reportes</a:t>
+            </a:r>
+          </a:p>
+        </p:txBody>
+      </p:sp>
+      <p:sp>
+        <p:nvSpPr>
+          <p:cNvPr id="6" name="">
+            <a:extLst xmlns:a="http://schemas.openxmlformats.org/drawingml/2006/main">
+              <a:ext uri="{FF2B5EF4-FFF2-40B4-BE49-F238E27FC236}">
+                <a16:creationId xmlns:a16="http://schemas.microsoft.com/office/drawing/2014/main" id="{9FCC1001-DBE0-4FB7-A50E-7ED01DD01465}"/>
+              </a:ext>
+            </a:extLst>
+          </p:cNvPr>
+          <p:cNvSpPr>
+            <a:spLocks xmlns:a="http://schemas.openxmlformats.org/drawingml/2006/main" noGrp="1"/>
+          </p:cNvSpPr>
+          <p:nvPr/>
+        </p:nvSpPr>
+        <p:spPr>
+          <a:xfrm xmlns:a="http://schemas.openxmlformats.org/drawingml/2006/main">
+            <a:off x="619125" y="3952875"/>
+            <a:ext cx="2857500" cy="1476375"/>
+          </a:xfrm>
+          <a:prstGeom xmlns:a="http://schemas.openxmlformats.org/drawingml/2006/main" prst="rect">
+            <a:avLst/>
+          </a:prstGeom>
+          <a:solidFill xmlns:a="http://schemas.openxmlformats.org/drawingml/2006/main">
+            <a:srgbClr val="E7EDE7"/>
+          </a:solidFill>
+          <a:ln xmlns:a="http://schemas.openxmlformats.org/drawingml/2006/main" w="19050">
+            <a:solidFill>
+              <a:srgbClr val="173D35"/>
+            </a:solidFill>
+          </a:ln>
+        </p:spPr>
+      </p:sp>
+      <p:sp>
+        <p:nvSpPr>
+          <p:cNvPr id="7" name="">
+            <a:extLst xmlns:a="http://schemas.openxmlformats.org/drawingml/2006/main">
+              <a:ext uri="{FF2B5EF4-FFF2-40B4-BE49-F238E27FC236}">
+                <a16:creationId xmlns:a16="http://schemas.microsoft.com/office/drawing/2014/main" id="{5F4FF395-FC21-4BFC-B228-AD8E884CEA7F}"/>
+              </a:ext>
+            </a:extLst>
+          </p:cNvPr>
+          <p:cNvSpPr>
+            <a:spLocks xmlns:a="http://schemas.openxmlformats.org/drawingml/2006/main" noGrp="1"/>
+          </p:cNvSpPr>
+          <p:nvPr/>
+        </p:nvSpPr>
+        <p:spPr>
+          <a:xfrm xmlns:a="http://schemas.openxmlformats.org/drawingml/2006/main">
+            <a:off x="695325" y="4124325"/>
+            <a:ext cx="2705100" cy="438150"/>
+          </a:xfrm>
+          <a:prstGeom xmlns:a="http://schemas.openxmlformats.org/drawingml/2006/main" prst="rect">
+            <a:avLst/>
+          </a:prstGeom>
+          <a:noFill xmlns:a="http://schemas.openxmlformats.org/drawingml/2006/main"/>
+          <a:ln xmlns:a="http://schemas.openxmlformats.org/drawingml/2006/main" w="0">
+            <a:noFill/>
+          </a:ln>
+        </p:spPr>
+        <p:txBody>
+          <a:bodyPr xmlns:a="http://schemas.openxmlformats.org/drawingml/2006/main">
+            <a:noAutofit/>
+          </a:bodyPr>
+          <a:lstStyle xmlns:a="http://schemas.openxmlformats.org/drawingml/2006/main"/>
+          <a:p xmlns:a="http://schemas.openxmlformats.org/drawingml/2006/main">
+            <a:pPr>
+              <a:defRPr sz="2100" b="1">
+                <a:solidFill>
+                  <a:srgbClr val="173D35"/>
+                </a:solidFill>
+                <a:latin typeface="DejaVu Sans"/>
+                <a:ea typeface="DejaVu Sans"/>
+                <a:cs typeface="DejaVu Sans"/>
+              </a:defRPr>
+            </a:pPr>
+            <a:r>
+              <a:rPr sz="2100" b="1">
+                <a:solidFill>
+                  <a:srgbClr val="173D35"/>
+                </a:solidFill>
+                <a:latin typeface="DejaVu Sans"/>
+                <a:ea typeface="DejaVu Sans"/>
+                <a:cs typeface="DejaVu Sans"/>
+              </a:rPr>
+              <a:t>Android</a:t>
+            </a:r>
+          </a:p>
+        </p:txBody>
+      </p:sp>
+      <p:sp>
+        <p:nvSpPr>
+          <p:cNvPr id="8" name="">
+            <a:extLst xmlns:a="http://schemas.openxmlformats.org/drawingml/2006/main">
+              <a:ext uri="{FF2B5EF4-FFF2-40B4-BE49-F238E27FC236}">
+                <a16:creationId xmlns:a16="http://schemas.microsoft.com/office/drawing/2014/main" id="{81D1C802-9AA3-4F18-9EFE-8F20D84C3155}"/>
+              </a:ext>
+            </a:extLst>
+          </p:cNvPr>
+          <p:cNvSpPr>
+            <a:spLocks xmlns:a="http://schemas.openxmlformats.org/drawingml/2006/main" noGrp="1"/>
+          </p:cNvSpPr>
+          <p:nvPr/>
+        </p:nvSpPr>
+        <p:spPr>
+          <a:xfrm xmlns:a="http://schemas.openxmlformats.org/drawingml/2006/main">
+            <a:off x="695325" y="4638675"/>
+            <a:ext cx="2705100" cy="752475"/>
+          </a:xfrm>
+          <a:prstGeom xmlns:a="http://schemas.openxmlformats.org/drawingml/2006/main" prst="rect">
+            <a:avLst/>
+          </a:prstGeom>
+          <a:noFill xmlns:a="http://schemas.openxmlformats.org/drawingml/2006/main"/>
+          <a:ln xmlns:a="http://schemas.openxmlformats.org/drawingml/2006/main" w="0">
+            <a:noFill/>
+          </a:ln>
+        </p:spPr>
+        <p:txBody>
+          <a:bodyPr xmlns:a="http://schemas.openxmlformats.org/drawingml/2006/main">
+            <a:noAutofit/>
+          </a:bodyPr>
+          <a:lstStyle xmlns:a="http://schemas.openxmlformats.org/drawingml/2006/main"/>
+          <a:p xmlns:a="http://schemas.openxmlformats.org/drawingml/2006/main">
+            <a:pPr>
+              <a:defRPr sz="1725" b="0">
+                <a:solidFill>
+                  <a:srgbClr val="142C32"/>
+                </a:solidFill>
+                <a:latin typeface="DejaVu Sans"/>
+                <a:ea typeface="DejaVu Sans"/>
+                <a:cs typeface="DejaVu Sans"/>
+              </a:defRPr>
+            </a:pPr>
+            <a:r>
+              <a:rPr sz="1725" b="0">
+                <a:solidFill>
+                  <a:srgbClr val="142C32"/>
+                </a:solidFill>
+                <a:latin typeface="DejaVu Sans"/>
+                <a:ea typeface="DejaVu Sans"/>
+                <a:cs typeface="DejaVu Sans"/>
+              </a:rPr>
+              <a:t>Validación y despacho</a:t>
+            </a:r>
+          </a:p>
+        </p:txBody>
+      </p:sp>
+      <p:sp>
+        <p:nvSpPr>
+          <p:cNvPr id="9" name="">
+            <a:extLst xmlns:a="http://schemas.openxmlformats.org/drawingml/2006/main">
+              <a:ext uri="{FF2B5EF4-FFF2-40B4-BE49-F238E27FC236}">
+                <a16:creationId xmlns:a16="http://schemas.microsoft.com/office/drawing/2014/main" id="{07502F96-B4D8-415A-8160-F0C384438EEB}"/>
+              </a:ext>
+            </a:extLst>
+          </p:cNvPr>
+          <p:cNvSpPr>
+            <a:spLocks xmlns:a="http://schemas.openxmlformats.org/drawingml/2006/main" noGrp="1"/>
+          </p:cNvSpPr>
+          <p:nvPr/>
+        </p:nvSpPr>
+        <p:spPr>
+          <a:xfrm xmlns:a="http://schemas.openxmlformats.org/drawingml/2006/main">
+            <a:off x="4762500" y="2857500"/>
+            <a:ext cx="2857500" cy="1476375"/>
+          </a:xfrm>
+          <a:prstGeom xmlns:a="http://schemas.openxmlformats.org/drawingml/2006/main" prst="rect">
+            <a:avLst/>
+          </a:prstGeom>
+          <a:solidFill xmlns:a="http://schemas.openxmlformats.org/drawingml/2006/main">
+            <a:srgbClr val="E7EDE7"/>
+          </a:solidFill>
+          <a:ln xmlns:a="http://schemas.openxmlformats.org/drawingml/2006/main" w="19050">
+            <a:solidFill>
+              <a:srgbClr val="173D35"/>
+            </a:solidFill>
+          </a:ln>
+        </p:spPr>
+      </p:sp>
+      <p:sp>
+        <p:nvSpPr>
+          <p:cNvPr id="10" name="">
+            <a:extLst xmlns:a="http://schemas.openxmlformats.org/drawingml/2006/main">
+              <a:ext uri="{FF2B5EF4-FFF2-40B4-BE49-F238E27FC236}">
+                <a16:creationId xmlns:a16="http://schemas.microsoft.com/office/drawing/2014/main" id="{0CB8801B-000C-4F4C-AF37-A19B4C60C430}"/>
+              </a:ext>
+            </a:extLst>
+          </p:cNvPr>
+          <p:cNvSpPr>
+            <a:spLocks xmlns:a="http://schemas.openxmlformats.org/drawingml/2006/main" noGrp="1"/>
+          </p:cNvSpPr>
+          <p:nvPr/>
+        </p:nvSpPr>
+        <p:spPr>
+          <a:xfrm xmlns:a="http://schemas.openxmlformats.org/drawingml/2006/main">
+            <a:off x="4838700" y="3028950"/>
+            <a:ext cx="2705100" cy="438150"/>
+          </a:xfrm>
+          <a:prstGeom xmlns:a="http://schemas.openxmlformats.org/drawingml/2006/main" prst="rect">
+            <a:avLst/>
+          </a:prstGeom>
+          <a:noFill xmlns:a="http://schemas.openxmlformats.org/drawingml/2006/main"/>
+          <a:ln xmlns:a="http://schemas.openxmlformats.org/drawingml/2006/main" w="0">
+            <a:noFill/>
+          </a:ln>
+        </p:spPr>
+        <p:txBody>
+          <a:bodyPr xmlns:a="http://schemas.openxmlformats.org/drawingml/2006/main">
+            <a:noAutofit/>
+          </a:bodyPr>
+          <a:lstStyle xmlns:a="http://schemas.openxmlformats.org/drawingml/2006/main"/>
+          <a:p xmlns:a="http://schemas.openxmlformats.org/drawingml/2006/main">
+            <a:pPr>
+              <a:defRPr sz="2100" b="1">
+                <a:solidFill>
+                  <a:srgbClr val="173D35"/>
+                </a:solidFill>
+                <a:latin typeface="DejaVu Sans"/>
+                <a:ea typeface="DejaVu Sans"/>
+                <a:cs typeface="DejaVu Sans"/>
+              </a:defRPr>
+            </a:pPr>
+            <a:r>
+              <a:rPr sz="2100" b="1">
+                <a:solidFill>
+                  <a:srgbClr val="173D35"/>
+                </a:solidFill>
+                <a:latin typeface="DejaVu Sans"/>
+                <a:ea typeface="DejaVu Sans"/>
+                <a:cs typeface="DejaVu Sans"/>
+              </a:rPr>
+              <a:t>API .NET</a:t>
+            </a:r>
+          </a:p>
+        </p:txBody>
+      </p:sp>
+      <p:sp>
+        <p:nvSpPr>
+          <p:cNvPr id="11" name="">
+            <a:extLst xmlns:a="http://schemas.openxmlformats.org/drawingml/2006/main">
+              <a:ext uri="{FF2B5EF4-FFF2-40B4-BE49-F238E27FC236}">
+                <a16:creationId xmlns:a16="http://schemas.microsoft.com/office/drawing/2014/main" id="{5192CF44-34F8-467F-88DF-9465FAF60FFB}"/>
+              </a:ext>
+            </a:extLst>
+          </p:cNvPr>
+          <p:cNvSpPr>
+            <a:spLocks xmlns:a="http://schemas.openxmlformats.org/drawingml/2006/main" noGrp="1"/>
+          </p:cNvSpPr>
+          <p:nvPr/>
+        </p:nvSpPr>
+        <p:spPr>
+          <a:xfrm xmlns:a="http://schemas.openxmlformats.org/drawingml/2006/main">
+            <a:off x="4838700" y="3543300"/>
+            <a:ext cx="2705100" cy="752475"/>
+          </a:xfrm>
+          <a:prstGeom xmlns:a="http://schemas.openxmlformats.org/drawingml/2006/main" prst="rect">
+            <a:avLst/>
+          </a:prstGeom>
+          <a:noFill xmlns:a="http://schemas.openxmlformats.org/drawingml/2006/main"/>
+          <a:ln xmlns:a="http://schemas.openxmlformats.org/drawingml/2006/main" w="0">
+            <a:noFill/>
+          </a:ln>
+        </p:spPr>
+        <p:txBody>
+          <a:bodyPr xmlns:a="http://schemas.openxmlformats.org/drawingml/2006/main">
+            <a:noAutofit/>
+          </a:bodyPr>
+          <a:lstStyle xmlns:a="http://schemas.openxmlformats.org/drawingml/2006/main"/>
+          <a:p xmlns:a="http://schemas.openxmlformats.org/drawingml/2006/main">
+            <a:pPr>
+              <a:defRPr sz="1725" b="0">
+                <a:solidFill>
+                  <a:srgbClr val="142C32"/>
+                </a:solidFill>
+                <a:latin typeface="DejaVu Sans"/>
+                <a:ea typeface="DejaVu Sans"/>
+                <a:cs typeface="DejaVu Sans"/>
+              </a:defRPr>
+            </a:pPr>
+            <a:r>
+              <a:rPr sz="1725" b="0">
+                <a:solidFill>
+                  <a:srgbClr val="142C32"/>
+                </a:solidFill>
+                <a:latin typeface="DejaVu Sans"/>
+                <a:ea typeface="DejaVu Sans"/>
+                <a:cs typeface="DejaVu Sans"/>
+              </a:rPr>
+              <a:t>Permisos y reglas comunes</a:t>
+            </a:r>
+          </a:p>
+        </p:txBody>
+      </p:sp>
+      <p:sp>
+        <p:nvSpPr>
+          <p:cNvPr id="12" name="">
+            <a:extLst xmlns:a="http://schemas.openxmlformats.org/drawingml/2006/main">
+              <a:ext uri="{FF2B5EF4-FFF2-40B4-BE49-F238E27FC236}">
+                <a16:creationId xmlns:a16="http://schemas.microsoft.com/office/drawing/2014/main" id="{E6B1BDD6-B837-483C-877E-E9F1FC8B5429}"/>
+              </a:ext>
+            </a:extLst>
+          </p:cNvPr>
+          <p:cNvSpPr>
+            <a:spLocks xmlns:a="http://schemas.openxmlformats.org/drawingml/2006/main" noGrp="1"/>
+          </p:cNvSpPr>
+          <p:nvPr/>
+        </p:nvSpPr>
+        <p:spPr>
+          <a:xfrm xmlns:a="http://schemas.openxmlformats.org/drawingml/2006/main">
+            <a:off x="8810625" y="1762125"/>
+            <a:ext cx="2714625" cy="1476375"/>
+          </a:xfrm>
+          <a:prstGeom xmlns:a="http://schemas.openxmlformats.org/drawingml/2006/main" prst="rect">
+            <a:avLst/>
+          </a:prstGeom>
+          <a:solidFill xmlns:a="http://schemas.openxmlformats.org/drawingml/2006/main">
+            <a:srgbClr val="E7EDE7"/>
+          </a:solidFill>
+          <a:ln xmlns:a="http://schemas.openxmlformats.org/drawingml/2006/main" w="19050">
+            <a:solidFill>
+              <a:srgbClr val="173D35"/>
+            </a:solidFill>
+          </a:ln>
+        </p:spPr>
+      </p:sp>
+      <p:sp>
+        <p:nvSpPr>
+          <p:cNvPr id="13" name="">
+            <a:extLst xmlns:a="http://schemas.openxmlformats.org/drawingml/2006/main">
+              <a:ext uri="{FF2B5EF4-FFF2-40B4-BE49-F238E27FC236}">
+                <a16:creationId xmlns:a16="http://schemas.microsoft.com/office/drawing/2014/main" id="{69A4D9C6-0A8C-40B7-8CCA-7E431CC9FE3A}"/>
+              </a:ext>
+            </a:extLst>
+          </p:cNvPr>
+          <p:cNvSpPr>
+            <a:spLocks xmlns:a="http://schemas.openxmlformats.org/drawingml/2006/main" noGrp="1"/>
+          </p:cNvSpPr>
+          <p:nvPr/>
+        </p:nvSpPr>
+        <p:spPr>
+          <a:xfrm xmlns:a="http://schemas.openxmlformats.org/drawingml/2006/main">
+            <a:off x="8886825" y="1933575"/>
+            <a:ext cx="2562225" cy="438150"/>
+          </a:xfrm>
+          <a:prstGeom xmlns:a="http://schemas.openxmlformats.org/drawingml/2006/main" prst="rect">
+            <a:avLst/>
+          </a:prstGeom>
+          <a:noFill xmlns:a="http://schemas.openxmlformats.org/drawingml/2006/main"/>
+          <a:ln xmlns:a="http://schemas.openxmlformats.org/drawingml/2006/main" w="0">
+            <a:noFill/>
+          </a:ln>
+        </p:spPr>
+        <p:txBody>
+          <a:bodyPr xmlns:a="http://schemas.openxmlformats.org/drawingml/2006/main">
+            <a:noAutofit/>
+          </a:bodyPr>
+          <a:lstStyle xmlns:a="http://schemas.openxmlformats.org/drawingml/2006/main"/>
+          <a:p xmlns:a="http://schemas.openxmlformats.org/drawingml/2006/main">
+            <a:pPr>
+              <a:defRPr sz="2100" b="1">
+                <a:solidFill>
+                  <a:srgbClr val="173D35"/>
+                </a:solidFill>
+                <a:latin typeface="DejaVu Sans"/>
+                <a:ea typeface="DejaVu Sans"/>
+                <a:cs typeface="DejaVu Sans"/>
+              </a:defRPr>
+            </a:pPr>
+            <a:r>
+              <a:rPr sz="2100" b="1">
+                <a:solidFill>
+                  <a:srgbClr val="173D35"/>
+                </a:solidFill>
+                <a:latin typeface="DejaVu Sans"/>
+                <a:ea typeface="DejaVu Sans"/>
+                <a:cs typeface="DejaVu Sans"/>
+              </a:rPr>
+              <a:t>PostgreSQL</a:t>
+            </a:r>
+          </a:p>
+        </p:txBody>
+      </p:sp>
+      <p:sp>
+        <p:nvSpPr>
+          <p:cNvPr id="14" name="">
+            <a:extLst xmlns:a="http://schemas.openxmlformats.org/drawingml/2006/main">
+              <a:ext uri="{FF2B5EF4-FFF2-40B4-BE49-F238E27FC236}">
+                <a16:creationId xmlns:a16="http://schemas.microsoft.com/office/drawing/2014/main" id="{10A0976B-0D2C-42F4-A02A-2CE3BE6B2384}"/>
+              </a:ext>
+            </a:extLst>
+          </p:cNvPr>
+          <p:cNvSpPr>
+            <a:spLocks xmlns:a="http://schemas.openxmlformats.org/drawingml/2006/main" noGrp="1"/>
+          </p:cNvSpPr>
+          <p:nvPr/>
+        </p:nvSpPr>
+        <p:spPr>
+          <a:xfrm xmlns:a="http://schemas.openxmlformats.org/drawingml/2006/main">
+            <a:off x="8886825" y="2447925"/>
+            <a:ext cx="2562225" cy="752475"/>
+          </a:xfrm>
+          <a:prstGeom xmlns:a="http://schemas.openxmlformats.org/drawingml/2006/main" prst="rect">
+            <a:avLst/>
+          </a:prstGeom>
+          <a:noFill xmlns:a="http://schemas.openxmlformats.org/drawingml/2006/main"/>
+          <a:ln xmlns:a="http://schemas.openxmlformats.org/drawingml/2006/main" w="0">
+            <a:noFill/>
+          </a:ln>
+        </p:spPr>
+        <p:txBody>
+          <a:bodyPr xmlns:a="http://schemas.openxmlformats.org/drawingml/2006/main">
+            <a:noAutofit/>
+          </a:bodyPr>
+          <a:lstStyle xmlns:a="http://schemas.openxmlformats.org/drawingml/2006/main"/>
+          <a:p xmlns:a="http://schemas.openxmlformats.org/drawingml/2006/main">
+            <a:pPr>
+              <a:defRPr sz="1725" b="0">
+                <a:solidFill>
+                  <a:srgbClr val="142C32"/>
+                </a:solidFill>
+                <a:latin typeface="DejaVu Sans"/>
+                <a:ea typeface="DejaVu Sans"/>
+                <a:cs typeface="DejaVu Sans"/>
+              </a:defRPr>
+            </a:pPr>
+            <a:r>
+              <a:rPr sz="1725" b="0">
+                <a:solidFill>
+                  <a:srgbClr val="142C32"/>
+                </a:solidFill>
+                <a:latin typeface="DejaVu Sans"/>
+                <a:ea typeface="DejaVu Sans"/>
+                <a:cs typeface="DejaVu Sans"/>
+              </a:rPr>
+              <a:t>Operaciones y auditoría</a:t>
+            </a:r>
+          </a:p>
+        </p:txBody>
+      </p:sp>
+      <p:sp>
+        <p:nvSpPr>
+          <p:cNvPr id="15" name="">
+            <a:extLst xmlns:a="http://schemas.openxmlformats.org/drawingml/2006/main">
+              <a:ext uri="{FF2B5EF4-FFF2-40B4-BE49-F238E27FC236}">
+                <a16:creationId xmlns:a16="http://schemas.microsoft.com/office/drawing/2014/main" id="{D61FF333-BE24-465C-88E1-E0C1ADAB6707}"/>
+              </a:ext>
+            </a:extLst>
+          </p:cNvPr>
+          <p:cNvSpPr>
+            <a:spLocks xmlns:a="http://schemas.openxmlformats.org/drawingml/2006/main" noGrp="1"/>
+          </p:cNvSpPr>
+          <p:nvPr/>
+        </p:nvSpPr>
+        <p:spPr>
+          <a:xfrm xmlns:a="http://schemas.openxmlformats.org/drawingml/2006/main">
+            <a:off x="8810625" y="3952875"/>
+            <a:ext cx="2714625" cy="1476375"/>
+          </a:xfrm>
+          <a:prstGeom xmlns:a="http://schemas.openxmlformats.org/drawingml/2006/main" prst="rect">
+            <a:avLst/>
+          </a:prstGeom>
+          <a:solidFill xmlns:a="http://schemas.openxmlformats.org/drawingml/2006/main">
+            <a:srgbClr val="E7EDE7"/>
+          </a:solidFill>
+          <a:ln xmlns:a="http://schemas.openxmlformats.org/drawingml/2006/main" w="19050">
+            <a:solidFill>
+              <a:srgbClr val="173D35"/>
+            </a:solidFill>
+          </a:ln>
+        </p:spPr>
+      </p:sp>
+      <p:sp>
+        <p:nvSpPr>
+          <p:cNvPr id="16" name="">
+            <a:extLst xmlns:a="http://schemas.openxmlformats.org/drawingml/2006/main">
+              <a:ext uri="{FF2B5EF4-FFF2-40B4-BE49-F238E27FC236}">
+                <a16:creationId xmlns:a16="http://schemas.microsoft.com/office/drawing/2014/main" id="{3C7C94EF-F67B-4D85-976E-C5281CB6E3E4}"/>
+              </a:ext>
+            </a:extLst>
+          </p:cNvPr>
+          <p:cNvSpPr>
+            <a:spLocks xmlns:a="http://schemas.openxmlformats.org/drawingml/2006/main" noGrp="1"/>
+          </p:cNvSpPr>
+          <p:nvPr/>
+        </p:nvSpPr>
+        <p:spPr>
+          <a:xfrm xmlns:a="http://schemas.openxmlformats.org/drawingml/2006/main">
+            <a:off x="8886825" y="4124325"/>
+            <a:ext cx="2562225" cy="438150"/>
+          </a:xfrm>
+          <a:prstGeom xmlns:a="http://schemas.openxmlformats.org/drawingml/2006/main" prst="rect">
+            <a:avLst/>
+          </a:prstGeom>
+          <a:noFill xmlns:a="http://schemas.openxmlformats.org/drawingml/2006/main"/>
+          <a:ln xmlns:a="http://schemas.openxmlformats.org/drawingml/2006/main" w="0">
+            <a:noFill/>
+          </a:ln>
+        </p:spPr>
+        <p:txBody>
+          <a:bodyPr xmlns:a="http://schemas.openxmlformats.org/drawingml/2006/main">
+            <a:noAutofit/>
+          </a:bodyPr>
+          <a:lstStyle xmlns:a="http://schemas.openxmlformats.org/drawingml/2006/main"/>
+          <a:p xmlns:a="http://schemas.openxmlformats.org/drawingml/2006/main">
+            <a:pPr>
+              <a:defRPr sz="2100" b="1">
+                <a:solidFill>
+                  <a:srgbClr val="173D35"/>
+                </a:solidFill>
+                <a:latin typeface="DejaVu Sans"/>
+                <a:ea typeface="DejaVu Sans"/>
+                <a:cs typeface="DejaVu Sans"/>
+              </a:defRPr>
+            </a:pPr>
+            <a:r>
+              <a:rPr sz="2100" b="1">
+                <a:solidFill>
+                  <a:srgbClr val="173D35"/>
+                </a:solidFill>
+                <a:latin typeface="DejaVu Sans"/>
+                <a:ea typeface="DejaVu Sans"/>
+                <a:cs typeface="DejaVu Sans"/>
+              </a:rPr>
+              <a:t>Notificaciones</a:t>
+            </a:r>
+          </a:p>
+        </p:txBody>
+      </p:sp>
+      <p:sp>
+        <p:nvSpPr>
+          <p:cNvPr id="17" name="">
+            <a:extLst xmlns:a="http://schemas.openxmlformats.org/drawingml/2006/main">
+              <a:ext uri="{FF2B5EF4-FFF2-40B4-BE49-F238E27FC236}">
+                <a16:creationId xmlns:a16="http://schemas.microsoft.com/office/drawing/2014/main" id="{C33315B0-91E4-4DE0-903B-DCDFCCC08F50}"/>
+              </a:ext>
+            </a:extLst>
+          </p:cNvPr>
+          <p:cNvSpPr>
+            <a:spLocks xmlns:a="http://schemas.openxmlformats.org/drawingml/2006/main" noGrp="1"/>
+          </p:cNvSpPr>
+          <p:nvPr/>
+        </p:nvSpPr>
+        <p:spPr>
+          <a:xfrm xmlns:a="http://schemas.openxmlformats.org/drawingml/2006/main">
+            <a:off x="8886825" y="4638675"/>
+            <a:ext cx="2562225" cy="752475"/>
+          </a:xfrm>
+          <a:prstGeom xmlns:a="http://schemas.openxmlformats.org/drawingml/2006/main" prst="rect">
+            <a:avLst/>
+          </a:prstGeom>
+          <a:noFill xmlns:a="http://schemas.openxmlformats.org/drawingml/2006/main"/>
+          <a:ln xmlns:a="http://schemas.openxmlformats.org/drawingml/2006/main" w="0">
+            <a:noFill/>
+          </a:ln>
+        </p:spPr>
+        <p:txBody>
+          <a:bodyPr xmlns:a="http://schemas.openxmlformats.org/drawingml/2006/main">
+            <a:noAutofit/>
+          </a:bodyPr>
+          <a:lstStyle xmlns:a="http://schemas.openxmlformats.org/drawingml/2006/main"/>
+          <a:p xmlns:a="http://schemas.openxmlformats.org/drawingml/2006/main">
+            <a:pPr>
+              <a:defRPr sz="1725" b="0">
+                <a:solidFill>
+                  <a:srgbClr val="142C32"/>
+                </a:solidFill>
+                <a:latin typeface="DejaVu Sans"/>
+                <a:ea typeface="DejaVu Sans"/>
+                <a:cs typeface="DejaVu Sans"/>
+              </a:defRPr>
+            </a:pPr>
+            <a:r>
+              <a:rPr sz="1725" b="0">
+                <a:solidFill>
+                  <a:srgbClr val="142C32"/>
+                </a:solidFill>
+                <a:latin typeface="DejaVu Sans"/>
+                <a:ea typeface="DejaVu Sans"/>
+                <a:cs typeface="DejaVu Sans"/>
+              </a:rPr>
+              <a:t>Correo y SMS</a:t>
+            </a:r>
+          </a:p>
+        </p:txBody>
+      </p:sp>
+      <p:cxnSp>
+        <p:nvCxnSpPr>
+          <p:cNvPr id="40" name=""/>
+          <p:cNvCxnSpPr>
+            <a:stCxn xmlns:a="http://schemas.openxmlformats.org/drawingml/2006/main" id="3" idx="3"/>
+            <a:endCxn xmlns:a="http://schemas.openxmlformats.org/drawingml/2006/main" id="9" idx="1"/>
+          </p:cNvCxnSpPr>
+          <p:nvPr/>
+        </p:nvCxnSpPr>
+        <p:spPr>
+          <a:xfrm xmlns:a="http://schemas.openxmlformats.org/drawingml/2006/main">
+            <a:off x="3476625" y="2500313"/>
+            <a:ext cx="1285875" cy="1095375"/>
+          </a:xfrm>
+          <a:prstGeom xmlns:a="http://schemas.openxmlformats.org/drawingml/2006/main" prst="bentConnector3">
+            <a:avLst>
+              <a:gd name="adj1" fmla="val 50000"/>
+            </a:avLst>
+          </a:prstGeom>
+          <a:ln xmlns:a="http://schemas.openxmlformats.org/drawingml/2006/main" w="28575">
+            <a:solidFill>
+              <a:srgbClr val="D99A32"/>
+            </a:solidFill>
+            <a:tailEnd type="arrow" w="med" len="med"/>
+          </a:ln>
+        </p:spPr>
+      </p:cxnSp>
+      <p:cxnSp>
+        <p:nvCxnSpPr>
+          <p:cNvPr id="41" name=""/>
+          <p:cNvCxnSpPr>
+            <a:stCxn xmlns:a="http://schemas.openxmlformats.org/drawingml/2006/main" id="6" idx="3"/>
+            <a:endCxn xmlns:a="http://schemas.openxmlformats.org/drawingml/2006/main" id="9" idx="1"/>
+          </p:cNvCxnSpPr>
+          <p:nvPr/>
+        </p:nvCxnSpPr>
+        <p:spPr>
+          <a:xfrm xmlns:a="http://schemas.openxmlformats.org/drawingml/2006/main" flipV="1">
+            <a:off x="3476625" y="3595688"/>
+            <a:ext cx="1285875" cy="1095375"/>
+          </a:xfrm>
+          <a:prstGeom xmlns:a="http://schemas.openxmlformats.org/drawingml/2006/main" prst="bentConnector3">
+            <a:avLst>
+              <a:gd name="adj1" fmla="val 50000"/>
+            </a:avLst>
+          </a:prstGeom>
+          <a:ln xmlns:a="http://schemas.openxmlformats.org/drawingml/2006/main" w="28575">
+            <a:solidFill>
+              <a:srgbClr val="D99A32"/>
+            </a:solidFill>
+            <a:tailEnd type="arrow" w="med" len="med"/>
+          </a:ln>
+        </p:spPr>
+      </p:cxnSp>
+      <p:cxnSp>
+        <p:nvCxnSpPr>
+          <p:cNvPr id="42" name=""/>
+          <p:cNvCxnSpPr>
+            <a:stCxn xmlns:a="http://schemas.openxmlformats.org/drawingml/2006/main" id="9" idx="3"/>
+            <a:endCxn xmlns:a="http://schemas.openxmlformats.org/drawingml/2006/main" id="12" idx="1"/>
+          </p:cNvCxnSpPr>
+          <p:nvPr/>
+        </p:nvCxnSpPr>
+        <p:spPr>
+          <a:xfrm xmlns:a="http://schemas.openxmlformats.org/drawingml/2006/main" flipV="1">
+            <a:off x="7620000" y="2500313"/>
+            <a:ext cx="1190625" cy="1095375"/>
+          </a:xfrm>
+          <a:prstGeom xmlns:a="http://schemas.openxmlformats.org/drawingml/2006/main" prst="bentConnector3">
+            <a:avLst>
+              <a:gd name="adj1" fmla="val 50000"/>
+            </a:avLst>
+          </a:prstGeom>
+          <a:ln xmlns:a="http://schemas.openxmlformats.org/drawingml/2006/main" w="28575">
+            <a:solidFill>
+              <a:srgbClr val="D99A32"/>
+            </a:solidFill>
+            <a:tailEnd type="arrow" w="med" len="med"/>
+          </a:ln>
+        </p:spPr>
+      </p:cxnSp>
+      <p:cxnSp>
+        <p:nvCxnSpPr>
+          <p:cNvPr id="43" name=""/>
+          <p:cNvCxnSpPr>
+            <a:stCxn xmlns:a="http://schemas.openxmlformats.org/drawingml/2006/main" id="9" idx="3"/>
+            <a:endCxn xmlns:a="http://schemas.openxmlformats.org/drawingml/2006/main" id="15" idx="1"/>
+          </p:cNvCxnSpPr>
+          <p:nvPr/>
+        </p:nvCxnSpPr>
+        <p:spPr>
+          <a:xfrm xmlns:a="http://schemas.openxmlformats.org/drawingml/2006/main">
+            <a:off x="7620000" y="3595688"/>
+            <a:ext cx="1190625" cy="1095375"/>
+          </a:xfrm>
+          <a:prstGeom xmlns:a="http://schemas.openxmlformats.org/drawingml/2006/main" prst="bentConnector3">
+            <a:avLst>
+              <a:gd name="adj1" fmla="val 50000"/>
+            </a:avLst>
+          </a:prstGeom>
+          <a:ln xmlns:a="http://schemas.openxmlformats.org/drawingml/2006/main" w="28575">
+            <a:solidFill>
+              <a:srgbClr val="D99A32"/>
+            </a:solidFill>
+            <a:tailEnd type="arrow" w="med" len="med"/>
+          </a:ln>
+        </p:spPr>
+      </p:cxnSp>
+      <p:sp>
+        <p:nvSpPr>
+          <p:cNvPr id="22" name="">
+            <a:extLst xmlns:a="http://schemas.openxmlformats.org/drawingml/2006/main">
+              <a:ext uri="{FF2B5EF4-FFF2-40B4-BE49-F238E27FC236}">
+                <a16:creationId xmlns:a16="http://schemas.microsoft.com/office/drawing/2014/main" id="{F50F2A18-5852-4347-8419-16E0FB923E29}"/>
+              </a:ext>
+            </a:extLst>
+          </p:cNvPr>
+          <p:cNvSpPr>
+            <a:spLocks xmlns:a="http://schemas.openxmlformats.org/drawingml/2006/main" noGrp="1"/>
+          </p:cNvSpPr>
+          <p:nvPr/>
+        </p:nvSpPr>
+        <p:spPr>
+          <a:xfrm xmlns:a="http://schemas.openxmlformats.org/drawingml/2006/main">
+            <a:off x="666750" y="5762625"/>
+            <a:ext cx="10668000" cy="457200"/>
           </a:xfrm>
           <a:prstGeom xmlns:a="http://schemas.openxmlformats.org/drawingml/2006/main" prst="rect">
             <a:avLst/>
@@ -8106,7 +9773,7 @@
             <a:pPr>
               <a:defRPr sz="1950" b="0">
                 <a:solidFill>
-                  <a:srgbClr val="142C32"/>
+                  <a:srgbClr val="53666B"/>
                 </a:solidFill>
                 <a:latin typeface="DejaVu Sans"/>
                 <a:ea typeface="DejaVu Sans"/>
@@ -8116,355 +9783,13 @@
             <a:r>
               <a:rPr sz="1950" b="0">
                 <a:solidFill>
-                  <a:srgbClr val="142C32"/>
-                </a:solidFill>
-                <a:latin typeface="DejaVu Sans"/>
-                <a:ea typeface="DejaVu Sans"/>
-                <a:cs typeface="DejaVu Sans"/>
-              </a:rPr>
-              <a:t>Administración, solicitudes, inventario y reportes.</a:t>
-            </a:r>
-          </a:p>
-        </p:txBody>
-      </p:sp>
-      <p:sp>
-        <p:nvSpPr>
-          <p:cNvPr id="5" name="">
-            <a:extLst xmlns:a="http://schemas.openxmlformats.org/drawingml/2006/main">
-              <a:ext uri="{FF2B5EF4-FFF2-40B4-BE49-F238E27FC236}">
-                <a16:creationId xmlns:a16="http://schemas.microsoft.com/office/drawing/2014/main" id="{69843EB6-CFCB-4CDB-A9F1-7F38041E0B76}"/>
-              </a:ext>
-            </a:extLst>
-          </p:cNvPr>
-          <p:cNvSpPr>
-            <a:spLocks xmlns:a="http://schemas.openxmlformats.org/drawingml/2006/main" noGrp="1"/>
-          </p:cNvSpPr>
-          <p:nvPr/>
-        </p:nvSpPr>
-        <p:spPr>
-          <a:xfrm xmlns:a="http://schemas.openxmlformats.org/drawingml/2006/main">
-            <a:off x="666750" y="2895600"/>
-            <a:ext cx="3333750" cy="438150"/>
-          </a:xfrm>
-          <a:prstGeom xmlns:a="http://schemas.openxmlformats.org/drawingml/2006/main" prst="rect">
-            <a:avLst/>
-          </a:prstGeom>
-          <a:noFill xmlns:a="http://schemas.openxmlformats.org/drawingml/2006/main"/>
-          <a:ln xmlns:a="http://schemas.openxmlformats.org/drawingml/2006/main" w="0">
-            <a:noFill/>
-          </a:ln>
-        </p:spPr>
-        <p:txBody>
-          <a:bodyPr xmlns:a="http://schemas.openxmlformats.org/drawingml/2006/main">
-            <a:noAutofit/>
-          </a:bodyPr>
-          <a:lstStyle xmlns:a="http://schemas.openxmlformats.org/drawingml/2006/main"/>
-          <a:p xmlns:a="http://schemas.openxmlformats.org/drawingml/2006/main">
-            <a:pPr>
-              <a:defRPr sz="2175" b="1">
-                <a:solidFill>
-                  <a:srgbClr val="173D35"/>
-                </a:solidFill>
-                <a:latin typeface="DejaVu Sans"/>
-                <a:ea typeface="DejaVu Sans"/>
-                <a:cs typeface="DejaVu Sans"/>
-              </a:defRPr>
-            </a:pPr>
-            <a:r>
-              <a:rPr sz="2175" b="1">
-                <a:solidFill>
-                  <a:srgbClr val="173D35"/>
-                </a:solidFill>
-                <a:latin typeface="DejaVu Sans"/>
-                <a:ea typeface="DejaVu Sans"/>
-                <a:cs typeface="DejaVu Sans"/>
-              </a:rPr>
-              <a:t>Aplicación Android</a:t>
-            </a:r>
-          </a:p>
-        </p:txBody>
-      </p:sp>
-      <p:sp>
-        <p:nvSpPr>
-          <p:cNvPr id="6" name="">
-            <a:extLst xmlns:a="http://schemas.openxmlformats.org/drawingml/2006/main">
-              <a:ext uri="{FF2B5EF4-FFF2-40B4-BE49-F238E27FC236}">
-                <a16:creationId xmlns:a16="http://schemas.microsoft.com/office/drawing/2014/main" id="{82331D67-4092-4D14-9DD0-542D078943DD}"/>
-              </a:ext>
-            </a:extLst>
-          </p:cNvPr>
-          <p:cNvSpPr>
-            <a:spLocks xmlns:a="http://schemas.openxmlformats.org/drawingml/2006/main" noGrp="1"/>
-          </p:cNvSpPr>
-          <p:nvPr/>
-        </p:nvSpPr>
-        <p:spPr>
-          <a:xfrm xmlns:a="http://schemas.openxmlformats.org/drawingml/2006/main">
-            <a:off x="4333875" y="2895600"/>
-            <a:ext cx="7048500" cy="838200"/>
-          </a:xfrm>
-          <a:prstGeom xmlns:a="http://schemas.openxmlformats.org/drawingml/2006/main" prst="rect">
-            <a:avLst/>
-          </a:prstGeom>
-          <a:noFill xmlns:a="http://schemas.openxmlformats.org/drawingml/2006/main"/>
-          <a:ln xmlns:a="http://schemas.openxmlformats.org/drawingml/2006/main" w="0">
-            <a:noFill/>
-          </a:ln>
-        </p:spPr>
-        <p:txBody>
-          <a:bodyPr xmlns:a="http://schemas.openxmlformats.org/drawingml/2006/main">
-            <a:noAutofit/>
-          </a:bodyPr>
-          <a:lstStyle xmlns:a="http://schemas.openxmlformats.org/drawingml/2006/main"/>
-          <a:p xmlns:a="http://schemas.openxmlformats.org/drawingml/2006/main">
-            <a:pPr>
-              <a:defRPr sz="1950" b="0">
-                <a:solidFill>
-                  <a:srgbClr val="142C32"/>
-                </a:solidFill>
-                <a:latin typeface="DejaVu Sans"/>
-                <a:ea typeface="DejaVu Sans"/>
-                <a:cs typeface="DejaVu Sans"/>
-              </a:defRPr>
-            </a:pPr>
-            <a:r>
-              <a:rPr sz="1950" b="0">
-                <a:solidFill>
-                  <a:srgbClr val="142C32"/>
-                </a:solidFill>
-                <a:latin typeface="DejaVu Sans"/>
-                <a:ea typeface="DejaVu Sans"/>
-                <a:cs typeface="DejaVu Sans"/>
-              </a:rPr>
-              <a:t>Validación del QR, identidad y registro del despacho.</a:t>
-            </a:r>
-          </a:p>
-        </p:txBody>
-      </p:sp>
-      <p:sp>
-        <p:nvSpPr>
-          <p:cNvPr id="7" name="">
-            <a:extLst xmlns:a="http://schemas.openxmlformats.org/drawingml/2006/main">
-              <a:ext uri="{FF2B5EF4-FFF2-40B4-BE49-F238E27FC236}">
-                <a16:creationId xmlns:a16="http://schemas.microsoft.com/office/drawing/2014/main" id="{EE78476A-7F09-4743-85B2-3F603DBFB975}"/>
-              </a:ext>
-            </a:extLst>
-          </p:cNvPr>
-          <p:cNvSpPr>
-            <a:spLocks xmlns:a="http://schemas.openxmlformats.org/drawingml/2006/main" noGrp="1"/>
-          </p:cNvSpPr>
-          <p:nvPr/>
-        </p:nvSpPr>
-        <p:spPr>
-          <a:xfrm xmlns:a="http://schemas.openxmlformats.org/drawingml/2006/main">
-            <a:off x="666750" y="3981450"/>
-            <a:ext cx="3333750" cy="438150"/>
-          </a:xfrm>
-          <a:prstGeom xmlns:a="http://schemas.openxmlformats.org/drawingml/2006/main" prst="rect">
-            <a:avLst/>
-          </a:prstGeom>
-          <a:noFill xmlns:a="http://schemas.openxmlformats.org/drawingml/2006/main"/>
-          <a:ln xmlns:a="http://schemas.openxmlformats.org/drawingml/2006/main" w="0">
-            <a:noFill/>
-          </a:ln>
-        </p:spPr>
-        <p:txBody>
-          <a:bodyPr xmlns:a="http://schemas.openxmlformats.org/drawingml/2006/main">
-            <a:noAutofit/>
-          </a:bodyPr>
-          <a:lstStyle xmlns:a="http://schemas.openxmlformats.org/drawingml/2006/main"/>
-          <a:p xmlns:a="http://schemas.openxmlformats.org/drawingml/2006/main">
-            <a:pPr>
-              <a:defRPr sz="2175" b="1">
-                <a:solidFill>
-                  <a:srgbClr val="173D35"/>
-                </a:solidFill>
-                <a:latin typeface="DejaVu Sans"/>
-                <a:ea typeface="DejaVu Sans"/>
-                <a:cs typeface="DejaVu Sans"/>
-              </a:defRPr>
-            </a:pPr>
-            <a:r>
-              <a:rPr sz="2175" b="1">
-                <a:solidFill>
-                  <a:srgbClr val="173D35"/>
-                </a:solidFill>
-                <a:latin typeface="DejaVu Sans"/>
-                <a:ea typeface="DejaVu Sans"/>
-                <a:cs typeface="DejaVu Sans"/>
-              </a:rPr>
-              <a:t>API y base de datos</a:t>
-            </a:r>
-          </a:p>
-        </p:txBody>
-      </p:sp>
-      <p:sp>
-        <p:nvSpPr>
-          <p:cNvPr id="8" name="">
-            <a:extLst xmlns:a="http://schemas.openxmlformats.org/drawingml/2006/main">
-              <a:ext uri="{FF2B5EF4-FFF2-40B4-BE49-F238E27FC236}">
-                <a16:creationId xmlns:a16="http://schemas.microsoft.com/office/drawing/2014/main" id="{3E814355-4BF4-4EE5-B922-C73BD96D6CC7}"/>
-              </a:ext>
-            </a:extLst>
-          </p:cNvPr>
-          <p:cNvSpPr>
-            <a:spLocks xmlns:a="http://schemas.openxmlformats.org/drawingml/2006/main" noGrp="1"/>
-          </p:cNvSpPr>
-          <p:nvPr/>
-        </p:nvSpPr>
-        <p:spPr>
-          <a:xfrm xmlns:a="http://schemas.openxmlformats.org/drawingml/2006/main">
-            <a:off x="4333875" y="3981450"/>
-            <a:ext cx="7048500" cy="838200"/>
-          </a:xfrm>
-          <a:prstGeom xmlns:a="http://schemas.openxmlformats.org/drawingml/2006/main" prst="rect">
-            <a:avLst/>
-          </a:prstGeom>
-          <a:noFill xmlns:a="http://schemas.openxmlformats.org/drawingml/2006/main"/>
-          <a:ln xmlns:a="http://schemas.openxmlformats.org/drawingml/2006/main" w="0">
-            <a:noFill/>
-          </a:ln>
-        </p:spPr>
-        <p:txBody>
-          <a:bodyPr xmlns:a="http://schemas.openxmlformats.org/drawingml/2006/main">
-            <a:noAutofit/>
-          </a:bodyPr>
-          <a:lstStyle xmlns:a="http://schemas.openxmlformats.org/drawingml/2006/main"/>
-          <a:p xmlns:a="http://schemas.openxmlformats.org/drawingml/2006/main">
-            <a:pPr>
-              <a:defRPr sz="1950" b="0">
-                <a:solidFill>
-                  <a:srgbClr val="142C32"/>
-                </a:solidFill>
-                <a:latin typeface="DejaVu Sans"/>
-                <a:ea typeface="DejaVu Sans"/>
-                <a:cs typeface="DejaVu Sans"/>
-              </a:defRPr>
-            </a:pPr>
-            <a:r>
-              <a:rPr sz="1950" b="0">
-                <a:solidFill>
-                  <a:srgbClr val="142C32"/>
-                </a:solidFill>
-                <a:latin typeface="DejaVu Sans"/>
-                <a:ea typeface="DejaVu Sans"/>
-                <a:cs typeface="DejaVu Sans"/>
-              </a:rPr>
-              <a:t>Reglas comunes, permisos y transacciones.</a:t>
-            </a:r>
-          </a:p>
-        </p:txBody>
-      </p:sp>
-      <p:sp>
-        <p:nvSpPr>
-          <p:cNvPr id="9" name="">
-            <a:extLst xmlns:a="http://schemas.openxmlformats.org/drawingml/2006/main">
-              <a:ext uri="{FF2B5EF4-FFF2-40B4-BE49-F238E27FC236}">
-                <a16:creationId xmlns:a16="http://schemas.microsoft.com/office/drawing/2014/main" id="{AF02DF3F-563F-444C-A824-0B5A11301AB6}"/>
-              </a:ext>
-            </a:extLst>
-          </p:cNvPr>
-          <p:cNvSpPr>
-            <a:spLocks xmlns:a="http://schemas.openxmlformats.org/drawingml/2006/main" noGrp="1"/>
-          </p:cNvSpPr>
-          <p:nvPr/>
-        </p:nvSpPr>
-        <p:spPr>
-          <a:xfrm xmlns:a="http://schemas.openxmlformats.org/drawingml/2006/main">
-            <a:off x="666750" y="5067300"/>
-            <a:ext cx="3333750" cy="438150"/>
-          </a:xfrm>
-          <a:prstGeom xmlns:a="http://schemas.openxmlformats.org/drawingml/2006/main" prst="rect">
-            <a:avLst/>
-          </a:prstGeom>
-          <a:noFill xmlns:a="http://schemas.openxmlformats.org/drawingml/2006/main"/>
-          <a:ln xmlns:a="http://schemas.openxmlformats.org/drawingml/2006/main" w="0">
-            <a:noFill/>
-          </a:ln>
-        </p:spPr>
-        <p:txBody>
-          <a:bodyPr xmlns:a="http://schemas.openxmlformats.org/drawingml/2006/main">
-            <a:noAutofit/>
-          </a:bodyPr>
-          <a:lstStyle xmlns:a="http://schemas.openxmlformats.org/drawingml/2006/main"/>
-          <a:p xmlns:a="http://schemas.openxmlformats.org/drawingml/2006/main">
-            <a:pPr>
-              <a:defRPr sz="2175" b="1">
-                <a:solidFill>
-                  <a:srgbClr val="173D35"/>
-                </a:solidFill>
-                <a:latin typeface="DejaVu Sans"/>
-                <a:ea typeface="DejaVu Sans"/>
-                <a:cs typeface="DejaVu Sans"/>
-              </a:defRPr>
-            </a:pPr>
-            <a:r>
-              <a:rPr sz="2175" b="1">
-                <a:solidFill>
-                  <a:srgbClr val="173D35"/>
-                </a:solidFill>
-                <a:latin typeface="DejaVu Sans"/>
-                <a:ea typeface="DejaVu Sans"/>
-                <a:cs typeface="DejaVu Sans"/>
-              </a:rPr>
-              <a:t>Notificaciones</a:t>
-            </a:r>
-          </a:p>
-        </p:txBody>
-      </p:sp>
-      <p:sp>
-        <p:nvSpPr>
-          <p:cNvPr id="10" name="">
-            <a:extLst xmlns:a="http://schemas.openxmlformats.org/drawingml/2006/main">
-              <a:ext uri="{FF2B5EF4-FFF2-40B4-BE49-F238E27FC236}">
-                <a16:creationId xmlns:a16="http://schemas.microsoft.com/office/drawing/2014/main" id="{A6EFBFB8-1F3E-4EB0-B0E8-8DB9A04FAD64}"/>
-              </a:ext>
-            </a:extLst>
-          </p:cNvPr>
-          <p:cNvSpPr>
-            <a:spLocks xmlns:a="http://schemas.openxmlformats.org/drawingml/2006/main" noGrp="1"/>
-          </p:cNvSpPr>
-          <p:nvPr/>
-        </p:nvSpPr>
-        <p:spPr>
-          <a:xfrm xmlns:a="http://schemas.openxmlformats.org/drawingml/2006/main">
-            <a:off x="4333875" y="5067300"/>
-            <a:ext cx="7048500" cy="838200"/>
-          </a:xfrm>
-          <a:prstGeom xmlns:a="http://schemas.openxmlformats.org/drawingml/2006/main" prst="rect">
-            <a:avLst/>
-          </a:prstGeom>
-          <a:noFill xmlns:a="http://schemas.openxmlformats.org/drawingml/2006/main"/>
-          <a:ln xmlns:a="http://schemas.openxmlformats.org/drawingml/2006/main" w="0">
-            <a:noFill/>
-          </a:ln>
-        </p:spPr>
-        <p:txBody>
-          <a:bodyPr xmlns:a="http://schemas.openxmlformats.org/drawingml/2006/main">
-            <a:noAutofit/>
-          </a:bodyPr>
-          <a:lstStyle xmlns:a="http://schemas.openxmlformats.org/drawingml/2006/main"/>
-          <a:p xmlns:a="http://schemas.openxmlformats.org/drawingml/2006/main">
-            <a:pPr>
-              <a:defRPr sz="1950" b="0">
-                <a:solidFill>
-                  <a:srgbClr val="142C32"/>
-                </a:solidFill>
-                <a:latin typeface="DejaVu Sans"/>
-                <a:ea typeface="DejaVu Sans"/>
-                <a:cs typeface="DejaVu Sans"/>
-              </a:defRPr>
-            </a:pPr>
-            <a:r>
-              <a:rPr sz="1950" b="0">
-                <a:solidFill>
-                  <a:srgbClr val="142C32"/>
-                </a:solidFill>
-                <a:latin typeface="DejaVu Sans"/>
-                <a:ea typeface="DejaVu Sans"/>
-                <a:cs typeface="DejaVu Sans"/>
-              </a:rPr>
-              <a:t>Correo con PDF y SMS con enlace seguro al ticket.</a:t>
+                  <a:srgbClr val="53666B"/>
+                </a:solidFill>
+                <a:latin typeface="DejaVu Sans"/>
+                <a:ea typeface="DejaVu Sans"/>
+                <a:cs typeface="DejaVu Sans"/>
+              </a:rPr>
+              <a:t>Ambas aplicaciones comparten las mismas reglas y existencias</a:t>
             </a:r>
           </a:p>
         </p:txBody>
@@ -8472,7 +9797,7 @@
     </p:spTree>
     <p:extLst>
       <p:ext uri="{BB962C8B-B14F-4D97-AF65-F5344CB8AC3E}">
-        <p14:creationId xmlns:p14="http://schemas.microsoft.com/office/powerpoint/2010/main" val="434149885"/>
+        <p14:creationId xmlns:p14="http://schemas.microsoft.com/office/powerpoint/2010/main" val="1589006522"/>
       </p:ext>
     </p:extLst>
   </p:cSld>
@@ -8503,7 +9828,7 @@
           <p:cNvPr id="13" name="">
             <a:extLst xmlns:a="http://schemas.openxmlformats.org/drawingml/2006/main">
               <a:ext uri="{FF2B5EF4-FFF2-40B4-BE49-F238E27FC236}">
-                <a16:creationId xmlns:a16="http://schemas.microsoft.com/office/drawing/2014/main" id="{5F2D531B-44CC-4BFC-8D76-B8190619D0F4}"/>
+                <a16:creationId xmlns:a16="http://schemas.microsoft.com/office/drawing/2014/main" id="{D1164D8B-8C50-4EB4-9610-B25D3E0B6F59}"/>
               </a:ext>
             </a:extLst>
           </p:cNvPr>
@@ -8560,7 +9885,7 @@
           <p:cNvPr id="2" name="">
             <a:extLst xmlns:a="http://schemas.openxmlformats.org/drawingml/2006/main">
               <a:ext uri="{FF2B5EF4-FFF2-40B4-BE49-F238E27FC236}">
-                <a16:creationId xmlns:a16="http://schemas.microsoft.com/office/drawing/2014/main" id="{898BE34F-1E6A-435B-AB56-B0567964D7EB}"/>
+                <a16:creationId xmlns:a16="http://schemas.microsoft.com/office/drawing/2014/main" id="{BBA3DB97-2B7D-4BDB-9416-94FE744CEDFB}"/>
               </a:ext>
             </a:extLst>
           </p:cNvPr>
@@ -8617,7 +9942,7 @@
           <p:cNvPr id="3" name="">
             <a:extLst xmlns:a="http://schemas.openxmlformats.org/drawingml/2006/main">
               <a:ext uri="{FF2B5EF4-FFF2-40B4-BE49-F238E27FC236}">
-                <a16:creationId xmlns:a16="http://schemas.microsoft.com/office/drawing/2014/main" id="{6BE156D4-5C2E-47DD-BA13-5D9DD4FAD8DA}"/>
+                <a16:creationId xmlns:a16="http://schemas.microsoft.com/office/drawing/2014/main" id="{DCC611BB-9CF0-4115-A35C-36C0F9CAEE6B}"/>
               </a:ext>
             </a:extLst>
           </p:cNvPr>
@@ -8674,7 +9999,7 @@
           <p:cNvPr id="4" name="">
             <a:extLst xmlns:a="http://schemas.openxmlformats.org/drawingml/2006/main">
               <a:ext uri="{FF2B5EF4-FFF2-40B4-BE49-F238E27FC236}">
-                <a16:creationId xmlns:a16="http://schemas.microsoft.com/office/drawing/2014/main" id="{44BA3681-3DBF-4DA7-968E-E3C00305D87D}"/>
+                <a16:creationId xmlns:a16="http://schemas.microsoft.com/office/drawing/2014/main" id="{B3C76D6C-A518-4029-A796-C7496F313839}"/>
               </a:ext>
             </a:extLst>
           </p:cNvPr>
@@ -8731,7 +10056,7 @@
           <p:cNvPr id="5" name="">
             <a:extLst xmlns:a="http://schemas.openxmlformats.org/drawingml/2006/main">
               <a:ext uri="{FF2B5EF4-FFF2-40B4-BE49-F238E27FC236}">
-                <a16:creationId xmlns:a16="http://schemas.microsoft.com/office/drawing/2014/main" id="{63558F0B-EC71-4407-9CAF-8F6594D95FCD}"/>
+                <a16:creationId xmlns:a16="http://schemas.microsoft.com/office/drawing/2014/main" id="{5C5D34DE-0682-478E-961E-C97B9A26ABA5}"/>
               </a:ext>
             </a:extLst>
           </p:cNvPr>
@@ -8788,7 +10113,7 @@
           <p:cNvPr id="6" name="">
             <a:extLst xmlns:a="http://schemas.openxmlformats.org/drawingml/2006/main">
               <a:ext uri="{FF2B5EF4-FFF2-40B4-BE49-F238E27FC236}">
-                <a16:creationId xmlns:a16="http://schemas.microsoft.com/office/drawing/2014/main" id="{DA39FCB2-394B-46E4-A350-E419BBA8357A}"/>
+                <a16:creationId xmlns:a16="http://schemas.microsoft.com/office/drawing/2014/main" id="{42A473AB-2600-414F-A089-AE283E2F2A03}"/>
               </a:ext>
             </a:extLst>
           </p:cNvPr>
@@ -8845,7 +10170,7 @@
           <p:cNvPr id="7" name="">
             <a:extLst xmlns:a="http://schemas.openxmlformats.org/drawingml/2006/main">
               <a:ext uri="{FF2B5EF4-FFF2-40B4-BE49-F238E27FC236}">
-                <a16:creationId xmlns:a16="http://schemas.microsoft.com/office/drawing/2014/main" id="{A87FC887-06B8-4DE6-9887-2286BB8CE3E5}"/>
+                <a16:creationId xmlns:a16="http://schemas.microsoft.com/office/drawing/2014/main" id="{34BE823C-4B60-4022-9861-8EFE99A24E36}"/>
               </a:ext>
             </a:extLst>
           </p:cNvPr>
@@ -8902,7 +10227,7 @@
           <p:cNvPr id="8" name="">
             <a:extLst xmlns:a="http://schemas.openxmlformats.org/drawingml/2006/main">
               <a:ext uri="{FF2B5EF4-FFF2-40B4-BE49-F238E27FC236}">
-                <a16:creationId xmlns:a16="http://schemas.microsoft.com/office/drawing/2014/main" id="{01122A48-645D-487A-95BE-597B572C877B}"/>
+                <a16:creationId xmlns:a16="http://schemas.microsoft.com/office/drawing/2014/main" id="{540B84AB-8239-489E-9BAC-A941579B8A0F}"/>
               </a:ext>
             </a:extLst>
           </p:cNvPr>
@@ -8959,7 +10284,7 @@
           <p:cNvPr id="9" name="">
             <a:extLst xmlns:a="http://schemas.openxmlformats.org/drawingml/2006/main">
               <a:ext uri="{FF2B5EF4-FFF2-40B4-BE49-F238E27FC236}">
-                <a16:creationId xmlns:a16="http://schemas.microsoft.com/office/drawing/2014/main" id="{2C8D3097-7A17-4901-93CD-AC74EF0F4D33}"/>
+                <a16:creationId xmlns:a16="http://schemas.microsoft.com/office/drawing/2014/main" id="{AF8F09B2-4F50-4C58-93D1-32DC1333F034}"/>
               </a:ext>
             </a:extLst>
           </p:cNvPr>
@@ -9016,7 +10341,7 @@
           <p:cNvPr id="10" name="">
             <a:extLst xmlns:a="http://schemas.openxmlformats.org/drawingml/2006/main">
               <a:ext uri="{FF2B5EF4-FFF2-40B4-BE49-F238E27FC236}">
-                <a16:creationId xmlns:a16="http://schemas.microsoft.com/office/drawing/2014/main" id="{F6948376-5AD4-4EC6-A034-49CB7F574B02}"/>
+                <a16:creationId xmlns:a16="http://schemas.microsoft.com/office/drawing/2014/main" id="{6E506C88-2337-403A-9DF9-2B0D8CF799F5}"/>
               </a:ext>
             </a:extLst>
           </p:cNvPr>
@@ -9073,7 +10398,7 @@
           <p:cNvPr id="11" name="">
             <a:extLst xmlns:a="http://schemas.openxmlformats.org/drawingml/2006/main">
               <a:ext uri="{FF2B5EF4-FFF2-40B4-BE49-F238E27FC236}">
-                <a16:creationId xmlns:a16="http://schemas.microsoft.com/office/drawing/2014/main" id="{82BA6487-9FF9-429A-98CC-AE540FEBA24F}"/>
+                <a16:creationId xmlns:a16="http://schemas.microsoft.com/office/drawing/2014/main" id="{4D08E2D5-3784-4C25-A5BB-3E8482B014F0}"/>
               </a:ext>
             </a:extLst>
           </p:cNvPr>
@@ -9130,7 +10455,7 @@
           <p:cNvPr id="12" name="">
             <a:extLst xmlns:a="http://schemas.openxmlformats.org/drawingml/2006/main">
               <a:ext uri="{FF2B5EF4-FFF2-40B4-BE49-F238E27FC236}">
-                <a16:creationId xmlns:a16="http://schemas.microsoft.com/office/drawing/2014/main" id="{2189BC60-EB1C-48E7-851E-E38F0A9D50ED}"/>
+                <a16:creationId xmlns:a16="http://schemas.microsoft.com/office/drawing/2014/main" id="{249959B3-45B5-4CB1-9F1A-52D92E302DE1}"/>
               </a:ext>
             </a:extLst>
           </p:cNvPr>
@@ -9185,7 +10510,7 @@
     </p:spTree>
     <p:extLst>
       <p:ext uri="{BB962C8B-B14F-4D97-AF65-F5344CB8AC3E}">
-        <p14:creationId xmlns:p14="http://schemas.microsoft.com/office/powerpoint/2010/main" val="516214401"/>
+        <p14:creationId xmlns:p14="http://schemas.microsoft.com/office/powerpoint/2010/main" val="844819502"/>
       </p:ext>
     </p:extLst>
   </p:cSld>
@@ -9213,10 +10538,10 @@
       </p:grpSpPr>
       <p:sp>
         <p:nvSpPr>
-          <p:cNvPr id="18" name="">
-            <a:extLst xmlns:a="http://schemas.openxmlformats.org/drawingml/2006/main">
-              <a:ext uri="{FF2B5EF4-FFF2-40B4-BE49-F238E27FC236}">
-                <a16:creationId xmlns:a16="http://schemas.microsoft.com/office/drawing/2014/main" id="{1C968525-BA85-40AD-BD55-1BB065970F20}"/>
+          <p:cNvPr id="24" name="">
+            <a:extLst xmlns:a="http://schemas.openxmlformats.org/drawingml/2006/main">
+              <a:ext uri="{FF2B5EF4-FFF2-40B4-BE49-F238E27FC236}">
+                <a16:creationId xmlns:a16="http://schemas.microsoft.com/office/drawing/2014/main" id="{899FE0B7-3C2A-427C-B5C1-A5D2F2B7B539}"/>
               </a:ext>
             </a:extLst>
           </p:cNvPr>
@@ -9273,7 +10598,7 @@
           <p:cNvPr id="2" name="">
             <a:extLst xmlns:a="http://schemas.openxmlformats.org/drawingml/2006/main">
               <a:ext uri="{FF2B5EF4-FFF2-40B4-BE49-F238E27FC236}">
-                <a16:creationId xmlns:a16="http://schemas.microsoft.com/office/drawing/2014/main" id="{68BB5E51-A8D0-486A-A43B-50D24761DA8A}"/>
+                <a16:creationId xmlns:a16="http://schemas.microsoft.com/office/drawing/2014/main" id="{06921698-1959-480C-893C-7AAE0CD0E092}"/>
               </a:ext>
             </a:extLst>
           </p:cNvPr>
@@ -9330,93 +10655,68 @@
           <p:cNvPr id="3" name="">
             <a:extLst xmlns:a="http://schemas.openxmlformats.org/drawingml/2006/main">
               <a:ext uri="{FF2B5EF4-FFF2-40B4-BE49-F238E27FC236}">
-                <a16:creationId xmlns:a16="http://schemas.microsoft.com/office/drawing/2014/main" id="{A2FC408F-3934-46F4-A257-DB1FE0B81ED7}"/>
-              </a:ext>
-            </a:extLst>
-          </p:cNvPr>
-          <p:cNvSpPr>
-            <a:spLocks xmlns:a="http://schemas.openxmlformats.org/drawingml/2006/main" noGrp="1"/>
-          </p:cNvSpPr>
-          <p:nvPr/>
-        </p:nvSpPr>
-        <p:spPr>
-          <a:xfrm xmlns:a="http://schemas.openxmlformats.org/drawingml/2006/main">
-            <a:off x="666750" y="1647825"/>
-            <a:ext cx="762000" cy="571500"/>
-          </a:xfrm>
-          <a:prstGeom xmlns:a="http://schemas.openxmlformats.org/drawingml/2006/main" prst="rect">
-            <a:avLst/>
-          </a:prstGeom>
-          <a:noFill xmlns:a="http://schemas.openxmlformats.org/drawingml/2006/main"/>
-          <a:ln xmlns:a="http://schemas.openxmlformats.org/drawingml/2006/main" w="0">
-            <a:noFill/>
-          </a:ln>
-        </p:spPr>
-        <p:txBody>
-          <a:bodyPr xmlns:a="http://schemas.openxmlformats.org/drawingml/2006/main">
-            <a:noAutofit/>
-          </a:bodyPr>
-          <a:lstStyle xmlns:a="http://schemas.openxmlformats.org/drawingml/2006/main"/>
-          <a:p xmlns:a="http://schemas.openxmlformats.org/drawingml/2006/main">
-            <a:pPr>
-              <a:defRPr sz="3150" b="1">
-                <a:solidFill>
-                  <a:srgbClr val="D99A32"/>
-                </a:solidFill>
-                <a:latin typeface="DejaVu Sans"/>
-                <a:ea typeface="DejaVu Sans"/>
-                <a:cs typeface="DejaVu Sans"/>
-              </a:defRPr>
-            </a:pPr>
-            <a:r>
-              <a:rPr sz="3150" b="1">
-                <a:solidFill>
-                  <a:srgbClr val="D99A32"/>
-                </a:solidFill>
-                <a:latin typeface="DejaVu Sans"/>
-                <a:ea typeface="DejaVu Sans"/>
-                <a:cs typeface="DejaVu Sans"/>
-              </a:rPr>
-              <a:t>01</a:t>
-            </a:r>
-          </a:p>
-        </p:txBody>
+                <a16:creationId xmlns:a16="http://schemas.microsoft.com/office/drawing/2014/main" id="{691B811B-2462-4431-912E-224B45F50A44}"/>
+              </a:ext>
+            </a:extLst>
+          </p:cNvPr>
+          <p:cNvSpPr>
+            <a:spLocks xmlns:a="http://schemas.openxmlformats.org/drawingml/2006/main" noGrp="1"/>
+          </p:cNvSpPr>
+          <p:nvPr/>
+        </p:nvSpPr>
+        <p:spPr>
+          <a:xfrm xmlns:a="http://schemas.openxmlformats.org/drawingml/2006/main">
+            <a:off x="619125" y="2619375"/>
+            <a:ext cx="2000250" cy="1571625"/>
+          </a:xfrm>
+          <a:prstGeom xmlns:a="http://schemas.openxmlformats.org/drawingml/2006/main" prst="rect">
+            <a:avLst/>
+          </a:prstGeom>
+          <a:solidFill xmlns:a="http://schemas.openxmlformats.org/drawingml/2006/main">
+            <a:srgbClr val="E7EDE7"/>
+          </a:solidFill>
+          <a:ln xmlns:a="http://schemas.openxmlformats.org/drawingml/2006/main" w="19050">
+            <a:solidFill>
+              <a:srgbClr val="173D35"/>
+            </a:solidFill>
+          </a:ln>
+        </p:spPr>
       </p:sp>
       <p:sp>
         <p:nvSpPr>
           <p:cNvPr id="4" name="">
             <a:extLst xmlns:a="http://schemas.openxmlformats.org/drawingml/2006/main">
               <a:ext uri="{FF2B5EF4-FFF2-40B4-BE49-F238E27FC236}">
-                <a16:creationId xmlns:a16="http://schemas.microsoft.com/office/drawing/2014/main" id="{1F658320-93D9-474D-A8CB-253C9D98263A}"/>
-              </a:ext>
-            </a:extLst>
-          </p:cNvPr>
-          <p:cNvSpPr>
-            <a:spLocks xmlns:a="http://schemas.openxmlformats.org/drawingml/2006/main" noGrp="1"/>
-          </p:cNvSpPr>
-          <p:nvPr/>
-        </p:nvSpPr>
-        <p:spPr>
-          <a:xfrm xmlns:a="http://schemas.openxmlformats.org/drawingml/2006/main">
-            <a:off x="1714500" y="1676400"/>
-            <a:ext cx="2619375" cy="514350"/>
-          </a:xfrm>
-          <a:prstGeom xmlns:a="http://schemas.openxmlformats.org/drawingml/2006/main" prst="rect">
-            <a:avLst/>
-          </a:prstGeom>
-          <a:noFill xmlns:a="http://schemas.openxmlformats.org/drawingml/2006/main"/>
-          <a:ln xmlns:a="http://schemas.openxmlformats.org/drawingml/2006/main" w="0">
-            <a:noFill/>
-          </a:ln>
-        </p:spPr>
-        <p:txBody>
-          <a:bodyPr xmlns:a="http://schemas.openxmlformats.org/drawingml/2006/main">
-            <a:noAutofit/>
-          </a:bodyPr>
-          <a:lstStyle xmlns:a="http://schemas.openxmlformats.org/drawingml/2006/main"/>
-          <a:p xmlns:a="http://schemas.openxmlformats.org/drawingml/2006/main">
-            <a:pPr>
-              <a:defRPr sz="2175" b="1">
+                <a16:creationId xmlns:a16="http://schemas.microsoft.com/office/drawing/2014/main" id="{5C7D9E2F-D7AC-44D6-843C-AFDE04C2945C}"/>
+              </a:ext>
+            </a:extLst>
+          </p:cNvPr>
+          <p:cNvSpPr>
+            <a:spLocks xmlns:a="http://schemas.openxmlformats.org/drawingml/2006/main" noGrp="1"/>
+          </p:cNvSpPr>
+          <p:nvPr/>
+        </p:nvSpPr>
+        <p:spPr>
+          <a:xfrm xmlns:a="http://schemas.openxmlformats.org/drawingml/2006/main">
+            <a:off x="695325" y="2790825"/>
+            <a:ext cx="1847850" cy="438150"/>
+          </a:xfrm>
+          <a:prstGeom xmlns:a="http://schemas.openxmlformats.org/drawingml/2006/main" prst="rect">
+            <a:avLst/>
+          </a:prstGeom>
+          <a:noFill xmlns:a="http://schemas.openxmlformats.org/drawingml/2006/main"/>
+          <a:ln xmlns:a="http://schemas.openxmlformats.org/drawingml/2006/main" w="0">
+            <a:noFill/>
+          </a:ln>
+        </p:spPr>
+        <p:txBody>
+          <a:bodyPr xmlns:a="http://schemas.openxmlformats.org/drawingml/2006/main">
+            <a:noAutofit/>
+          </a:bodyPr>
+          <a:lstStyle xmlns:a="http://schemas.openxmlformats.org/drawingml/2006/main"/>
+          <a:p xmlns:a="http://schemas.openxmlformats.org/drawingml/2006/main">
+            <a:pPr>
+              <a:defRPr sz="1800" b="1">
                 <a:solidFill>
                   <a:srgbClr val="173D35"/>
                 </a:solidFill>
@@ -9426,7 +10726,7 @@
               </a:defRPr>
             </a:pPr>
             <a:r>
-              <a:rPr sz="2175" b="1">
+              <a:rPr sz="1800" b="1">
                 <a:solidFill>
                   <a:srgbClr val="173D35"/>
                 </a:solidFill>
@@ -9444,54 +10744,54 @@
           <p:cNvPr id="5" name="">
             <a:extLst xmlns:a="http://schemas.openxmlformats.org/drawingml/2006/main">
               <a:ext uri="{FF2B5EF4-FFF2-40B4-BE49-F238E27FC236}">
-                <a16:creationId xmlns:a16="http://schemas.microsoft.com/office/drawing/2014/main" id="{4C32B5CF-7ED2-43B2-B828-8317D73685EA}"/>
-              </a:ext>
-            </a:extLst>
-          </p:cNvPr>
-          <p:cNvSpPr>
-            <a:spLocks xmlns:a="http://schemas.openxmlformats.org/drawingml/2006/main" noGrp="1"/>
-          </p:cNvSpPr>
-          <p:nvPr/>
-        </p:nvSpPr>
-        <p:spPr>
-          <a:xfrm xmlns:a="http://schemas.openxmlformats.org/drawingml/2006/main">
-            <a:off x="4619625" y="1714500"/>
-            <a:ext cx="6858000" cy="628650"/>
-          </a:xfrm>
-          <a:prstGeom xmlns:a="http://schemas.openxmlformats.org/drawingml/2006/main" prst="rect">
-            <a:avLst/>
-          </a:prstGeom>
-          <a:noFill xmlns:a="http://schemas.openxmlformats.org/drawingml/2006/main"/>
-          <a:ln xmlns:a="http://schemas.openxmlformats.org/drawingml/2006/main" w="0">
-            <a:noFill/>
-          </a:ln>
-        </p:spPr>
-        <p:txBody>
-          <a:bodyPr xmlns:a="http://schemas.openxmlformats.org/drawingml/2006/main">
-            <a:noAutofit/>
-          </a:bodyPr>
-          <a:lstStyle xmlns:a="http://schemas.openxmlformats.org/drawingml/2006/main"/>
-          <a:p xmlns:a="http://schemas.openxmlformats.org/drawingml/2006/main">
-            <a:pPr>
-              <a:defRPr sz="2025" b="0">
-                <a:solidFill>
-                  <a:srgbClr val="142C32"/>
-                </a:solidFill>
-                <a:latin typeface="DejaVu Sans"/>
-                <a:ea typeface="DejaVu Sans"/>
-                <a:cs typeface="DejaVu Sans"/>
-              </a:defRPr>
-            </a:pPr>
-            <a:r>
-              <a:rPr sz="2025" b="0">
-                <a:solidFill>
-                  <a:srgbClr val="142C32"/>
-                </a:solidFill>
-                <a:latin typeface="DejaVu Sans"/>
-                <a:ea typeface="DejaVu Sans"/>
-                <a:cs typeface="DejaVu Sans"/>
-              </a:rPr>
-              <a:t>Empleado, vehículo y combustible</a:t>
+                <a16:creationId xmlns:a16="http://schemas.microsoft.com/office/drawing/2014/main" id="{2DA5F562-49EC-4A5D-834C-447AE260B111}"/>
+              </a:ext>
+            </a:extLst>
+          </p:cNvPr>
+          <p:cNvSpPr>
+            <a:spLocks xmlns:a="http://schemas.openxmlformats.org/drawingml/2006/main" noGrp="1"/>
+          </p:cNvSpPr>
+          <p:nvPr/>
+        </p:nvSpPr>
+        <p:spPr>
+          <a:xfrm xmlns:a="http://schemas.openxmlformats.org/drawingml/2006/main">
+            <a:off x="695325" y="3305175"/>
+            <a:ext cx="1847850" cy="847725"/>
+          </a:xfrm>
+          <a:prstGeom xmlns:a="http://schemas.openxmlformats.org/drawingml/2006/main" prst="rect">
+            <a:avLst/>
+          </a:prstGeom>
+          <a:noFill xmlns:a="http://schemas.openxmlformats.org/drawingml/2006/main"/>
+          <a:ln xmlns:a="http://schemas.openxmlformats.org/drawingml/2006/main" w="0">
+            <a:noFill/>
+          </a:ln>
+        </p:spPr>
+        <p:txBody>
+          <a:bodyPr xmlns:a="http://schemas.openxmlformats.org/drawingml/2006/main">
+            <a:noAutofit/>
+          </a:bodyPr>
+          <a:lstStyle xmlns:a="http://schemas.openxmlformats.org/drawingml/2006/main"/>
+          <a:p xmlns:a="http://schemas.openxmlformats.org/drawingml/2006/main">
+            <a:pPr>
+              <a:defRPr sz="1725" b="0">
+                <a:solidFill>
+                  <a:srgbClr val="142C32"/>
+                </a:solidFill>
+                <a:latin typeface="DejaVu Sans"/>
+                <a:ea typeface="DejaVu Sans"/>
+                <a:cs typeface="DejaVu Sans"/>
+              </a:defRPr>
+            </a:pPr>
+            <a:r>
+              <a:rPr sz="1725" b="0">
+                <a:solidFill>
+                  <a:srgbClr val="142C32"/>
+                </a:solidFill>
+                <a:latin typeface="DejaVu Sans"/>
+                <a:ea typeface="DejaVu Sans"/>
+                <a:cs typeface="DejaVu Sans"/>
+              </a:rPr>
+              <a:t>Empleado y vehículo</a:t>
             </a:r>
           </a:p>
         </p:txBody>
@@ -9501,93 +10801,68 @@
           <p:cNvPr id="6" name="">
             <a:extLst xmlns:a="http://schemas.openxmlformats.org/drawingml/2006/main">
               <a:ext uri="{FF2B5EF4-FFF2-40B4-BE49-F238E27FC236}">
-                <a16:creationId xmlns:a16="http://schemas.microsoft.com/office/drawing/2014/main" id="{928181FA-6562-4836-BECD-2A9B12F448DD}"/>
-              </a:ext>
-            </a:extLst>
-          </p:cNvPr>
-          <p:cNvSpPr>
-            <a:spLocks xmlns:a="http://schemas.openxmlformats.org/drawingml/2006/main" noGrp="1"/>
-          </p:cNvSpPr>
-          <p:nvPr/>
-        </p:nvSpPr>
-        <p:spPr>
-          <a:xfrm xmlns:a="http://schemas.openxmlformats.org/drawingml/2006/main">
-            <a:off x="666750" y="2524125"/>
-            <a:ext cx="762000" cy="571500"/>
-          </a:xfrm>
-          <a:prstGeom xmlns:a="http://schemas.openxmlformats.org/drawingml/2006/main" prst="rect">
-            <a:avLst/>
-          </a:prstGeom>
-          <a:noFill xmlns:a="http://schemas.openxmlformats.org/drawingml/2006/main"/>
-          <a:ln xmlns:a="http://schemas.openxmlformats.org/drawingml/2006/main" w="0">
-            <a:noFill/>
-          </a:ln>
-        </p:spPr>
-        <p:txBody>
-          <a:bodyPr xmlns:a="http://schemas.openxmlformats.org/drawingml/2006/main">
-            <a:noAutofit/>
-          </a:bodyPr>
-          <a:lstStyle xmlns:a="http://schemas.openxmlformats.org/drawingml/2006/main"/>
-          <a:p xmlns:a="http://schemas.openxmlformats.org/drawingml/2006/main">
-            <a:pPr>
-              <a:defRPr sz="3150" b="1">
-                <a:solidFill>
-                  <a:srgbClr val="D99A32"/>
-                </a:solidFill>
-                <a:latin typeface="DejaVu Sans"/>
-                <a:ea typeface="DejaVu Sans"/>
-                <a:cs typeface="DejaVu Sans"/>
-              </a:defRPr>
-            </a:pPr>
-            <a:r>
-              <a:rPr sz="3150" b="1">
-                <a:solidFill>
-                  <a:srgbClr val="D99A32"/>
-                </a:solidFill>
-                <a:latin typeface="DejaVu Sans"/>
-                <a:ea typeface="DejaVu Sans"/>
-                <a:cs typeface="DejaVu Sans"/>
-              </a:rPr>
-              <a:t>02</a:t>
-            </a:r>
-          </a:p>
-        </p:txBody>
+                <a16:creationId xmlns:a16="http://schemas.microsoft.com/office/drawing/2014/main" id="{A731F405-5BB5-4E4C-A5AE-CB465505E9BE}"/>
+              </a:ext>
+            </a:extLst>
+          </p:cNvPr>
+          <p:cNvSpPr>
+            <a:spLocks xmlns:a="http://schemas.openxmlformats.org/drawingml/2006/main" noGrp="1"/>
+          </p:cNvSpPr>
+          <p:nvPr/>
+        </p:nvSpPr>
+        <p:spPr>
+          <a:xfrm xmlns:a="http://schemas.openxmlformats.org/drawingml/2006/main">
+            <a:off x="2857500" y="2619375"/>
+            <a:ext cx="2000250" cy="1571625"/>
+          </a:xfrm>
+          <a:prstGeom xmlns:a="http://schemas.openxmlformats.org/drawingml/2006/main" prst="rect">
+            <a:avLst/>
+          </a:prstGeom>
+          <a:solidFill xmlns:a="http://schemas.openxmlformats.org/drawingml/2006/main">
+            <a:srgbClr val="E7EDE7"/>
+          </a:solidFill>
+          <a:ln xmlns:a="http://schemas.openxmlformats.org/drawingml/2006/main" w="19050">
+            <a:solidFill>
+              <a:srgbClr val="173D35"/>
+            </a:solidFill>
+          </a:ln>
+        </p:spPr>
       </p:sp>
       <p:sp>
         <p:nvSpPr>
           <p:cNvPr id="7" name="">
             <a:extLst xmlns:a="http://schemas.openxmlformats.org/drawingml/2006/main">
               <a:ext uri="{FF2B5EF4-FFF2-40B4-BE49-F238E27FC236}">
-                <a16:creationId xmlns:a16="http://schemas.microsoft.com/office/drawing/2014/main" id="{D1BB684C-92CB-4BC1-B932-67DC31A16C11}"/>
-              </a:ext>
-            </a:extLst>
-          </p:cNvPr>
-          <p:cNvSpPr>
-            <a:spLocks xmlns:a="http://schemas.openxmlformats.org/drawingml/2006/main" noGrp="1"/>
-          </p:cNvSpPr>
-          <p:nvPr/>
-        </p:nvSpPr>
-        <p:spPr>
-          <a:xfrm xmlns:a="http://schemas.openxmlformats.org/drawingml/2006/main">
-            <a:off x="1714500" y="2552700"/>
-            <a:ext cx="2619375" cy="514350"/>
-          </a:xfrm>
-          <a:prstGeom xmlns:a="http://schemas.openxmlformats.org/drawingml/2006/main" prst="rect">
-            <a:avLst/>
-          </a:prstGeom>
-          <a:noFill xmlns:a="http://schemas.openxmlformats.org/drawingml/2006/main"/>
-          <a:ln xmlns:a="http://schemas.openxmlformats.org/drawingml/2006/main" w="0">
-            <a:noFill/>
-          </a:ln>
-        </p:spPr>
-        <p:txBody>
-          <a:bodyPr xmlns:a="http://schemas.openxmlformats.org/drawingml/2006/main">
-            <a:noAutofit/>
-          </a:bodyPr>
-          <a:lstStyle xmlns:a="http://schemas.openxmlformats.org/drawingml/2006/main"/>
-          <a:p xmlns:a="http://schemas.openxmlformats.org/drawingml/2006/main">
-            <a:pPr>
-              <a:defRPr sz="2175" b="1">
+                <a16:creationId xmlns:a16="http://schemas.microsoft.com/office/drawing/2014/main" id="{19C1D7DF-94A4-4434-95D0-92E855AD478A}"/>
+              </a:ext>
+            </a:extLst>
+          </p:cNvPr>
+          <p:cNvSpPr>
+            <a:spLocks xmlns:a="http://schemas.openxmlformats.org/drawingml/2006/main" noGrp="1"/>
+          </p:cNvSpPr>
+          <p:nvPr/>
+        </p:nvSpPr>
+        <p:spPr>
+          <a:xfrm xmlns:a="http://schemas.openxmlformats.org/drawingml/2006/main">
+            <a:off x="2933700" y="2790825"/>
+            <a:ext cx="1847850" cy="438150"/>
+          </a:xfrm>
+          <a:prstGeom xmlns:a="http://schemas.openxmlformats.org/drawingml/2006/main" prst="rect">
+            <a:avLst/>
+          </a:prstGeom>
+          <a:noFill xmlns:a="http://schemas.openxmlformats.org/drawingml/2006/main"/>
+          <a:ln xmlns:a="http://schemas.openxmlformats.org/drawingml/2006/main" w="0">
+            <a:noFill/>
+          </a:ln>
+        </p:spPr>
+        <p:txBody>
+          <a:bodyPr xmlns:a="http://schemas.openxmlformats.org/drawingml/2006/main">
+            <a:noAutofit/>
+          </a:bodyPr>
+          <a:lstStyle xmlns:a="http://schemas.openxmlformats.org/drawingml/2006/main"/>
+          <a:p xmlns:a="http://schemas.openxmlformats.org/drawingml/2006/main">
+            <a:pPr>
+              <a:defRPr sz="1800" b="1">
                 <a:solidFill>
                   <a:srgbClr val="173D35"/>
                 </a:solidFill>
@@ -9597,7 +10872,7 @@
               </a:defRPr>
             </a:pPr>
             <a:r>
-              <a:rPr sz="2175" b="1">
+              <a:rPr sz="1800" b="1">
                 <a:solidFill>
                   <a:srgbClr val="173D35"/>
                 </a:solidFill>
@@ -9615,150 +10890,150 @@
           <p:cNvPr id="8" name="">
             <a:extLst xmlns:a="http://schemas.openxmlformats.org/drawingml/2006/main">
               <a:ext uri="{FF2B5EF4-FFF2-40B4-BE49-F238E27FC236}">
-                <a16:creationId xmlns:a16="http://schemas.microsoft.com/office/drawing/2014/main" id="{0F6FCDAA-BA38-46F4-935D-F94599DA7923}"/>
-              </a:ext>
-            </a:extLst>
-          </p:cNvPr>
-          <p:cNvSpPr>
-            <a:spLocks xmlns:a="http://schemas.openxmlformats.org/drawingml/2006/main" noGrp="1"/>
-          </p:cNvSpPr>
-          <p:nvPr/>
-        </p:nvSpPr>
-        <p:spPr>
-          <a:xfrm xmlns:a="http://schemas.openxmlformats.org/drawingml/2006/main">
-            <a:off x="4619625" y="2590800"/>
-            <a:ext cx="6858000" cy="628650"/>
-          </a:xfrm>
-          <a:prstGeom xmlns:a="http://schemas.openxmlformats.org/drawingml/2006/main" prst="rect">
-            <a:avLst/>
-          </a:prstGeom>
-          <a:noFill xmlns:a="http://schemas.openxmlformats.org/drawingml/2006/main"/>
-          <a:ln xmlns:a="http://schemas.openxmlformats.org/drawingml/2006/main" w="0">
-            <a:noFill/>
-          </a:ln>
-        </p:spPr>
-        <p:txBody>
-          <a:bodyPr xmlns:a="http://schemas.openxmlformats.org/drawingml/2006/main">
-            <a:noAutofit/>
-          </a:bodyPr>
-          <a:lstStyle xmlns:a="http://schemas.openxmlformats.org/drawingml/2006/main"/>
-          <a:p xmlns:a="http://schemas.openxmlformats.org/drawingml/2006/main">
-            <a:pPr>
-              <a:defRPr sz="2025" b="0">
-                <a:solidFill>
-                  <a:srgbClr val="142C32"/>
-                </a:solidFill>
-                <a:latin typeface="DejaVu Sans"/>
-                <a:ea typeface="DejaVu Sans"/>
-                <a:cs typeface="DejaVu Sans"/>
-              </a:defRPr>
-            </a:pPr>
-            <a:r>
-              <a:rPr sz="2025" b="0">
-                <a:solidFill>
-                  <a:srgbClr val="142C32"/>
-                </a:solidFill>
-                <a:latin typeface="DejaVu Sans"/>
-                <a:ea typeface="DejaVu Sans"/>
-                <a:cs typeface="DejaVu Sans"/>
-              </a:rPr>
-              <a:t>Cantidad autorizada y vigencia</a:t>
-            </a:r>
-          </a:p>
-        </p:txBody>
-      </p:sp>
-      <p:sp>
-        <p:nvSpPr>
-          <p:cNvPr id="9" name="">
-            <a:extLst xmlns:a="http://schemas.openxmlformats.org/drawingml/2006/main">
-              <a:ext uri="{FF2B5EF4-FFF2-40B4-BE49-F238E27FC236}">
-                <a16:creationId xmlns:a16="http://schemas.microsoft.com/office/drawing/2014/main" id="{D99425C7-A8BE-4C73-8BCC-C8D6C9AC84B6}"/>
-              </a:ext>
-            </a:extLst>
-          </p:cNvPr>
-          <p:cNvSpPr>
-            <a:spLocks xmlns:a="http://schemas.openxmlformats.org/drawingml/2006/main" noGrp="1"/>
-          </p:cNvSpPr>
-          <p:nvPr/>
-        </p:nvSpPr>
-        <p:spPr>
-          <a:xfrm xmlns:a="http://schemas.openxmlformats.org/drawingml/2006/main">
-            <a:off x="666750" y="3400425"/>
-            <a:ext cx="762000" cy="571500"/>
-          </a:xfrm>
-          <a:prstGeom xmlns:a="http://schemas.openxmlformats.org/drawingml/2006/main" prst="rect">
-            <a:avLst/>
-          </a:prstGeom>
-          <a:noFill xmlns:a="http://schemas.openxmlformats.org/drawingml/2006/main"/>
-          <a:ln xmlns:a="http://schemas.openxmlformats.org/drawingml/2006/main" w="0">
-            <a:noFill/>
-          </a:ln>
-        </p:spPr>
-        <p:txBody>
-          <a:bodyPr xmlns:a="http://schemas.openxmlformats.org/drawingml/2006/main">
-            <a:noAutofit/>
-          </a:bodyPr>
-          <a:lstStyle xmlns:a="http://schemas.openxmlformats.org/drawingml/2006/main"/>
-          <a:p xmlns:a="http://schemas.openxmlformats.org/drawingml/2006/main">
-            <a:pPr>
-              <a:defRPr sz="3150" b="1">
-                <a:solidFill>
-                  <a:srgbClr val="D99A32"/>
-                </a:solidFill>
-                <a:latin typeface="DejaVu Sans"/>
-                <a:ea typeface="DejaVu Sans"/>
-                <a:cs typeface="DejaVu Sans"/>
-              </a:defRPr>
-            </a:pPr>
-            <a:r>
-              <a:rPr sz="3150" b="1">
-                <a:solidFill>
-                  <a:srgbClr val="D99A32"/>
-                </a:solidFill>
-                <a:latin typeface="DejaVu Sans"/>
-                <a:ea typeface="DejaVu Sans"/>
-                <a:cs typeface="DejaVu Sans"/>
-              </a:rPr>
-              <a:t>03</a:t>
-            </a:r>
-          </a:p>
-        </p:txBody>
-      </p:sp>
+                <a16:creationId xmlns:a16="http://schemas.microsoft.com/office/drawing/2014/main" id="{C17573E5-5910-40AA-8FB0-2AB5F1E915B1}"/>
+              </a:ext>
+            </a:extLst>
+          </p:cNvPr>
+          <p:cNvSpPr>
+            <a:spLocks xmlns:a="http://schemas.openxmlformats.org/drawingml/2006/main" noGrp="1"/>
+          </p:cNvSpPr>
+          <p:nvPr/>
+        </p:nvSpPr>
+        <p:spPr>
+          <a:xfrm xmlns:a="http://schemas.openxmlformats.org/drawingml/2006/main">
+            <a:off x="2933700" y="3305175"/>
+            <a:ext cx="1847850" cy="847725"/>
+          </a:xfrm>
+          <a:prstGeom xmlns:a="http://schemas.openxmlformats.org/drawingml/2006/main" prst="rect">
+            <a:avLst/>
+          </a:prstGeom>
+          <a:noFill xmlns:a="http://schemas.openxmlformats.org/drawingml/2006/main"/>
+          <a:ln xmlns:a="http://schemas.openxmlformats.org/drawingml/2006/main" w="0">
+            <a:noFill/>
+          </a:ln>
+        </p:spPr>
+        <p:txBody>
+          <a:bodyPr xmlns:a="http://schemas.openxmlformats.org/drawingml/2006/main">
+            <a:noAutofit/>
+          </a:bodyPr>
+          <a:lstStyle xmlns:a="http://schemas.openxmlformats.org/drawingml/2006/main"/>
+          <a:p xmlns:a="http://schemas.openxmlformats.org/drawingml/2006/main">
+            <a:pPr>
+              <a:defRPr sz="1725" b="0">
+                <a:solidFill>
+                  <a:srgbClr val="142C32"/>
+                </a:solidFill>
+                <a:latin typeface="DejaVu Sans"/>
+                <a:ea typeface="DejaVu Sans"/>
+                <a:cs typeface="DejaVu Sans"/>
+              </a:defRPr>
+            </a:pPr>
+            <a:r>
+              <a:rPr sz="1725" b="0">
+                <a:solidFill>
+                  <a:srgbClr val="142C32"/>
+                </a:solidFill>
+                <a:latin typeface="DejaVu Sans"/>
+                <a:ea typeface="DejaVu Sans"/>
+                <a:cs typeface="DejaVu Sans"/>
+              </a:rPr>
+              <a:t>Cantidad y vigencia</a:t>
+            </a:r>
+          </a:p>
+        </p:txBody>
+      </p:sp>
+      <p:cxnSp>
+        <p:nvCxnSpPr>
+          <p:cNvPr id="32" name=""/>
+          <p:cNvCxnSpPr>
+            <a:stCxn xmlns:a="http://schemas.openxmlformats.org/drawingml/2006/main" id="3" idx="3"/>
+            <a:endCxn xmlns:a="http://schemas.openxmlformats.org/drawingml/2006/main" id="6" idx="1"/>
+          </p:cNvCxnSpPr>
+          <p:nvPr/>
+        </p:nvCxnSpPr>
+        <p:spPr>
+          <a:xfrm xmlns:a="http://schemas.openxmlformats.org/drawingml/2006/main">
+            <a:off x="2619375" y="3405188"/>
+            <a:ext cx="238125" cy="0"/>
+          </a:xfrm>
+          <a:prstGeom xmlns:a="http://schemas.openxmlformats.org/drawingml/2006/main" prst="straightConnector1">
+            <a:avLst/>
+          </a:prstGeom>
+          <a:ln xmlns:a="http://schemas.openxmlformats.org/drawingml/2006/main" w="28575">
+            <a:solidFill>
+              <a:srgbClr val="D99A32"/>
+            </a:solidFill>
+            <a:tailEnd type="arrow" w="med" len="med"/>
+          </a:ln>
+        </p:spPr>
+      </p:cxnSp>
       <p:sp>
         <p:nvSpPr>
           <p:cNvPr id="10" name="">
             <a:extLst xmlns:a="http://schemas.openxmlformats.org/drawingml/2006/main">
               <a:ext uri="{FF2B5EF4-FFF2-40B4-BE49-F238E27FC236}">
-                <a16:creationId xmlns:a16="http://schemas.microsoft.com/office/drawing/2014/main" id="{297CD576-3FAF-4BFB-9BEC-4CF09BE3A31A}"/>
-              </a:ext>
-            </a:extLst>
-          </p:cNvPr>
-          <p:cNvSpPr>
-            <a:spLocks xmlns:a="http://schemas.openxmlformats.org/drawingml/2006/main" noGrp="1"/>
-          </p:cNvSpPr>
-          <p:nvPr/>
-        </p:nvSpPr>
-        <p:spPr>
-          <a:xfrm xmlns:a="http://schemas.openxmlformats.org/drawingml/2006/main">
-            <a:off x="1714500" y="3429000"/>
-            <a:ext cx="2619375" cy="514350"/>
-          </a:xfrm>
-          <a:prstGeom xmlns:a="http://schemas.openxmlformats.org/drawingml/2006/main" prst="rect">
-            <a:avLst/>
-          </a:prstGeom>
-          <a:noFill xmlns:a="http://schemas.openxmlformats.org/drawingml/2006/main"/>
-          <a:ln xmlns:a="http://schemas.openxmlformats.org/drawingml/2006/main" w="0">
-            <a:noFill/>
-          </a:ln>
-        </p:spPr>
-        <p:txBody>
-          <a:bodyPr xmlns:a="http://schemas.openxmlformats.org/drawingml/2006/main">
-            <a:noAutofit/>
-          </a:bodyPr>
-          <a:lstStyle xmlns:a="http://schemas.openxmlformats.org/drawingml/2006/main"/>
-          <a:p xmlns:a="http://schemas.openxmlformats.org/drawingml/2006/main">
-            <a:pPr>
-              <a:defRPr sz="2175" b="1">
+                <a16:creationId xmlns:a16="http://schemas.microsoft.com/office/drawing/2014/main" id="{30C1307C-AFEC-425A-AAE0-917B4FC118C2}"/>
+              </a:ext>
+            </a:extLst>
+          </p:cNvPr>
+          <p:cNvSpPr>
+            <a:spLocks xmlns:a="http://schemas.openxmlformats.org/drawingml/2006/main" noGrp="1"/>
+          </p:cNvSpPr>
+          <p:nvPr/>
+        </p:nvSpPr>
+        <p:spPr>
+          <a:xfrm xmlns:a="http://schemas.openxmlformats.org/drawingml/2006/main">
+            <a:off x="5095875" y="2619375"/>
+            <a:ext cx="2000250" cy="1571625"/>
+          </a:xfrm>
+          <a:prstGeom xmlns:a="http://schemas.openxmlformats.org/drawingml/2006/main" prst="rect">
+            <a:avLst/>
+          </a:prstGeom>
+          <a:solidFill xmlns:a="http://schemas.openxmlformats.org/drawingml/2006/main">
+            <a:srgbClr val="E7EDE7"/>
+          </a:solidFill>
+          <a:ln xmlns:a="http://schemas.openxmlformats.org/drawingml/2006/main" w="19050">
+            <a:solidFill>
+              <a:srgbClr val="173D35"/>
+            </a:solidFill>
+          </a:ln>
+        </p:spPr>
+      </p:sp>
+      <p:sp>
+        <p:nvSpPr>
+          <p:cNvPr id="11" name="">
+            <a:extLst xmlns:a="http://schemas.openxmlformats.org/drawingml/2006/main">
+              <a:ext uri="{FF2B5EF4-FFF2-40B4-BE49-F238E27FC236}">
+                <a16:creationId xmlns:a16="http://schemas.microsoft.com/office/drawing/2014/main" id="{055A3FB3-F29B-45A2-B68E-B213FABFF0F4}"/>
+              </a:ext>
+            </a:extLst>
+          </p:cNvPr>
+          <p:cNvSpPr>
+            <a:spLocks xmlns:a="http://schemas.openxmlformats.org/drawingml/2006/main" noGrp="1"/>
+          </p:cNvSpPr>
+          <p:nvPr/>
+        </p:nvSpPr>
+        <p:spPr>
+          <a:xfrm xmlns:a="http://schemas.openxmlformats.org/drawingml/2006/main">
+            <a:off x="5172075" y="2790825"/>
+            <a:ext cx="1847850" cy="438150"/>
+          </a:xfrm>
+          <a:prstGeom xmlns:a="http://schemas.openxmlformats.org/drawingml/2006/main" prst="rect">
+            <a:avLst/>
+          </a:prstGeom>
+          <a:noFill xmlns:a="http://schemas.openxmlformats.org/drawingml/2006/main"/>
+          <a:ln xmlns:a="http://schemas.openxmlformats.org/drawingml/2006/main" w="0">
+            <a:noFill/>
+          </a:ln>
+        </p:spPr>
+        <p:txBody>
+          <a:bodyPr xmlns:a="http://schemas.openxmlformats.org/drawingml/2006/main">
+            <a:noAutofit/>
+          </a:bodyPr>
+          <a:lstStyle xmlns:a="http://schemas.openxmlformats.org/drawingml/2006/main"/>
+          <a:p xmlns:a="http://schemas.openxmlformats.org/drawingml/2006/main">
+            <a:pPr>
+              <a:defRPr sz="1800" b="1">
                 <a:solidFill>
                   <a:srgbClr val="173D35"/>
                 </a:solidFill>
@@ -9768,7 +11043,7 @@
               </a:defRPr>
             </a:pPr>
             <a:r>
-              <a:rPr sz="2175" b="1">
+              <a:rPr sz="1800" b="1">
                 <a:solidFill>
                   <a:srgbClr val="173D35"/>
                 </a:solidFill>
@@ -9783,153 +11058,153 @@
       </p:sp>
       <p:sp>
         <p:nvSpPr>
-          <p:cNvPr id="11" name="">
-            <a:extLst xmlns:a="http://schemas.openxmlformats.org/drawingml/2006/main">
-              <a:ext uri="{FF2B5EF4-FFF2-40B4-BE49-F238E27FC236}">
-                <a16:creationId xmlns:a16="http://schemas.microsoft.com/office/drawing/2014/main" id="{8B21131F-6970-466E-BBC3-3B1CBF1A8BBE}"/>
-              </a:ext>
-            </a:extLst>
-          </p:cNvPr>
-          <p:cNvSpPr>
-            <a:spLocks xmlns:a="http://schemas.openxmlformats.org/drawingml/2006/main" noGrp="1"/>
-          </p:cNvSpPr>
-          <p:nvPr/>
-        </p:nvSpPr>
-        <p:spPr>
-          <a:xfrm xmlns:a="http://schemas.openxmlformats.org/drawingml/2006/main">
-            <a:off x="4619625" y="3467100"/>
-            <a:ext cx="6858000" cy="628650"/>
-          </a:xfrm>
-          <a:prstGeom xmlns:a="http://schemas.openxmlformats.org/drawingml/2006/main" prst="rect">
-            <a:avLst/>
-          </a:prstGeom>
-          <a:noFill xmlns:a="http://schemas.openxmlformats.org/drawingml/2006/main"/>
-          <a:ln xmlns:a="http://schemas.openxmlformats.org/drawingml/2006/main" w="0">
-            <a:noFill/>
-          </a:ln>
-        </p:spPr>
-        <p:txBody>
-          <a:bodyPr xmlns:a="http://schemas.openxmlformats.org/drawingml/2006/main">
-            <a:noAutofit/>
-          </a:bodyPr>
-          <a:lstStyle xmlns:a="http://schemas.openxmlformats.org/drawingml/2006/main"/>
-          <a:p xmlns:a="http://schemas.openxmlformats.org/drawingml/2006/main">
-            <a:pPr>
-              <a:defRPr sz="2025" b="0">
-                <a:solidFill>
-                  <a:srgbClr val="142C32"/>
-                </a:solidFill>
-                <a:latin typeface="DejaVu Sans"/>
-                <a:ea typeface="DejaVu Sans"/>
-                <a:cs typeface="DejaVu Sans"/>
-              </a:defRPr>
-            </a:pPr>
-            <a:r>
-              <a:rPr sz="2025" b="0">
-                <a:solidFill>
-                  <a:srgbClr val="142C32"/>
-                </a:solidFill>
-                <a:latin typeface="DejaVu Sans"/>
-                <a:ea typeface="DejaVu Sans"/>
-                <a:cs typeface="DejaVu Sans"/>
-              </a:rPr>
-              <a:t>Identificador único y QR firmado</a:t>
-            </a:r>
-          </a:p>
-        </p:txBody>
-      </p:sp>
-      <p:sp>
-        <p:nvSpPr>
           <p:cNvPr id="12" name="">
             <a:extLst xmlns:a="http://schemas.openxmlformats.org/drawingml/2006/main">
               <a:ext uri="{FF2B5EF4-FFF2-40B4-BE49-F238E27FC236}">
-                <a16:creationId xmlns:a16="http://schemas.microsoft.com/office/drawing/2014/main" id="{3FF57910-8D33-456F-A25A-238665E3F195}"/>
-              </a:ext>
-            </a:extLst>
-          </p:cNvPr>
-          <p:cNvSpPr>
-            <a:spLocks xmlns:a="http://schemas.openxmlformats.org/drawingml/2006/main" noGrp="1"/>
-          </p:cNvSpPr>
-          <p:nvPr/>
-        </p:nvSpPr>
-        <p:spPr>
-          <a:xfrm xmlns:a="http://schemas.openxmlformats.org/drawingml/2006/main">
-            <a:off x="666750" y="4276725"/>
-            <a:ext cx="762000" cy="571500"/>
-          </a:xfrm>
-          <a:prstGeom xmlns:a="http://schemas.openxmlformats.org/drawingml/2006/main" prst="rect">
-            <a:avLst/>
-          </a:prstGeom>
-          <a:noFill xmlns:a="http://schemas.openxmlformats.org/drawingml/2006/main"/>
-          <a:ln xmlns:a="http://schemas.openxmlformats.org/drawingml/2006/main" w="0">
-            <a:noFill/>
-          </a:ln>
-        </p:spPr>
-        <p:txBody>
-          <a:bodyPr xmlns:a="http://schemas.openxmlformats.org/drawingml/2006/main">
-            <a:noAutofit/>
-          </a:bodyPr>
-          <a:lstStyle xmlns:a="http://schemas.openxmlformats.org/drawingml/2006/main"/>
-          <a:p xmlns:a="http://schemas.openxmlformats.org/drawingml/2006/main">
-            <a:pPr>
-              <a:defRPr sz="3150" b="1">
-                <a:solidFill>
-                  <a:srgbClr val="D99A32"/>
-                </a:solidFill>
-                <a:latin typeface="DejaVu Sans"/>
-                <a:ea typeface="DejaVu Sans"/>
-                <a:cs typeface="DejaVu Sans"/>
-              </a:defRPr>
-            </a:pPr>
-            <a:r>
-              <a:rPr sz="3150" b="1">
-                <a:solidFill>
-                  <a:srgbClr val="D99A32"/>
-                </a:solidFill>
-                <a:latin typeface="DejaVu Sans"/>
-                <a:ea typeface="DejaVu Sans"/>
-                <a:cs typeface="DejaVu Sans"/>
-              </a:rPr>
-              <a:t>04</a:t>
-            </a:r>
-          </a:p>
-        </p:txBody>
-      </p:sp>
-      <p:sp>
-        <p:nvSpPr>
-          <p:cNvPr id="13" name="">
-            <a:extLst xmlns:a="http://schemas.openxmlformats.org/drawingml/2006/main">
-              <a:ext uri="{FF2B5EF4-FFF2-40B4-BE49-F238E27FC236}">
-                <a16:creationId xmlns:a16="http://schemas.microsoft.com/office/drawing/2014/main" id="{81F24619-F529-4224-95C5-14DF4A3425DB}"/>
-              </a:ext>
-            </a:extLst>
-          </p:cNvPr>
-          <p:cNvSpPr>
-            <a:spLocks xmlns:a="http://schemas.openxmlformats.org/drawingml/2006/main" noGrp="1"/>
-          </p:cNvSpPr>
-          <p:nvPr/>
-        </p:nvSpPr>
-        <p:spPr>
-          <a:xfrm xmlns:a="http://schemas.openxmlformats.org/drawingml/2006/main">
-            <a:off x="1714500" y="4305300"/>
-            <a:ext cx="2619375" cy="514350"/>
-          </a:xfrm>
-          <a:prstGeom xmlns:a="http://schemas.openxmlformats.org/drawingml/2006/main" prst="rect">
-            <a:avLst/>
-          </a:prstGeom>
-          <a:noFill xmlns:a="http://schemas.openxmlformats.org/drawingml/2006/main"/>
-          <a:ln xmlns:a="http://schemas.openxmlformats.org/drawingml/2006/main" w="0">
-            <a:noFill/>
-          </a:ln>
-        </p:spPr>
-        <p:txBody>
-          <a:bodyPr xmlns:a="http://schemas.openxmlformats.org/drawingml/2006/main">
-            <a:noAutofit/>
-          </a:bodyPr>
-          <a:lstStyle xmlns:a="http://schemas.openxmlformats.org/drawingml/2006/main"/>
-          <a:p xmlns:a="http://schemas.openxmlformats.org/drawingml/2006/main">
-            <a:pPr>
-              <a:defRPr sz="2175" b="1">
+                <a16:creationId xmlns:a16="http://schemas.microsoft.com/office/drawing/2014/main" id="{E29958C1-5150-41E4-8B0C-146F8F2178CC}"/>
+              </a:ext>
+            </a:extLst>
+          </p:cNvPr>
+          <p:cNvSpPr>
+            <a:spLocks xmlns:a="http://schemas.openxmlformats.org/drawingml/2006/main" noGrp="1"/>
+          </p:cNvSpPr>
+          <p:nvPr/>
+        </p:nvSpPr>
+        <p:spPr>
+          <a:xfrm xmlns:a="http://schemas.openxmlformats.org/drawingml/2006/main">
+            <a:off x="5172075" y="3305175"/>
+            <a:ext cx="1847850" cy="847725"/>
+          </a:xfrm>
+          <a:prstGeom xmlns:a="http://schemas.openxmlformats.org/drawingml/2006/main" prst="rect">
+            <a:avLst/>
+          </a:prstGeom>
+          <a:noFill xmlns:a="http://schemas.openxmlformats.org/drawingml/2006/main"/>
+          <a:ln xmlns:a="http://schemas.openxmlformats.org/drawingml/2006/main" w="0">
+            <a:noFill/>
+          </a:ln>
+        </p:spPr>
+        <p:txBody>
+          <a:bodyPr xmlns:a="http://schemas.openxmlformats.org/drawingml/2006/main">
+            <a:noAutofit/>
+          </a:bodyPr>
+          <a:lstStyle xmlns:a="http://schemas.openxmlformats.org/drawingml/2006/main"/>
+          <a:p xmlns:a="http://schemas.openxmlformats.org/drawingml/2006/main">
+            <a:pPr>
+              <a:defRPr sz="1725" b="0">
+                <a:solidFill>
+                  <a:srgbClr val="142C32"/>
+                </a:solidFill>
+                <a:latin typeface="DejaVu Sans"/>
+                <a:ea typeface="DejaVu Sans"/>
+                <a:cs typeface="DejaVu Sans"/>
+              </a:defRPr>
+            </a:pPr>
+            <a:r>
+              <a:rPr sz="1725" b="0">
+                <a:solidFill>
+                  <a:srgbClr val="142C32"/>
+                </a:solidFill>
+                <a:latin typeface="DejaVu Sans"/>
+                <a:ea typeface="DejaVu Sans"/>
+                <a:cs typeface="DejaVu Sans"/>
+              </a:rPr>
+              <a:t>PDF y QR firmado</a:t>
+            </a:r>
+          </a:p>
+        </p:txBody>
+      </p:sp>
+      <p:cxnSp>
+        <p:nvCxnSpPr>
+          <p:cNvPr id="36" name=""/>
+          <p:cNvCxnSpPr>
+            <a:stCxn xmlns:a="http://schemas.openxmlformats.org/drawingml/2006/main" id="6" idx="3"/>
+            <a:endCxn xmlns:a="http://schemas.openxmlformats.org/drawingml/2006/main" id="10" idx="1"/>
+          </p:cNvCxnSpPr>
+          <p:nvPr/>
+        </p:nvCxnSpPr>
+        <p:spPr>
+          <a:xfrm xmlns:a="http://schemas.openxmlformats.org/drawingml/2006/main">
+            <a:off x="4857750" y="3405188"/>
+            <a:ext cx="238125" cy="0"/>
+          </a:xfrm>
+          <a:prstGeom xmlns:a="http://schemas.openxmlformats.org/drawingml/2006/main" prst="straightConnector1">
+            <a:avLst/>
+          </a:prstGeom>
+          <a:ln xmlns:a="http://schemas.openxmlformats.org/drawingml/2006/main" w="28575">
+            <a:solidFill>
+              <a:srgbClr val="D99A32"/>
+            </a:solidFill>
+            <a:tailEnd type="arrow" w="med" len="med"/>
+          </a:ln>
+        </p:spPr>
+      </p:cxnSp>
+      <p:sp>
+        <p:nvSpPr>
+          <p:cNvPr id="14" name="">
+            <a:extLst xmlns:a="http://schemas.openxmlformats.org/drawingml/2006/main">
+              <a:ext uri="{FF2B5EF4-FFF2-40B4-BE49-F238E27FC236}">
+                <a16:creationId xmlns:a16="http://schemas.microsoft.com/office/drawing/2014/main" id="{D818B217-BF60-4D36-91C7-FCFA6B346680}"/>
+              </a:ext>
+            </a:extLst>
+          </p:cNvPr>
+          <p:cNvSpPr>
+            <a:spLocks xmlns:a="http://schemas.openxmlformats.org/drawingml/2006/main" noGrp="1"/>
+          </p:cNvSpPr>
+          <p:nvPr/>
+        </p:nvSpPr>
+        <p:spPr>
+          <a:xfrm xmlns:a="http://schemas.openxmlformats.org/drawingml/2006/main">
+            <a:off x="7334250" y="2619375"/>
+            <a:ext cx="2000250" cy="1571625"/>
+          </a:xfrm>
+          <a:prstGeom xmlns:a="http://schemas.openxmlformats.org/drawingml/2006/main" prst="rect">
+            <a:avLst/>
+          </a:prstGeom>
+          <a:solidFill xmlns:a="http://schemas.openxmlformats.org/drawingml/2006/main">
+            <a:srgbClr val="E7EDE7"/>
+          </a:solidFill>
+          <a:ln xmlns:a="http://schemas.openxmlformats.org/drawingml/2006/main" w="19050">
+            <a:solidFill>
+              <a:srgbClr val="173D35"/>
+            </a:solidFill>
+          </a:ln>
+        </p:spPr>
+      </p:sp>
+      <p:sp>
+        <p:nvSpPr>
+          <p:cNvPr id="15" name="">
+            <a:extLst xmlns:a="http://schemas.openxmlformats.org/drawingml/2006/main">
+              <a:ext uri="{FF2B5EF4-FFF2-40B4-BE49-F238E27FC236}">
+                <a16:creationId xmlns:a16="http://schemas.microsoft.com/office/drawing/2014/main" id="{9DFF62E2-FDDE-4C97-9D7A-9A7213047CCB}"/>
+              </a:ext>
+            </a:extLst>
+          </p:cNvPr>
+          <p:cNvSpPr>
+            <a:spLocks xmlns:a="http://schemas.openxmlformats.org/drawingml/2006/main" noGrp="1"/>
+          </p:cNvSpPr>
+          <p:nvPr/>
+        </p:nvSpPr>
+        <p:spPr>
+          <a:xfrm xmlns:a="http://schemas.openxmlformats.org/drawingml/2006/main">
+            <a:off x="7410450" y="2790825"/>
+            <a:ext cx="1847850" cy="438150"/>
+          </a:xfrm>
+          <a:prstGeom xmlns:a="http://schemas.openxmlformats.org/drawingml/2006/main" prst="rect">
+            <a:avLst/>
+          </a:prstGeom>
+          <a:noFill xmlns:a="http://schemas.openxmlformats.org/drawingml/2006/main"/>
+          <a:ln xmlns:a="http://schemas.openxmlformats.org/drawingml/2006/main" w="0">
+            <a:noFill/>
+          </a:ln>
+        </p:spPr>
+        <p:txBody>
+          <a:bodyPr xmlns:a="http://schemas.openxmlformats.org/drawingml/2006/main">
+            <a:noAutofit/>
+          </a:bodyPr>
+          <a:lstStyle xmlns:a="http://schemas.openxmlformats.org/drawingml/2006/main"/>
+          <a:p xmlns:a="http://schemas.openxmlformats.org/drawingml/2006/main">
+            <a:pPr>
+              <a:defRPr sz="1800" b="1">
                 <a:solidFill>
                   <a:srgbClr val="173D35"/>
                 </a:solidFill>
@@ -9939,7 +11214,7 @@
               </a:defRPr>
             </a:pPr>
             <a:r>
-              <a:rPr sz="2175" b="1">
+              <a:rPr sz="1800" b="1">
                 <a:solidFill>
                   <a:srgbClr val="173D35"/>
                 </a:solidFill>
@@ -9954,153 +11229,153 @@
       </p:sp>
       <p:sp>
         <p:nvSpPr>
-          <p:cNvPr id="14" name="">
-            <a:extLst xmlns:a="http://schemas.openxmlformats.org/drawingml/2006/main">
-              <a:ext uri="{FF2B5EF4-FFF2-40B4-BE49-F238E27FC236}">
-                <a16:creationId xmlns:a16="http://schemas.microsoft.com/office/drawing/2014/main" id="{99CD83DB-D40C-4604-A7E5-A26EC130A530}"/>
-              </a:ext>
-            </a:extLst>
-          </p:cNvPr>
-          <p:cNvSpPr>
-            <a:spLocks xmlns:a="http://schemas.openxmlformats.org/drawingml/2006/main" noGrp="1"/>
-          </p:cNvSpPr>
-          <p:nvPr/>
-        </p:nvSpPr>
-        <p:spPr>
-          <a:xfrm xmlns:a="http://schemas.openxmlformats.org/drawingml/2006/main">
-            <a:off x="4619625" y="4343400"/>
-            <a:ext cx="6858000" cy="628650"/>
-          </a:xfrm>
-          <a:prstGeom xmlns:a="http://schemas.openxmlformats.org/drawingml/2006/main" prst="rect">
-            <a:avLst/>
-          </a:prstGeom>
-          <a:noFill xmlns:a="http://schemas.openxmlformats.org/drawingml/2006/main"/>
-          <a:ln xmlns:a="http://schemas.openxmlformats.org/drawingml/2006/main" w="0">
-            <a:noFill/>
-          </a:ln>
-        </p:spPr>
-        <p:txBody>
-          <a:bodyPr xmlns:a="http://schemas.openxmlformats.org/drawingml/2006/main">
-            <a:noAutofit/>
-          </a:bodyPr>
-          <a:lstStyle xmlns:a="http://schemas.openxmlformats.org/drawingml/2006/main"/>
-          <a:p xmlns:a="http://schemas.openxmlformats.org/drawingml/2006/main">
-            <a:pPr>
-              <a:defRPr sz="2025" b="0">
-                <a:solidFill>
-                  <a:srgbClr val="142C32"/>
-                </a:solidFill>
-                <a:latin typeface="DejaVu Sans"/>
-                <a:ea typeface="DejaVu Sans"/>
-                <a:cs typeface="DejaVu Sans"/>
-              </a:defRPr>
-            </a:pPr>
-            <a:r>
-              <a:rPr sz="2025" b="0">
-                <a:solidFill>
-                  <a:srgbClr val="142C32"/>
-                </a:solidFill>
-                <a:latin typeface="DejaVu Sans"/>
-                <a:ea typeface="DejaVu Sans"/>
-                <a:cs typeface="DejaVu Sans"/>
-              </a:rPr>
-              <a:t>Identidad, estación y galones servidos</a:t>
-            </a:r>
-          </a:p>
-        </p:txBody>
-      </p:sp>
-      <p:sp>
-        <p:nvSpPr>
-          <p:cNvPr id="15" name="">
-            <a:extLst xmlns:a="http://schemas.openxmlformats.org/drawingml/2006/main">
-              <a:ext uri="{FF2B5EF4-FFF2-40B4-BE49-F238E27FC236}">
-                <a16:creationId xmlns:a16="http://schemas.microsoft.com/office/drawing/2014/main" id="{BFA0E270-E20E-4DB4-9AE0-392A5D846A4E}"/>
-              </a:ext>
-            </a:extLst>
-          </p:cNvPr>
-          <p:cNvSpPr>
-            <a:spLocks xmlns:a="http://schemas.openxmlformats.org/drawingml/2006/main" noGrp="1"/>
-          </p:cNvSpPr>
-          <p:nvPr/>
-        </p:nvSpPr>
-        <p:spPr>
-          <a:xfrm xmlns:a="http://schemas.openxmlformats.org/drawingml/2006/main">
-            <a:off x="666750" y="5153025"/>
-            <a:ext cx="762000" cy="571500"/>
-          </a:xfrm>
-          <a:prstGeom xmlns:a="http://schemas.openxmlformats.org/drawingml/2006/main" prst="rect">
-            <a:avLst/>
-          </a:prstGeom>
-          <a:noFill xmlns:a="http://schemas.openxmlformats.org/drawingml/2006/main"/>
-          <a:ln xmlns:a="http://schemas.openxmlformats.org/drawingml/2006/main" w="0">
-            <a:noFill/>
-          </a:ln>
-        </p:spPr>
-        <p:txBody>
-          <a:bodyPr xmlns:a="http://schemas.openxmlformats.org/drawingml/2006/main">
-            <a:noAutofit/>
-          </a:bodyPr>
-          <a:lstStyle xmlns:a="http://schemas.openxmlformats.org/drawingml/2006/main"/>
-          <a:p xmlns:a="http://schemas.openxmlformats.org/drawingml/2006/main">
-            <a:pPr>
-              <a:defRPr sz="3150" b="1">
-                <a:solidFill>
-                  <a:srgbClr val="D99A32"/>
-                </a:solidFill>
-                <a:latin typeface="DejaVu Sans"/>
-                <a:ea typeface="DejaVu Sans"/>
-                <a:cs typeface="DejaVu Sans"/>
-              </a:defRPr>
-            </a:pPr>
-            <a:r>
-              <a:rPr sz="3150" b="1">
-                <a:solidFill>
-                  <a:srgbClr val="D99A32"/>
-                </a:solidFill>
-                <a:latin typeface="DejaVu Sans"/>
-                <a:ea typeface="DejaVu Sans"/>
-                <a:cs typeface="DejaVu Sans"/>
-              </a:rPr>
-              <a:t>05</a:t>
-            </a:r>
-          </a:p>
-        </p:txBody>
-      </p:sp>
-      <p:sp>
-        <p:nvSpPr>
           <p:cNvPr id="16" name="">
             <a:extLst xmlns:a="http://schemas.openxmlformats.org/drawingml/2006/main">
               <a:ext uri="{FF2B5EF4-FFF2-40B4-BE49-F238E27FC236}">
-                <a16:creationId xmlns:a16="http://schemas.microsoft.com/office/drawing/2014/main" id="{B4BC2066-BBEC-4248-940D-7173ACA7341C}"/>
-              </a:ext>
-            </a:extLst>
-          </p:cNvPr>
-          <p:cNvSpPr>
-            <a:spLocks xmlns:a="http://schemas.openxmlformats.org/drawingml/2006/main" noGrp="1"/>
-          </p:cNvSpPr>
-          <p:nvPr/>
-        </p:nvSpPr>
-        <p:spPr>
-          <a:xfrm xmlns:a="http://schemas.openxmlformats.org/drawingml/2006/main">
-            <a:off x="1714500" y="5181600"/>
-            <a:ext cx="2619375" cy="514350"/>
-          </a:xfrm>
-          <a:prstGeom xmlns:a="http://schemas.openxmlformats.org/drawingml/2006/main" prst="rect">
-            <a:avLst/>
-          </a:prstGeom>
-          <a:noFill xmlns:a="http://schemas.openxmlformats.org/drawingml/2006/main"/>
-          <a:ln xmlns:a="http://schemas.openxmlformats.org/drawingml/2006/main" w="0">
-            <a:noFill/>
-          </a:ln>
-        </p:spPr>
-        <p:txBody>
-          <a:bodyPr xmlns:a="http://schemas.openxmlformats.org/drawingml/2006/main">
-            <a:noAutofit/>
-          </a:bodyPr>
-          <a:lstStyle xmlns:a="http://schemas.openxmlformats.org/drawingml/2006/main"/>
-          <a:p xmlns:a="http://schemas.openxmlformats.org/drawingml/2006/main">
-            <a:pPr>
-              <a:defRPr sz="2175" b="1">
+                <a16:creationId xmlns:a16="http://schemas.microsoft.com/office/drawing/2014/main" id="{F90B5D71-E787-458D-9840-46AF57E06B4A}"/>
+              </a:ext>
+            </a:extLst>
+          </p:cNvPr>
+          <p:cNvSpPr>
+            <a:spLocks xmlns:a="http://schemas.openxmlformats.org/drawingml/2006/main" noGrp="1"/>
+          </p:cNvSpPr>
+          <p:nvPr/>
+        </p:nvSpPr>
+        <p:spPr>
+          <a:xfrm xmlns:a="http://schemas.openxmlformats.org/drawingml/2006/main">
+            <a:off x="7410450" y="3305175"/>
+            <a:ext cx="1847850" cy="847725"/>
+          </a:xfrm>
+          <a:prstGeom xmlns:a="http://schemas.openxmlformats.org/drawingml/2006/main" prst="rect">
+            <a:avLst/>
+          </a:prstGeom>
+          <a:noFill xmlns:a="http://schemas.openxmlformats.org/drawingml/2006/main"/>
+          <a:ln xmlns:a="http://schemas.openxmlformats.org/drawingml/2006/main" w="0">
+            <a:noFill/>
+          </a:ln>
+        </p:spPr>
+        <p:txBody>
+          <a:bodyPr xmlns:a="http://schemas.openxmlformats.org/drawingml/2006/main">
+            <a:noAutofit/>
+          </a:bodyPr>
+          <a:lstStyle xmlns:a="http://schemas.openxmlformats.org/drawingml/2006/main"/>
+          <a:p xmlns:a="http://schemas.openxmlformats.org/drawingml/2006/main">
+            <a:pPr>
+              <a:defRPr sz="1725" b="0">
+                <a:solidFill>
+                  <a:srgbClr val="142C32"/>
+                </a:solidFill>
+                <a:latin typeface="DejaVu Sans"/>
+                <a:ea typeface="DejaVu Sans"/>
+                <a:cs typeface="DejaVu Sans"/>
+              </a:defRPr>
+            </a:pPr>
+            <a:r>
+              <a:rPr sz="1725" b="0">
+                <a:solidFill>
+                  <a:srgbClr val="142C32"/>
+                </a:solidFill>
+                <a:latin typeface="DejaVu Sans"/>
+                <a:ea typeface="DejaVu Sans"/>
+                <a:cs typeface="DejaVu Sans"/>
+              </a:rPr>
+              <a:t>Identidad y galones</a:t>
+            </a:r>
+          </a:p>
+        </p:txBody>
+      </p:sp>
+      <p:cxnSp>
+        <p:nvCxnSpPr>
+          <p:cNvPr id="40" name=""/>
+          <p:cNvCxnSpPr>
+            <a:stCxn xmlns:a="http://schemas.openxmlformats.org/drawingml/2006/main" id="10" idx="3"/>
+            <a:endCxn xmlns:a="http://schemas.openxmlformats.org/drawingml/2006/main" id="14" idx="1"/>
+          </p:cNvCxnSpPr>
+          <p:nvPr/>
+        </p:nvCxnSpPr>
+        <p:spPr>
+          <a:xfrm xmlns:a="http://schemas.openxmlformats.org/drawingml/2006/main">
+            <a:off x="7096125" y="3405188"/>
+            <a:ext cx="238125" cy="0"/>
+          </a:xfrm>
+          <a:prstGeom xmlns:a="http://schemas.openxmlformats.org/drawingml/2006/main" prst="straightConnector1">
+            <a:avLst/>
+          </a:prstGeom>
+          <a:ln xmlns:a="http://schemas.openxmlformats.org/drawingml/2006/main" w="28575">
+            <a:solidFill>
+              <a:srgbClr val="D99A32"/>
+            </a:solidFill>
+            <a:tailEnd type="arrow" w="med" len="med"/>
+          </a:ln>
+        </p:spPr>
+      </p:cxnSp>
+      <p:sp>
+        <p:nvSpPr>
+          <p:cNvPr id="18" name="">
+            <a:extLst xmlns:a="http://schemas.openxmlformats.org/drawingml/2006/main">
+              <a:ext uri="{FF2B5EF4-FFF2-40B4-BE49-F238E27FC236}">
+                <a16:creationId xmlns:a16="http://schemas.microsoft.com/office/drawing/2014/main" id="{7688DA8F-F6BB-4E15-B6D9-F092609E0135}"/>
+              </a:ext>
+            </a:extLst>
+          </p:cNvPr>
+          <p:cNvSpPr>
+            <a:spLocks xmlns:a="http://schemas.openxmlformats.org/drawingml/2006/main" noGrp="1"/>
+          </p:cNvSpPr>
+          <p:nvPr/>
+        </p:nvSpPr>
+        <p:spPr>
+          <a:xfrm xmlns:a="http://schemas.openxmlformats.org/drawingml/2006/main">
+            <a:off x="9572625" y="2619375"/>
+            <a:ext cx="2000250" cy="1571625"/>
+          </a:xfrm>
+          <a:prstGeom xmlns:a="http://schemas.openxmlformats.org/drawingml/2006/main" prst="rect">
+            <a:avLst/>
+          </a:prstGeom>
+          <a:solidFill xmlns:a="http://schemas.openxmlformats.org/drawingml/2006/main">
+            <a:srgbClr val="E7EDE7"/>
+          </a:solidFill>
+          <a:ln xmlns:a="http://schemas.openxmlformats.org/drawingml/2006/main" w="19050">
+            <a:solidFill>
+              <a:srgbClr val="173D35"/>
+            </a:solidFill>
+          </a:ln>
+        </p:spPr>
+      </p:sp>
+      <p:sp>
+        <p:nvSpPr>
+          <p:cNvPr id="19" name="">
+            <a:extLst xmlns:a="http://schemas.openxmlformats.org/drawingml/2006/main">
+              <a:ext uri="{FF2B5EF4-FFF2-40B4-BE49-F238E27FC236}">
+                <a16:creationId xmlns:a16="http://schemas.microsoft.com/office/drawing/2014/main" id="{46E3B714-DFAC-4E22-B5DB-6210B19063AC}"/>
+              </a:ext>
+            </a:extLst>
+          </p:cNvPr>
+          <p:cNvSpPr>
+            <a:spLocks xmlns:a="http://schemas.openxmlformats.org/drawingml/2006/main" noGrp="1"/>
+          </p:cNvSpPr>
+          <p:nvPr/>
+        </p:nvSpPr>
+        <p:spPr>
+          <a:xfrm xmlns:a="http://schemas.openxmlformats.org/drawingml/2006/main">
+            <a:off x="9648825" y="2790825"/>
+            <a:ext cx="1847850" cy="438150"/>
+          </a:xfrm>
+          <a:prstGeom xmlns:a="http://schemas.openxmlformats.org/drawingml/2006/main" prst="rect">
+            <a:avLst/>
+          </a:prstGeom>
+          <a:noFill xmlns:a="http://schemas.openxmlformats.org/drawingml/2006/main"/>
+          <a:ln xmlns:a="http://schemas.openxmlformats.org/drawingml/2006/main" w="0">
+            <a:noFill/>
+          </a:ln>
+        </p:spPr>
+        <p:txBody>
+          <a:bodyPr xmlns:a="http://schemas.openxmlformats.org/drawingml/2006/main">
+            <a:noAutofit/>
+          </a:bodyPr>
+          <a:lstStyle xmlns:a="http://schemas.openxmlformats.org/drawingml/2006/main"/>
+          <a:p xmlns:a="http://schemas.openxmlformats.org/drawingml/2006/main">
+            <a:pPr>
+              <a:defRPr sz="1800" b="1">
                 <a:solidFill>
                   <a:srgbClr val="173D35"/>
                 </a:solidFill>
@@ -10110,7 +11385,7 @@
               </a:defRPr>
             </a:pPr>
             <a:r>
-              <a:rPr sz="2175" b="1">
+              <a:rPr sz="1800" b="1">
                 <a:solidFill>
                   <a:srgbClr val="173D35"/>
                 </a:solidFill>
@@ -10125,57 +11400,196 @@
       </p:sp>
       <p:sp>
         <p:nvSpPr>
-          <p:cNvPr id="17" name="">
-            <a:extLst xmlns:a="http://schemas.openxmlformats.org/drawingml/2006/main">
-              <a:ext uri="{FF2B5EF4-FFF2-40B4-BE49-F238E27FC236}">
-                <a16:creationId xmlns:a16="http://schemas.microsoft.com/office/drawing/2014/main" id="{A99E09B1-5682-414E-AFAA-03ECDA50761E}"/>
-              </a:ext>
-            </a:extLst>
-          </p:cNvPr>
-          <p:cNvSpPr>
-            <a:spLocks xmlns:a="http://schemas.openxmlformats.org/drawingml/2006/main" noGrp="1"/>
-          </p:cNvSpPr>
-          <p:nvPr/>
-        </p:nvSpPr>
-        <p:spPr>
-          <a:xfrm xmlns:a="http://schemas.openxmlformats.org/drawingml/2006/main">
-            <a:off x="4619625" y="5219700"/>
-            <a:ext cx="6858000" cy="628650"/>
-          </a:xfrm>
-          <a:prstGeom xmlns:a="http://schemas.openxmlformats.org/drawingml/2006/main" prst="rect">
-            <a:avLst/>
-          </a:prstGeom>
-          <a:noFill xmlns:a="http://schemas.openxmlformats.org/drawingml/2006/main"/>
-          <a:ln xmlns:a="http://schemas.openxmlformats.org/drawingml/2006/main" w="0">
-            <a:noFill/>
-          </a:ln>
-        </p:spPr>
-        <p:txBody>
-          <a:bodyPr xmlns:a="http://schemas.openxmlformats.org/drawingml/2006/main">
-            <a:noAutofit/>
-          </a:bodyPr>
-          <a:lstStyle xmlns:a="http://schemas.openxmlformats.org/drawingml/2006/main"/>
-          <a:p xmlns:a="http://schemas.openxmlformats.org/drawingml/2006/main">
-            <a:pPr>
-              <a:defRPr sz="2025" b="0">
-                <a:solidFill>
-                  <a:srgbClr val="142C32"/>
-                </a:solidFill>
-                <a:latin typeface="DejaVu Sans"/>
-                <a:ea typeface="DejaVu Sans"/>
-                <a:cs typeface="DejaVu Sans"/>
-              </a:defRPr>
-            </a:pPr>
-            <a:r>
-              <a:rPr sz="2025" b="0">
-                <a:solidFill>
-                  <a:srgbClr val="142C32"/>
-                </a:solidFill>
-                <a:latin typeface="DejaVu Sans"/>
-                <a:ea typeface="DejaVu Sans"/>
-                <a:cs typeface="DejaVu Sans"/>
-              </a:rPr>
-              <a:t>Inventario, auditoría y cierre diario</a:t>
+          <p:cNvPr id="20" name="">
+            <a:extLst xmlns:a="http://schemas.openxmlformats.org/drawingml/2006/main">
+              <a:ext uri="{FF2B5EF4-FFF2-40B4-BE49-F238E27FC236}">
+                <a16:creationId xmlns:a16="http://schemas.microsoft.com/office/drawing/2014/main" id="{923762D6-C4F5-4B67-A8FB-F042294C1A32}"/>
+              </a:ext>
+            </a:extLst>
+          </p:cNvPr>
+          <p:cNvSpPr>
+            <a:spLocks xmlns:a="http://schemas.openxmlformats.org/drawingml/2006/main" noGrp="1"/>
+          </p:cNvSpPr>
+          <p:nvPr/>
+        </p:nvSpPr>
+        <p:spPr>
+          <a:xfrm xmlns:a="http://schemas.openxmlformats.org/drawingml/2006/main">
+            <a:off x="9648825" y="3305175"/>
+            <a:ext cx="1847850" cy="847725"/>
+          </a:xfrm>
+          <a:prstGeom xmlns:a="http://schemas.openxmlformats.org/drawingml/2006/main" prst="rect">
+            <a:avLst/>
+          </a:prstGeom>
+          <a:noFill xmlns:a="http://schemas.openxmlformats.org/drawingml/2006/main"/>
+          <a:ln xmlns:a="http://schemas.openxmlformats.org/drawingml/2006/main" w="0">
+            <a:noFill/>
+          </a:ln>
+        </p:spPr>
+        <p:txBody>
+          <a:bodyPr xmlns:a="http://schemas.openxmlformats.org/drawingml/2006/main">
+            <a:noAutofit/>
+          </a:bodyPr>
+          <a:lstStyle xmlns:a="http://schemas.openxmlformats.org/drawingml/2006/main"/>
+          <a:p xmlns:a="http://schemas.openxmlformats.org/drawingml/2006/main">
+            <a:pPr>
+              <a:defRPr sz="1725" b="0">
+                <a:solidFill>
+                  <a:srgbClr val="142C32"/>
+                </a:solidFill>
+                <a:latin typeface="DejaVu Sans"/>
+                <a:ea typeface="DejaVu Sans"/>
+                <a:cs typeface="DejaVu Sans"/>
+              </a:defRPr>
+            </a:pPr>
+            <a:r>
+              <a:rPr sz="1725" b="0">
+                <a:solidFill>
+                  <a:srgbClr val="142C32"/>
+                </a:solidFill>
+                <a:latin typeface="DejaVu Sans"/>
+                <a:ea typeface="DejaVu Sans"/>
+                <a:cs typeface="DejaVu Sans"/>
+              </a:rPr>
+              <a:t>Saldo y auditoría</a:t>
+            </a:r>
+          </a:p>
+        </p:txBody>
+      </p:sp>
+      <p:cxnSp>
+        <p:nvCxnSpPr>
+          <p:cNvPr id="44" name=""/>
+          <p:cNvCxnSpPr>
+            <a:stCxn xmlns:a="http://schemas.openxmlformats.org/drawingml/2006/main" id="14" idx="3"/>
+            <a:endCxn xmlns:a="http://schemas.openxmlformats.org/drawingml/2006/main" id="18" idx="1"/>
+          </p:cNvCxnSpPr>
+          <p:nvPr/>
+        </p:nvCxnSpPr>
+        <p:spPr>
+          <a:xfrm xmlns:a="http://schemas.openxmlformats.org/drawingml/2006/main">
+            <a:off x="9334500" y="3405188"/>
+            <a:ext cx="238125" cy="0"/>
+          </a:xfrm>
+          <a:prstGeom xmlns:a="http://schemas.openxmlformats.org/drawingml/2006/main" prst="straightConnector1">
+            <a:avLst/>
+          </a:prstGeom>
+          <a:ln xmlns:a="http://schemas.openxmlformats.org/drawingml/2006/main" w="28575">
+            <a:solidFill>
+              <a:srgbClr val="D99A32"/>
+            </a:solidFill>
+            <a:tailEnd type="arrow" w="med" len="med"/>
+          </a:ln>
+        </p:spPr>
+      </p:cxnSp>
+      <p:sp>
+        <p:nvSpPr>
+          <p:cNvPr id="22" name="">
+            <a:extLst xmlns:a="http://schemas.openxmlformats.org/drawingml/2006/main">
+              <a:ext uri="{FF2B5EF4-FFF2-40B4-BE49-F238E27FC236}">
+                <a16:creationId xmlns:a16="http://schemas.microsoft.com/office/drawing/2014/main" id="{EBFBA63D-FE70-43AE-B94D-AF491CE307C3}"/>
+              </a:ext>
+            </a:extLst>
+          </p:cNvPr>
+          <p:cNvSpPr>
+            <a:spLocks xmlns:a="http://schemas.openxmlformats.org/drawingml/2006/main" noGrp="1"/>
+          </p:cNvSpPr>
+          <p:nvPr/>
+        </p:nvSpPr>
+        <p:spPr>
+          <a:xfrm xmlns:a="http://schemas.openxmlformats.org/drawingml/2006/main">
+            <a:off x="666750" y="4667250"/>
+            <a:ext cx="10668000" cy="619125"/>
+          </a:xfrm>
+          <a:prstGeom xmlns:a="http://schemas.openxmlformats.org/drawingml/2006/main" prst="rect">
+            <a:avLst/>
+          </a:prstGeom>
+          <a:noFill xmlns:a="http://schemas.openxmlformats.org/drawingml/2006/main"/>
+          <a:ln xmlns:a="http://schemas.openxmlformats.org/drawingml/2006/main" w="0">
+            <a:noFill/>
+          </a:ln>
+        </p:spPr>
+        <p:txBody>
+          <a:bodyPr xmlns:a="http://schemas.openxmlformats.org/drawingml/2006/main">
+            <a:noAutofit/>
+          </a:bodyPr>
+          <a:lstStyle xmlns:a="http://schemas.openxmlformats.org/drawingml/2006/main"/>
+          <a:p xmlns:a="http://schemas.openxmlformats.org/drawingml/2006/main">
+            <a:pPr>
+              <a:defRPr sz="2400" b="1">
+                <a:solidFill>
+                  <a:srgbClr val="173D35"/>
+                </a:solidFill>
+                <a:latin typeface="DejaVu Sans"/>
+                <a:ea typeface="DejaVu Sans"/>
+                <a:cs typeface="DejaVu Sans"/>
+              </a:defRPr>
+            </a:pPr>
+            <a:r>
+              <a:rPr sz="2400" b="1">
+                <a:solidFill>
+                  <a:srgbClr val="173D35"/>
+                </a:solidFill>
+                <a:latin typeface="DejaVu Sans"/>
+                <a:ea typeface="DejaVu Sans"/>
+                <a:cs typeface="DejaVu Sans"/>
+              </a:rPr>
+              <a:t>El inventario disminuye cuando se confirma el despacho</a:t>
+            </a:r>
+          </a:p>
+        </p:txBody>
+      </p:sp>
+      <p:sp>
+        <p:nvSpPr>
+          <p:cNvPr id="23" name="">
+            <a:extLst xmlns:a="http://schemas.openxmlformats.org/drawingml/2006/main">
+              <a:ext uri="{FF2B5EF4-FFF2-40B4-BE49-F238E27FC236}">
+                <a16:creationId xmlns:a16="http://schemas.microsoft.com/office/drawing/2014/main" id="{110A1C54-BBAD-48CC-8938-00E1C847A887}"/>
+              </a:ext>
+            </a:extLst>
+          </p:cNvPr>
+          <p:cNvSpPr>
+            <a:spLocks xmlns:a="http://schemas.openxmlformats.org/drawingml/2006/main" noGrp="1"/>
+          </p:cNvSpPr>
+          <p:nvPr/>
+        </p:nvSpPr>
+        <p:spPr>
+          <a:xfrm xmlns:a="http://schemas.openxmlformats.org/drawingml/2006/main">
+            <a:off x="666750" y="5524500"/>
+            <a:ext cx="10668000" cy="495300"/>
+          </a:xfrm>
+          <a:prstGeom xmlns:a="http://schemas.openxmlformats.org/drawingml/2006/main" prst="rect">
+            <a:avLst/>
+          </a:prstGeom>
+          <a:noFill xmlns:a="http://schemas.openxmlformats.org/drawingml/2006/main"/>
+          <a:ln xmlns:a="http://schemas.openxmlformats.org/drawingml/2006/main" w="0">
+            <a:noFill/>
+          </a:ln>
+        </p:spPr>
+        <p:txBody>
+          <a:bodyPr xmlns:a="http://schemas.openxmlformats.org/drawingml/2006/main">
+            <a:noAutofit/>
+          </a:bodyPr>
+          <a:lstStyle xmlns:a="http://schemas.openxmlformats.org/drawingml/2006/main"/>
+          <a:p xmlns:a="http://schemas.openxmlformats.org/drawingml/2006/main">
+            <a:pPr>
+              <a:defRPr sz="1950" b="0">
+                <a:solidFill>
+                  <a:srgbClr val="53666B"/>
+                </a:solidFill>
+                <a:latin typeface="DejaVu Sans"/>
+                <a:ea typeface="DejaVu Sans"/>
+                <a:cs typeface="DejaVu Sans"/>
+              </a:defRPr>
+            </a:pPr>
+            <a:r>
+              <a:rPr sz="1950" b="0">
+                <a:solidFill>
+                  <a:srgbClr val="53666B"/>
+                </a:solidFill>
+                <a:latin typeface="DejaVu Sans"/>
+                <a:ea typeface="DejaVu Sans"/>
+                <a:cs typeface="DejaVu Sans"/>
+              </a:rPr>
+              <a:t>Cada paso conserva su responsable y permite revisar la operación</a:t>
             </a:r>
           </a:p>
         </p:txBody>
@@ -10183,7 +11597,7 @@
     </p:spTree>
     <p:extLst>
       <p:ext uri="{BB962C8B-B14F-4D97-AF65-F5344CB8AC3E}">
-        <p14:creationId xmlns:p14="http://schemas.microsoft.com/office/powerpoint/2010/main" val="1725462211"/>
+        <p14:creationId xmlns:p14="http://schemas.microsoft.com/office/powerpoint/2010/main" val="673589129"/>
       </p:ext>
     </p:extLst>
   </p:cSld>
@@ -10214,7 +11628,7 @@
           <p:cNvPr id="6" name="">
             <a:extLst xmlns:a="http://schemas.openxmlformats.org/drawingml/2006/main">
               <a:ext uri="{FF2B5EF4-FFF2-40B4-BE49-F238E27FC236}">
-                <a16:creationId xmlns:a16="http://schemas.microsoft.com/office/drawing/2014/main" id="{AD6C27A3-7FF4-48B9-AE1A-FCBB851B06BE}"/>
+                <a16:creationId xmlns:a16="http://schemas.microsoft.com/office/drawing/2014/main" id="{CA0D8164-93C6-4CEF-ABB2-E3526564FAE2}"/>
               </a:ext>
             </a:extLst>
           </p:cNvPr>
@@ -10271,7 +11685,7 @@
           <p:cNvPr id="2" name="">
             <a:extLst xmlns:a="http://schemas.openxmlformats.org/drawingml/2006/main">
               <a:ext uri="{FF2B5EF4-FFF2-40B4-BE49-F238E27FC236}">
-                <a16:creationId xmlns:a16="http://schemas.microsoft.com/office/drawing/2014/main" id="{4323682F-A38A-43D4-9486-164941CA60A3}"/>
+                <a16:creationId xmlns:a16="http://schemas.microsoft.com/office/drawing/2014/main" id="{414A37F6-F365-4869-9CE6-45F5B6D11805}"/>
               </a:ext>
             </a:extLst>
           </p:cNvPr>
@@ -10328,7 +11742,7 @@
           <p:cNvPr id="3" name="">
             <a:extLst xmlns:a="http://schemas.openxmlformats.org/drawingml/2006/main">
               <a:ext uri="{FF2B5EF4-FFF2-40B4-BE49-F238E27FC236}">
-                <a16:creationId xmlns:a16="http://schemas.microsoft.com/office/drawing/2014/main" id="{74DE1F72-3BD5-4E9D-9380-2511D94DFDAF}"/>
+                <a16:creationId xmlns:a16="http://schemas.microsoft.com/office/drawing/2014/main" id="{833D9D01-CC0A-4BBD-9B14-94F4A85D4DE2}"/>
               </a:ext>
             </a:extLst>
           </p:cNvPr>
@@ -10389,7 +11803,7 @@
           <p:nvPr/>
         </p:nvPicPr>
         <p:blipFill>
-          <a:blip xmlns:r="http://schemas.openxmlformats.org/officeDocument/2006/relationships" xmlns:a="http://schemas.openxmlformats.org/drawingml/2006/main" r:embed="R1f0156eec4e744ab"/>
+          <a:blip xmlns:r="http://schemas.openxmlformats.org/officeDocument/2006/relationships" xmlns:a="http://schemas.openxmlformats.org/drawingml/2006/main" r:embed="R60c6d444d1b046de"/>
           <a:stretch xmlns:a="http://schemas.openxmlformats.org/drawingml/2006/main"/>
         </p:blipFill>
         <p:spPr>
@@ -10407,7 +11821,7 @@
           <p:cNvPr id="5" name="">
             <a:extLst xmlns:a="http://schemas.openxmlformats.org/drawingml/2006/main">
               <a:ext uri="{FF2B5EF4-FFF2-40B4-BE49-F238E27FC236}">
-                <a16:creationId xmlns:a16="http://schemas.microsoft.com/office/drawing/2014/main" id="{6E8F0E0D-6A20-4E14-876B-D315AFCD3F41}"/>
+                <a16:creationId xmlns:a16="http://schemas.microsoft.com/office/drawing/2014/main" id="{76264972-B894-4824-A736-A54D64BB09DB}"/>
               </a:ext>
             </a:extLst>
           </p:cNvPr>
@@ -10518,7 +11932,7 @@
     </p:spTree>
     <p:extLst>
       <p:ext uri="{BB962C8B-B14F-4D97-AF65-F5344CB8AC3E}">
-        <p14:creationId xmlns:p14="http://schemas.microsoft.com/office/powerpoint/2010/main" val="1741915710"/>
+        <p14:creationId xmlns:p14="http://schemas.microsoft.com/office/powerpoint/2010/main" val="2105259725"/>
       </p:ext>
     </p:extLst>
   </p:cSld>
@@ -10549,7 +11963,7 @@
           <p:cNvPr id="5" name="">
             <a:extLst xmlns:a="http://schemas.openxmlformats.org/drawingml/2006/main">
               <a:ext uri="{FF2B5EF4-FFF2-40B4-BE49-F238E27FC236}">
-                <a16:creationId xmlns:a16="http://schemas.microsoft.com/office/drawing/2014/main" id="{42EAD4FC-CAE8-44CF-9B2C-E6B94C9A7370}"/>
+                <a16:creationId xmlns:a16="http://schemas.microsoft.com/office/drawing/2014/main" id="{51630E19-F68C-403A-867B-CE7A44BCF740}"/>
               </a:ext>
             </a:extLst>
           </p:cNvPr>
@@ -10606,7 +12020,7 @@
           <p:cNvPr id="2" name="">
             <a:extLst xmlns:a="http://schemas.openxmlformats.org/drawingml/2006/main">
               <a:ext uri="{FF2B5EF4-FFF2-40B4-BE49-F238E27FC236}">
-                <a16:creationId xmlns:a16="http://schemas.microsoft.com/office/drawing/2014/main" id="{9270DF36-5C04-4217-AA28-8A34CC4E9C56}"/>
+                <a16:creationId xmlns:a16="http://schemas.microsoft.com/office/drawing/2014/main" id="{B2262BCE-1C88-47B5-81EC-93A25157D407}"/>
               </a:ext>
             </a:extLst>
           </p:cNvPr>
@@ -10667,7 +12081,7 @@
           <p:nvPr/>
         </p:nvPicPr>
         <p:blipFill>
-          <a:blip xmlns:r="http://schemas.openxmlformats.org/officeDocument/2006/relationships" xmlns:a="http://schemas.openxmlformats.org/drawingml/2006/main" r:embed="R53354ad0cd9445cb"/>
+          <a:blip xmlns:r="http://schemas.openxmlformats.org/officeDocument/2006/relationships" xmlns:a="http://schemas.openxmlformats.org/drawingml/2006/main" r:embed="R7a61cb6a11a34d50"/>
           <a:stretch xmlns:a="http://schemas.openxmlformats.org/drawingml/2006/main"/>
         </p:blipFill>
         <p:spPr>
@@ -10685,7 +12099,7 @@
           <p:cNvPr id="4" name="">
             <a:extLst xmlns:a="http://schemas.openxmlformats.org/drawingml/2006/main">
               <a:ext uri="{FF2B5EF4-FFF2-40B4-BE49-F238E27FC236}">
-                <a16:creationId xmlns:a16="http://schemas.microsoft.com/office/drawing/2014/main" id="{9D2BBE07-8B5E-4DF8-8E29-D01AC3E94039}"/>
+                <a16:creationId xmlns:a16="http://schemas.microsoft.com/office/drawing/2014/main" id="{A1A28CF9-532B-4942-9DC8-22A323632492}"/>
               </a:ext>
             </a:extLst>
           </p:cNvPr>
@@ -10852,7 +12266,7 @@
     </p:spTree>
     <p:extLst>
       <p:ext uri="{BB962C8B-B14F-4D97-AF65-F5344CB8AC3E}">
-        <p14:creationId xmlns:p14="http://schemas.microsoft.com/office/powerpoint/2010/main" val="2144950524"/>
+        <p14:creationId xmlns:p14="http://schemas.microsoft.com/office/powerpoint/2010/main" val="478301587"/>
       </p:ext>
     </p:extLst>
   </p:cSld>
@@ -10883,7 +12297,7 @@
           <p:cNvPr id="5" name="">
             <a:extLst xmlns:a="http://schemas.openxmlformats.org/drawingml/2006/main">
               <a:ext uri="{FF2B5EF4-FFF2-40B4-BE49-F238E27FC236}">
-                <a16:creationId xmlns:a16="http://schemas.microsoft.com/office/drawing/2014/main" id="{734BD21A-8596-420F-B968-8C91895A5844}"/>
+                <a16:creationId xmlns:a16="http://schemas.microsoft.com/office/drawing/2014/main" id="{C3D390D2-0F86-4E46-8151-D1F779F2331B}"/>
               </a:ext>
             </a:extLst>
           </p:cNvPr>
@@ -10940,7 +12354,7 @@
           <p:cNvPr id="2" name="">
             <a:extLst xmlns:a="http://schemas.openxmlformats.org/drawingml/2006/main">
               <a:ext uri="{FF2B5EF4-FFF2-40B4-BE49-F238E27FC236}">
-                <a16:creationId xmlns:a16="http://schemas.microsoft.com/office/drawing/2014/main" id="{FC3E7275-3DDD-4672-B1BF-3212AF96B121}"/>
+                <a16:creationId xmlns:a16="http://schemas.microsoft.com/office/drawing/2014/main" id="{8A01F3B9-AF7C-48C1-8AAA-2C9E74FA7625}"/>
               </a:ext>
             </a:extLst>
           </p:cNvPr>
@@ -11001,7 +12415,7 @@
           <p:nvPr/>
         </p:nvPicPr>
         <p:blipFill>
-          <a:blip xmlns:r="http://schemas.openxmlformats.org/officeDocument/2006/relationships" xmlns:a="http://schemas.openxmlformats.org/drawingml/2006/main" r:embed="Rcbe20d2b766d47ad"/>
+          <a:blip xmlns:r="http://schemas.openxmlformats.org/officeDocument/2006/relationships" xmlns:a="http://schemas.openxmlformats.org/drawingml/2006/main" r:embed="R1bd979fc099b4b99"/>
           <a:stretch xmlns:a="http://schemas.openxmlformats.org/drawingml/2006/main"/>
         </p:blipFill>
         <p:spPr>
@@ -11019,7 +12433,7 @@
           <p:cNvPr id="4" name="">
             <a:extLst xmlns:a="http://schemas.openxmlformats.org/drawingml/2006/main">
               <a:ext uri="{FF2B5EF4-FFF2-40B4-BE49-F238E27FC236}">
-                <a16:creationId xmlns:a16="http://schemas.microsoft.com/office/drawing/2014/main" id="{3773DDC7-A66A-4ECB-9415-8A32F75137CB}"/>
+                <a16:creationId xmlns:a16="http://schemas.microsoft.com/office/drawing/2014/main" id="{C36C677D-31BB-410C-BF15-52196FED4611}"/>
               </a:ext>
             </a:extLst>
           </p:cNvPr>
@@ -11186,7 +12600,7 @@
     </p:spTree>
     <p:extLst>
       <p:ext uri="{BB962C8B-B14F-4D97-AF65-F5344CB8AC3E}">
-        <p14:creationId xmlns:p14="http://schemas.microsoft.com/office/powerpoint/2010/main" val="343991576"/>
+        <p14:creationId xmlns:p14="http://schemas.microsoft.com/office/powerpoint/2010/main" val="958811569"/>
       </p:ext>
     </p:extLst>
   </p:cSld>
@@ -11217,7 +12631,7 @@
           <p:cNvPr id="5" name="">
             <a:extLst xmlns:a="http://schemas.openxmlformats.org/drawingml/2006/main">
               <a:ext uri="{FF2B5EF4-FFF2-40B4-BE49-F238E27FC236}">
-                <a16:creationId xmlns:a16="http://schemas.microsoft.com/office/drawing/2014/main" id="{A64DF87B-3483-46FF-ADA9-6DDA3B2E1BEE}"/>
+                <a16:creationId xmlns:a16="http://schemas.microsoft.com/office/drawing/2014/main" id="{E8788DA7-B52F-43A2-BF71-ADA54D537899}"/>
               </a:ext>
             </a:extLst>
           </p:cNvPr>
@@ -11274,7 +12688,7 @@
           <p:cNvPr id="2" name="">
             <a:extLst xmlns:a="http://schemas.openxmlformats.org/drawingml/2006/main">
               <a:ext uri="{FF2B5EF4-FFF2-40B4-BE49-F238E27FC236}">
-                <a16:creationId xmlns:a16="http://schemas.microsoft.com/office/drawing/2014/main" id="{CDEEA519-60ED-4AEE-880F-ABFCD744B3C6}"/>
+                <a16:creationId xmlns:a16="http://schemas.microsoft.com/office/drawing/2014/main" id="{76351B08-4FD9-45D9-9014-314CB9781173}"/>
               </a:ext>
             </a:extLst>
           </p:cNvPr>
@@ -11335,7 +12749,7 @@
           <p:nvPr/>
         </p:nvPicPr>
         <p:blipFill>
-          <a:blip xmlns:r="http://schemas.openxmlformats.org/officeDocument/2006/relationships" xmlns:a="http://schemas.openxmlformats.org/drawingml/2006/main" r:embed="R6f6c5beee22b459f"/>
+          <a:blip xmlns:r="http://schemas.openxmlformats.org/officeDocument/2006/relationships" xmlns:a="http://schemas.openxmlformats.org/drawingml/2006/main" r:embed="R1d56af631d4c472a"/>
           <a:stretch xmlns:a="http://schemas.openxmlformats.org/drawingml/2006/main"/>
         </p:blipFill>
         <p:spPr>
@@ -11353,7 +12767,7 @@
           <p:cNvPr id="4" name="">
             <a:extLst xmlns:a="http://schemas.openxmlformats.org/drawingml/2006/main">
               <a:ext uri="{FF2B5EF4-FFF2-40B4-BE49-F238E27FC236}">
-                <a16:creationId xmlns:a16="http://schemas.microsoft.com/office/drawing/2014/main" id="{74DCDB58-16AA-49F7-9321-E681799F26D7}"/>
+                <a16:creationId xmlns:a16="http://schemas.microsoft.com/office/drawing/2014/main" id="{AFF3F814-9B84-446D-ADFA-44D3A010932E}"/>
               </a:ext>
             </a:extLst>
           </p:cNvPr>
@@ -11520,7 +12934,7 @@
     </p:spTree>
     <p:extLst>
       <p:ext uri="{BB962C8B-B14F-4D97-AF65-F5344CB8AC3E}">
-        <p14:creationId xmlns:p14="http://schemas.microsoft.com/office/powerpoint/2010/main" val="419010791"/>
+        <p14:creationId xmlns:p14="http://schemas.microsoft.com/office/powerpoint/2010/main" val="1890088105"/>
       </p:ext>
     </p:extLst>
   </p:cSld>

--- a/docs/presentacion/FuelTrack-Presentacion.pptx
+++ b/docs/presentacion/FuelTrack-Presentacion.pptx
@@ -2,31 +2,31 @@
 <file path=ppt/presentation.xml><?xml version="1.0" encoding="utf-8"?>
 <p:presentation xmlns:p="http://schemas.openxmlformats.org/presentationml/2006/main">
   <p:sldMasterIdLst>
-    <p:sldMasterId xmlns:r="http://schemas.openxmlformats.org/officeDocument/2006/relationships" id="2147483648" r:id="R28fa4a467bbb4bc2"/>
+    <p:sldMasterId xmlns:r="http://schemas.openxmlformats.org/officeDocument/2006/relationships" id="2147483648" r:id="R249ed2e261a44841"/>
   </p:sldMasterIdLst>
   <p:notesMasterIdLst>
-    <p:notesMasterId xmlns:r="http://schemas.openxmlformats.org/officeDocument/2006/relationships" r:id="Rbf6cb99420d74c05"/>
+    <p:notesMasterId xmlns:r="http://schemas.openxmlformats.org/officeDocument/2006/relationships" r:id="Re549598e1cea4625"/>
   </p:notesMasterIdLst>
   <p:sldIdLst>
-    <p:sldId xmlns:r="http://schemas.openxmlformats.org/officeDocument/2006/relationships" id="256" r:id="R68146a545585423f"/>
-    <p:sldId xmlns:r="http://schemas.openxmlformats.org/officeDocument/2006/relationships" id="257" r:id="R342358756da34142"/>
-    <p:sldId xmlns:r="http://schemas.openxmlformats.org/officeDocument/2006/relationships" id="258" r:id="R57761686bfdd42b1"/>
-    <p:sldId xmlns:r="http://schemas.openxmlformats.org/officeDocument/2006/relationships" id="259" r:id="R924808d6a3ac4a80"/>
-    <p:sldId xmlns:r="http://schemas.openxmlformats.org/officeDocument/2006/relationships" id="260" r:id="R204a7534cc6f4ea1"/>
-    <p:sldId xmlns:r="http://schemas.openxmlformats.org/officeDocument/2006/relationships" id="261" r:id="R5a3bff9509a34607"/>
-    <p:sldId xmlns:r="http://schemas.openxmlformats.org/officeDocument/2006/relationships" id="262" r:id="Reeb268ea526e49fd"/>
-    <p:sldId xmlns:r="http://schemas.openxmlformats.org/officeDocument/2006/relationships" id="263" r:id="R91c18fdc248049b3"/>
-    <p:sldId xmlns:r="http://schemas.openxmlformats.org/officeDocument/2006/relationships" id="264" r:id="Rc5efe66152f24eec"/>
-    <p:sldId xmlns:r="http://schemas.openxmlformats.org/officeDocument/2006/relationships" id="265" r:id="R918290fdbadb49d5"/>
-    <p:sldId xmlns:r="http://schemas.openxmlformats.org/officeDocument/2006/relationships" id="266" r:id="Rb257bfc5520244d0"/>
-    <p:sldId xmlns:r="http://schemas.openxmlformats.org/officeDocument/2006/relationships" id="267" r:id="R208db10379864945"/>
-    <p:sldId xmlns:r="http://schemas.openxmlformats.org/officeDocument/2006/relationships" id="268" r:id="Rb73375207a8a443f"/>
-    <p:sldId xmlns:r="http://schemas.openxmlformats.org/officeDocument/2006/relationships" id="269" r:id="R6fdd365000084bee"/>
-    <p:sldId xmlns:r="http://schemas.openxmlformats.org/officeDocument/2006/relationships" id="270" r:id="Rc4741ad284cc49c8"/>
-    <p:sldId xmlns:r="http://schemas.openxmlformats.org/officeDocument/2006/relationships" id="271" r:id="R9b2c98082238402c"/>
-    <p:sldId xmlns:r="http://schemas.openxmlformats.org/officeDocument/2006/relationships" id="272" r:id="R52086432959644a7"/>
-    <p:sldId xmlns:r="http://schemas.openxmlformats.org/officeDocument/2006/relationships" id="273" r:id="R8bbc6d9f49d04d1b"/>
-    <p:sldId xmlns:r="http://schemas.openxmlformats.org/officeDocument/2006/relationships" id="274" r:id="R86246d43eaa74b31"/>
+    <p:sldId xmlns:r="http://schemas.openxmlformats.org/officeDocument/2006/relationships" id="256" r:id="R68b5a101d56142b2"/>
+    <p:sldId xmlns:r="http://schemas.openxmlformats.org/officeDocument/2006/relationships" id="257" r:id="R5322464f38bc48a2"/>
+    <p:sldId xmlns:r="http://schemas.openxmlformats.org/officeDocument/2006/relationships" id="258" r:id="Rdf8520ec92b840c6"/>
+    <p:sldId xmlns:r="http://schemas.openxmlformats.org/officeDocument/2006/relationships" id="259" r:id="R498746f0c52b45fd"/>
+    <p:sldId xmlns:r="http://schemas.openxmlformats.org/officeDocument/2006/relationships" id="260" r:id="R19185fd936b245af"/>
+    <p:sldId xmlns:r="http://schemas.openxmlformats.org/officeDocument/2006/relationships" id="261" r:id="Rf992b93d60ad4f4a"/>
+    <p:sldId xmlns:r="http://schemas.openxmlformats.org/officeDocument/2006/relationships" id="262" r:id="R6abc4419334f4159"/>
+    <p:sldId xmlns:r="http://schemas.openxmlformats.org/officeDocument/2006/relationships" id="263" r:id="R682ff533a5f243ad"/>
+    <p:sldId xmlns:r="http://schemas.openxmlformats.org/officeDocument/2006/relationships" id="264" r:id="Ra4d32891044a4965"/>
+    <p:sldId xmlns:r="http://schemas.openxmlformats.org/officeDocument/2006/relationships" id="265" r:id="Ra52783ee867b44ab"/>
+    <p:sldId xmlns:r="http://schemas.openxmlformats.org/officeDocument/2006/relationships" id="266" r:id="Rd30f23b98ef24a29"/>
+    <p:sldId xmlns:r="http://schemas.openxmlformats.org/officeDocument/2006/relationships" id="267" r:id="R9551f23c29e54ad8"/>
+    <p:sldId xmlns:r="http://schemas.openxmlformats.org/officeDocument/2006/relationships" id="268" r:id="R2b1a8d161b2b49a8"/>
+    <p:sldId xmlns:r="http://schemas.openxmlformats.org/officeDocument/2006/relationships" id="269" r:id="Rdb2cf3f2acd34d40"/>
+    <p:sldId xmlns:r="http://schemas.openxmlformats.org/officeDocument/2006/relationships" id="270" r:id="Ra5b51adb6c6d46e4"/>
+    <p:sldId xmlns:r="http://schemas.openxmlformats.org/officeDocument/2006/relationships" id="271" r:id="Rc0acfe25b8aa48a2"/>
+    <p:sldId xmlns:r="http://schemas.openxmlformats.org/officeDocument/2006/relationships" id="272" r:id="R96f1b462796b4272"/>
+    <p:sldId xmlns:r="http://schemas.openxmlformats.org/officeDocument/2006/relationships" id="273" r:id="R39d7f59627584e10"/>
+    <p:sldId xmlns:r="http://schemas.openxmlformats.org/officeDocument/2006/relationships" id="274" r:id="Raa8fb8b476c24578"/>
   </p:sldIdLst>
   <p:sldSz cx="12192000" cy="6858000"/>
   <p:notesSz cx="6858000" cy="9144000"/>
@@ -1090,7 +1090,7 @@
           <a:lstStyle xmlns:a="http://schemas.openxmlformats.org/drawingml/2006/main"/>
           <a:p xmlns:a="http://schemas.openxmlformats.org/drawingml/2006/main">
             <a:r>
-              <a:t>La matriz adjunta cruza los 24 requisitos funcionales, los seis de seguridad, la arquitectura y siete criterios de aceptación. La demo local no acredita operación en producción. Requieren cierre externo: SMS y correo real en el entorno objetivo, cámara/lector físico, login nativo de Keycloak y despliegue con TLS 1.3/AES-256, backups, restauración y disponibilidad. La distribución Android actual es QA/debug. No afirmar 100% del SRS.</a:t>
+              <a:t>La matriz adjunta cruza los 24 requisitos funcionales, los seis de seguridad, la arquitectura y siete criterios de aceptación. Demo HTTPS publicada en https://fueltrack-intec-demo.onrender.com con Render Free y Neon. Verificados TLS 1.3, cinco roles, permisos, sobrecapacidad, QR inválido y PDF; esto no acredita operación productiva continua. Requieren cierre externo: SMS y correo real en el entorno objetivo, cámara/lector físico, login nativo de Keycloak y cifrado AES-256 en reposo, backups, restauración y disponibilidad. La distribución Android actual es QA/debug. No afirmar 100% del SRS.</a:t>
             </a:r>
           </a:p>
         </p:txBody>
@@ -1788,7 +1788,7 @@
   </p:cSld>
   <p:clrMap bg1="lt1" tx1="dk1" bg2="lt2" tx2="dk2" accent1="accent1" accent2="accent2" accent3="accent3" accent4="accent4" accent5="accent5" accent6="accent6" hlink="hlink" folHlink="folHlink"/>
   <p:sldLayoutIdLst>
-    <p:sldLayoutId xmlns:r="http://schemas.openxmlformats.org/officeDocument/2006/relationships" id="2147483649" r:id="Rfcf84dcae59c44f6"/>
+    <p:sldLayoutId xmlns:r="http://schemas.openxmlformats.org/officeDocument/2006/relationships" id="2147483649" r:id="R4008f90aefbb456e"/>
   </p:sldLayoutIdLst>
   <p:txStyles>
     <p:titleStyle>
@@ -2339,7 +2339,7 @@
           <p:cNvPr id="7" name="">
             <a:extLst xmlns:a="http://schemas.openxmlformats.org/drawingml/2006/main">
               <a:ext uri="{FF2B5EF4-FFF2-40B4-BE49-F238E27FC236}">
-                <a16:creationId xmlns:a16="http://schemas.microsoft.com/office/drawing/2014/main" id="{7FD3641A-2A17-4A51-89DB-93EB28F9D2F9}"/>
+                <a16:creationId xmlns:a16="http://schemas.microsoft.com/office/drawing/2014/main" id="{342BFBC2-0A1A-47CF-99B4-9F02890EF78C}"/>
               </a:ext>
             </a:extLst>
           </p:cNvPr>
@@ -2396,7 +2396,7 @@
           <p:cNvPr id="2" name="">
             <a:extLst xmlns:a="http://schemas.openxmlformats.org/drawingml/2006/main">
               <a:ext uri="{FF2B5EF4-FFF2-40B4-BE49-F238E27FC236}">
-                <a16:creationId xmlns:a16="http://schemas.microsoft.com/office/drawing/2014/main" id="{309649EC-787C-4A50-A36A-E400FD906E4B}"/>
+                <a16:creationId xmlns:a16="http://schemas.microsoft.com/office/drawing/2014/main" id="{3757F878-3C7B-4205-8D1E-5CD874A5EF7E}"/>
               </a:ext>
             </a:extLst>
           </p:cNvPr>
@@ -2453,7 +2453,7 @@
           <p:cNvPr id="3" name="">
             <a:extLst xmlns:a="http://schemas.openxmlformats.org/drawingml/2006/main">
               <a:ext uri="{FF2B5EF4-FFF2-40B4-BE49-F238E27FC236}">
-                <a16:creationId xmlns:a16="http://schemas.microsoft.com/office/drawing/2014/main" id="{39FFE847-A093-4D22-B21E-8FD1C8403CC2}"/>
+                <a16:creationId xmlns:a16="http://schemas.microsoft.com/office/drawing/2014/main" id="{5E0CCEAD-447F-4A7C-8DF0-7FF3916FDF54}"/>
               </a:ext>
             </a:extLst>
           </p:cNvPr>
@@ -2533,7 +2533,7 @@
           <p:cNvPr id="4" name="">
             <a:extLst xmlns:a="http://schemas.openxmlformats.org/drawingml/2006/main">
               <a:ext uri="{FF2B5EF4-FFF2-40B4-BE49-F238E27FC236}">
-                <a16:creationId xmlns:a16="http://schemas.microsoft.com/office/drawing/2014/main" id="{0B736B9B-64B6-43C1-B06B-35F5B5F571AA}"/>
+                <a16:creationId xmlns:a16="http://schemas.microsoft.com/office/drawing/2014/main" id="{5C0B0A9F-9B97-4C09-88EB-7E69637EE927}"/>
               </a:ext>
             </a:extLst>
           </p:cNvPr>
@@ -2590,7 +2590,7 @@
           <p:cNvPr id="5" name="">
             <a:extLst xmlns:a="http://schemas.openxmlformats.org/drawingml/2006/main">
               <a:ext uri="{FF2B5EF4-FFF2-40B4-BE49-F238E27FC236}">
-                <a16:creationId xmlns:a16="http://schemas.microsoft.com/office/drawing/2014/main" id="{A794453D-C4B6-40CB-A35C-F94E5DC948F5}"/>
+                <a16:creationId xmlns:a16="http://schemas.microsoft.com/office/drawing/2014/main" id="{14ED29B4-1CD1-43FC-BC9B-8D7B79ACF592}"/>
               </a:ext>
             </a:extLst>
           </p:cNvPr>
@@ -2651,7 +2651,7 @@
           <p:nvPr/>
         </p:nvPicPr>
         <p:blipFill>
-          <a:blip xmlns:r="http://schemas.openxmlformats.org/officeDocument/2006/relationships" xmlns:a="http://schemas.openxmlformats.org/drawingml/2006/main" r:embed="R2100c966730c4810"/>
+          <a:blip xmlns:r="http://schemas.openxmlformats.org/officeDocument/2006/relationships" xmlns:a="http://schemas.openxmlformats.org/drawingml/2006/main" r:embed="Rf9043990f56f42a9"/>
           <a:stretch xmlns:a="http://schemas.openxmlformats.org/drawingml/2006/main"/>
         </p:blipFill>
         <p:spPr>
@@ -2667,7 +2667,7 @@
     </p:spTree>
     <p:extLst>
       <p:ext uri="{BB962C8B-B14F-4D97-AF65-F5344CB8AC3E}">
-        <p14:creationId xmlns:p14="http://schemas.microsoft.com/office/powerpoint/2010/main" val="2019234822"/>
+        <p14:creationId xmlns:p14="http://schemas.microsoft.com/office/powerpoint/2010/main" val="633881197"/>
       </p:ext>
     </p:extLst>
   </p:cSld>
@@ -2698,7 +2698,7 @@
           <p:cNvPr id="4" name="">
             <a:extLst xmlns:a="http://schemas.openxmlformats.org/drawingml/2006/main">
               <a:ext uri="{FF2B5EF4-FFF2-40B4-BE49-F238E27FC236}">
-                <a16:creationId xmlns:a16="http://schemas.microsoft.com/office/drawing/2014/main" id="{0F845689-BE1D-4C91-BCFC-3A9D03317023}"/>
+                <a16:creationId xmlns:a16="http://schemas.microsoft.com/office/drawing/2014/main" id="{D75FC8C8-3384-482E-9D60-53FFBAA3588C}"/>
               </a:ext>
             </a:extLst>
           </p:cNvPr>
@@ -2755,7 +2755,7 @@
           <p:cNvPr id="2" name="">
             <a:extLst xmlns:a="http://schemas.openxmlformats.org/drawingml/2006/main">
               <a:ext uri="{FF2B5EF4-FFF2-40B4-BE49-F238E27FC236}">
-                <a16:creationId xmlns:a16="http://schemas.microsoft.com/office/drawing/2014/main" id="{6A05924E-75D2-48A0-8445-C950425F0239}"/>
+                <a16:creationId xmlns:a16="http://schemas.microsoft.com/office/drawing/2014/main" id="{9D439FFA-3A2F-4DA4-87A4-57B80604B516}"/>
               </a:ext>
             </a:extLst>
           </p:cNvPr>
@@ -2816,7 +2816,7 @@
           <p:nvPr/>
         </p:nvPicPr>
         <p:blipFill>
-          <a:blip xmlns:r="http://schemas.openxmlformats.org/officeDocument/2006/relationships" xmlns:a="http://schemas.openxmlformats.org/drawingml/2006/main" r:embed="R41bdad8472644189"/>
+          <a:blip xmlns:r="http://schemas.openxmlformats.org/officeDocument/2006/relationships" xmlns:a="http://schemas.openxmlformats.org/drawingml/2006/main" r:embed="R9faa7759f730412d"/>
           <a:stretch xmlns:a="http://schemas.openxmlformats.org/drawingml/2006/main"/>
         </p:blipFill>
         <p:spPr>
@@ -2832,7 +2832,7 @@
     </p:spTree>
     <p:extLst>
       <p:ext uri="{BB962C8B-B14F-4D97-AF65-F5344CB8AC3E}">
-        <p14:creationId xmlns:p14="http://schemas.microsoft.com/office/powerpoint/2010/main" val="1388340021"/>
+        <p14:creationId xmlns:p14="http://schemas.microsoft.com/office/powerpoint/2010/main" val="478463739"/>
       </p:ext>
     </p:extLst>
   </p:cSld>
@@ -2863,7 +2863,7 @@
           <p:cNvPr id="5" name="">
             <a:extLst xmlns:a="http://schemas.openxmlformats.org/drawingml/2006/main">
               <a:ext uri="{FF2B5EF4-FFF2-40B4-BE49-F238E27FC236}">
-                <a16:creationId xmlns:a16="http://schemas.microsoft.com/office/drawing/2014/main" id="{A3AACBDF-8227-4D22-8FC4-80EC2E697809}"/>
+                <a16:creationId xmlns:a16="http://schemas.microsoft.com/office/drawing/2014/main" id="{2C03F14A-06E2-402C-90CB-C1DEA808FA69}"/>
               </a:ext>
             </a:extLst>
           </p:cNvPr>
@@ -2920,7 +2920,7 @@
           <p:cNvPr id="2" name="">
             <a:extLst xmlns:a="http://schemas.openxmlformats.org/drawingml/2006/main">
               <a:ext uri="{FF2B5EF4-FFF2-40B4-BE49-F238E27FC236}">
-                <a16:creationId xmlns:a16="http://schemas.microsoft.com/office/drawing/2014/main" id="{68DB18CD-049F-4DB0-B02F-B8FC7DBB91F7}"/>
+                <a16:creationId xmlns:a16="http://schemas.microsoft.com/office/drawing/2014/main" id="{2D0C95E9-BE67-4488-9FE6-9C52DA57B5B4}"/>
               </a:ext>
             </a:extLst>
           </p:cNvPr>
@@ -2981,7 +2981,7 @@
           <p:nvPr/>
         </p:nvPicPr>
         <p:blipFill>
-          <a:blip xmlns:r="http://schemas.openxmlformats.org/officeDocument/2006/relationships" xmlns:a="http://schemas.openxmlformats.org/drawingml/2006/main" r:embed="Rfe6162f77fb9442e"/>
+          <a:blip xmlns:r="http://schemas.openxmlformats.org/officeDocument/2006/relationships" xmlns:a="http://schemas.openxmlformats.org/drawingml/2006/main" r:embed="R7036d46bf0484dc3"/>
           <a:stretch xmlns:a="http://schemas.openxmlformats.org/drawingml/2006/main"/>
         </p:blipFill>
         <p:spPr>
@@ -2999,7 +2999,7 @@
           <p:cNvPr id="4" name="">
             <a:extLst xmlns:a="http://schemas.openxmlformats.org/drawingml/2006/main">
               <a:ext uri="{FF2B5EF4-FFF2-40B4-BE49-F238E27FC236}">
-                <a16:creationId xmlns:a16="http://schemas.microsoft.com/office/drawing/2014/main" id="{E16B4783-C0FB-4418-A16F-FB92A2C433E4}"/>
+                <a16:creationId xmlns:a16="http://schemas.microsoft.com/office/drawing/2014/main" id="{F0186923-C0FD-4AC5-AE67-16675F0EF479}"/>
               </a:ext>
             </a:extLst>
           </p:cNvPr>
@@ -3138,7 +3138,7 @@
     </p:spTree>
     <p:extLst>
       <p:ext uri="{BB962C8B-B14F-4D97-AF65-F5344CB8AC3E}">
-        <p14:creationId xmlns:p14="http://schemas.microsoft.com/office/powerpoint/2010/main" val="416750965"/>
+        <p14:creationId xmlns:p14="http://schemas.microsoft.com/office/powerpoint/2010/main" val="491269211"/>
       </p:ext>
     </p:extLst>
   </p:cSld>
@@ -3169,7 +3169,7 @@
           <p:cNvPr id="5" name="">
             <a:extLst xmlns:a="http://schemas.openxmlformats.org/drawingml/2006/main">
               <a:ext uri="{FF2B5EF4-FFF2-40B4-BE49-F238E27FC236}">
-                <a16:creationId xmlns:a16="http://schemas.microsoft.com/office/drawing/2014/main" id="{4D3DC9CB-D452-4057-8BD0-76805D9D6DDB}"/>
+                <a16:creationId xmlns:a16="http://schemas.microsoft.com/office/drawing/2014/main" id="{AA8B8398-A24A-4EBF-8BDB-948B00AF6E8A}"/>
               </a:ext>
             </a:extLst>
           </p:cNvPr>
@@ -3226,7 +3226,7 @@
           <p:cNvPr id="2" name="">
             <a:extLst xmlns:a="http://schemas.openxmlformats.org/drawingml/2006/main">
               <a:ext uri="{FF2B5EF4-FFF2-40B4-BE49-F238E27FC236}">
-                <a16:creationId xmlns:a16="http://schemas.microsoft.com/office/drawing/2014/main" id="{18E86C37-163E-4CBB-B289-4876FC39979B}"/>
+                <a16:creationId xmlns:a16="http://schemas.microsoft.com/office/drawing/2014/main" id="{676C04DB-4BD1-45A6-9940-6A87BEB9F056}"/>
               </a:ext>
             </a:extLst>
           </p:cNvPr>
@@ -3750,7 +3750,7 @@
           <p:cNvPr id="4" name="">
             <a:extLst xmlns:a="http://schemas.openxmlformats.org/drawingml/2006/main">
               <a:ext uri="{FF2B5EF4-FFF2-40B4-BE49-F238E27FC236}">
-                <a16:creationId xmlns:a16="http://schemas.microsoft.com/office/drawing/2014/main" id="{08D6D268-BEE9-47C7-9AA4-38496737FDB6}"/>
+                <a16:creationId xmlns:a16="http://schemas.microsoft.com/office/drawing/2014/main" id="{781C6F8B-2AAA-4070-836C-3EF3DE8E3AFC}"/>
               </a:ext>
             </a:extLst>
           </p:cNvPr>
@@ -3805,7 +3805,7 @@
     </p:spTree>
     <p:extLst>
       <p:ext uri="{BB962C8B-B14F-4D97-AF65-F5344CB8AC3E}">
-        <p14:creationId xmlns:p14="http://schemas.microsoft.com/office/powerpoint/2010/main" val="1787031104"/>
+        <p14:creationId xmlns:p14="http://schemas.microsoft.com/office/powerpoint/2010/main" val="1264742548"/>
       </p:ext>
     </p:extLst>
   </p:cSld>
@@ -3836,7 +3836,7 @@
           <p:cNvPr id="11" name="">
             <a:extLst xmlns:a="http://schemas.openxmlformats.org/drawingml/2006/main">
               <a:ext uri="{FF2B5EF4-FFF2-40B4-BE49-F238E27FC236}">
-                <a16:creationId xmlns:a16="http://schemas.microsoft.com/office/drawing/2014/main" id="{B3223A05-3981-480E-B2E8-BB1535D3789D}"/>
+                <a16:creationId xmlns:a16="http://schemas.microsoft.com/office/drawing/2014/main" id="{8EB31363-1089-4A8E-91E9-E4AC8957EDD7}"/>
               </a:ext>
             </a:extLst>
           </p:cNvPr>
@@ -3893,7 +3893,7 @@
           <p:cNvPr id="2" name="">
             <a:extLst xmlns:a="http://schemas.openxmlformats.org/drawingml/2006/main">
               <a:ext uri="{FF2B5EF4-FFF2-40B4-BE49-F238E27FC236}">
-                <a16:creationId xmlns:a16="http://schemas.microsoft.com/office/drawing/2014/main" id="{B28538BB-23A6-4C9D-B4B1-C6616EB22F76}"/>
+                <a16:creationId xmlns:a16="http://schemas.microsoft.com/office/drawing/2014/main" id="{E71E4C6C-8992-4335-97E7-2FB6BB57EF76}"/>
               </a:ext>
             </a:extLst>
           </p:cNvPr>
@@ -3950,7 +3950,7 @@
           <p:cNvPr id="3" name="">
             <a:extLst xmlns:a="http://schemas.openxmlformats.org/drawingml/2006/main">
               <a:ext uri="{FF2B5EF4-FFF2-40B4-BE49-F238E27FC236}">
-                <a16:creationId xmlns:a16="http://schemas.microsoft.com/office/drawing/2014/main" id="{1D0B5385-B0D5-4FFB-B2F5-521FFFB31B07}"/>
+                <a16:creationId xmlns:a16="http://schemas.microsoft.com/office/drawing/2014/main" id="{D1DC5677-416D-4DF8-8A3C-AFA05C9DA791}"/>
               </a:ext>
             </a:extLst>
           </p:cNvPr>
@@ -4007,7 +4007,7 @@
           <p:cNvPr id="4" name="">
             <a:extLst xmlns:a="http://schemas.openxmlformats.org/drawingml/2006/main">
               <a:ext uri="{FF2B5EF4-FFF2-40B4-BE49-F238E27FC236}">
-                <a16:creationId xmlns:a16="http://schemas.microsoft.com/office/drawing/2014/main" id="{5577A250-8444-402E-B1F7-0FDE5C8CCA1E}"/>
+                <a16:creationId xmlns:a16="http://schemas.microsoft.com/office/drawing/2014/main" id="{6FB91E6F-39D5-4575-9B2A-F5E4964B0218}"/>
               </a:ext>
             </a:extLst>
           </p:cNvPr>
@@ -4064,7 +4064,7 @@
           <p:cNvPr id="5" name="">
             <a:extLst xmlns:a="http://schemas.openxmlformats.org/drawingml/2006/main">
               <a:ext uri="{FF2B5EF4-FFF2-40B4-BE49-F238E27FC236}">
-                <a16:creationId xmlns:a16="http://schemas.microsoft.com/office/drawing/2014/main" id="{51C9A630-DFC5-47BA-8A4D-1862BE575F5B}"/>
+                <a16:creationId xmlns:a16="http://schemas.microsoft.com/office/drawing/2014/main" id="{48CC5315-8E20-4833-B54E-2E46F18A7B2E}"/>
               </a:ext>
             </a:extLst>
           </p:cNvPr>
@@ -4121,7 +4121,7 @@
           <p:cNvPr id="6" name="">
             <a:extLst xmlns:a="http://schemas.openxmlformats.org/drawingml/2006/main">
               <a:ext uri="{FF2B5EF4-FFF2-40B4-BE49-F238E27FC236}">
-                <a16:creationId xmlns:a16="http://schemas.microsoft.com/office/drawing/2014/main" id="{257843E0-712D-4D45-8760-4BE9CA128894}"/>
+                <a16:creationId xmlns:a16="http://schemas.microsoft.com/office/drawing/2014/main" id="{0D681C76-EA3E-4EBE-B618-6A065E7C5903}"/>
               </a:ext>
             </a:extLst>
           </p:cNvPr>
@@ -4178,7 +4178,7 @@
           <p:cNvPr id="7" name="">
             <a:extLst xmlns:a="http://schemas.openxmlformats.org/drawingml/2006/main">
               <a:ext uri="{FF2B5EF4-FFF2-40B4-BE49-F238E27FC236}">
-                <a16:creationId xmlns:a16="http://schemas.microsoft.com/office/drawing/2014/main" id="{A69187DC-DEE8-4649-AE4B-AE51FEB3CDFC}"/>
+                <a16:creationId xmlns:a16="http://schemas.microsoft.com/office/drawing/2014/main" id="{28677858-F381-4EE2-A3C8-E31712D5956A}"/>
               </a:ext>
             </a:extLst>
           </p:cNvPr>
@@ -4235,7 +4235,7 @@
           <p:cNvPr id="8" name="">
             <a:extLst xmlns:a="http://schemas.openxmlformats.org/drawingml/2006/main">
               <a:ext uri="{FF2B5EF4-FFF2-40B4-BE49-F238E27FC236}">
-                <a16:creationId xmlns:a16="http://schemas.microsoft.com/office/drawing/2014/main" id="{62606321-EDA9-4FFB-B9E9-B35299051380}"/>
+                <a16:creationId xmlns:a16="http://schemas.microsoft.com/office/drawing/2014/main" id="{E33288E9-77B1-46F8-9AEE-157BA85A9296}"/>
               </a:ext>
             </a:extLst>
           </p:cNvPr>
@@ -4292,7 +4292,7 @@
           <p:cNvPr id="9" name="">
             <a:extLst xmlns:a="http://schemas.openxmlformats.org/drawingml/2006/main">
               <a:ext uri="{FF2B5EF4-FFF2-40B4-BE49-F238E27FC236}">
-                <a16:creationId xmlns:a16="http://schemas.microsoft.com/office/drawing/2014/main" id="{133056E0-5B17-43A4-81B6-2E387B66197B}"/>
+                <a16:creationId xmlns:a16="http://schemas.microsoft.com/office/drawing/2014/main" id="{D9C0F812-C4D9-44F3-B0A4-0137AF81AD76}"/>
               </a:ext>
             </a:extLst>
           </p:cNvPr>
@@ -4349,7 +4349,7 @@
           <p:cNvPr id="10" name="">
             <a:extLst xmlns:a="http://schemas.openxmlformats.org/drawingml/2006/main">
               <a:ext uri="{FF2B5EF4-FFF2-40B4-BE49-F238E27FC236}">
-                <a16:creationId xmlns:a16="http://schemas.microsoft.com/office/drawing/2014/main" id="{09715120-97AB-4AC1-AFB6-DC662146B233}"/>
+                <a16:creationId xmlns:a16="http://schemas.microsoft.com/office/drawing/2014/main" id="{1355F951-89F6-4CF3-AA10-7A31B5C5154C}"/>
               </a:ext>
             </a:extLst>
           </p:cNvPr>
@@ -4404,7 +4404,7 @@
     </p:spTree>
     <p:extLst>
       <p:ext uri="{BB962C8B-B14F-4D97-AF65-F5344CB8AC3E}">
-        <p14:creationId xmlns:p14="http://schemas.microsoft.com/office/powerpoint/2010/main" val="1700190253"/>
+        <p14:creationId xmlns:p14="http://schemas.microsoft.com/office/powerpoint/2010/main" val="2131103569"/>
       </p:ext>
     </p:extLst>
   </p:cSld>
@@ -4435,7 +4435,7 @@
           <p:cNvPr id="16" name="">
             <a:extLst xmlns:a="http://schemas.openxmlformats.org/drawingml/2006/main">
               <a:ext uri="{FF2B5EF4-FFF2-40B4-BE49-F238E27FC236}">
-                <a16:creationId xmlns:a16="http://schemas.microsoft.com/office/drawing/2014/main" id="{B868DC29-3DFE-4B25-8D36-AD7FD5327158}"/>
+                <a16:creationId xmlns:a16="http://schemas.microsoft.com/office/drawing/2014/main" id="{438D89AF-7517-44C2-BC05-2D834668D067}"/>
               </a:ext>
             </a:extLst>
           </p:cNvPr>
@@ -4492,7 +4492,7 @@
           <p:cNvPr id="2" name="">
             <a:extLst xmlns:a="http://schemas.openxmlformats.org/drawingml/2006/main">
               <a:ext uri="{FF2B5EF4-FFF2-40B4-BE49-F238E27FC236}">
-                <a16:creationId xmlns:a16="http://schemas.microsoft.com/office/drawing/2014/main" id="{A80064B9-FE10-4AF2-865A-9BEF481F3D68}"/>
+                <a16:creationId xmlns:a16="http://schemas.microsoft.com/office/drawing/2014/main" id="{9F70D6BE-91B3-4623-975B-5AD64B9E6F69}"/>
               </a:ext>
             </a:extLst>
           </p:cNvPr>
@@ -4549,7 +4549,7 @@
           <p:cNvPr id="3" name="">
             <a:extLst xmlns:a="http://schemas.openxmlformats.org/drawingml/2006/main">
               <a:ext uri="{FF2B5EF4-FFF2-40B4-BE49-F238E27FC236}">
-                <a16:creationId xmlns:a16="http://schemas.microsoft.com/office/drawing/2014/main" id="{599D4736-9599-448D-B6A3-9EC4262D24F9}"/>
+                <a16:creationId xmlns:a16="http://schemas.microsoft.com/office/drawing/2014/main" id="{EAF2B6FC-4AAA-4D0A-8115-5EC8B91B7C12}"/>
               </a:ext>
             </a:extLst>
           </p:cNvPr>
@@ -4606,7 +4606,7 @@
           <p:cNvPr id="4" name="">
             <a:extLst xmlns:a="http://schemas.openxmlformats.org/drawingml/2006/main">
               <a:ext uri="{FF2B5EF4-FFF2-40B4-BE49-F238E27FC236}">
-                <a16:creationId xmlns:a16="http://schemas.microsoft.com/office/drawing/2014/main" id="{DFBD4E38-5E8A-479A-9620-73244F8BAF00}"/>
+                <a16:creationId xmlns:a16="http://schemas.microsoft.com/office/drawing/2014/main" id="{934F3A2C-3262-4305-8075-74086F0309A6}"/>
               </a:ext>
             </a:extLst>
           </p:cNvPr>
@@ -4663,7 +4663,7 @@
           <p:cNvPr id="5" name="">
             <a:extLst xmlns:a="http://schemas.openxmlformats.org/drawingml/2006/main">
               <a:ext uri="{FF2B5EF4-FFF2-40B4-BE49-F238E27FC236}">
-                <a16:creationId xmlns:a16="http://schemas.microsoft.com/office/drawing/2014/main" id="{CF2A6059-D59A-4912-8ED6-BAEAD87EC4B5}"/>
+                <a16:creationId xmlns:a16="http://schemas.microsoft.com/office/drawing/2014/main" id="{21EFC794-4066-42E7-AC08-A2FB59A0692C}"/>
               </a:ext>
             </a:extLst>
           </p:cNvPr>
@@ -4720,7 +4720,7 @@
           <p:cNvPr id="6" name="">
             <a:extLst xmlns:a="http://schemas.openxmlformats.org/drawingml/2006/main">
               <a:ext uri="{FF2B5EF4-FFF2-40B4-BE49-F238E27FC236}">
-                <a16:creationId xmlns:a16="http://schemas.microsoft.com/office/drawing/2014/main" id="{28427790-6E6B-49E2-B93B-DC40E2045DAA}"/>
+                <a16:creationId xmlns:a16="http://schemas.microsoft.com/office/drawing/2014/main" id="{EC4F6A69-6134-417F-A0F7-B644CA9AD633}"/>
               </a:ext>
             </a:extLst>
           </p:cNvPr>
@@ -4777,7 +4777,7 @@
           <p:cNvPr id="7" name="">
             <a:extLst xmlns:a="http://schemas.openxmlformats.org/drawingml/2006/main">
               <a:ext uri="{FF2B5EF4-FFF2-40B4-BE49-F238E27FC236}">
-                <a16:creationId xmlns:a16="http://schemas.microsoft.com/office/drawing/2014/main" id="{24E68FD6-628A-41BF-ABE5-02B43DEB165C}"/>
+                <a16:creationId xmlns:a16="http://schemas.microsoft.com/office/drawing/2014/main" id="{503A8E77-1CCD-4563-BD94-AD3CB30CEAC4}"/>
               </a:ext>
             </a:extLst>
           </p:cNvPr>
@@ -4834,7 +4834,7 @@
           <p:cNvPr id="8" name="">
             <a:extLst xmlns:a="http://schemas.openxmlformats.org/drawingml/2006/main">
               <a:ext uri="{FF2B5EF4-FFF2-40B4-BE49-F238E27FC236}">
-                <a16:creationId xmlns:a16="http://schemas.microsoft.com/office/drawing/2014/main" id="{66F1FDDA-7EAB-402A-BC81-4A927AEFB704}"/>
+                <a16:creationId xmlns:a16="http://schemas.microsoft.com/office/drawing/2014/main" id="{1824D826-FED3-4C1A-B0EA-D5D101AD9E29}"/>
               </a:ext>
             </a:extLst>
           </p:cNvPr>
@@ -4891,7 +4891,7 @@
           <p:cNvPr id="9" name="">
             <a:extLst xmlns:a="http://schemas.openxmlformats.org/drawingml/2006/main">
               <a:ext uri="{FF2B5EF4-FFF2-40B4-BE49-F238E27FC236}">
-                <a16:creationId xmlns:a16="http://schemas.microsoft.com/office/drawing/2014/main" id="{6E0403AF-1EC2-440F-B48E-68D85E22C174}"/>
+                <a16:creationId xmlns:a16="http://schemas.microsoft.com/office/drawing/2014/main" id="{FEC574B5-BB1B-4FFD-8E6D-B6492221B922}"/>
               </a:ext>
             </a:extLst>
           </p:cNvPr>
@@ -4948,7 +4948,7 @@
           <p:cNvPr id="10" name="">
             <a:extLst xmlns:a="http://schemas.openxmlformats.org/drawingml/2006/main">
               <a:ext uri="{FF2B5EF4-FFF2-40B4-BE49-F238E27FC236}">
-                <a16:creationId xmlns:a16="http://schemas.microsoft.com/office/drawing/2014/main" id="{265FC871-1F1D-438E-A4A5-8D0FC3012268}"/>
+                <a16:creationId xmlns:a16="http://schemas.microsoft.com/office/drawing/2014/main" id="{B53B90FE-889F-41BF-9DFD-E8B5DC53C796}"/>
               </a:ext>
             </a:extLst>
           </p:cNvPr>
@@ -5005,7 +5005,7 @@
           <p:cNvPr id="11" name="">
             <a:extLst xmlns:a="http://schemas.openxmlformats.org/drawingml/2006/main">
               <a:ext uri="{FF2B5EF4-FFF2-40B4-BE49-F238E27FC236}">
-                <a16:creationId xmlns:a16="http://schemas.microsoft.com/office/drawing/2014/main" id="{183E135E-2839-4CF8-B151-B88F901785ED}"/>
+                <a16:creationId xmlns:a16="http://schemas.microsoft.com/office/drawing/2014/main" id="{28E6EE6D-F500-4748-BB84-B6F9936C86AC}"/>
               </a:ext>
             </a:extLst>
           </p:cNvPr>
@@ -5062,7 +5062,7 @@
           <p:cNvPr id="12" name="">
             <a:extLst xmlns:a="http://schemas.openxmlformats.org/drawingml/2006/main">
               <a:ext uri="{FF2B5EF4-FFF2-40B4-BE49-F238E27FC236}">
-                <a16:creationId xmlns:a16="http://schemas.microsoft.com/office/drawing/2014/main" id="{E7F0AA9F-D5D7-4364-94E5-8D980F813A9A}"/>
+                <a16:creationId xmlns:a16="http://schemas.microsoft.com/office/drawing/2014/main" id="{581A05EE-82A7-421A-B00F-2E4A655D99A5}"/>
               </a:ext>
             </a:extLst>
           </p:cNvPr>
@@ -5119,7 +5119,7 @@
           <p:cNvPr id="13" name="">
             <a:extLst xmlns:a="http://schemas.openxmlformats.org/drawingml/2006/main">
               <a:ext uri="{FF2B5EF4-FFF2-40B4-BE49-F238E27FC236}">
-                <a16:creationId xmlns:a16="http://schemas.microsoft.com/office/drawing/2014/main" id="{2CF93428-7988-439C-88FD-C86194CB335D}"/>
+                <a16:creationId xmlns:a16="http://schemas.microsoft.com/office/drawing/2014/main" id="{32621EE2-C872-46DE-82C2-C511F67C7BA6}"/>
               </a:ext>
             </a:extLst>
           </p:cNvPr>
@@ -5176,7 +5176,7 @@
           <p:cNvPr id="14" name="">
             <a:extLst xmlns:a="http://schemas.openxmlformats.org/drawingml/2006/main">
               <a:ext uri="{FF2B5EF4-FFF2-40B4-BE49-F238E27FC236}">
-                <a16:creationId xmlns:a16="http://schemas.microsoft.com/office/drawing/2014/main" id="{8F205B76-5E0C-4B7C-9518-6C4CD11D0CD5}"/>
+                <a16:creationId xmlns:a16="http://schemas.microsoft.com/office/drawing/2014/main" id="{E0704A2D-24AF-41C9-B012-9A5F13D4F001}"/>
               </a:ext>
             </a:extLst>
           </p:cNvPr>
@@ -5233,7 +5233,7 @@
           <p:cNvPr id="15" name="">
             <a:extLst xmlns:a="http://schemas.openxmlformats.org/drawingml/2006/main">
               <a:ext uri="{FF2B5EF4-FFF2-40B4-BE49-F238E27FC236}">
-                <a16:creationId xmlns:a16="http://schemas.microsoft.com/office/drawing/2014/main" id="{8EBA6303-243A-4CFA-B68F-D137ED42D723}"/>
+                <a16:creationId xmlns:a16="http://schemas.microsoft.com/office/drawing/2014/main" id="{77D80D3D-4EC9-4BC0-9272-C22D22AB8239}"/>
               </a:ext>
             </a:extLst>
           </p:cNvPr>
@@ -5288,7 +5288,7 @@
     </p:spTree>
     <p:extLst>
       <p:ext uri="{BB962C8B-B14F-4D97-AF65-F5344CB8AC3E}">
-        <p14:creationId xmlns:p14="http://schemas.microsoft.com/office/powerpoint/2010/main" val="1302399620"/>
+        <p14:creationId xmlns:p14="http://schemas.microsoft.com/office/powerpoint/2010/main" val="1299848433"/>
       </p:ext>
     </p:extLst>
   </p:cSld>
@@ -5319,7 +5319,7 @@
           <p:cNvPr id="7" name="">
             <a:extLst xmlns:a="http://schemas.openxmlformats.org/drawingml/2006/main">
               <a:ext uri="{FF2B5EF4-FFF2-40B4-BE49-F238E27FC236}">
-                <a16:creationId xmlns:a16="http://schemas.microsoft.com/office/drawing/2014/main" id="{F126A879-C256-4CCC-BB75-7777E233B506}"/>
+                <a16:creationId xmlns:a16="http://schemas.microsoft.com/office/drawing/2014/main" id="{D5F43DBE-2ABB-4F88-A1E1-D2D4C36B9D3A}"/>
               </a:ext>
             </a:extLst>
           </p:cNvPr>
@@ -5376,7 +5376,7 @@
           <p:cNvPr id="2" name="">
             <a:extLst xmlns:a="http://schemas.openxmlformats.org/drawingml/2006/main">
               <a:ext uri="{FF2B5EF4-FFF2-40B4-BE49-F238E27FC236}">
-                <a16:creationId xmlns:a16="http://schemas.microsoft.com/office/drawing/2014/main" id="{39F94C3B-DC2A-48C1-B1E1-66DF121B14E1}"/>
+                <a16:creationId xmlns:a16="http://schemas.microsoft.com/office/drawing/2014/main" id="{227869FF-16F3-4AFA-A757-B77558E483E5}"/>
               </a:ext>
             </a:extLst>
           </p:cNvPr>
@@ -5433,7 +5433,7 @@
           <p:cNvPr id="3" name="">
             <a:extLst xmlns:a="http://schemas.openxmlformats.org/drawingml/2006/main">
               <a:ext uri="{FF2B5EF4-FFF2-40B4-BE49-F238E27FC236}">
-                <a16:creationId xmlns:a16="http://schemas.microsoft.com/office/drawing/2014/main" id="{DEB8D60C-9635-4520-9165-7291D5ED8BA1}"/>
+                <a16:creationId xmlns:a16="http://schemas.microsoft.com/office/drawing/2014/main" id="{E77F4E77-CF76-459F-BD7B-B6F7054BCD83}"/>
               </a:ext>
             </a:extLst>
           </p:cNvPr>
@@ -5490,7 +5490,7 @@
           <p:cNvPr id="4" name="">
             <a:extLst xmlns:a="http://schemas.openxmlformats.org/drawingml/2006/main">
               <a:ext uri="{FF2B5EF4-FFF2-40B4-BE49-F238E27FC236}">
-                <a16:creationId xmlns:a16="http://schemas.microsoft.com/office/drawing/2014/main" id="{655FC5FE-9A61-41CC-8E0F-E254812E50D0}"/>
+                <a16:creationId xmlns:a16="http://schemas.microsoft.com/office/drawing/2014/main" id="{516C052F-45E9-4F76-8A0B-2AFAFA4F9DC2}"/>
               </a:ext>
             </a:extLst>
           </p:cNvPr>
@@ -5570,7 +5570,7 @@
           <p:cNvPr id="5" name="">
             <a:extLst xmlns:a="http://schemas.openxmlformats.org/drawingml/2006/main">
               <a:ext uri="{FF2B5EF4-FFF2-40B4-BE49-F238E27FC236}">
-                <a16:creationId xmlns:a16="http://schemas.microsoft.com/office/drawing/2014/main" id="{16E79BAF-A861-4318-A15D-A2AEE6D5E509}"/>
+                <a16:creationId xmlns:a16="http://schemas.microsoft.com/office/drawing/2014/main" id="{4D8544FA-27A7-44E9-BAA7-77C101461A44}"/>
               </a:ext>
             </a:extLst>
           </p:cNvPr>
@@ -5711,7 +5711,7 @@
           <p:cNvPr id="6" name="">
             <a:extLst xmlns:a="http://schemas.openxmlformats.org/drawingml/2006/main">
               <a:ext uri="{FF2B5EF4-FFF2-40B4-BE49-F238E27FC236}">
-                <a16:creationId xmlns:a16="http://schemas.microsoft.com/office/drawing/2014/main" id="{8E89D3AC-C391-4812-B29F-5CFB72B3272E}"/>
+                <a16:creationId xmlns:a16="http://schemas.microsoft.com/office/drawing/2014/main" id="{3CAC6BB5-C6B4-4A87-9FB6-D11694CD2513}"/>
               </a:ext>
             </a:extLst>
           </p:cNvPr>
@@ -5766,7 +5766,7 @@
     </p:spTree>
     <p:extLst>
       <p:ext uri="{BB962C8B-B14F-4D97-AF65-F5344CB8AC3E}">
-        <p14:creationId xmlns:p14="http://schemas.microsoft.com/office/powerpoint/2010/main" val="875281977"/>
+        <p14:creationId xmlns:p14="http://schemas.microsoft.com/office/powerpoint/2010/main" val="1575742430"/>
       </p:ext>
     </p:extLst>
   </p:cSld>
@@ -5797,7 +5797,7 @@
           <p:cNvPr id="20" name="">
             <a:extLst xmlns:a="http://schemas.openxmlformats.org/drawingml/2006/main">
               <a:ext uri="{FF2B5EF4-FFF2-40B4-BE49-F238E27FC236}">
-                <a16:creationId xmlns:a16="http://schemas.microsoft.com/office/drawing/2014/main" id="{12E560DF-B875-4D53-A2E0-AEEF0028E94D}"/>
+                <a16:creationId xmlns:a16="http://schemas.microsoft.com/office/drawing/2014/main" id="{BE99A75B-4DDA-45F6-AAB8-B515EB37410D}"/>
               </a:ext>
             </a:extLst>
           </p:cNvPr>
@@ -5854,7 +5854,7 @@
           <p:cNvPr id="2" name="">
             <a:extLst xmlns:a="http://schemas.openxmlformats.org/drawingml/2006/main">
               <a:ext uri="{FF2B5EF4-FFF2-40B4-BE49-F238E27FC236}">
-                <a16:creationId xmlns:a16="http://schemas.microsoft.com/office/drawing/2014/main" id="{5A50C7A5-7D4C-4AAC-872B-A7E209F68AAC}"/>
+                <a16:creationId xmlns:a16="http://schemas.microsoft.com/office/drawing/2014/main" id="{9F6C7D81-DC30-4D8C-BE14-98B5FB979B98}"/>
               </a:ext>
             </a:extLst>
           </p:cNvPr>
@@ -5911,7 +5911,7 @@
           <p:cNvPr id="3" name="">
             <a:extLst xmlns:a="http://schemas.openxmlformats.org/drawingml/2006/main">
               <a:ext uri="{FF2B5EF4-FFF2-40B4-BE49-F238E27FC236}">
-                <a16:creationId xmlns:a16="http://schemas.microsoft.com/office/drawing/2014/main" id="{B517E0B0-FDA4-42D9-9533-87DA0B98B362}"/>
+                <a16:creationId xmlns:a16="http://schemas.microsoft.com/office/drawing/2014/main" id="{7F3B21DD-094A-4B29-853B-52500D98F4BE}"/>
               </a:ext>
             </a:extLst>
           </p:cNvPr>
@@ -5943,7 +5943,7 @@
           <p:cNvPr id="4" name="">
             <a:extLst xmlns:a="http://schemas.openxmlformats.org/drawingml/2006/main">
               <a:ext uri="{FF2B5EF4-FFF2-40B4-BE49-F238E27FC236}">
-                <a16:creationId xmlns:a16="http://schemas.microsoft.com/office/drawing/2014/main" id="{50D8D858-DD74-49E8-9453-A1E62A5086EC}"/>
+                <a16:creationId xmlns:a16="http://schemas.microsoft.com/office/drawing/2014/main" id="{1B73010F-C3BD-456B-A31F-95B4B9E02B68}"/>
               </a:ext>
             </a:extLst>
           </p:cNvPr>
@@ -6000,7 +6000,7 @@
           <p:cNvPr id="5" name="">
             <a:extLst xmlns:a="http://schemas.openxmlformats.org/drawingml/2006/main">
               <a:ext uri="{FF2B5EF4-FFF2-40B4-BE49-F238E27FC236}">
-                <a16:creationId xmlns:a16="http://schemas.microsoft.com/office/drawing/2014/main" id="{37725826-BD96-4C46-B11C-1BAF3F5C8FBF}"/>
+                <a16:creationId xmlns:a16="http://schemas.microsoft.com/office/drawing/2014/main" id="{A757E42C-C1B7-4BCA-820D-3E2B4C5AAF58}"/>
               </a:ext>
             </a:extLst>
           </p:cNvPr>
@@ -6057,7 +6057,7 @@
           <p:cNvPr id="6" name="">
             <a:extLst xmlns:a="http://schemas.openxmlformats.org/drawingml/2006/main">
               <a:ext uri="{FF2B5EF4-FFF2-40B4-BE49-F238E27FC236}">
-                <a16:creationId xmlns:a16="http://schemas.microsoft.com/office/drawing/2014/main" id="{9674DC50-AE55-4670-AE94-79A80EB8BEB3}"/>
+                <a16:creationId xmlns:a16="http://schemas.microsoft.com/office/drawing/2014/main" id="{CD9591CB-DC8E-41D0-A2A5-E505FF22DAD1}"/>
               </a:ext>
             </a:extLst>
           </p:cNvPr>
@@ -6089,7 +6089,7 @@
           <p:cNvPr id="7" name="">
             <a:extLst xmlns:a="http://schemas.openxmlformats.org/drawingml/2006/main">
               <a:ext uri="{FF2B5EF4-FFF2-40B4-BE49-F238E27FC236}">
-                <a16:creationId xmlns:a16="http://schemas.microsoft.com/office/drawing/2014/main" id="{FA19D179-CE1A-425A-B7CA-599B688F3F7E}"/>
+                <a16:creationId xmlns:a16="http://schemas.microsoft.com/office/drawing/2014/main" id="{6419D883-CA52-410A-A078-FC5E418AA48D}"/>
               </a:ext>
             </a:extLst>
           </p:cNvPr>
@@ -6146,7 +6146,7 @@
           <p:cNvPr id="8" name="">
             <a:extLst xmlns:a="http://schemas.openxmlformats.org/drawingml/2006/main">
               <a:ext uri="{FF2B5EF4-FFF2-40B4-BE49-F238E27FC236}">
-                <a16:creationId xmlns:a16="http://schemas.microsoft.com/office/drawing/2014/main" id="{8702A4E8-7761-421A-B707-B5EFAF943097}"/>
+                <a16:creationId xmlns:a16="http://schemas.microsoft.com/office/drawing/2014/main" id="{4A5BF3B9-FF0C-4108-B4C3-AE655E7D4A5B}"/>
               </a:ext>
             </a:extLst>
           </p:cNvPr>
@@ -6203,7 +6203,7 @@
           <p:cNvPr id="9" name="">
             <a:extLst xmlns:a="http://schemas.openxmlformats.org/drawingml/2006/main">
               <a:ext uri="{FF2B5EF4-FFF2-40B4-BE49-F238E27FC236}">
-                <a16:creationId xmlns:a16="http://schemas.microsoft.com/office/drawing/2014/main" id="{3898845D-1D4F-43F5-A1F7-1C90FF1DB35F}"/>
+                <a16:creationId xmlns:a16="http://schemas.microsoft.com/office/drawing/2014/main" id="{0B121B19-2DEB-450F-86F2-F3C2B030F1F6}"/>
               </a:ext>
             </a:extLst>
           </p:cNvPr>
@@ -6235,7 +6235,7 @@
           <p:cNvPr id="10" name="">
             <a:extLst xmlns:a="http://schemas.openxmlformats.org/drawingml/2006/main">
               <a:ext uri="{FF2B5EF4-FFF2-40B4-BE49-F238E27FC236}">
-                <a16:creationId xmlns:a16="http://schemas.microsoft.com/office/drawing/2014/main" id="{315428DA-232A-49EA-BC75-DD1F38CA06F8}"/>
+                <a16:creationId xmlns:a16="http://schemas.microsoft.com/office/drawing/2014/main" id="{15240F6A-561C-4E55-ABF3-0359D8904BAD}"/>
               </a:ext>
             </a:extLst>
           </p:cNvPr>
@@ -6292,7 +6292,7 @@
           <p:cNvPr id="11" name="">
             <a:extLst xmlns:a="http://schemas.openxmlformats.org/drawingml/2006/main">
               <a:ext uri="{FF2B5EF4-FFF2-40B4-BE49-F238E27FC236}">
-                <a16:creationId xmlns:a16="http://schemas.microsoft.com/office/drawing/2014/main" id="{04D98F59-8A30-4A06-B844-831DA5264157}"/>
+                <a16:creationId xmlns:a16="http://schemas.microsoft.com/office/drawing/2014/main" id="{A720A4D7-1BA1-4E7A-A588-3103ADC90291}"/>
               </a:ext>
             </a:extLst>
           </p:cNvPr>
@@ -6349,7 +6349,7 @@
           <p:cNvPr id="12" name="">
             <a:extLst xmlns:a="http://schemas.openxmlformats.org/drawingml/2006/main">
               <a:ext uri="{FF2B5EF4-FFF2-40B4-BE49-F238E27FC236}">
-                <a16:creationId xmlns:a16="http://schemas.microsoft.com/office/drawing/2014/main" id="{784CB378-C8A2-4197-BB18-0BB082E71F4E}"/>
+                <a16:creationId xmlns:a16="http://schemas.microsoft.com/office/drawing/2014/main" id="{37FFCC03-4AF4-46C2-A5FD-BA52FFB09688}"/>
               </a:ext>
             </a:extLst>
           </p:cNvPr>
@@ -6381,7 +6381,7 @@
           <p:cNvPr id="13" name="">
             <a:extLst xmlns:a="http://schemas.openxmlformats.org/drawingml/2006/main">
               <a:ext uri="{FF2B5EF4-FFF2-40B4-BE49-F238E27FC236}">
-                <a16:creationId xmlns:a16="http://schemas.microsoft.com/office/drawing/2014/main" id="{46825BED-38B9-46A4-AA9A-DC6D577FD499}"/>
+                <a16:creationId xmlns:a16="http://schemas.microsoft.com/office/drawing/2014/main" id="{EF5A20DB-E746-4159-8508-B66C87B82F51}"/>
               </a:ext>
             </a:extLst>
           </p:cNvPr>
@@ -6438,7 +6438,7 @@
           <p:cNvPr id="14" name="">
             <a:extLst xmlns:a="http://schemas.openxmlformats.org/drawingml/2006/main">
               <a:ext uri="{FF2B5EF4-FFF2-40B4-BE49-F238E27FC236}">
-                <a16:creationId xmlns:a16="http://schemas.microsoft.com/office/drawing/2014/main" id="{7D32573A-BC58-4113-9AE5-2F13B139E3D7}"/>
+                <a16:creationId xmlns:a16="http://schemas.microsoft.com/office/drawing/2014/main" id="{40383BE1-6047-449C-8171-F0FD482F6F30}"/>
               </a:ext>
             </a:extLst>
           </p:cNvPr>
@@ -6570,7 +6570,7 @@
           <p:cNvPr id="18" name="">
             <a:extLst xmlns:a="http://schemas.openxmlformats.org/drawingml/2006/main">
               <a:ext uri="{FF2B5EF4-FFF2-40B4-BE49-F238E27FC236}">
-                <a16:creationId xmlns:a16="http://schemas.microsoft.com/office/drawing/2014/main" id="{D808ABD1-883E-401C-9C92-EFFF18F19F33}"/>
+                <a16:creationId xmlns:a16="http://schemas.microsoft.com/office/drawing/2014/main" id="{03B51C2F-ECE6-4C9F-B90B-534F07768196}"/>
               </a:ext>
             </a:extLst>
           </p:cNvPr>
@@ -6627,7 +6627,7 @@
           <p:cNvPr id="19" name="">
             <a:extLst xmlns:a="http://schemas.openxmlformats.org/drawingml/2006/main">
               <a:ext uri="{FF2B5EF4-FFF2-40B4-BE49-F238E27FC236}">
-                <a16:creationId xmlns:a16="http://schemas.microsoft.com/office/drawing/2014/main" id="{41D6B575-0591-4637-80AF-158E4C020B85}"/>
+                <a16:creationId xmlns:a16="http://schemas.microsoft.com/office/drawing/2014/main" id="{751A31D3-9C38-4FCF-A0DA-6F26D653EDCE}"/>
               </a:ext>
             </a:extLst>
           </p:cNvPr>
@@ -6682,7 +6682,7 @@
     </p:spTree>
     <p:extLst>
       <p:ext uri="{BB962C8B-B14F-4D97-AF65-F5344CB8AC3E}">
-        <p14:creationId xmlns:p14="http://schemas.microsoft.com/office/powerpoint/2010/main" val="481132202"/>
+        <p14:creationId xmlns:p14="http://schemas.microsoft.com/office/powerpoint/2010/main" val="616553512"/>
       </p:ext>
     </p:extLst>
   </p:cSld>
@@ -6713,7 +6713,7 @@
           <p:cNvPr id="11" name="">
             <a:extLst xmlns:a="http://schemas.openxmlformats.org/drawingml/2006/main">
               <a:ext uri="{FF2B5EF4-FFF2-40B4-BE49-F238E27FC236}">
-                <a16:creationId xmlns:a16="http://schemas.microsoft.com/office/drawing/2014/main" id="{5EE98587-8577-478C-B21C-19D2CC5AB934}"/>
+                <a16:creationId xmlns:a16="http://schemas.microsoft.com/office/drawing/2014/main" id="{5A8EDC21-39B1-4CD7-9424-307AD0736EEA}"/>
               </a:ext>
             </a:extLst>
           </p:cNvPr>
@@ -6770,7 +6770,7 @@
           <p:cNvPr id="2" name="">
             <a:extLst xmlns:a="http://schemas.openxmlformats.org/drawingml/2006/main">
               <a:ext uri="{FF2B5EF4-FFF2-40B4-BE49-F238E27FC236}">
-                <a16:creationId xmlns:a16="http://schemas.microsoft.com/office/drawing/2014/main" id="{719C5161-B9F2-4BC2-B6EB-209515D6B25C}"/>
+                <a16:creationId xmlns:a16="http://schemas.microsoft.com/office/drawing/2014/main" id="{B34BB5DC-4BFC-4CC8-92FE-B83FAF1BE533}"/>
               </a:ext>
             </a:extLst>
           </p:cNvPr>
@@ -6827,7 +6827,7 @@
           <p:cNvPr id="3" name="">
             <a:extLst xmlns:a="http://schemas.openxmlformats.org/drawingml/2006/main">
               <a:ext uri="{FF2B5EF4-FFF2-40B4-BE49-F238E27FC236}">
-                <a16:creationId xmlns:a16="http://schemas.microsoft.com/office/drawing/2014/main" id="{0972378B-5F18-4F4A-B5EB-EE3010A5D45B}"/>
+                <a16:creationId xmlns:a16="http://schemas.microsoft.com/office/drawing/2014/main" id="{AE8D025C-DE44-455F-B301-7E4C31EA112E}"/>
               </a:ext>
             </a:extLst>
           </p:cNvPr>
@@ -6884,7 +6884,7 @@
           <p:cNvPr id="4" name="">
             <a:extLst xmlns:a="http://schemas.openxmlformats.org/drawingml/2006/main">
               <a:ext uri="{FF2B5EF4-FFF2-40B4-BE49-F238E27FC236}">
-                <a16:creationId xmlns:a16="http://schemas.microsoft.com/office/drawing/2014/main" id="{B49C35F8-F725-4521-A5E2-E48C89D48E20}"/>
+                <a16:creationId xmlns:a16="http://schemas.microsoft.com/office/drawing/2014/main" id="{C6DBBF9B-663E-4620-AC13-AA3A0FB3536C}"/>
               </a:ext>
             </a:extLst>
           </p:cNvPr>
@@ -6941,7 +6941,7 @@
           <p:cNvPr id="5" name="">
             <a:extLst xmlns:a="http://schemas.openxmlformats.org/drawingml/2006/main">
               <a:ext uri="{FF2B5EF4-FFF2-40B4-BE49-F238E27FC236}">
-                <a16:creationId xmlns:a16="http://schemas.microsoft.com/office/drawing/2014/main" id="{93A806A6-7B98-42BB-B529-416C7AAFBBA9}"/>
+                <a16:creationId xmlns:a16="http://schemas.microsoft.com/office/drawing/2014/main" id="{27DFD33C-A050-4C2F-A5D4-E92197F90C3F}"/>
               </a:ext>
             </a:extLst>
           </p:cNvPr>
@@ -6998,7 +6998,7 @@
           <p:cNvPr id="6" name="">
             <a:extLst xmlns:a="http://schemas.openxmlformats.org/drawingml/2006/main">
               <a:ext uri="{FF2B5EF4-FFF2-40B4-BE49-F238E27FC236}">
-                <a16:creationId xmlns:a16="http://schemas.microsoft.com/office/drawing/2014/main" id="{F37CF5F4-C8DB-4CEF-975C-957EA07CED40}"/>
+                <a16:creationId xmlns:a16="http://schemas.microsoft.com/office/drawing/2014/main" id="{7E49762E-7444-4B66-96CA-2DD20F02E6CF}"/>
               </a:ext>
             </a:extLst>
           </p:cNvPr>
@@ -7055,7 +7055,7 @@
           <p:cNvPr id="7" name="">
             <a:extLst xmlns:a="http://schemas.openxmlformats.org/drawingml/2006/main">
               <a:ext uri="{FF2B5EF4-FFF2-40B4-BE49-F238E27FC236}">
-                <a16:creationId xmlns:a16="http://schemas.microsoft.com/office/drawing/2014/main" id="{EFE3406F-FFC5-4CD2-B89D-8776E2987061}"/>
+                <a16:creationId xmlns:a16="http://schemas.microsoft.com/office/drawing/2014/main" id="{8F7B9632-6EBB-4855-ADD2-78C1DCD00A3A}"/>
               </a:ext>
             </a:extLst>
           </p:cNvPr>
@@ -7112,7 +7112,7 @@
           <p:cNvPr id="8" name="">
             <a:extLst xmlns:a="http://schemas.openxmlformats.org/drawingml/2006/main">
               <a:ext uri="{FF2B5EF4-FFF2-40B4-BE49-F238E27FC236}">
-                <a16:creationId xmlns:a16="http://schemas.microsoft.com/office/drawing/2014/main" id="{A9E87D75-263C-4170-8489-DD3AE0EE900C}"/>
+                <a16:creationId xmlns:a16="http://schemas.microsoft.com/office/drawing/2014/main" id="{4B400C02-A6DF-499D-8E85-6530FEE26CE5}"/>
               </a:ext>
             </a:extLst>
           </p:cNvPr>
@@ -7169,7 +7169,7 @@
           <p:cNvPr id="9" name="">
             <a:extLst xmlns:a="http://schemas.openxmlformats.org/drawingml/2006/main">
               <a:ext uri="{FF2B5EF4-FFF2-40B4-BE49-F238E27FC236}">
-                <a16:creationId xmlns:a16="http://schemas.microsoft.com/office/drawing/2014/main" id="{15490553-F3A2-4D74-B8B7-E70C3A7E45DB}"/>
+                <a16:creationId xmlns:a16="http://schemas.microsoft.com/office/drawing/2014/main" id="{2F551980-F2FF-4A36-8B02-DDFD87993962}"/>
               </a:ext>
             </a:extLst>
           </p:cNvPr>
@@ -7226,7 +7226,7 @@
           <p:cNvPr id="10" name="">
             <a:extLst xmlns:a="http://schemas.openxmlformats.org/drawingml/2006/main">
               <a:ext uri="{FF2B5EF4-FFF2-40B4-BE49-F238E27FC236}">
-                <a16:creationId xmlns:a16="http://schemas.microsoft.com/office/drawing/2014/main" id="{1870A752-EE11-49AC-B84A-0CA759A4C64B}"/>
+                <a16:creationId xmlns:a16="http://schemas.microsoft.com/office/drawing/2014/main" id="{BB0D3554-7361-45C8-BC06-249905C47082}"/>
               </a:ext>
             </a:extLst>
           </p:cNvPr>
@@ -7281,7 +7281,7 @@
     </p:spTree>
     <p:extLst>
       <p:ext uri="{BB962C8B-B14F-4D97-AF65-F5344CB8AC3E}">
-        <p14:creationId xmlns:p14="http://schemas.microsoft.com/office/powerpoint/2010/main" val="600672372"/>
+        <p14:creationId xmlns:p14="http://schemas.microsoft.com/office/powerpoint/2010/main" val="2068614278"/>
       </p:ext>
     </p:extLst>
   </p:cSld>
@@ -7312,7 +7312,7 @@
           <p:cNvPr id="11" name="">
             <a:extLst xmlns:a="http://schemas.openxmlformats.org/drawingml/2006/main">
               <a:ext uri="{FF2B5EF4-FFF2-40B4-BE49-F238E27FC236}">
-                <a16:creationId xmlns:a16="http://schemas.microsoft.com/office/drawing/2014/main" id="{41876C15-0580-4BE8-B95A-C275E7B3B60B}"/>
+                <a16:creationId xmlns:a16="http://schemas.microsoft.com/office/drawing/2014/main" id="{D02D7D9B-D740-41E8-ADAC-98601D766B7C}"/>
               </a:ext>
             </a:extLst>
           </p:cNvPr>
@@ -7369,7 +7369,7 @@
           <p:cNvPr id="2" name="">
             <a:extLst xmlns:a="http://schemas.openxmlformats.org/drawingml/2006/main">
               <a:ext uri="{FF2B5EF4-FFF2-40B4-BE49-F238E27FC236}">
-                <a16:creationId xmlns:a16="http://schemas.microsoft.com/office/drawing/2014/main" id="{EA73398E-10F4-4DC8-8AE3-363D6D6A6C12}"/>
+                <a16:creationId xmlns:a16="http://schemas.microsoft.com/office/drawing/2014/main" id="{B94582E8-B904-44FF-BCA6-36D2B81475A9}"/>
               </a:ext>
             </a:extLst>
           </p:cNvPr>
@@ -7426,7 +7426,7 @@
           <p:cNvPr id="3" name="">
             <a:extLst xmlns:a="http://schemas.openxmlformats.org/drawingml/2006/main">
               <a:ext uri="{FF2B5EF4-FFF2-40B4-BE49-F238E27FC236}">
-                <a16:creationId xmlns:a16="http://schemas.microsoft.com/office/drawing/2014/main" id="{6E07585F-FC7D-43E0-87AC-96D43D98E657}"/>
+                <a16:creationId xmlns:a16="http://schemas.microsoft.com/office/drawing/2014/main" id="{2131FCA8-9F7B-46FA-8128-C64E2BE01996}"/>
               </a:ext>
             </a:extLst>
           </p:cNvPr>
@@ -7473,7 +7473,7 @@
                 <a:ea typeface="DejaVu Sans"/>
                 <a:cs typeface="DejaVu Sans"/>
               </a:rPr>
-              <a:t>Validado localmente</a:t>
+              <a:t>Demo publicada</a:t>
             </a:r>
           </a:p>
         </p:txBody>
@@ -7483,7 +7483,7 @@
           <p:cNvPr id="4" name="">
             <a:extLst xmlns:a="http://schemas.openxmlformats.org/drawingml/2006/main">
               <a:ext uri="{FF2B5EF4-FFF2-40B4-BE49-F238E27FC236}">
-                <a16:creationId xmlns:a16="http://schemas.microsoft.com/office/drawing/2014/main" id="{D4B7E3FE-7BE5-47BB-BD19-65E38731E66D}"/>
+                <a16:creationId xmlns:a16="http://schemas.microsoft.com/office/drawing/2014/main" id="{95685806-2D51-49D5-B31C-56E0F6E651D0}"/>
               </a:ext>
             </a:extLst>
           </p:cNvPr>
@@ -7530,7 +7530,7 @@
                 <a:ea typeface="DejaVu Sans"/>
                 <a:cs typeface="DejaVu Sans"/>
               </a:rPr>
-              <a:t>Flujos principales, controles, reportes y API.</a:t>
+              <a:t>Render y Neon: HTTPS, roles, inventario y tickets.</a:t>
             </a:r>
           </a:p>
         </p:txBody>
@@ -7540,7 +7540,7 @@
           <p:cNvPr id="5" name="">
             <a:extLst xmlns:a="http://schemas.openxmlformats.org/drawingml/2006/main">
               <a:ext uri="{FF2B5EF4-FFF2-40B4-BE49-F238E27FC236}">
-                <a16:creationId xmlns:a16="http://schemas.microsoft.com/office/drawing/2014/main" id="{77905AF2-C866-4A60-990F-668C894122A8}"/>
+                <a16:creationId xmlns:a16="http://schemas.microsoft.com/office/drawing/2014/main" id="{5A74D299-C7D8-4BEA-ADFF-C59AAF576DC2}"/>
               </a:ext>
             </a:extLst>
           </p:cNvPr>
@@ -7597,7 +7597,7 @@
           <p:cNvPr id="6" name="">
             <a:extLst xmlns:a="http://schemas.openxmlformats.org/drawingml/2006/main">
               <a:ext uri="{FF2B5EF4-FFF2-40B4-BE49-F238E27FC236}">
-                <a16:creationId xmlns:a16="http://schemas.microsoft.com/office/drawing/2014/main" id="{2EDF3474-1981-42B3-A4B9-88D6172E42E9}"/>
+                <a16:creationId xmlns:a16="http://schemas.microsoft.com/office/drawing/2014/main" id="{C5F9E075-70DF-4264-98E1-F000C22FE6A4}"/>
               </a:ext>
             </a:extLst>
           </p:cNvPr>
@@ -7654,7 +7654,7 @@
           <p:cNvPr id="7" name="">
             <a:extLst xmlns:a="http://schemas.openxmlformats.org/drawingml/2006/main">
               <a:ext uri="{FF2B5EF4-FFF2-40B4-BE49-F238E27FC236}">
-                <a16:creationId xmlns:a16="http://schemas.microsoft.com/office/drawing/2014/main" id="{AED8D7C5-B0F9-4AD8-989B-8184237DC292}"/>
+                <a16:creationId xmlns:a16="http://schemas.microsoft.com/office/drawing/2014/main" id="{E95870B9-6B65-4F3D-A91E-6442C7C0572D}"/>
               </a:ext>
             </a:extLst>
           </p:cNvPr>
@@ -7701,7 +7701,7 @@
                 <a:ea typeface="DejaVu Sans"/>
                 <a:cs typeface="DejaVu Sans"/>
               </a:rPr>
-              <a:t>Pendiente de despliegue</a:t>
+              <a:t>Pendiente operativo</a:t>
             </a:r>
           </a:p>
         </p:txBody>
@@ -7711,7 +7711,7 @@
           <p:cNvPr id="8" name="">
             <a:extLst xmlns:a="http://schemas.openxmlformats.org/drawingml/2006/main">
               <a:ext uri="{FF2B5EF4-FFF2-40B4-BE49-F238E27FC236}">
-                <a16:creationId xmlns:a16="http://schemas.microsoft.com/office/drawing/2014/main" id="{6C59EDE0-D48D-42D9-BDCB-2B6BE2AE2857}"/>
+                <a16:creationId xmlns:a16="http://schemas.microsoft.com/office/drawing/2014/main" id="{827991F8-5C75-472A-A172-DDC174E744E6}"/>
               </a:ext>
             </a:extLst>
           </p:cNvPr>
@@ -7758,7 +7758,7 @@
                 <a:ea typeface="DejaVu Sans"/>
                 <a:cs typeface="DejaVu Sans"/>
               </a:rPr>
-              <a:t>HTTPS, cifrado en reposo, respaldo y operación.</a:t>
+              <a:t>Cifrado en reposo, respaldo y restauración.</a:t>
             </a:r>
           </a:p>
         </p:txBody>
@@ -7768,7 +7768,7 @@
           <p:cNvPr id="9" name="">
             <a:extLst xmlns:a="http://schemas.openxmlformats.org/drawingml/2006/main">
               <a:ext uri="{FF2B5EF4-FFF2-40B4-BE49-F238E27FC236}">
-                <a16:creationId xmlns:a16="http://schemas.microsoft.com/office/drawing/2014/main" id="{FCF08B66-7706-4248-904A-3B9DE7BC1B38}"/>
+                <a16:creationId xmlns:a16="http://schemas.microsoft.com/office/drawing/2014/main" id="{9264133E-004D-4798-9E7E-2BF25D4BDB4D}"/>
               </a:ext>
             </a:extLst>
           </p:cNvPr>
@@ -7825,7 +7825,7 @@
           <p:cNvPr id="10" name="">
             <a:extLst xmlns:a="http://schemas.openxmlformats.org/drawingml/2006/main">
               <a:ext uri="{FF2B5EF4-FFF2-40B4-BE49-F238E27FC236}">
-                <a16:creationId xmlns:a16="http://schemas.microsoft.com/office/drawing/2014/main" id="{CBA7AC71-1192-49A7-9A77-FBFA1636B876}"/>
+                <a16:creationId xmlns:a16="http://schemas.microsoft.com/office/drawing/2014/main" id="{04FB5DF8-4A0B-424C-808E-7BD982447D3B}"/>
               </a:ext>
             </a:extLst>
           </p:cNvPr>
@@ -7880,7 +7880,7 @@
     </p:spTree>
     <p:extLst>
       <p:ext uri="{BB962C8B-B14F-4D97-AF65-F5344CB8AC3E}">
-        <p14:creationId xmlns:p14="http://schemas.microsoft.com/office/powerpoint/2010/main" val="628294963"/>
+        <p14:creationId xmlns:p14="http://schemas.microsoft.com/office/powerpoint/2010/main" val="1001949896"/>
       </p:ext>
     </p:extLst>
   </p:cSld>
@@ -7911,7 +7911,7 @@
           <p:cNvPr id="5" name="">
             <a:extLst xmlns:a="http://schemas.openxmlformats.org/drawingml/2006/main">
               <a:ext uri="{FF2B5EF4-FFF2-40B4-BE49-F238E27FC236}">
-                <a16:creationId xmlns:a16="http://schemas.microsoft.com/office/drawing/2014/main" id="{0D122C25-32D8-44C9-B721-D32B7BA78832}"/>
+                <a16:creationId xmlns:a16="http://schemas.microsoft.com/office/drawing/2014/main" id="{33C33936-2CE3-4143-8CD1-C6D7E672D913}"/>
               </a:ext>
             </a:extLst>
           </p:cNvPr>
@@ -7968,7 +7968,7 @@
           <p:cNvPr id="2" name="">
             <a:extLst xmlns:a="http://schemas.openxmlformats.org/drawingml/2006/main">
               <a:ext uri="{FF2B5EF4-FFF2-40B4-BE49-F238E27FC236}">
-                <a16:creationId xmlns:a16="http://schemas.microsoft.com/office/drawing/2014/main" id="{29D0C742-5A8C-46D7-9064-3000174B14A0}"/>
+                <a16:creationId xmlns:a16="http://schemas.microsoft.com/office/drawing/2014/main" id="{41848344-9959-4CAE-8830-E68C74791751}"/>
               </a:ext>
             </a:extLst>
           </p:cNvPr>
@@ -8025,7 +8025,7 @@
           <p:cNvPr id="3" name="">
             <a:extLst xmlns:a="http://schemas.openxmlformats.org/drawingml/2006/main">
               <a:ext uri="{FF2B5EF4-FFF2-40B4-BE49-F238E27FC236}">
-                <a16:creationId xmlns:a16="http://schemas.microsoft.com/office/drawing/2014/main" id="{2A20390D-0CC9-4F37-BE69-A7B54E880504}"/>
+                <a16:creationId xmlns:a16="http://schemas.microsoft.com/office/drawing/2014/main" id="{BE23F8FB-0939-4592-B285-354C8B31C188}"/>
               </a:ext>
             </a:extLst>
           </p:cNvPr>
@@ -8105,7 +8105,7 @@
           <p:cNvPr id="4" name="">
             <a:extLst xmlns:a="http://schemas.openxmlformats.org/drawingml/2006/main">
               <a:ext uri="{FF2B5EF4-FFF2-40B4-BE49-F238E27FC236}">
-                <a16:creationId xmlns:a16="http://schemas.microsoft.com/office/drawing/2014/main" id="{2BA5FAEE-D265-4156-A0B6-FF926280D3C3}"/>
+                <a16:creationId xmlns:a16="http://schemas.microsoft.com/office/drawing/2014/main" id="{7CDDC504-728E-4D69-8358-55FC69A60E42}"/>
               </a:ext>
             </a:extLst>
           </p:cNvPr>
@@ -8160,7 +8160,7 @@
     </p:spTree>
     <p:extLst>
       <p:ext uri="{BB962C8B-B14F-4D97-AF65-F5344CB8AC3E}">
-        <p14:creationId xmlns:p14="http://schemas.microsoft.com/office/powerpoint/2010/main" val="7873805"/>
+        <p14:creationId xmlns:p14="http://schemas.microsoft.com/office/powerpoint/2010/main" val="806823905"/>
       </p:ext>
     </p:extLst>
   </p:cSld>
@@ -8191,7 +8191,7 @@
           <p:cNvPr id="11" name="">
             <a:extLst xmlns:a="http://schemas.openxmlformats.org/drawingml/2006/main">
               <a:ext uri="{FF2B5EF4-FFF2-40B4-BE49-F238E27FC236}">
-                <a16:creationId xmlns:a16="http://schemas.microsoft.com/office/drawing/2014/main" id="{88BC30F8-EFC5-4740-A0D5-F58EF14FD266}"/>
+                <a16:creationId xmlns:a16="http://schemas.microsoft.com/office/drawing/2014/main" id="{345EDB30-A83A-404C-B853-7B314204B1DF}"/>
               </a:ext>
             </a:extLst>
           </p:cNvPr>
@@ -8248,7 +8248,7 @@
           <p:cNvPr id="2" name="">
             <a:extLst xmlns:a="http://schemas.openxmlformats.org/drawingml/2006/main">
               <a:ext uri="{FF2B5EF4-FFF2-40B4-BE49-F238E27FC236}">
-                <a16:creationId xmlns:a16="http://schemas.microsoft.com/office/drawing/2014/main" id="{53B5B214-F7B9-4DD3-8426-561A9FCD3E13}"/>
+                <a16:creationId xmlns:a16="http://schemas.microsoft.com/office/drawing/2014/main" id="{C903D633-E1E3-46AD-8680-A1690E15145B}"/>
               </a:ext>
             </a:extLst>
           </p:cNvPr>
@@ -8305,7 +8305,7 @@
           <p:cNvPr id="3" name="">
             <a:extLst xmlns:a="http://schemas.openxmlformats.org/drawingml/2006/main">
               <a:ext uri="{FF2B5EF4-FFF2-40B4-BE49-F238E27FC236}">
-                <a16:creationId xmlns:a16="http://schemas.microsoft.com/office/drawing/2014/main" id="{782FE156-4D6E-4AD2-BE1A-FDBA18F3885E}"/>
+                <a16:creationId xmlns:a16="http://schemas.microsoft.com/office/drawing/2014/main" id="{D8A0A183-A787-4369-B20F-54C398EF7466}"/>
               </a:ext>
             </a:extLst>
           </p:cNvPr>
@@ -8362,7 +8362,7 @@
           <p:cNvPr id="4" name="">
             <a:extLst xmlns:a="http://schemas.openxmlformats.org/drawingml/2006/main">
               <a:ext uri="{FF2B5EF4-FFF2-40B4-BE49-F238E27FC236}">
-                <a16:creationId xmlns:a16="http://schemas.microsoft.com/office/drawing/2014/main" id="{61DB19C8-9A9D-4331-AD36-D3670714451A}"/>
+                <a16:creationId xmlns:a16="http://schemas.microsoft.com/office/drawing/2014/main" id="{8ED85875-0650-4FCB-8EB0-4387A06D0B73}"/>
               </a:ext>
             </a:extLst>
           </p:cNvPr>
@@ -8419,7 +8419,7 @@
           <p:cNvPr id="5" name="">
             <a:extLst xmlns:a="http://schemas.openxmlformats.org/drawingml/2006/main">
               <a:ext uri="{FF2B5EF4-FFF2-40B4-BE49-F238E27FC236}">
-                <a16:creationId xmlns:a16="http://schemas.microsoft.com/office/drawing/2014/main" id="{E7675735-AD5B-4F07-9C35-873FC821C811}"/>
+                <a16:creationId xmlns:a16="http://schemas.microsoft.com/office/drawing/2014/main" id="{DFFB1555-B5C8-4BB1-BE1B-4FEF38616350}"/>
               </a:ext>
             </a:extLst>
           </p:cNvPr>
@@ -8476,7 +8476,7 @@
           <p:cNvPr id="6" name="">
             <a:extLst xmlns:a="http://schemas.openxmlformats.org/drawingml/2006/main">
               <a:ext uri="{FF2B5EF4-FFF2-40B4-BE49-F238E27FC236}">
-                <a16:creationId xmlns:a16="http://schemas.microsoft.com/office/drawing/2014/main" id="{67642F6B-1873-40FB-B934-055DE2A4E13F}"/>
+                <a16:creationId xmlns:a16="http://schemas.microsoft.com/office/drawing/2014/main" id="{39F696ED-CC42-4E0B-BB26-5B97362DF92F}"/>
               </a:ext>
             </a:extLst>
           </p:cNvPr>
@@ -8533,7 +8533,7 @@
           <p:cNvPr id="7" name="">
             <a:extLst xmlns:a="http://schemas.openxmlformats.org/drawingml/2006/main">
               <a:ext uri="{FF2B5EF4-FFF2-40B4-BE49-F238E27FC236}">
-                <a16:creationId xmlns:a16="http://schemas.microsoft.com/office/drawing/2014/main" id="{1946CC20-6AD6-4330-967E-E4340468B94F}"/>
+                <a16:creationId xmlns:a16="http://schemas.microsoft.com/office/drawing/2014/main" id="{39E934ED-BC49-45D0-A501-F338B45BAF5E}"/>
               </a:ext>
             </a:extLst>
           </p:cNvPr>
@@ -8590,7 +8590,7 @@
           <p:cNvPr id="8" name="">
             <a:extLst xmlns:a="http://schemas.openxmlformats.org/drawingml/2006/main">
               <a:ext uri="{FF2B5EF4-FFF2-40B4-BE49-F238E27FC236}">
-                <a16:creationId xmlns:a16="http://schemas.microsoft.com/office/drawing/2014/main" id="{6835F0D9-5D62-4E4E-92E6-EF8173D50669}"/>
+                <a16:creationId xmlns:a16="http://schemas.microsoft.com/office/drawing/2014/main" id="{078BF06B-4C6C-4BFF-8E90-6FE25750D013}"/>
               </a:ext>
             </a:extLst>
           </p:cNvPr>
@@ -8647,7 +8647,7 @@
           <p:cNvPr id="9" name="">
             <a:extLst xmlns:a="http://schemas.openxmlformats.org/drawingml/2006/main">
               <a:ext uri="{FF2B5EF4-FFF2-40B4-BE49-F238E27FC236}">
-                <a16:creationId xmlns:a16="http://schemas.microsoft.com/office/drawing/2014/main" id="{AD0638DD-9127-43AA-8C67-936CEB211EB6}"/>
+                <a16:creationId xmlns:a16="http://schemas.microsoft.com/office/drawing/2014/main" id="{CBE3E4E3-BD65-46BE-8DEB-AB20BAF299D1}"/>
               </a:ext>
             </a:extLst>
           </p:cNvPr>
@@ -8704,7 +8704,7 @@
           <p:cNvPr id="10" name="">
             <a:extLst xmlns:a="http://schemas.openxmlformats.org/drawingml/2006/main">
               <a:ext uri="{FF2B5EF4-FFF2-40B4-BE49-F238E27FC236}">
-                <a16:creationId xmlns:a16="http://schemas.microsoft.com/office/drawing/2014/main" id="{CD6601C6-2D2E-4ACA-B231-85FDDA268917}"/>
+                <a16:creationId xmlns:a16="http://schemas.microsoft.com/office/drawing/2014/main" id="{4C7DE0C0-DA23-4862-A012-A6E1BF278204}"/>
               </a:ext>
             </a:extLst>
           </p:cNvPr>
@@ -8759,7 +8759,7 @@
     </p:spTree>
     <p:extLst>
       <p:ext uri="{BB962C8B-B14F-4D97-AF65-F5344CB8AC3E}">
-        <p14:creationId xmlns:p14="http://schemas.microsoft.com/office/powerpoint/2010/main" val="2073064217"/>
+        <p14:creationId xmlns:p14="http://schemas.microsoft.com/office/powerpoint/2010/main" val="1580988706"/>
       </p:ext>
     </p:extLst>
   </p:cSld>
@@ -8790,7 +8790,7 @@
           <p:cNvPr id="23" name="">
             <a:extLst xmlns:a="http://schemas.openxmlformats.org/drawingml/2006/main">
               <a:ext uri="{FF2B5EF4-FFF2-40B4-BE49-F238E27FC236}">
-                <a16:creationId xmlns:a16="http://schemas.microsoft.com/office/drawing/2014/main" id="{6C02D3CF-1937-43E7-A3D2-6AD2D8D103C6}"/>
+                <a16:creationId xmlns:a16="http://schemas.microsoft.com/office/drawing/2014/main" id="{F35BE9B3-366F-4659-A05C-C12221EC057F}"/>
               </a:ext>
             </a:extLst>
           </p:cNvPr>
@@ -8847,7 +8847,7 @@
           <p:cNvPr id="2" name="">
             <a:extLst xmlns:a="http://schemas.openxmlformats.org/drawingml/2006/main">
               <a:ext uri="{FF2B5EF4-FFF2-40B4-BE49-F238E27FC236}">
-                <a16:creationId xmlns:a16="http://schemas.microsoft.com/office/drawing/2014/main" id="{998916EC-4DF0-4A27-B3D1-9FE8937A774F}"/>
+                <a16:creationId xmlns:a16="http://schemas.microsoft.com/office/drawing/2014/main" id="{49F5C918-57CE-4C3D-AC7F-E482CDF029F2}"/>
               </a:ext>
             </a:extLst>
           </p:cNvPr>
@@ -8904,7 +8904,7 @@
           <p:cNvPr id="3" name="">
             <a:extLst xmlns:a="http://schemas.openxmlformats.org/drawingml/2006/main">
               <a:ext uri="{FF2B5EF4-FFF2-40B4-BE49-F238E27FC236}">
-                <a16:creationId xmlns:a16="http://schemas.microsoft.com/office/drawing/2014/main" id="{FD1C24B5-6673-4007-8DA8-BC17C0935FED}"/>
+                <a16:creationId xmlns:a16="http://schemas.microsoft.com/office/drawing/2014/main" id="{0F024F43-9CB2-43D8-843F-79FF8A097A5A}"/>
               </a:ext>
             </a:extLst>
           </p:cNvPr>
@@ -8936,7 +8936,7 @@
           <p:cNvPr id="4" name="">
             <a:extLst xmlns:a="http://schemas.openxmlformats.org/drawingml/2006/main">
               <a:ext uri="{FF2B5EF4-FFF2-40B4-BE49-F238E27FC236}">
-                <a16:creationId xmlns:a16="http://schemas.microsoft.com/office/drawing/2014/main" id="{5DDE04FB-0EDE-4CF3-9814-8DB467134250}"/>
+                <a16:creationId xmlns:a16="http://schemas.microsoft.com/office/drawing/2014/main" id="{BF00C167-8D2F-4196-9B52-EE1B88372464}"/>
               </a:ext>
             </a:extLst>
           </p:cNvPr>
@@ -8993,7 +8993,7 @@
           <p:cNvPr id="5" name="">
             <a:extLst xmlns:a="http://schemas.openxmlformats.org/drawingml/2006/main">
               <a:ext uri="{FF2B5EF4-FFF2-40B4-BE49-F238E27FC236}">
-                <a16:creationId xmlns:a16="http://schemas.microsoft.com/office/drawing/2014/main" id="{D3536402-BE83-46AC-8DA1-26D9BE7390E6}"/>
+                <a16:creationId xmlns:a16="http://schemas.microsoft.com/office/drawing/2014/main" id="{E820D810-ADD2-463C-9CE7-28F572AAF701}"/>
               </a:ext>
             </a:extLst>
           </p:cNvPr>
@@ -9050,7 +9050,7 @@
           <p:cNvPr id="6" name="">
             <a:extLst xmlns:a="http://schemas.openxmlformats.org/drawingml/2006/main">
               <a:ext uri="{FF2B5EF4-FFF2-40B4-BE49-F238E27FC236}">
-                <a16:creationId xmlns:a16="http://schemas.microsoft.com/office/drawing/2014/main" id="{9FCC1001-DBE0-4FB7-A50E-7ED01DD01465}"/>
+                <a16:creationId xmlns:a16="http://schemas.microsoft.com/office/drawing/2014/main" id="{56E6FD40-8D70-4C56-AAD3-4E8EA84B9CEF}"/>
               </a:ext>
             </a:extLst>
           </p:cNvPr>
@@ -9082,7 +9082,7 @@
           <p:cNvPr id="7" name="">
             <a:extLst xmlns:a="http://schemas.openxmlformats.org/drawingml/2006/main">
               <a:ext uri="{FF2B5EF4-FFF2-40B4-BE49-F238E27FC236}">
-                <a16:creationId xmlns:a16="http://schemas.microsoft.com/office/drawing/2014/main" id="{5F4FF395-FC21-4BFC-B228-AD8E884CEA7F}"/>
+                <a16:creationId xmlns:a16="http://schemas.microsoft.com/office/drawing/2014/main" id="{1CB43707-F665-4E64-8D1A-05FBC6C88ECB}"/>
               </a:ext>
             </a:extLst>
           </p:cNvPr>
@@ -9139,7 +9139,7 @@
           <p:cNvPr id="8" name="">
             <a:extLst xmlns:a="http://schemas.openxmlformats.org/drawingml/2006/main">
               <a:ext uri="{FF2B5EF4-FFF2-40B4-BE49-F238E27FC236}">
-                <a16:creationId xmlns:a16="http://schemas.microsoft.com/office/drawing/2014/main" id="{81D1C802-9AA3-4F18-9EFE-8F20D84C3155}"/>
+                <a16:creationId xmlns:a16="http://schemas.microsoft.com/office/drawing/2014/main" id="{D0A1DE81-D717-49A6-ACE7-79395B3656B6}"/>
               </a:ext>
             </a:extLst>
           </p:cNvPr>
@@ -9196,7 +9196,7 @@
           <p:cNvPr id="9" name="">
             <a:extLst xmlns:a="http://schemas.openxmlformats.org/drawingml/2006/main">
               <a:ext uri="{FF2B5EF4-FFF2-40B4-BE49-F238E27FC236}">
-                <a16:creationId xmlns:a16="http://schemas.microsoft.com/office/drawing/2014/main" id="{07502F96-B4D8-415A-8160-F0C384438EEB}"/>
+                <a16:creationId xmlns:a16="http://schemas.microsoft.com/office/drawing/2014/main" id="{9972EF0F-BE71-47AF-960D-00E608F13D10}"/>
               </a:ext>
             </a:extLst>
           </p:cNvPr>
@@ -9228,7 +9228,7 @@
           <p:cNvPr id="10" name="">
             <a:extLst xmlns:a="http://schemas.openxmlformats.org/drawingml/2006/main">
               <a:ext uri="{FF2B5EF4-FFF2-40B4-BE49-F238E27FC236}">
-                <a16:creationId xmlns:a16="http://schemas.microsoft.com/office/drawing/2014/main" id="{0CB8801B-000C-4F4C-AF37-A19B4C60C430}"/>
+                <a16:creationId xmlns:a16="http://schemas.microsoft.com/office/drawing/2014/main" id="{B7CFE0B3-68CB-419F-9EE8-DFD2FF7CE7BB}"/>
               </a:ext>
             </a:extLst>
           </p:cNvPr>
@@ -9285,7 +9285,7 @@
           <p:cNvPr id="11" name="">
             <a:extLst xmlns:a="http://schemas.openxmlformats.org/drawingml/2006/main">
               <a:ext uri="{FF2B5EF4-FFF2-40B4-BE49-F238E27FC236}">
-                <a16:creationId xmlns:a16="http://schemas.microsoft.com/office/drawing/2014/main" id="{5192CF44-34F8-467F-88DF-9465FAF60FFB}"/>
+                <a16:creationId xmlns:a16="http://schemas.microsoft.com/office/drawing/2014/main" id="{6005E1C7-7908-410C-9BBB-A448D74C0452}"/>
               </a:ext>
             </a:extLst>
           </p:cNvPr>
@@ -9342,7 +9342,7 @@
           <p:cNvPr id="12" name="">
             <a:extLst xmlns:a="http://schemas.openxmlformats.org/drawingml/2006/main">
               <a:ext uri="{FF2B5EF4-FFF2-40B4-BE49-F238E27FC236}">
-                <a16:creationId xmlns:a16="http://schemas.microsoft.com/office/drawing/2014/main" id="{E6B1BDD6-B837-483C-877E-E9F1FC8B5429}"/>
+                <a16:creationId xmlns:a16="http://schemas.microsoft.com/office/drawing/2014/main" id="{FA8CDD98-11FC-4624-8C3B-6A993A788E07}"/>
               </a:ext>
             </a:extLst>
           </p:cNvPr>
@@ -9374,7 +9374,7 @@
           <p:cNvPr id="13" name="">
             <a:extLst xmlns:a="http://schemas.openxmlformats.org/drawingml/2006/main">
               <a:ext uri="{FF2B5EF4-FFF2-40B4-BE49-F238E27FC236}">
-                <a16:creationId xmlns:a16="http://schemas.microsoft.com/office/drawing/2014/main" id="{69A4D9C6-0A8C-40B7-8CCA-7E431CC9FE3A}"/>
+                <a16:creationId xmlns:a16="http://schemas.microsoft.com/office/drawing/2014/main" id="{524FB4F0-E626-4F2C-8D76-C769C1932412}"/>
               </a:ext>
             </a:extLst>
           </p:cNvPr>
@@ -9431,7 +9431,7 @@
           <p:cNvPr id="14" name="">
             <a:extLst xmlns:a="http://schemas.openxmlformats.org/drawingml/2006/main">
               <a:ext uri="{FF2B5EF4-FFF2-40B4-BE49-F238E27FC236}">
-                <a16:creationId xmlns:a16="http://schemas.microsoft.com/office/drawing/2014/main" id="{10A0976B-0D2C-42F4-A02A-2CE3BE6B2384}"/>
+                <a16:creationId xmlns:a16="http://schemas.microsoft.com/office/drawing/2014/main" id="{498CA77E-98B1-4589-8008-7BC07F496B61}"/>
               </a:ext>
             </a:extLst>
           </p:cNvPr>
@@ -9488,7 +9488,7 @@
           <p:cNvPr id="15" name="">
             <a:extLst xmlns:a="http://schemas.openxmlformats.org/drawingml/2006/main">
               <a:ext uri="{FF2B5EF4-FFF2-40B4-BE49-F238E27FC236}">
-                <a16:creationId xmlns:a16="http://schemas.microsoft.com/office/drawing/2014/main" id="{D61FF333-BE24-465C-88E1-E0C1ADAB6707}"/>
+                <a16:creationId xmlns:a16="http://schemas.microsoft.com/office/drawing/2014/main" id="{EACEC1F4-F523-4602-ABB9-A85EBE5014C2}"/>
               </a:ext>
             </a:extLst>
           </p:cNvPr>
@@ -9520,7 +9520,7 @@
           <p:cNvPr id="16" name="">
             <a:extLst xmlns:a="http://schemas.openxmlformats.org/drawingml/2006/main">
               <a:ext uri="{FF2B5EF4-FFF2-40B4-BE49-F238E27FC236}">
-                <a16:creationId xmlns:a16="http://schemas.microsoft.com/office/drawing/2014/main" id="{3C7C94EF-F67B-4D85-976E-C5281CB6E3E4}"/>
+                <a16:creationId xmlns:a16="http://schemas.microsoft.com/office/drawing/2014/main" id="{2D535442-8FA1-4E3F-80A0-1D4D0C2A65FD}"/>
               </a:ext>
             </a:extLst>
           </p:cNvPr>
@@ -9577,7 +9577,7 @@
           <p:cNvPr id="17" name="">
             <a:extLst xmlns:a="http://schemas.openxmlformats.org/drawingml/2006/main">
               <a:ext uri="{FF2B5EF4-FFF2-40B4-BE49-F238E27FC236}">
-                <a16:creationId xmlns:a16="http://schemas.microsoft.com/office/drawing/2014/main" id="{C33315B0-91E4-4DE0-903B-DCDFCCC08F50}"/>
+                <a16:creationId xmlns:a16="http://schemas.microsoft.com/office/drawing/2014/main" id="{036CCE4A-1946-4B96-9F83-5F74D981F769}"/>
               </a:ext>
             </a:extLst>
           </p:cNvPr>
@@ -9742,7 +9742,7 @@
           <p:cNvPr id="22" name="">
             <a:extLst xmlns:a="http://schemas.openxmlformats.org/drawingml/2006/main">
               <a:ext uri="{FF2B5EF4-FFF2-40B4-BE49-F238E27FC236}">
-                <a16:creationId xmlns:a16="http://schemas.microsoft.com/office/drawing/2014/main" id="{F50F2A18-5852-4347-8419-16E0FB923E29}"/>
+                <a16:creationId xmlns:a16="http://schemas.microsoft.com/office/drawing/2014/main" id="{F9AF2016-21DC-43D1-9061-5A6D68068353}"/>
               </a:ext>
             </a:extLst>
           </p:cNvPr>
@@ -9797,7 +9797,7 @@
     </p:spTree>
     <p:extLst>
       <p:ext uri="{BB962C8B-B14F-4D97-AF65-F5344CB8AC3E}">
-        <p14:creationId xmlns:p14="http://schemas.microsoft.com/office/powerpoint/2010/main" val="1589006522"/>
+        <p14:creationId xmlns:p14="http://schemas.microsoft.com/office/powerpoint/2010/main" val="882500254"/>
       </p:ext>
     </p:extLst>
   </p:cSld>
@@ -9828,7 +9828,7 @@
           <p:cNvPr id="13" name="">
             <a:extLst xmlns:a="http://schemas.openxmlformats.org/drawingml/2006/main">
               <a:ext uri="{FF2B5EF4-FFF2-40B4-BE49-F238E27FC236}">
-                <a16:creationId xmlns:a16="http://schemas.microsoft.com/office/drawing/2014/main" id="{D1164D8B-8C50-4EB4-9610-B25D3E0B6F59}"/>
+                <a16:creationId xmlns:a16="http://schemas.microsoft.com/office/drawing/2014/main" id="{5AD71AEA-3665-447D-95BE-A89ABD84D5BC}"/>
               </a:ext>
             </a:extLst>
           </p:cNvPr>
@@ -9885,7 +9885,7 @@
           <p:cNvPr id="2" name="">
             <a:extLst xmlns:a="http://schemas.openxmlformats.org/drawingml/2006/main">
               <a:ext uri="{FF2B5EF4-FFF2-40B4-BE49-F238E27FC236}">
-                <a16:creationId xmlns:a16="http://schemas.microsoft.com/office/drawing/2014/main" id="{BBA3DB97-2B7D-4BDB-9416-94FE744CEDFB}"/>
+                <a16:creationId xmlns:a16="http://schemas.microsoft.com/office/drawing/2014/main" id="{F221A198-584E-41EF-B854-28948EF45FE0}"/>
               </a:ext>
             </a:extLst>
           </p:cNvPr>
@@ -9942,7 +9942,7 @@
           <p:cNvPr id="3" name="">
             <a:extLst xmlns:a="http://schemas.openxmlformats.org/drawingml/2006/main">
               <a:ext uri="{FF2B5EF4-FFF2-40B4-BE49-F238E27FC236}">
-                <a16:creationId xmlns:a16="http://schemas.microsoft.com/office/drawing/2014/main" id="{DCC611BB-9CF0-4115-A35C-36C0F9CAEE6B}"/>
+                <a16:creationId xmlns:a16="http://schemas.microsoft.com/office/drawing/2014/main" id="{9FAA14A5-698F-46C9-9065-6803EC899B54}"/>
               </a:ext>
             </a:extLst>
           </p:cNvPr>
@@ -9999,7 +9999,7 @@
           <p:cNvPr id="4" name="">
             <a:extLst xmlns:a="http://schemas.openxmlformats.org/drawingml/2006/main">
               <a:ext uri="{FF2B5EF4-FFF2-40B4-BE49-F238E27FC236}">
-                <a16:creationId xmlns:a16="http://schemas.microsoft.com/office/drawing/2014/main" id="{B3C76D6C-A518-4029-A796-C7496F313839}"/>
+                <a16:creationId xmlns:a16="http://schemas.microsoft.com/office/drawing/2014/main" id="{3C4310DB-7D7E-40DF-A2FB-F472B261D50A}"/>
               </a:ext>
             </a:extLst>
           </p:cNvPr>
@@ -10056,7 +10056,7 @@
           <p:cNvPr id="5" name="">
             <a:extLst xmlns:a="http://schemas.openxmlformats.org/drawingml/2006/main">
               <a:ext uri="{FF2B5EF4-FFF2-40B4-BE49-F238E27FC236}">
-                <a16:creationId xmlns:a16="http://schemas.microsoft.com/office/drawing/2014/main" id="{5C5D34DE-0682-478E-961E-C97B9A26ABA5}"/>
+                <a16:creationId xmlns:a16="http://schemas.microsoft.com/office/drawing/2014/main" id="{902FFFD5-FBAF-489D-A347-E564B359C0BD}"/>
               </a:ext>
             </a:extLst>
           </p:cNvPr>
@@ -10113,7 +10113,7 @@
           <p:cNvPr id="6" name="">
             <a:extLst xmlns:a="http://schemas.openxmlformats.org/drawingml/2006/main">
               <a:ext uri="{FF2B5EF4-FFF2-40B4-BE49-F238E27FC236}">
-                <a16:creationId xmlns:a16="http://schemas.microsoft.com/office/drawing/2014/main" id="{42A473AB-2600-414F-A089-AE283E2F2A03}"/>
+                <a16:creationId xmlns:a16="http://schemas.microsoft.com/office/drawing/2014/main" id="{36E779B3-C734-4643-BDE5-F455D1FCD8E9}"/>
               </a:ext>
             </a:extLst>
           </p:cNvPr>
@@ -10170,7 +10170,7 @@
           <p:cNvPr id="7" name="">
             <a:extLst xmlns:a="http://schemas.openxmlformats.org/drawingml/2006/main">
               <a:ext uri="{FF2B5EF4-FFF2-40B4-BE49-F238E27FC236}">
-                <a16:creationId xmlns:a16="http://schemas.microsoft.com/office/drawing/2014/main" id="{34BE823C-4B60-4022-9861-8EFE99A24E36}"/>
+                <a16:creationId xmlns:a16="http://schemas.microsoft.com/office/drawing/2014/main" id="{3D846AE5-1366-49EE-8B79-BD70DEA1C5CD}"/>
               </a:ext>
             </a:extLst>
           </p:cNvPr>
@@ -10227,7 +10227,7 @@
           <p:cNvPr id="8" name="">
             <a:extLst xmlns:a="http://schemas.openxmlformats.org/drawingml/2006/main">
               <a:ext uri="{FF2B5EF4-FFF2-40B4-BE49-F238E27FC236}">
-                <a16:creationId xmlns:a16="http://schemas.microsoft.com/office/drawing/2014/main" id="{540B84AB-8239-489E-9BAC-A941579B8A0F}"/>
+                <a16:creationId xmlns:a16="http://schemas.microsoft.com/office/drawing/2014/main" id="{C7D2037F-CFE3-4B71-8FFC-C95962E05DBA}"/>
               </a:ext>
             </a:extLst>
           </p:cNvPr>
@@ -10284,7 +10284,7 @@
           <p:cNvPr id="9" name="">
             <a:extLst xmlns:a="http://schemas.openxmlformats.org/drawingml/2006/main">
               <a:ext uri="{FF2B5EF4-FFF2-40B4-BE49-F238E27FC236}">
-                <a16:creationId xmlns:a16="http://schemas.microsoft.com/office/drawing/2014/main" id="{AF8F09B2-4F50-4C58-93D1-32DC1333F034}"/>
+                <a16:creationId xmlns:a16="http://schemas.microsoft.com/office/drawing/2014/main" id="{3C61AEAC-63B0-4501-AD15-C2767F319AC5}"/>
               </a:ext>
             </a:extLst>
           </p:cNvPr>
@@ -10341,7 +10341,7 @@
           <p:cNvPr id="10" name="">
             <a:extLst xmlns:a="http://schemas.openxmlformats.org/drawingml/2006/main">
               <a:ext uri="{FF2B5EF4-FFF2-40B4-BE49-F238E27FC236}">
-                <a16:creationId xmlns:a16="http://schemas.microsoft.com/office/drawing/2014/main" id="{6E506C88-2337-403A-9DF9-2B0D8CF799F5}"/>
+                <a16:creationId xmlns:a16="http://schemas.microsoft.com/office/drawing/2014/main" id="{73B83EBB-0501-458A-8FD2-4A346F325F27}"/>
               </a:ext>
             </a:extLst>
           </p:cNvPr>
@@ -10398,7 +10398,7 @@
           <p:cNvPr id="11" name="">
             <a:extLst xmlns:a="http://schemas.openxmlformats.org/drawingml/2006/main">
               <a:ext uri="{FF2B5EF4-FFF2-40B4-BE49-F238E27FC236}">
-                <a16:creationId xmlns:a16="http://schemas.microsoft.com/office/drawing/2014/main" id="{4D08E2D5-3784-4C25-A5BB-3E8482B014F0}"/>
+                <a16:creationId xmlns:a16="http://schemas.microsoft.com/office/drawing/2014/main" id="{2F019DA9-3CEF-4A80-A944-ACFEE23B6932}"/>
               </a:ext>
             </a:extLst>
           </p:cNvPr>
@@ -10455,7 +10455,7 @@
           <p:cNvPr id="12" name="">
             <a:extLst xmlns:a="http://schemas.openxmlformats.org/drawingml/2006/main">
               <a:ext uri="{FF2B5EF4-FFF2-40B4-BE49-F238E27FC236}">
-                <a16:creationId xmlns:a16="http://schemas.microsoft.com/office/drawing/2014/main" id="{249959B3-45B5-4CB1-9F1A-52D92E302DE1}"/>
+                <a16:creationId xmlns:a16="http://schemas.microsoft.com/office/drawing/2014/main" id="{73EA334F-C409-4534-B236-DB793127ED68}"/>
               </a:ext>
             </a:extLst>
           </p:cNvPr>
@@ -10510,7 +10510,7 @@
     </p:spTree>
     <p:extLst>
       <p:ext uri="{BB962C8B-B14F-4D97-AF65-F5344CB8AC3E}">
-        <p14:creationId xmlns:p14="http://schemas.microsoft.com/office/powerpoint/2010/main" val="844819502"/>
+        <p14:creationId xmlns:p14="http://schemas.microsoft.com/office/powerpoint/2010/main" val="1559073387"/>
       </p:ext>
     </p:extLst>
   </p:cSld>
@@ -10541,7 +10541,7 @@
           <p:cNvPr id="24" name="">
             <a:extLst xmlns:a="http://schemas.openxmlformats.org/drawingml/2006/main">
               <a:ext uri="{FF2B5EF4-FFF2-40B4-BE49-F238E27FC236}">
-                <a16:creationId xmlns:a16="http://schemas.microsoft.com/office/drawing/2014/main" id="{899FE0B7-3C2A-427C-B5C1-A5D2F2B7B539}"/>
+                <a16:creationId xmlns:a16="http://schemas.microsoft.com/office/drawing/2014/main" id="{0392FD64-08AC-4E8A-89C8-76392EFD91CF}"/>
               </a:ext>
             </a:extLst>
           </p:cNvPr>
@@ -10598,7 +10598,7 @@
           <p:cNvPr id="2" name="">
             <a:extLst xmlns:a="http://schemas.openxmlformats.org/drawingml/2006/main">
               <a:ext uri="{FF2B5EF4-FFF2-40B4-BE49-F238E27FC236}">
-                <a16:creationId xmlns:a16="http://schemas.microsoft.com/office/drawing/2014/main" id="{06921698-1959-480C-893C-7AAE0CD0E092}"/>
+                <a16:creationId xmlns:a16="http://schemas.microsoft.com/office/drawing/2014/main" id="{DF1A4877-7FCE-407E-9AFC-2BB3A60AA149}"/>
               </a:ext>
             </a:extLst>
           </p:cNvPr>
@@ -10655,7 +10655,7 @@
           <p:cNvPr id="3" name="">
             <a:extLst xmlns:a="http://schemas.openxmlformats.org/drawingml/2006/main">
               <a:ext uri="{FF2B5EF4-FFF2-40B4-BE49-F238E27FC236}">
-                <a16:creationId xmlns:a16="http://schemas.microsoft.com/office/drawing/2014/main" id="{691B811B-2462-4431-912E-224B45F50A44}"/>
+                <a16:creationId xmlns:a16="http://schemas.microsoft.com/office/drawing/2014/main" id="{B8C01336-5CC2-44BE-9AD8-B391867F3D06}"/>
               </a:ext>
             </a:extLst>
           </p:cNvPr>
@@ -10687,7 +10687,7 @@
           <p:cNvPr id="4" name="">
             <a:extLst xmlns:a="http://schemas.openxmlformats.org/drawingml/2006/main">
               <a:ext uri="{FF2B5EF4-FFF2-40B4-BE49-F238E27FC236}">
-                <a16:creationId xmlns:a16="http://schemas.microsoft.com/office/drawing/2014/main" id="{5C7D9E2F-D7AC-44D6-843C-AFDE04C2945C}"/>
+                <a16:creationId xmlns:a16="http://schemas.microsoft.com/office/drawing/2014/main" id="{9A4F1358-9CA9-4738-B703-99B466787E52}"/>
               </a:ext>
             </a:extLst>
           </p:cNvPr>
@@ -10744,7 +10744,7 @@
           <p:cNvPr id="5" name="">
             <a:extLst xmlns:a="http://schemas.openxmlformats.org/drawingml/2006/main">
               <a:ext uri="{FF2B5EF4-FFF2-40B4-BE49-F238E27FC236}">
-                <a16:creationId xmlns:a16="http://schemas.microsoft.com/office/drawing/2014/main" id="{2DA5F562-49EC-4A5D-834C-447AE260B111}"/>
+                <a16:creationId xmlns:a16="http://schemas.microsoft.com/office/drawing/2014/main" id="{6A5C5A93-2540-4327-B48A-1161FA88CABB}"/>
               </a:ext>
             </a:extLst>
           </p:cNvPr>
@@ -10801,7 +10801,7 @@
           <p:cNvPr id="6" name="">
             <a:extLst xmlns:a="http://schemas.openxmlformats.org/drawingml/2006/main">
               <a:ext uri="{FF2B5EF4-FFF2-40B4-BE49-F238E27FC236}">
-                <a16:creationId xmlns:a16="http://schemas.microsoft.com/office/drawing/2014/main" id="{A731F405-5BB5-4E4C-A5AE-CB465505E9BE}"/>
+                <a16:creationId xmlns:a16="http://schemas.microsoft.com/office/drawing/2014/main" id="{ECB42E22-2F64-44C9-83AE-3E93F4540F66}"/>
               </a:ext>
             </a:extLst>
           </p:cNvPr>
@@ -10833,7 +10833,7 @@
           <p:cNvPr id="7" name="">
             <a:extLst xmlns:a="http://schemas.openxmlformats.org/drawingml/2006/main">
               <a:ext uri="{FF2B5EF4-FFF2-40B4-BE49-F238E27FC236}">
-                <a16:creationId xmlns:a16="http://schemas.microsoft.com/office/drawing/2014/main" id="{19C1D7DF-94A4-4434-95D0-92E855AD478A}"/>
+                <a16:creationId xmlns:a16="http://schemas.microsoft.com/office/drawing/2014/main" id="{5FBC2E9A-572A-461F-9789-18AC6A4D67C7}"/>
               </a:ext>
             </a:extLst>
           </p:cNvPr>
@@ -10890,7 +10890,7 @@
           <p:cNvPr id="8" name="">
             <a:extLst xmlns:a="http://schemas.openxmlformats.org/drawingml/2006/main">
               <a:ext uri="{FF2B5EF4-FFF2-40B4-BE49-F238E27FC236}">
-                <a16:creationId xmlns:a16="http://schemas.microsoft.com/office/drawing/2014/main" id="{C17573E5-5910-40AA-8FB0-2AB5F1E915B1}"/>
+                <a16:creationId xmlns:a16="http://schemas.microsoft.com/office/drawing/2014/main" id="{9C0AF9B8-A6A8-4AE4-B315-F0EE4BADDBFB}"/>
               </a:ext>
             </a:extLst>
           </p:cNvPr>
@@ -10972,7 +10972,7 @@
           <p:cNvPr id="10" name="">
             <a:extLst xmlns:a="http://schemas.openxmlformats.org/drawingml/2006/main">
               <a:ext uri="{FF2B5EF4-FFF2-40B4-BE49-F238E27FC236}">
-                <a16:creationId xmlns:a16="http://schemas.microsoft.com/office/drawing/2014/main" id="{30C1307C-AFEC-425A-AAE0-917B4FC118C2}"/>
+                <a16:creationId xmlns:a16="http://schemas.microsoft.com/office/drawing/2014/main" id="{B47C2BEE-25AB-4964-B9E5-CAC5759F8500}"/>
               </a:ext>
             </a:extLst>
           </p:cNvPr>
@@ -11004,7 +11004,7 @@
           <p:cNvPr id="11" name="">
             <a:extLst xmlns:a="http://schemas.openxmlformats.org/drawingml/2006/main">
               <a:ext uri="{FF2B5EF4-FFF2-40B4-BE49-F238E27FC236}">
-                <a16:creationId xmlns:a16="http://schemas.microsoft.com/office/drawing/2014/main" id="{055A3FB3-F29B-45A2-B68E-B213FABFF0F4}"/>
+                <a16:creationId xmlns:a16="http://schemas.microsoft.com/office/drawing/2014/main" id="{411A3175-04E1-4170-8ADF-B8F4E1A61AD2}"/>
               </a:ext>
             </a:extLst>
           </p:cNvPr>
@@ -11061,7 +11061,7 @@
           <p:cNvPr id="12" name="">
             <a:extLst xmlns:a="http://schemas.openxmlformats.org/drawingml/2006/main">
               <a:ext uri="{FF2B5EF4-FFF2-40B4-BE49-F238E27FC236}">
-                <a16:creationId xmlns:a16="http://schemas.microsoft.com/office/drawing/2014/main" id="{E29958C1-5150-41E4-8B0C-146F8F2178CC}"/>
+                <a16:creationId xmlns:a16="http://schemas.microsoft.com/office/drawing/2014/main" id="{95AE76F9-FC23-4E60-A387-2D1CCFA1CB7B}"/>
               </a:ext>
             </a:extLst>
           </p:cNvPr>
@@ -11143,7 +11143,7 @@
           <p:cNvPr id="14" name="">
             <a:extLst xmlns:a="http://schemas.openxmlformats.org/drawingml/2006/main">
               <a:ext uri="{FF2B5EF4-FFF2-40B4-BE49-F238E27FC236}">
-                <a16:creationId xmlns:a16="http://schemas.microsoft.com/office/drawing/2014/main" id="{D818B217-BF60-4D36-91C7-FCFA6B346680}"/>
+                <a16:creationId xmlns:a16="http://schemas.microsoft.com/office/drawing/2014/main" id="{7151DC95-1F8B-40D6-9583-C322E4AF7FC8}"/>
               </a:ext>
             </a:extLst>
           </p:cNvPr>
@@ -11175,7 +11175,7 @@
           <p:cNvPr id="15" name="">
             <a:extLst xmlns:a="http://schemas.openxmlformats.org/drawingml/2006/main">
               <a:ext uri="{FF2B5EF4-FFF2-40B4-BE49-F238E27FC236}">
-                <a16:creationId xmlns:a16="http://schemas.microsoft.com/office/drawing/2014/main" id="{9DFF62E2-FDDE-4C97-9D7A-9A7213047CCB}"/>
+                <a16:creationId xmlns:a16="http://schemas.microsoft.com/office/drawing/2014/main" id="{F03C31F5-B81D-4A4B-9C23-F927496ECB2C}"/>
               </a:ext>
             </a:extLst>
           </p:cNvPr>
@@ -11232,7 +11232,7 @@
           <p:cNvPr id="16" name="">
             <a:extLst xmlns:a="http://schemas.openxmlformats.org/drawingml/2006/main">
               <a:ext uri="{FF2B5EF4-FFF2-40B4-BE49-F238E27FC236}">
-                <a16:creationId xmlns:a16="http://schemas.microsoft.com/office/drawing/2014/main" id="{F90B5D71-E787-458D-9840-46AF57E06B4A}"/>
+                <a16:creationId xmlns:a16="http://schemas.microsoft.com/office/drawing/2014/main" id="{87D4566A-ADA6-4687-817C-44F00D0D8B6B}"/>
               </a:ext>
             </a:extLst>
           </p:cNvPr>
@@ -11314,7 +11314,7 @@
           <p:cNvPr id="18" name="">
             <a:extLst xmlns:a="http://schemas.openxmlformats.org/drawingml/2006/main">
               <a:ext uri="{FF2B5EF4-FFF2-40B4-BE49-F238E27FC236}">
-                <a16:creationId xmlns:a16="http://schemas.microsoft.com/office/drawing/2014/main" id="{7688DA8F-F6BB-4E15-B6D9-F092609E0135}"/>
+                <a16:creationId xmlns:a16="http://schemas.microsoft.com/office/drawing/2014/main" id="{9D231E80-AED1-4AFC-8F99-F41642113890}"/>
               </a:ext>
             </a:extLst>
           </p:cNvPr>
@@ -11346,7 +11346,7 @@
           <p:cNvPr id="19" name="">
             <a:extLst xmlns:a="http://schemas.openxmlformats.org/drawingml/2006/main">
               <a:ext uri="{FF2B5EF4-FFF2-40B4-BE49-F238E27FC236}">
-                <a16:creationId xmlns:a16="http://schemas.microsoft.com/office/drawing/2014/main" id="{46E3B714-DFAC-4E22-B5DB-6210B19063AC}"/>
+                <a16:creationId xmlns:a16="http://schemas.microsoft.com/office/drawing/2014/main" id="{C90DC807-27DA-4DFC-B49C-5469388F4B7D}"/>
               </a:ext>
             </a:extLst>
           </p:cNvPr>
@@ -11403,7 +11403,7 @@
           <p:cNvPr id="20" name="">
             <a:extLst xmlns:a="http://schemas.openxmlformats.org/drawingml/2006/main">
               <a:ext uri="{FF2B5EF4-FFF2-40B4-BE49-F238E27FC236}">
-                <a16:creationId xmlns:a16="http://schemas.microsoft.com/office/drawing/2014/main" id="{923762D6-C4F5-4B67-A8FB-F042294C1A32}"/>
+                <a16:creationId xmlns:a16="http://schemas.microsoft.com/office/drawing/2014/main" id="{73769800-3695-4DFE-ADA6-112955579977}"/>
               </a:ext>
             </a:extLst>
           </p:cNvPr>
@@ -11485,7 +11485,7 @@
           <p:cNvPr id="22" name="">
             <a:extLst xmlns:a="http://schemas.openxmlformats.org/drawingml/2006/main">
               <a:ext uri="{FF2B5EF4-FFF2-40B4-BE49-F238E27FC236}">
-                <a16:creationId xmlns:a16="http://schemas.microsoft.com/office/drawing/2014/main" id="{EBFBA63D-FE70-43AE-B94D-AF491CE307C3}"/>
+                <a16:creationId xmlns:a16="http://schemas.microsoft.com/office/drawing/2014/main" id="{BD43E99C-58A2-4A77-B42E-CA0380E2D696}"/>
               </a:ext>
             </a:extLst>
           </p:cNvPr>
@@ -11542,7 +11542,7 @@
           <p:cNvPr id="23" name="">
             <a:extLst xmlns:a="http://schemas.openxmlformats.org/drawingml/2006/main">
               <a:ext uri="{FF2B5EF4-FFF2-40B4-BE49-F238E27FC236}">
-                <a16:creationId xmlns:a16="http://schemas.microsoft.com/office/drawing/2014/main" id="{110A1C54-BBAD-48CC-8938-00E1C847A887}"/>
+                <a16:creationId xmlns:a16="http://schemas.microsoft.com/office/drawing/2014/main" id="{C849EEFA-38E4-4080-BDEA-0F80E103F569}"/>
               </a:ext>
             </a:extLst>
           </p:cNvPr>
@@ -11597,7 +11597,7 @@
     </p:spTree>
     <p:extLst>
       <p:ext uri="{BB962C8B-B14F-4D97-AF65-F5344CB8AC3E}">
-        <p14:creationId xmlns:p14="http://schemas.microsoft.com/office/powerpoint/2010/main" val="673589129"/>
+        <p14:creationId xmlns:p14="http://schemas.microsoft.com/office/powerpoint/2010/main" val="311106037"/>
       </p:ext>
     </p:extLst>
   </p:cSld>
@@ -11628,7 +11628,7 @@
           <p:cNvPr id="6" name="">
             <a:extLst xmlns:a="http://schemas.openxmlformats.org/drawingml/2006/main">
               <a:ext uri="{FF2B5EF4-FFF2-40B4-BE49-F238E27FC236}">
-                <a16:creationId xmlns:a16="http://schemas.microsoft.com/office/drawing/2014/main" id="{CA0D8164-93C6-4CEF-ABB2-E3526564FAE2}"/>
+                <a16:creationId xmlns:a16="http://schemas.microsoft.com/office/drawing/2014/main" id="{EF5E3064-A35F-40A3-961E-62E95A92C05E}"/>
               </a:ext>
             </a:extLst>
           </p:cNvPr>
@@ -11685,7 +11685,7 @@
           <p:cNvPr id="2" name="">
             <a:extLst xmlns:a="http://schemas.openxmlformats.org/drawingml/2006/main">
               <a:ext uri="{FF2B5EF4-FFF2-40B4-BE49-F238E27FC236}">
-                <a16:creationId xmlns:a16="http://schemas.microsoft.com/office/drawing/2014/main" id="{414A37F6-F365-4869-9CE6-45F5B6D11805}"/>
+                <a16:creationId xmlns:a16="http://schemas.microsoft.com/office/drawing/2014/main" id="{5CF287EC-0B8B-4A1B-86E7-349087ED593C}"/>
               </a:ext>
             </a:extLst>
           </p:cNvPr>
@@ -11742,7 +11742,7 @@
           <p:cNvPr id="3" name="">
             <a:extLst xmlns:a="http://schemas.openxmlformats.org/drawingml/2006/main">
               <a:ext uri="{FF2B5EF4-FFF2-40B4-BE49-F238E27FC236}">
-                <a16:creationId xmlns:a16="http://schemas.microsoft.com/office/drawing/2014/main" id="{833D9D01-CC0A-4BBD-9B14-94F4A85D4DE2}"/>
+                <a16:creationId xmlns:a16="http://schemas.microsoft.com/office/drawing/2014/main" id="{AD3422D6-0386-4498-8F63-1ACAF012186D}"/>
               </a:ext>
             </a:extLst>
           </p:cNvPr>
@@ -11803,7 +11803,7 @@
           <p:nvPr/>
         </p:nvPicPr>
         <p:blipFill>
-          <a:blip xmlns:r="http://schemas.openxmlformats.org/officeDocument/2006/relationships" xmlns:a="http://schemas.openxmlformats.org/drawingml/2006/main" r:embed="R60c6d444d1b046de"/>
+          <a:blip xmlns:r="http://schemas.openxmlformats.org/officeDocument/2006/relationships" xmlns:a="http://schemas.openxmlformats.org/drawingml/2006/main" r:embed="R4dd9d680c4ba4e86"/>
           <a:stretch xmlns:a="http://schemas.openxmlformats.org/drawingml/2006/main"/>
         </p:blipFill>
         <p:spPr>
@@ -11821,7 +11821,7 @@
           <p:cNvPr id="5" name="">
             <a:extLst xmlns:a="http://schemas.openxmlformats.org/drawingml/2006/main">
               <a:ext uri="{FF2B5EF4-FFF2-40B4-BE49-F238E27FC236}">
-                <a16:creationId xmlns:a16="http://schemas.microsoft.com/office/drawing/2014/main" id="{76264972-B894-4824-A736-A54D64BB09DB}"/>
+                <a16:creationId xmlns:a16="http://schemas.microsoft.com/office/drawing/2014/main" id="{0FEE72E9-7241-4CE6-9C21-60498D315B64}"/>
               </a:ext>
             </a:extLst>
           </p:cNvPr>
@@ -11932,7 +11932,7 @@
     </p:spTree>
     <p:extLst>
       <p:ext uri="{BB962C8B-B14F-4D97-AF65-F5344CB8AC3E}">
-        <p14:creationId xmlns:p14="http://schemas.microsoft.com/office/powerpoint/2010/main" val="2105259725"/>
+        <p14:creationId xmlns:p14="http://schemas.microsoft.com/office/powerpoint/2010/main" val="118883730"/>
       </p:ext>
     </p:extLst>
   </p:cSld>
@@ -11963,7 +11963,7 @@
           <p:cNvPr id="5" name="">
             <a:extLst xmlns:a="http://schemas.openxmlformats.org/drawingml/2006/main">
               <a:ext uri="{FF2B5EF4-FFF2-40B4-BE49-F238E27FC236}">
-                <a16:creationId xmlns:a16="http://schemas.microsoft.com/office/drawing/2014/main" id="{51630E19-F68C-403A-867B-CE7A44BCF740}"/>
+                <a16:creationId xmlns:a16="http://schemas.microsoft.com/office/drawing/2014/main" id="{1408A74C-66A7-455F-AB48-BABDAF9977EB}"/>
               </a:ext>
             </a:extLst>
           </p:cNvPr>
@@ -12020,7 +12020,7 @@
           <p:cNvPr id="2" name="">
             <a:extLst xmlns:a="http://schemas.openxmlformats.org/drawingml/2006/main">
               <a:ext uri="{FF2B5EF4-FFF2-40B4-BE49-F238E27FC236}">
-                <a16:creationId xmlns:a16="http://schemas.microsoft.com/office/drawing/2014/main" id="{B2262BCE-1C88-47B5-81EC-93A25157D407}"/>
+                <a16:creationId xmlns:a16="http://schemas.microsoft.com/office/drawing/2014/main" id="{86DCD973-237C-4F84-B8F7-1589C51731E6}"/>
               </a:ext>
             </a:extLst>
           </p:cNvPr>
@@ -12081,7 +12081,7 @@
           <p:nvPr/>
         </p:nvPicPr>
         <p:blipFill>
-          <a:blip xmlns:r="http://schemas.openxmlformats.org/officeDocument/2006/relationships" xmlns:a="http://schemas.openxmlformats.org/drawingml/2006/main" r:embed="R7a61cb6a11a34d50"/>
+          <a:blip xmlns:r="http://schemas.openxmlformats.org/officeDocument/2006/relationships" xmlns:a="http://schemas.openxmlformats.org/drawingml/2006/main" r:embed="Rd324246e601e47a9"/>
           <a:stretch xmlns:a="http://schemas.openxmlformats.org/drawingml/2006/main"/>
         </p:blipFill>
         <p:spPr>
@@ -12099,7 +12099,7 @@
           <p:cNvPr id="4" name="">
             <a:extLst xmlns:a="http://schemas.openxmlformats.org/drawingml/2006/main">
               <a:ext uri="{FF2B5EF4-FFF2-40B4-BE49-F238E27FC236}">
-                <a16:creationId xmlns:a16="http://schemas.microsoft.com/office/drawing/2014/main" id="{A1A28CF9-532B-4942-9DC8-22A323632492}"/>
+                <a16:creationId xmlns:a16="http://schemas.microsoft.com/office/drawing/2014/main" id="{99A52D50-08D1-4F82-AD14-A31E4F537BBA}"/>
               </a:ext>
             </a:extLst>
           </p:cNvPr>
@@ -12266,7 +12266,7 @@
     </p:spTree>
     <p:extLst>
       <p:ext uri="{BB962C8B-B14F-4D97-AF65-F5344CB8AC3E}">
-        <p14:creationId xmlns:p14="http://schemas.microsoft.com/office/powerpoint/2010/main" val="478301587"/>
+        <p14:creationId xmlns:p14="http://schemas.microsoft.com/office/powerpoint/2010/main" val="433072152"/>
       </p:ext>
     </p:extLst>
   </p:cSld>
@@ -12297,7 +12297,7 @@
           <p:cNvPr id="5" name="">
             <a:extLst xmlns:a="http://schemas.openxmlformats.org/drawingml/2006/main">
               <a:ext uri="{FF2B5EF4-FFF2-40B4-BE49-F238E27FC236}">
-                <a16:creationId xmlns:a16="http://schemas.microsoft.com/office/drawing/2014/main" id="{C3D390D2-0F86-4E46-8151-D1F779F2331B}"/>
+                <a16:creationId xmlns:a16="http://schemas.microsoft.com/office/drawing/2014/main" id="{2C43E933-2BAD-4623-AC1B-FDF43FD7DE3F}"/>
               </a:ext>
             </a:extLst>
           </p:cNvPr>
@@ -12354,7 +12354,7 @@
           <p:cNvPr id="2" name="">
             <a:extLst xmlns:a="http://schemas.openxmlformats.org/drawingml/2006/main">
               <a:ext uri="{FF2B5EF4-FFF2-40B4-BE49-F238E27FC236}">
-                <a16:creationId xmlns:a16="http://schemas.microsoft.com/office/drawing/2014/main" id="{8A01F3B9-AF7C-48C1-8AAA-2C9E74FA7625}"/>
+                <a16:creationId xmlns:a16="http://schemas.microsoft.com/office/drawing/2014/main" id="{2BC4CB98-6490-4D6B-BFE4-4B3F98CF552F}"/>
               </a:ext>
             </a:extLst>
           </p:cNvPr>
@@ -12415,7 +12415,7 @@
           <p:nvPr/>
         </p:nvPicPr>
         <p:blipFill>
-          <a:blip xmlns:r="http://schemas.openxmlformats.org/officeDocument/2006/relationships" xmlns:a="http://schemas.openxmlformats.org/drawingml/2006/main" r:embed="R1bd979fc099b4b99"/>
+          <a:blip xmlns:r="http://schemas.openxmlformats.org/officeDocument/2006/relationships" xmlns:a="http://schemas.openxmlformats.org/drawingml/2006/main" r:embed="Rce31ef25137046cf"/>
           <a:stretch xmlns:a="http://schemas.openxmlformats.org/drawingml/2006/main"/>
         </p:blipFill>
         <p:spPr>
@@ -12433,7 +12433,7 @@
           <p:cNvPr id="4" name="">
             <a:extLst xmlns:a="http://schemas.openxmlformats.org/drawingml/2006/main">
               <a:ext uri="{FF2B5EF4-FFF2-40B4-BE49-F238E27FC236}">
-                <a16:creationId xmlns:a16="http://schemas.microsoft.com/office/drawing/2014/main" id="{C36C677D-31BB-410C-BF15-52196FED4611}"/>
+                <a16:creationId xmlns:a16="http://schemas.microsoft.com/office/drawing/2014/main" id="{EC5C8F29-93F3-4E62-9334-5E7517826A4D}"/>
               </a:ext>
             </a:extLst>
           </p:cNvPr>
@@ -12600,7 +12600,7 @@
     </p:spTree>
     <p:extLst>
       <p:ext uri="{BB962C8B-B14F-4D97-AF65-F5344CB8AC3E}">
-        <p14:creationId xmlns:p14="http://schemas.microsoft.com/office/powerpoint/2010/main" val="958811569"/>
+        <p14:creationId xmlns:p14="http://schemas.microsoft.com/office/powerpoint/2010/main" val="1297435558"/>
       </p:ext>
     </p:extLst>
   </p:cSld>
@@ -12631,7 +12631,7 @@
           <p:cNvPr id="5" name="">
             <a:extLst xmlns:a="http://schemas.openxmlformats.org/drawingml/2006/main">
               <a:ext uri="{FF2B5EF4-FFF2-40B4-BE49-F238E27FC236}">
-                <a16:creationId xmlns:a16="http://schemas.microsoft.com/office/drawing/2014/main" id="{E8788DA7-B52F-43A2-BF71-ADA54D537899}"/>
+                <a16:creationId xmlns:a16="http://schemas.microsoft.com/office/drawing/2014/main" id="{D39121F3-6C78-424F-B328-0CC4B88AA034}"/>
               </a:ext>
             </a:extLst>
           </p:cNvPr>
@@ -12688,7 +12688,7 @@
           <p:cNvPr id="2" name="">
             <a:extLst xmlns:a="http://schemas.openxmlformats.org/drawingml/2006/main">
               <a:ext uri="{FF2B5EF4-FFF2-40B4-BE49-F238E27FC236}">
-                <a16:creationId xmlns:a16="http://schemas.microsoft.com/office/drawing/2014/main" id="{76351B08-4FD9-45D9-9014-314CB9781173}"/>
+                <a16:creationId xmlns:a16="http://schemas.microsoft.com/office/drawing/2014/main" id="{2D9645A6-5D29-41AB-8ADE-5A5FF95B39AF}"/>
               </a:ext>
             </a:extLst>
           </p:cNvPr>
@@ -12749,7 +12749,7 @@
           <p:nvPr/>
         </p:nvPicPr>
         <p:blipFill>
-          <a:blip xmlns:r="http://schemas.openxmlformats.org/officeDocument/2006/relationships" xmlns:a="http://schemas.openxmlformats.org/drawingml/2006/main" r:embed="R1d56af631d4c472a"/>
+          <a:blip xmlns:r="http://schemas.openxmlformats.org/officeDocument/2006/relationships" xmlns:a="http://schemas.openxmlformats.org/drawingml/2006/main" r:embed="Rc02854231ccb4f67"/>
           <a:stretch xmlns:a="http://schemas.openxmlformats.org/drawingml/2006/main"/>
         </p:blipFill>
         <p:spPr>
@@ -12767,7 +12767,7 @@
           <p:cNvPr id="4" name="">
             <a:extLst xmlns:a="http://schemas.openxmlformats.org/drawingml/2006/main">
               <a:ext uri="{FF2B5EF4-FFF2-40B4-BE49-F238E27FC236}">
-                <a16:creationId xmlns:a16="http://schemas.microsoft.com/office/drawing/2014/main" id="{AFF3F814-9B84-446D-ADFA-44D3A010932E}"/>
+                <a16:creationId xmlns:a16="http://schemas.microsoft.com/office/drawing/2014/main" id="{7C4F66B6-7EDA-48A0-89A7-5A5759122615}"/>
               </a:ext>
             </a:extLst>
           </p:cNvPr>
@@ -12934,7 +12934,7 @@
     </p:spTree>
     <p:extLst>
       <p:ext uri="{BB962C8B-B14F-4D97-AF65-F5344CB8AC3E}">
-        <p14:creationId xmlns:p14="http://schemas.microsoft.com/office/powerpoint/2010/main" val="1890088105"/>
+        <p14:creationId xmlns:p14="http://schemas.microsoft.com/office/powerpoint/2010/main" val="738790640"/>
       </p:ext>
     </p:extLst>
   </p:cSld>
